--- a/public/downloads/dg32-2dom-architecture.pptx
+++ b/public/downloads/dg32-2dom-architecture.pptx
@@ -2,25 +2,25 @@
 <file path=ppt/presentation.xml><?xml version="1.0" encoding="utf-8"?>
 <p:presentation xmlns:p="http://schemas.openxmlformats.org/presentationml/2006/main">
   <p:sldMasterIdLst>
-    <p:sldMasterId xmlns:r="http://schemas.openxmlformats.org/officeDocument/2006/relationships" id="2147483648" r:id="R8bc121e6e22b48da"/>
+    <p:sldMasterId xmlns:r="http://schemas.openxmlformats.org/officeDocument/2006/relationships" id="2147483648" r:id="R1d10ccade7ae4063"/>
   </p:sldMasterIdLst>
   <p:notesMasterIdLst>
-    <p:notesMasterId xmlns:r="http://schemas.openxmlformats.org/officeDocument/2006/relationships" r:id="R16e891f8fcbf4421"/>
+    <p:notesMasterId xmlns:r="http://schemas.openxmlformats.org/officeDocument/2006/relationships" r:id="R5931dc379e184312"/>
   </p:notesMasterIdLst>
   <p:sldIdLst>
-    <p:sldId xmlns:r="http://schemas.openxmlformats.org/officeDocument/2006/relationships" id="256" r:id="Rb0f8f2d27fa6409f"/>
-    <p:sldId xmlns:r="http://schemas.openxmlformats.org/officeDocument/2006/relationships" id="257" r:id="Ra821b4cbffab4f14"/>
-    <p:sldId xmlns:r="http://schemas.openxmlformats.org/officeDocument/2006/relationships" id="258" r:id="R14712f1356e142f0"/>
-    <p:sldId xmlns:r="http://schemas.openxmlformats.org/officeDocument/2006/relationships" id="259" r:id="Rb9007640274840c7"/>
-    <p:sldId xmlns:r="http://schemas.openxmlformats.org/officeDocument/2006/relationships" id="260" r:id="R85c449f9b39349b0"/>
-    <p:sldId xmlns:r="http://schemas.openxmlformats.org/officeDocument/2006/relationships" id="261" r:id="Rb045db1e49d54f93"/>
-    <p:sldId xmlns:r="http://schemas.openxmlformats.org/officeDocument/2006/relationships" id="262" r:id="R98a226669ead45fa"/>
-    <p:sldId xmlns:r="http://schemas.openxmlformats.org/officeDocument/2006/relationships" id="263" r:id="R82ec02f18c6849bc"/>
-    <p:sldId xmlns:r="http://schemas.openxmlformats.org/officeDocument/2006/relationships" id="264" r:id="R3ea4cbaa581b458d"/>
-    <p:sldId xmlns:r="http://schemas.openxmlformats.org/officeDocument/2006/relationships" id="265" r:id="R4f0d19b729c047dd"/>
-    <p:sldId xmlns:r="http://schemas.openxmlformats.org/officeDocument/2006/relationships" id="266" r:id="R7ebcfde82671478a"/>
-    <p:sldId xmlns:r="http://schemas.openxmlformats.org/officeDocument/2006/relationships" id="267" r:id="R4b8acf4394a04b66"/>
-    <p:sldId xmlns:r="http://schemas.openxmlformats.org/officeDocument/2006/relationships" id="268" r:id="Rd2609abc047243f6"/>
+    <p:sldId xmlns:r="http://schemas.openxmlformats.org/officeDocument/2006/relationships" id="256" r:id="R91ef68551ab74ad3"/>
+    <p:sldId xmlns:r="http://schemas.openxmlformats.org/officeDocument/2006/relationships" id="257" r:id="R2c1badb4b6c248f9"/>
+    <p:sldId xmlns:r="http://schemas.openxmlformats.org/officeDocument/2006/relationships" id="258" r:id="R76026a2e3c764a59"/>
+    <p:sldId xmlns:r="http://schemas.openxmlformats.org/officeDocument/2006/relationships" id="259" r:id="R9113ea374d47424b"/>
+    <p:sldId xmlns:r="http://schemas.openxmlformats.org/officeDocument/2006/relationships" id="260" r:id="R0319f2e838b14b90"/>
+    <p:sldId xmlns:r="http://schemas.openxmlformats.org/officeDocument/2006/relationships" id="261" r:id="Reef613927c844e65"/>
+    <p:sldId xmlns:r="http://schemas.openxmlformats.org/officeDocument/2006/relationships" id="262" r:id="R21e915c1102e4ee3"/>
+    <p:sldId xmlns:r="http://schemas.openxmlformats.org/officeDocument/2006/relationships" id="263" r:id="Rf81e4c2a38e5498a"/>
+    <p:sldId xmlns:r="http://schemas.openxmlformats.org/officeDocument/2006/relationships" id="264" r:id="R1f079aca15f34a6d"/>
+    <p:sldId xmlns:r="http://schemas.openxmlformats.org/officeDocument/2006/relationships" id="265" r:id="R8f5ee2a9dd9d40fb"/>
+    <p:sldId xmlns:r="http://schemas.openxmlformats.org/officeDocument/2006/relationships" id="266" r:id="Rdbb7c28716dc497e"/>
+    <p:sldId xmlns:r="http://schemas.openxmlformats.org/officeDocument/2006/relationships" id="267" r:id="Re48a002bf93e4c3f"/>
+    <p:sldId xmlns:r="http://schemas.openxmlformats.org/officeDocument/2006/relationships" id="268" r:id="R3ff6da75f719405d"/>
   </p:sldIdLst>
   <p:sldSz cx="12192000" cy="6858000"/>
   <p:notesSz cx="6858000" cy="9144000"/>
@@ -524,7 +524,7 @@
           <a:lstStyle xmlns:a="http://schemas.openxmlformats.org/drawingml/2006/main"/>
           <a:p xmlns:a="http://schemas.openxmlformats.org/drawingml/2006/main">
             <a:r>
-              <a:t>Here is what one query row costs, by analysis, at sixteen lanes, four hundred keys, thirty-two-byte keys and sixty-four-byte values. The value pass is the largest share, at sixteen hundred cycles. The key pass takes eight hundred, requantisation about seven hundred, and the divide forty-eight. That totals about thirty-two hundred and forty cycles. The measured figure comes at bring-up.</a:t>
+              <a:t>The engine's cost can be worked out before silicon, because it is plain arithmetic. At sixteen lanes and four hundred keys, with keys of thirty-two bytes and values of sixty-four, combining the values takes half of each row, about sixteen hundred cycles. Scoring the keys takes a quarter, requantising about seven hundred, and the divide just forty-eight, roughly thirty-two hundred and forty in all. A bench measurement replaces that estimate once first silicon arrives.</a:t>
             </a:r>
           </a:p>
         </p:txBody>
@@ -594,7 +594,7 @@
           <a:lstStyle xmlns:a="http://schemas.openxmlformats.org/drawingml/2006/main"/>
           <a:p xmlns:a="http://schemas.openxmlformats.org/drawingml/2006/main">
             <a:r>
-              <a:t>Both domains close timing on the larger die. The fifty megahertz control domain closes with zero point three nanoseconds of slack, and the one hundred fourteen megahertz compute domain with zero point one nine. The die is three point four by four point five millimetres. These are post-route results; silicon measurements follow bring-up.</a:t>
+              <a:t>Splitting the clocks worked: both domains close timing after place-and-route, with positive slack. The fifty megahertz control side has zero point three nanoseconds of slack, and the one hundred fourteen megahertz engine side zero point one nine, on a die of three point four by four point five millimetres. Those are layout results, not silicon; the silicon numbers come with bring-up.</a:t>
             </a:r>
           </a:p>
         </p:txBody>
@@ -664,7 +664,7 @@
           <a:lstStyle xmlns:a="http://schemas.openxmlformats.org/drawingml/2006/main"/>
           <a:p xmlns:a="http://schemas.openxmlformats.org/drawingml/2006/main">
             <a:r>
-              <a:t>The engine is designed for condition monitoring inside the drive: bearing-fault and anomaly detection, on the chip that already turns the motor. Against the STM32G0, which runs AI in software, that is a hardware differentiator. It sits on the roadmap alongside DG32-LITE first silicon, with its own design complete and in physical trials.</a:t>
+              <a:t>What is it for? Catching a wearing bearing, or a drive that starts behaving oddly, without an extra processor on the board, because the motor controller watches its own motor. The STM32G0 can only run that kind of model in software, so a hardware engine sets DG32-2DOM apart. On the roadmap it runs alongside DG32-LITE's first silicon, with its design finished and undergoing physical trials.</a:t>
             </a:r>
           </a:p>
         </p:txBody>
@@ -734,7 +734,7 @@
           <a:lstStyle xmlns:a="http://schemas.openxmlformats.org/drawingml/2006/main"/>
           <a:p xmlns:a="http://schemas.openxmlformats.org/drawingml/2006/main">
             <a:r>
-              <a:t>Three things to take away. The engine is an addition, not a redesign: the safety core is untouched. Its arithmetic is exact: INT8 output, bit-exact to the model, with no weight rounded to zero. And its cost is known before silicon: about thirty-two hundred cycles per query row. First silicon turns these design values into measurements.</a:t>
+              <a:t>So what should stay with you? First, the safety controller was left alone; the engine was built around it, not into it. Second, nothing is lost to rounding, and the hardware reproduces the reference software's output exactly. Third, the price of each row is already known from analysis, at about thirty-two hundred cycles. The next step is to measure all of it on real silicon.</a:t>
             </a:r>
           </a:p>
         </p:txBody>
@@ -1014,7 +1014,7 @@
           <a:lstStyle xmlns:a="http://schemas.openxmlformats.org/drawingml/2006/main"/>
           <a:p xmlns:a="http://schemas.openxmlformats.org/drawingml/2006/main">
             <a:r>
-              <a:t>Everything proven on DG32-LITE carries over unchanged. The lockstep pair, fault latch, boot ROM, SRAM, motor drive, sensing and connectivity are the same blocks from the same design source. The control loop still costs about three hundred hardware cycles, and the package is the same nine-by-nine millimetre QFN, because the engine adds no pads.</a:t>
+              <a:t>None of the base chip is redesigned. The safety pair and its fault latch, the boot ROM and memory, and every motor and sensing block come straight from DG32-LITE's own design files. So the control loop still costs roughly three hundred hardware cycles, and because the engine needs no pins, the nine-by-nine millimetre package and its pinout stay put. Only the clocking changes.</a:t>
             </a:r>
           </a:p>
         </p:txBody>
@@ -1154,7 +1154,7 @@
           <a:lstStyle xmlns:a="http://schemas.openxmlformats.org/drawingml/2006/main"/>
           <a:p xmlns:a="http://schemas.openxmlformats.org/drawingml/2006/main">
             <a:r>
-              <a:t>Why INT8, and not INT4? With about four hundred similar keys, each softmax weight is close to one four-hundredth. INT4 rounds that to zero, and the output came out identically zero. The engine keeps fifteen-bit weights all the way into a forty-bit numerator, which stays exact to more than one hundred thousand keys, and it saturates only the final output.</a:t>
+              <a:t>Why not squeeze the engine down to four bits? Because attention spreads its weight thin. Across roughly four hundred keys that look alike, each key earns about a quarter of one percent, and four-bit arithmetic cannot represent that: every weight became zero, and so did the answer. The engine instead carries weights at fifteen bits through a forty-bit sum, which holds exactly past a hundred thousand keys, and only narrows to INT8 at the very end.</a:t>
             </a:r>
           </a:p>
         </p:txBody>
@@ -1224,7 +1224,7 @@
           <a:lstStyle xmlns:a="http://schemas.openxmlformats.org/drawingml/2006/main"/>
           <a:p xmlns:a="http://schemas.openxmlformats.org/drawingml/2006/main">
             <a:r>
-              <a:t>Memory traffic decides whether the engine fights the rest of the chip. Keys and values load once per kick and are re-read for every query row, which keeps one head's bus traffic around one percent. Streaming the values row by row would cost about four hundred times that. A DMA and the SRAM's idle read port can feed the engine without contending with the CPU.</a:t>
+              <a:t>An engine that streamed its data across the shared bus would spend its time fighting the CPU for it. So its working data is loaded once per kick into memory right beside it, and each query row rereads what is already there. That keeps one attention head near one percent of bus time; resending the data for each row would cost roughly four hundred times as much. The DMA can even do the loading without involving the processor.</a:t>
             </a:r>
           </a:p>
         </p:txBody>
@@ -1294,7 +1294,7 @@
           <a:lstStyle xmlns:a="http://schemas.openxmlformats.org/drawingml/2006/main"/>
           <a:p xmlns:a="http://schemas.openxmlformats.org/drawingml/2006/main">
             <a:r>
-              <a:t>Crossings between the two clocks are rare: keys and values load once, and outputs write back once. So the bridges use a small four-phase handshake through two-flop synchronisers instead of a FIFO. One bridge carries programming, one transaction at a time, and two burst bridges batch a whole read or a whole write into a single crossing.</a:t>
+              <a:t>The usual way to join two clocks is a FIFO buffer. This design skips it, because data crosses between the domains so seldom: inputs go over once, and results come back once. A four-phase request and acknowledge, synchronised on arrival, is small and easy to prove safe. Programming commands cross one after another, and a whole block of reads or writes travels as a single transfer.</a:t>
             </a:r>
           </a:p>
         </p:txBody>
@@ -1362,7 +1362,7 @@
   </p:cSld>
   <p:clrMap bg1="lt1" tx1="dk1" bg2="lt2" tx2="dk2" accent1="accent1" accent2="accent2" accent3="accent3" accent4="accent4" accent5="accent5" accent6="accent6" hlink="hlink" folHlink="folHlink"/>
   <p:sldLayoutIdLst>
-    <p:sldLayoutId xmlns:r="http://schemas.openxmlformats.org/officeDocument/2006/relationships" id="2147483649" r:id="Rabdfdcee3681464a"/>
+    <p:sldLayoutId xmlns:r="http://schemas.openxmlformats.org/officeDocument/2006/relationships" id="2147483649" r:id="Re7a9a180802643a7"/>
   </p:sldLayoutIdLst>
   <p:txStyles>
     <p:titleStyle>
@@ -1906,7 +1906,7 @@
           <p:cNvPr id="105" name="">
             <a:extLst xmlns:a="http://schemas.openxmlformats.org/drawingml/2006/main">
               <a:ext uri="{FF2B5EF4-FFF2-40B4-BE49-F238E27FC236}">
-                <a16:creationId xmlns:a16="http://schemas.microsoft.com/office/drawing/2014/main" id="{DB84CBA9-9A6A-44A4-8823-3D5965DA0FE4}"/>
+                <a16:creationId xmlns:a16="http://schemas.microsoft.com/office/drawing/2014/main" id="{751AC0B7-6E75-416F-BF39-60A298B1352A}"/>
               </a:ext>
             </a:extLst>
           </p:cNvPr>
@@ -1937,7 +1937,7 @@
           <p:cNvPr id="2" name="">
             <a:extLst xmlns:a="http://schemas.openxmlformats.org/drawingml/2006/main">
               <a:ext uri="{FF2B5EF4-FFF2-40B4-BE49-F238E27FC236}">
-                <a16:creationId xmlns:a16="http://schemas.microsoft.com/office/drawing/2014/main" id="{519D6889-588F-444B-861A-AA7ABB9B1780}"/>
+                <a16:creationId xmlns:a16="http://schemas.microsoft.com/office/drawing/2014/main" id="{B13E68F0-C0BD-4E54-9CFF-FEE3EC86DBF3}"/>
               </a:ext>
             </a:extLst>
           </p:cNvPr>
@@ -1982,7 +1982,7 @@
           <p:cNvPr id="3" name="">
             <a:extLst xmlns:a="http://schemas.openxmlformats.org/drawingml/2006/main">
               <a:ext uri="{FF2B5EF4-FFF2-40B4-BE49-F238E27FC236}">
-                <a16:creationId xmlns:a16="http://schemas.microsoft.com/office/drawing/2014/main" id="{AEFF98A5-A112-4700-8A07-E783B39C1BEC}"/>
+                <a16:creationId xmlns:a16="http://schemas.microsoft.com/office/drawing/2014/main" id="{771A8FD2-43BB-43C0-B427-E90FD5182533}"/>
               </a:ext>
             </a:extLst>
           </p:cNvPr>
@@ -2027,7 +2027,7 @@
           <p:cNvPr id="4" name="">
             <a:extLst xmlns:a="http://schemas.openxmlformats.org/drawingml/2006/main">
               <a:ext uri="{FF2B5EF4-FFF2-40B4-BE49-F238E27FC236}">
-                <a16:creationId xmlns:a16="http://schemas.microsoft.com/office/drawing/2014/main" id="{7C803207-3995-49E7-B21A-71D1B4858C2E}"/>
+                <a16:creationId xmlns:a16="http://schemas.microsoft.com/office/drawing/2014/main" id="{8F030EA7-460B-43AF-A577-60AD471C5495}"/>
               </a:ext>
             </a:extLst>
           </p:cNvPr>
@@ -2058,7 +2058,7 @@
           <p:cNvPr id="5" name="">
             <a:extLst xmlns:a="http://schemas.openxmlformats.org/drawingml/2006/main">
               <a:ext uri="{FF2B5EF4-FFF2-40B4-BE49-F238E27FC236}">
-                <a16:creationId xmlns:a16="http://schemas.microsoft.com/office/drawing/2014/main" id="{5489A7E5-C3DE-4DE5-BB81-E0A6DA5B2BA9}"/>
+                <a16:creationId xmlns:a16="http://schemas.microsoft.com/office/drawing/2014/main" id="{16FB7128-E3EC-4086-B14E-CC9910091948}"/>
               </a:ext>
             </a:extLst>
           </p:cNvPr>
@@ -2103,7 +2103,7 @@
           <p:cNvPr id="6" name="">
             <a:extLst xmlns:a="http://schemas.openxmlformats.org/drawingml/2006/main">
               <a:ext uri="{FF2B5EF4-FFF2-40B4-BE49-F238E27FC236}">
-                <a16:creationId xmlns:a16="http://schemas.microsoft.com/office/drawing/2014/main" id="{C15DDE87-E73E-4296-9B57-C5E93D1204FA}"/>
+                <a16:creationId xmlns:a16="http://schemas.microsoft.com/office/drawing/2014/main" id="{01532155-6BCB-48A9-AF41-C27A05982404}"/>
               </a:ext>
             </a:extLst>
           </p:cNvPr>
@@ -2136,7 +2136,7 @@
           <p:cNvPr id="7" name="">
             <a:extLst xmlns:a="http://schemas.openxmlformats.org/drawingml/2006/main">
               <a:ext uri="{FF2B5EF4-FFF2-40B4-BE49-F238E27FC236}">
-                <a16:creationId xmlns:a16="http://schemas.microsoft.com/office/drawing/2014/main" id="{10ADFBC7-7308-4475-B85E-7E06ACABB922}"/>
+                <a16:creationId xmlns:a16="http://schemas.microsoft.com/office/drawing/2014/main" id="{6DB52408-3BEB-4C68-AA7C-E00D7B1DA0C0}"/>
               </a:ext>
             </a:extLst>
           </p:cNvPr>
@@ -2167,7 +2167,7 @@
           <p:cNvPr id="8" name="">
             <a:extLst xmlns:a="http://schemas.openxmlformats.org/drawingml/2006/main">
               <a:ext uri="{FF2B5EF4-FFF2-40B4-BE49-F238E27FC236}">
-                <a16:creationId xmlns:a16="http://schemas.microsoft.com/office/drawing/2014/main" id="{7D7A7406-1460-43A9-B12E-2C36C3E509A5}"/>
+                <a16:creationId xmlns:a16="http://schemas.microsoft.com/office/drawing/2014/main" id="{23855EC2-388D-4EE6-A98A-8F9F3634A77F}"/>
               </a:ext>
             </a:extLst>
           </p:cNvPr>
@@ -2198,7 +2198,7 @@
           <p:cNvPr id="9" name="">
             <a:extLst xmlns:a="http://schemas.openxmlformats.org/drawingml/2006/main">
               <a:ext uri="{FF2B5EF4-FFF2-40B4-BE49-F238E27FC236}">
-                <a16:creationId xmlns:a16="http://schemas.microsoft.com/office/drawing/2014/main" id="{8F8FCE22-93C5-4266-A753-273B9089808A}"/>
+                <a16:creationId xmlns:a16="http://schemas.microsoft.com/office/drawing/2014/main" id="{42CD3482-B334-4458-A4CF-FFABB4615930}"/>
               </a:ext>
             </a:extLst>
           </p:cNvPr>
@@ -2229,7 +2229,7 @@
           <p:cNvPr id="10" name="">
             <a:extLst xmlns:a="http://schemas.openxmlformats.org/drawingml/2006/main">
               <a:ext uri="{FF2B5EF4-FFF2-40B4-BE49-F238E27FC236}">
-                <a16:creationId xmlns:a16="http://schemas.microsoft.com/office/drawing/2014/main" id="{77CA5FDB-BF45-428D-BCCA-2D8B127732E7}"/>
+                <a16:creationId xmlns:a16="http://schemas.microsoft.com/office/drawing/2014/main" id="{1044C06A-4C75-41A7-8ADC-2445BAE83D20}"/>
               </a:ext>
             </a:extLst>
           </p:cNvPr>
@@ -2260,7 +2260,7 @@
           <p:cNvPr id="11" name="">
             <a:extLst xmlns:a="http://schemas.openxmlformats.org/drawingml/2006/main">
               <a:ext uri="{FF2B5EF4-FFF2-40B4-BE49-F238E27FC236}">
-                <a16:creationId xmlns:a16="http://schemas.microsoft.com/office/drawing/2014/main" id="{90523EF0-63A3-4CBB-A315-BD423D573B55}"/>
+                <a16:creationId xmlns:a16="http://schemas.microsoft.com/office/drawing/2014/main" id="{E858D90B-00F1-4E9F-A5E6-7E39A2B85F71}"/>
               </a:ext>
             </a:extLst>
           </p:cNvPr>
@@ -2291,7 +2291,7 @@
           <p:cNvPr id="12" name="">
             <a:extLst xmlns:a="http://schemas.openxmlformats.org/drawingml/2006/main">
               <a:ext uri="{FF2B5EF4-FFF2-40B4-BE49-F238E27FC236}">
-                <a16:creationId xmlns:a16="http://schemas.microsoft.com/office/drawing/2014/main" id="{8665D80E-E3DD-47DF-8E0F-33B0881E7D04}"/>
+                <a16:creationId xmlns:a16="http://schemas.microsoft.com/office/drawing/2014/main" id="{17626823-6E41-460D-B085-6627B20B40D7}"/>
               </a:ext>
             </a:extLst>
           </p:cNvPr>
@@ -2322,7 +2322,7 @@
           <p:cNvPr id="13" name="">
             <a:extLst xmlns:a="http://schemas.openxmlformats.org/drawingml/2006/main">
               <a:ext uri="{FF2B5EF4-FFF2-40B4-BE49-F238E27FC236}">
-                <a16:creationId xmlns:a16="http://schemas.microsoft.com/office/drawing/2014/main" id="{E3FB0214-F21F-4ECE-B456-6A536A411F49}"/>
+                <a16:creationId xmlns:a16="http://schemas.microsoft.com/office/drawing/2014/main" id="{1C6515E7-F775-4D04-9CE9-72ADBE261DFD}"/>
               </a:ext>
             </a:extLst>
           </p:cNvPr>
@@ -2353,7 +2353,7 @@
           <p:cNvPr id="14" name="">
             <a:extLst xmlns:a="http://schemas.openxmlformats.org/drawingml/2006/main">
               <a:ext uri="{FF2B5EF4-FFF2-40B4-BE49-F238E27FC236}">
-                <a16:creationId xmlns:a16="http://schemas.microsoft.com/office/drawing/2014/main" id="{75CA9BD1-EA3C-48A8-9F3B-8AAC73A129F0}"/>
+                <a16:creationId xmlns:a16="http://schemas.microsoft.com/office/drawing/2014/main" id="{DA3C24FE-1746-49BA-9E35-B61633EF740C}"/>
               </a:ext>
             </a:extLst>
           </p:cNvPr>
@@ -2384,7 +2384,7 @@
           <p:cNvPr id="15" name="">
             <a:extLst xmlns:a="http://schemas.openxmlformats.org/drawingml/2006/main">
               <a:ext uri="{FF2B5EF4-FFF2-40B4-BE49-F238E27FC236}">
-                <a16:creationId xmlns:a16="http://schemas.microsoft.com/office/drawing/2014/main" id="{197E51EA-5C98-4210-9704-9617B476F8F7}"/>
+                <a16:creationId xmlns:a16="http://schemas.microsoft.com/office/drawing/2014/main" id="{2D63F90F-0874-4D9C-8578-F2235587392F}"/>
               </a:ext>
             </a:extLst>
           </p:cNvPr>
@@ -2415,7 +2415,7 @@
           <p:cNvPr id="16" name="">
             <a:extLst xmlns:a="http://schemas.openxmlformats.org/drawingml/2006/main">
               <a:ext uri="{FF2B5EF4-FFF2-40B4-BE49-F238E27FC236}">
-                <a16:creationId xmlns:a16="http://schemas.microsoft.com/office/drawing/2014/main" id="{5078B3C7-84B5-4F56-A9B7-AB9086997B3B}"/>
+                <a16:creationId xmlns:a16="http://schemas.microsoft.com/office/drawing/2014/main" id="{5F745B7E-6EB6-40C7-AF82-CFE37F2F42D9}"/>
               </a:ext>
             </a:extLst>
           </p:cNvPr>
@@ -2446,7 +2446,7 @@
           <p:cNvPr id="17" name="">
             <a:extLst xmlns:a="http://schemas.openxmlformats.org/drawingml/2006/main">
               <a:ext uri="{FF2B5EF4-FFF2-40B4-BE49-F238E27FC236}">
-                <a16:creationId xmlns:a16="http://schemas.microsoft.com/office/drawing/2014/main" id="{DF1311DB-DA2A-4398-8D2C-2C0C904CFB45}"/>
+                <a16:creationId xmlns:a16="http://schemas.microsoft.com/office/drawing/2014/main" id="{C898AF40-8F8F-4E5F-86E3-2EF0203E6DC3}"/>
               </a:ext>
             </a:extLst>
           </p:cNvPr>
@@ -2477,7 +2477,7 @@
           <p:cNvPr id="18" name="">
             <a:extLst xmlns:a="http://schemas.openxmlformats.org/drawingml/2006/main">
               <a:ext uri="{FF2B5EF4-FFF2-40B4-BE49-F238E27FC236}">
-                <a16:creationId xmlns:a16="http://schemas.microsoft.com/office/drawing/2014/main" id="{51A7EE77-680E-49CD-A6D6-616C624488E0}"/>
+                <a16:creationId xmlns:a16="http://schemas.microsoft.com/office/drawing/2014/main" id="{21DE6944-4518-4FDD-B13A-A62F5CED4168}"/>
               </a:ext>
             </a:extLst>
           </p:cNvPr>
@@ -2508,7 +2508,7 @@
           <p:cNvPr id="19" name="">
             <a:extLst xmlns:a="http://schemas.openxmlformats.org/drawingml/2006/main">
               <a:ext uri="{FF2B5EF4-FFF2-40B4-BE49-F238E27FC236}">
-                <a16:creationId xmlns:a16="http://schemas.microsoft.com/office/drawing/2014/main" id="{D3B81B0C-157B-4F4C-842F-D89F110C77F7}"/>
+                <a16:creationId xmlns:a16="http://schemas.microsoft.com/office/drawing/2014/main" id="{AB8E6E04-6B3D-4F59-8085-204CCB9C5214}"/>
               </a:ext>
             </a:extLst>
           </p:cNvPr>
@@ -2539,7 +2539,7 @@
           <p:cNvPr id="20" name="">
             <a:extLst xmlns:a="http://schemas.openxmlformats.org/drawingml/2006/main">
               <a:ext uri="{FF2B5EF4-FFF2-40B4-BE49-F238E27FC236}">
-                <a16:creationId xmlns:a16="http://schemas.microsoft.com/office/drawing/2014/main" id="{133048A3-6888-464A-94F6-CD74F1A7038E}"/>
+                <a16:creationId xmlns:a16="http://schemas.microsoft.com/office/drawing/2014/main" id="{345CB0F5-25EF-4AE8-B1B3-9CAE8765A954}"/>
               </a:ext>
             </a:extLst>
           </p:cNvPr>
@@ -2570,7 +2570,7 @@
           <p:cNvPr id="21" name="">
             <a:extLst xmlns:a="http://schemas.openxmlformats.org/drawingml/2006/main">
               <a:ext uri="{FF2B5EF4-FFF2-40B4-BE49-F238E27FC236}">
-                <a16:creationId xmlns:a16="http://schemas.microsoft.com/office/drawing/2014/main" id="{94AF2FC2-AA33-4918-8E03-465BDAC0ACD3}"/>
+                <a16:creationId xmlns:a16="http://schemas.microsoft.com/office/drawing/2014/main" id="{9114F771-7C54-4E5E-9F33-4584218DE162}"/>
               </a:ext>
             </a:extLst>
           </p:cNvPr>
@@ -2601,7 +2601,7 @@
           <p:cNvPr id="22" name="">
             <a:extLst xmlns:a="http://schemas.openxmlformats.org/drawingml/2006/main">
               <a:ext uri="{FF2B5EF4-FFF2-40B4-BE49-F238E27FC236}">
-                <a16:creationId xmlns:a16="http://schemas.microsoft.com/office/drawing/2014/main" id="{5F87F7B6-980D-43FC-9866-F4AE19F530ED}"/>
+                <a16:creationId xmlns:a16="http://schemas.microsoft.com/office/drawing/2014/main" id="{B6C3EE22-9178-4753-89DB-3F5D86F7C906}"/>
               </a:ext>
             </a:extLst>
           </p:cNvPr>
@@ -2632,7 +2632,7 @@
           <p:cNvPr id="23" name="">
             <a:extLst xmlns:a="http://schemas.openxmlformats.org/drawingml/2006/main">
               <a:ext uri="{FF2B5EF4-FFF2-40B4-BE49-F238E27FC236}">
-                <a16:creationId xmlns:a16="http://schemas.microsoft.com/office/drawing/2014/main" id="{862C4C6E-5285-467F-A2C5-B0E439D6E221}"/>
+                <a16:creationId xmlns:a16="http://schemas.microsoft.com/office/drawing/2014/main" id="{7AA29D09-A191-4840-8049-75DB94C196C0}"/>
               </a:ext>
             </a:extLst>
           </p:cNvPr>
@@ -2663,7 +2663,7 @@
           <p:cNvPr id="24" name="">
             <a:extLst xmlns:a="http://schemas.openxmlformats.org/drawingml/2006/main">
               <a:ext uri="{FF2B5EF4-FFF2-40B4-BE49-F238E27FC236}">
-                <a16:creationId xmlns:a16="http://schemas.microsoft.com/office/drawing/2014/main" id="{3015DC93-0F75-4500-8B1B-C39872ABBA1A}"/>
+                <a16:creationId xmlns:a16="http://schemas.microsoft.com/office/drawing/2014/main" id="{505E05F0-C559-43D9-A630-EDC8586B378B}"/>
               </a:ext>
             </a:extLst>
           </p:cNvPr>
@@ -2694,7 +2694,7 @@
           <p:cNvPr id="25" name="">
             <a:extLst xmlns:a="http://schemas.openxmlformats.org/drawingml/2006/main">
               <a:ext uri="{FF2B5EF4-FFF2-40B4-BE49-F238E27FC236}">
-                <a16:creationId xmlns:a16="http://schemas.microsoft.com/office/drawing/2014/main" id="{48B4A716-278D-4981-A35A-F9FF31F07B6F}"/>
+                <a16:creationId xmlns:a16="http://schemas.microsoft.com/office/drawing/2014/main" id="{A12BD0F3-F7F7-4CB8-A069-39825402CE98}"/>
               </a:ext>
             </a:extLst>
           </p:cNvPr>
@@ -2725,7 +2725,7 @@
           <p:cNvPr id="26" name="">
             <a:extLst xmlns:a="http://schemas.openxmlformats.org/drawingml/2006/main">
               <a:ext uri="{FF2B5EF4-FFF2-40B4-BE49-F238E27FC236}">
-                <a16:creationId xmlns:a16="http://schemas.microsoft.com/office/drawing/2014/main" id="{19577FF4-B3B0-4B66-A8F0-6F1B6CBB0842}"/>
+                <a16:creationId xmlns:a16="http://schemas.microsoft.com/office/drawing/2014/main" id="{7BC6B497-7164-4F8E-81DC-5AA85D740A61}"/>
               </a:ext>
             </a:extLst>
           </p:cNvPr>
@@ -2756,7 +2756,7 @@
           <p:cNvPr id="27" name="">
             <a:extLst xmlns:a="http://schemas.openxmlformats.org/drawingml/2006/main">
               <a:ext uri="{FF2B5EF4-FFF2-40B4-BE49-F238E27FC236}">
-                <a16:creationId xmlns:a16="http://schemas.microsoft.com/office/drawing/2014/main" id="{5FEBEA7B-4468-4731-811C-B343BD5F1DC3}"/>
+                <a16:creationId xmlns:a16="http://schemas.microsoft.com/office/drawing/2014/main" id="{F38A070C-0080-42A4-8453-51CD1E5E27B3}"/>
               </a:ext>
             </a:extLst>
           </p:cNvPr>
@@ -2787,7 +2787,7 @@
           <p:cNvPr id="28" name="">
             <a:extLst xmlns:a="http://schemas.openxmlformats.org/drawingml/2006/main">
               <a:ext uri="{FF2B5EF4-FFF2-40B4-BE49-F238E27FC236}">
-                <a16:creationId xmlns:a16="http://schemas.microsoft.com/office/drawing/2014/main" id="{76AA5C04-7261-452A-9368-200FC816F8FD}"/>
+                <a16:creationId xmlns:a16="http://schemas.microsoft.com/office/drawing/2014/main" id="{EF46F903-55AE-4F98-BFC6-EFF88992402E}"/>
               </a:ext>
             </a:extLst>
           </p:cNvPr>
@@ -2818,7 +2818,7 @@
           <p:cNvPr id="29" name="">
             <a:extLst xmlns:a="http://schemas.openxmlformats.org/drawingml/2006/main">
               <a:ext uri="{FF2B5EF4-FFF2-40B4-BE49-F238E27FC236}">
-                <a16:creationId xmlns:a16="http://schemas.microsoft.com/office/drawing/2014/main" id="{3F18E2D4-786B-450D-92E2-ECEC3A40B283}"/>
+                <a16:creationId xmlns:a16="http://schemas.microsoft.com/office/drawing/2014/main" id="{FE62EFF7-8B5F-469A-BE89-185DAA2EB984}"/>
               </a:ext>
             </a:extLst>
           </p:cNvPr>
@@ -2849,7 +2849,7 @@
           <p:cNvPr id="30" name="">
             <a:extLst xmlns:a="http://schemas.openxmlformats.org/drawingml/2006/main">
               <a:ext uri="{FF2B5EF4-FFF2-40B4-BE49-F238E27FC236}">
-                <a16:creationId xmlns:a16="http://schemas.microsoft.com/office/drawing/2014/main" id="{6D022F49-571B-408D-9243-0C599341B8B9}"/>
+                <a16:creationId xmlns:a16="http://schemas.microsoft.com/office/drawing/2014/main" id="{74AD9AC5-CDF3-4DF1-91CE-A3A673A7B76B}"/>
               </a:ext>
             </a:extLst>
           </p:cNvPr>
@@ -2880,7 +2880,7 @@
           <p:cNvPr id="31" name="">
             <a:extLst xmlns:a="http://schemas.openxmlformats.org/drawingml/2006/main">
               <a:ext uri="{FF2B5EF4-FFF2-40B4-BE49-F238E27FC236}">
-                <a16:creationId xmlns:a16="http://schemas.microsoft.com/office/drawing/2014/main" id="{11278041-D1F3-42D7-A48C-AC9DD8799DFA}"/>
+                <a16:creationId xmlns:a16="http://schemas.microsoft.com/office/drawing/2014/main" id="{873EC363-C96D-4A6F-AFC2-71B2FBB5912A}"/>
               </a:ext>
             </a:extLst>
           </p:cNvPr>
@@ -2911,7 +2911,7 @@
           <p:cNvPr id="32" name="">
             <a:extLst xmlns:a="http://schemas.openxmlformats.org/drawingml/2006/main">
               <a:ext uri="{FF2B5EF4-FFF2-40B4-BE49-F238E27FC236}">
-                <a16:creationId xmlns:a16="http://schemas.microsoft.com/office/drawing/2014/main" id="{5695D607-596B-40C9-AABA-F5911A769C44}"/>
+                <a16:creationId xmlns:a16="http://schemas.microsoft.com/office/drawing/2014/main" id="{EECA8ACC-94BA-4C1F-8F90-5E9DB9752733}"/>
               </a:ext>
             </a:extLst>
           </p:cNvPr>
@@ -2942,7 +2942,7 @@
           <p:cNvPr id="33" name="">
             <a:extLst xmlns:a="http://schemas.openxmlformats.org/drawingml/2006/main">
               <a:ext uri="{FF2B5EF4-FFF2-40B4-BE49-F238E27FC236}">
-                <a16:creationId xmlns:a16="http://schemas.microsoft.com/office/drawing/2014/main" id="{22508CA1-D544-4B28-AEDD-72E2E582CB19}"/>
+                <a16:creationId xmlns:a16="http://schemas.microsoft.com/office/drawing/2014/main" id="{EBF89251-8F79-40BA-9D00-545F6D7F02BD}"/>
               </a:ext>
             </a:extLst>
           </p:cNvPr>
@@ -2973,7 +2973,7 @@
           <p:cNvPr id="34" name="">
             <a:extLst xmlns:a="http://schemas.openxmlformats.org/drawingml/2006/main">
               <a:ext uri="{FF2B5EF4-FFF2-40B4-BE49-F238E27FC236}">
-                <a16:creationId xmlns:a16="http://schemas.microsoft.com/office/drawing/2014/main" id="{3CA83468-9311-44E9-8F85-4ED43DC2855B}"/>
+                <a16:creationId xmlns:a16="http://schemas.microsoft.com/office/drawing/2014/main" id="{51A98D37-C76D-46FA-9DAB-C3697467C5E4}"/>
               </a:ext>
             </a:extLst>
           </p:cNvPr>
@@ -3004,7 +3004,7 @@
           <p:cNvPr id="35" name="">
             <a:extLst xmlns:a="http://schemas.openxmlformats.org/drawingml/2006/main">
               <a:ext uri="{FF2B5EF4-FFF2-40B4-BE49-F238E27FC236}">
-                <a16:creationId xmlns:a16="http://schemas.microsoft.com/office/drawing/2014/main" id="{907761E1-DEB4-45F8-8E0F-57992D1F535C}"/>
+                <a16:creationId xmlns:a16="http://schemas.microsoft.com/office/drawing/2014/main" id="{A4606501-D163-44AE-8E05-53591DDA2F55}"/>
               </a:ext>
             </a:extLst>
           </p:cNvPr>
@@ -3035,7 +3035,7 @@
           <p:cNvPr id="36" name="">
             <a:extLst xmlns:a="http://schemas.openxmlformats.org/drawingml/2006/main">
               <a:ext uri="{FF2B5EF4-FFF2-40B4-BE49-F238E27FC236}">
-                <a16:creationId xmlns:a16="http://schemas.microsoft.com/office/drawing/2014/main" id="{2F507777-1691-47B4-B973-77C2694C93C9}"/>
+                <a16:creationId xmlns:a16="http://schemas.microsoft.com/office/drawing/2014/main" id="{18446A01-C9D6-48F9-8C64-E2DB383A840D}"/>
               </a:ext>
             </a:extLst>
           </p:cNvPr>
@@ -3066,7 +3066,7 @@
           <p:cNvPr id="37" name="">
             <a:extLst xmlns:a="http://schemas.openxmlformats.org/drawingml/2006/main">
               <a:ext uri="{FF2B5EF4-FFF2-40B4-BE49-F238E27FC236}">
-                <a16:creationId xmlns:a16="http://schemas.microsoft.com/office/drawing/2014/main" id="{F7C9BE4B-8507-4D93-83F0-18EB7FA3F0BE}"/>
+                <a16:creationId xmlns:a16="http://schemas.microsoft.com/office/drawing/2014/main" id="{23332A34-D150-45FC-9A13-4701278A8AEE}"/>
               </a:ext>
             </a:extLst>
           </p:cNvPr>
@@ -3097,7 +3097,7 @@
           <p:cNvPr id="38" name="">
             <a:extLst xmlns:a="http://schemas.openxmlformats.org/drawingml/2006/main">
               <a:ext uri="{FF2B5EF4-FFF2-40B4-BE49-F238E27FC236}">
-                <a16:creationId xmlns:a16="http://schemas.microsoft.com/office/drawing/2014/main" id="{0A4173FA-58F6-47FF-A9DF-B09C8C60D8B3}"/>
+                <a16:creationId xmlns:a16="http://schemas.microsoft.com/office/drawing/2014/main" id="{32826AA7-9EA5-4DA3-8E3A-E55376FAFEC7}"/>
               </a:ext>
             </a:extLst>
           </p:cNvPr>
@@ -3128,7 +3128,7 @@
           <p:cNvPr id="39" name="">
             <a:extLst xmlns:a="http://schemas.openxmlformats.org/drawingml/2006/main">
               <a:ext uri="{FF2B5EF4-FFF2-40B4-BE49-F238E27FC236}">
-                <a16:creationId xmlns:a16="http://schemas.microsoft.com/office/drawing/2014/main" id="{39173F18-7070-40FB-B956-4A98D988DCF7}"/>
+                <a16:creationId xmlns:a16="http://schemas.microsoft.com/office/drawing/2014/main" id="{594134B2-5477-42C6-B7E5-551CD9A9BB7E}"/>
               </a:ext>
             </a:extLst>
           </p:cNvPr>
@@ -3159,7 +3159,7 @@
           <p:cNvPr id="40" name="">
             <a:extLst xmlns:a="http://schemas.openxmlformats.org/drawingml/2006/main">
               <a:ext uri="{FF2B5EF4-FFF2-40B4-BE49-F238E27FC236}">
-                <a16:creationId xmlns:a16="http://schemas.microsoft.com/office/drawing/2014/main" id="{9D81F209-64BF-4C2E-A593-E24C9C37E7FD}"/>
+                <a16:creationId xmlns:a16="http://schemas.microsoft.com/office/drawing/2014/main" id="{EA016EAA-AA54-4A57-9864-6B4CC7528547}"/>
               </a:ext>
             </a:extLst>
           </p:cNvPr>
@@ -3190,7 +3190,7 @@
           <p:cNvPr id="41" name="">
             <a:extLst xmlns:a="http://schemas.openxmlformats.org/drawingml/2006/main">
               <a:ext uri="{FF2B5EF4-FFF2-40B4-BE49-F238E27FC236}">
-                <a16:creationId xmlns:a16="http://schemas.microsoft.com/office/drawing/2014/main" id="{40502637-55B7-48B0-994E-16DD1705708E}"/>
+                <a16:creationId xmlns:a16="http://schemas.microsoft.com/office/drawing/2014/main" id="{8509B84D-61E2-4658-9C35-906889366AF4}"/>
               </a:ext>
             </a:extLst>
           </p:cNvPr>
@@ -3221,7 +3221,7 @@
           <p:cNvPr id="42" name="">
             <a:extLst xmlns:a="http://schemas.openxmlformats.org/drawingml/2006/main">
               <a:ext uri="{FF2B5EF4-FFF2-40B4-BE49-F238E27FC236}">
-                <a16:creationId xmlns:a16="http://schemas.microsoft.com/office/drawing/2014/main" id="{59E2AB67-0A18-4ABF-B76B-C04B8211AC7F}"/>
+                <a16:creationId xmlns:a16="http://schemas.microsoft.com/office/drawing/2014/main" id="{B83D2DD2-598D-4FC5-9A98-4254E93476DE}"/>
               </a:ext>
             </a:extLst>
           </p:cNvPr>
@@ -3252,7 +3252,7 @@
           <p:cNvPr id="43" name="">
             <a:extLst xmlns:a="http://schemas.openxmlformats.org/drawingml/2006/main">
               <a:ext uri="{FF2B5EF4-FFF2-40B4-BE49-F238E27FC236}">
-                <a16:creationId xmlns:a16="http://schemas.microsoft.com/office/drawing/2014/main" id="{1B2C1BAC-184E-4131-95CB-3D2C60402047}"/>
+                <a16:creationId xmlns:a16="http://schemas.microsoft.com/office/drawing/2014/main" id="{DE3E9665-50AF-4509-ABE5-66F9AB83FF27}"/>
               </a:ext>
             </a:extLst>
           </p:cNvPr>
@@ -3283,7 +3283,7 @@
           <p:cNvPr id="44" name="">
             <a:extLst xmlns:a="http://schemas.openxmlformats.org/drawingml/2006/main">
               <a:ext uri="{FF2B5EF4-FFF2-40B4-BE49-F238E27FC236}">
-                <a16:creationId xmlns:a16="http://schemas.microsoft.com/office/drawing/2014/main" id="{D9C992A9-4D80-4C84-A490-6F12A70C6264}"/>
+                <a16:creationId xmlns:a16="http://schemas.microsoft.com/office/drawing/2014/main" id="{9630B2A8-C3F6-49EE-8DAF-CCA423297B8C}"/>
               </a:ext>
             </a:extLst>
           </p:cNvPr>
@@ -3314,7 +3314,7 @@
           <p:cNvPr id="45" name="">
             <a:extLst xmlns:a="http://schemas.openxmlformats.org/drawingml/2006/main">
               <a:ext uri="{FF2B5EF4-FFF2-40B4-BE49-F238E27FC236}">
-                <a16:creationId xmlns:a16="http://schemas.microsoft.com/office/drawing/2014/main" id="{C081178E-0DE3-410B-BB2C-D92E93C3B524}"/>
+                <a16:creationId xmlns:a16="http://schemas.microsoft.com/office/drawing/2014/main" id="{407B8F78-5804-4911-8773-212EE3C2CC54}"/>
               </a:ext>
             </a:extLst>
           </p:cNvPr>
@@ -3345,7 +3345,7 @@
           <p:cNvPr id="46" name="">
             <a:extLst xmlns:a="http://schemas.openxmlformats.org/drawingml/2006/main">
               <a:ext uri="{FF2B5EF4-FFF2-40B4-BE49-F238E27FC236}">
-                <a16:creationId xmlns:a16="http://schemas.microsoft.com/office/drawing/2014/main" id="{AB6BF6F2-7FB1-4FAE-9FE9-C562CCE847D9}"/>
+                <a16:creationId xmlns:a16="http://schemas.microsoft.com/office/drawing/2014/main" id="{AF24DA49-D8F8-4A5C-91A7-C138940179A9}"/>
               </a:ext>
             </a:extLst>
           </p:cNvPr>
@@ -3376,7 +3376,7 @@
           <p:cNvPr id="47" name="">
             <a:extLst xmlns:a="http://schemas.openxmlformats.org/drawingml/2006/main">
               <a:ext uri="{FF2B5EF4-FFF2-40B4-BE49-F238E27FC236}">
-                <a16:creationId xmlns:a16="http://schemas.microsoft.com/office/drawing/2014/main" id="{8CEEBF00-9E84-4B35-B2B9-C3B7914F1636}"/>
+                <a16:creationId xmlns:a16="http://schemas.microsoft.com/office/drawing/2014/main" id="{F3BEBD50-565E-4864-86FE-7FFEE64A720A}"/>
               </a:ext>
             </a:extLst>
           </p:cNvPr>
@@ -3407,7 +3407,7 @@
           <p:cNvPr id="48" name="">
             <a:extLst xmlns:a="http://schemas.openxmlformats.org/drawingml/2006/main">
               <a:ext uri="{FF2B5EF4-FFF2-40B4-BE49-F238E27FC236}">
-                <a16:creationId xmlns:a16="http://schemas.microsoft.com/office/drawing/2014/main" id="{2C6D065B-30D0-4CD5-8A69-2F7DD124E186}"/>
+                <a16:creationId xmlns:a16="http://schemas.microsoft.com/office/drawing/2014/main" id="{8ADC916C-4818-4AD7-8402-AE33A433C1BB}"/>
               </a:ext>
             </a:extLst>
           </p:cNvPr>
@@ -3438,7 +3438,7 @@
           <p:cNvPr id="49" name="">
             <a:extLst xmlns:a="http://schemas.openxmlformats.org/drawingml/2006/main">
               <a:ext uri="{FF2B5EF4-FFF2-40B4-BE49-F238E27FC236}">
-                <a16:creationId xmlns:a16="http://schemas.microsoft.com/office/drawing/2014/main" id="{7C06EA10-961A-4645-87B2-9CB48084E34F}"/>
+                <a16:creationId xmlns:a16="http://schemas.microsoft.com/office/drawing/2014/main" id="{66E35889-EC42-488C-9392-A64DF87CD522}"/>
               </a:ext>
             </a:extLst>
           </p:cNvPr>
@@ -3469,7 +3469,7 @@
           <p:cNvPr id="50" name="">
             <a:extLst xmlns:a="http://schemas.openxmlformats.org/drawingml/2006/main">
               <a:ext uri="{FF2B5EF4-FFF2-40B4-BE49-F238E27FC236}">
-                <a16:creationId xmlns:a16="http://schemas.microsoft.com/office/drawing/2014/main" id="{FF32AFD5-4005-4CFD-BA78-8F3D1E4E33F3}"/>
+                <a16:creationId xmlns:a16="http://schemas.microsoft.com/office/drawing/2014/main" id="{08E64081-BAEE-4F79-995C-FAD2A4A119AD}"/>
               </a:ext>
             </a:extLst>
           </p:cNvPr>
@@ -3500,7 +3500,7 @@
           <p:cNvPr id="51" name="">
             <a:extLst xmlns:a="http://schemas.openxmlformats.org/drawingml/2006/main">
               <a:ext uri="{FF2B5EF4-FFF2-40B4-BE49-F238E27FC236}">
-                <a16:creationId xmlns:a16="http://schemas.microsoft.com/office/drawing/2014/main" id="{7345A65A-AEE5-4AEF-A349-64D3586D8C88}"/>
+                <a16:creationId xmlns:a16="http://schemas.microsoft.com/office/drawing/2014/main" id="{4DA9A4A4-741D-4BF5-8ED7-A62FC614F0B6}"/>
               </a:ext>
             </a:extLst>
           </p:cNvPr>
@@ -3531,7 +3531,7 @@
           <p:cNvPr id="52" name="">
             <a:extLst xmlns:a="http://schemas.openxmlformats.org/drawingml/2006/main">
               <a:ext uri="{FF2B5EF4-FFF2-40B4-BE49-F238E27FC236}">
-                <a16:creationId xmlns:a16="http://schemas.microsoft.com/office/drawing/2014/main" id="{03198B21-FA77-4825-93F6-CA0B44BA01A2}"/>
+                <a16:creationId xmlns:a16="http://schemas.microsoft.com/office/drawing/2014/main" id="{F2EB4ECA-05E3-41B2-ACD4-60D543A7C782}"/>
               </a:ext>
             </a:extLst>
           </p:cNvPr>
@@ -3562,7 +3562,7 @@
           <p:cNvPr id="53" name="">
             <a:extLst xmlns:a="http://schemas.openxmlformats.org/drawingml/2006/main">
               <a:ext uri="{FF2B5EF4-FFF2-40B4-BE49-F238E27FC236}">
-                <a16:creationId xmlns:a16="http://schemas.microsoft.com/office/drawing/2014/main" id="{D238AE1E-7B1D-4A64-BA88-52BDF77FB30C}"/>
+                <a16:creationId xmlns:a16="http://schemas.microsoft.com/office/drawing/2014/main" id="{04F055DF-929C-45BF-8B64-E8455A74D4A0}"/>
               </a:ext>
             </a:extLst>
           </p:cNvPr>
@@ -3593,7 +3593,7 @@
           <p:cNvPr id="54" name="">
             <a:extLst xmlns:a="http://schemas.openxmlformats.org/drawingml/2006/main">
               <a:ext uri="{FF2B5EF4-FFF2-40B4-BE49-F238E27FC236}">
-                <a16:creationId xmlns:a16="http://schemas.microsoft.com/office/drawing/2014/main" id="{301A3032-317F-453D-9FA6-8A70F7B33D12}"/>
+                <a16:creationId xmlns:a16="http://schemas.microsoft.com/office/drawing/2014/main" id="{B565C380-3BFE-4F06-9ED6-299195CF6561}"/>
               </a:ext>
             </a:extLst>
           </p:cNvPr>
@@ -3624,7 +3624,7 @@
           <p:cNvPr id="55" name="">
             <a:extLst xmlns:a="http://schemas.openxmlformats.org/drawingml/2006/main">
               <a:ext uri="{FF2B5EF4-FFF2-40B4-BE49-F238E27FC236}">
-                <a16:creationId xmlns:a16="http://schemas.microsoft.com/office/drawing/2014/main" id="{4E62EF7A-78AD-49D0-9D99-9056E3B41D13}"/>
+                <a16:creationId xmlns:a16="http://schemas.microsoft.com/office/drawing/2014/main" id="{C402BD03-4BC8-4CC7-B899-F5029BCF3817}"/>
               </a:ext>
             </a:extLst>
           </p:cNvPr>
@@ -3655,7 +3655,7 @@
           <p:cNvPr id="56" name="">
             <a:extLst xmlns:a="http://schemas.openxmlformats.org/drawingml/2006/main">
               <a:ext uri="{FF2B5EF4-FFF2-40B4-BE49-F238E27FC236}">
-                <a16:creationId xmlns:a16="http://schemas.microsoft.com/office/drawing/2014/main" id="{EC415C98-1CA4-4B23-B415-79ECFB7AB5D7}"/>
+                <a16:creationId xmlns:a16="http://schemas.microsoft.com/office/drawing/2014/main" id="{C6CD7D3B-655A-4430-AF91-224FC12E291E}"/>
               </a:ext>
             </a:extLst>
           </p:cNvPr>
@@ -3686,7 +3686,7 @@
           <p:cNvPr id="57" name="">
             <a:extLst xmlns:a="http://schemas.openxmlformats.org/drawingml/2006/main">
               <a:ext uri="{FF2B5EF4-FFF2-40B4-BE49-F238E27FC236}">
-                <a16:creationId xmlns:a16="http://schemas.microsoft.com/office/drawing/2014/main" id="{226DA009-7432-4739-B13B-D9D9721AB0DC}"/>
+                <a16:creationId xmlns:a16="http://schemas.microsoft.com/office/drawing/2014/main" id="{660651DE-A69D-46C1-8DE6-A5569376BABC}"/>
               </a:ext>
             </a:extLst>
           </p:cNvPr>
@@ -3717,7 +3717,7 @@
           <p:cNvPr id="58" name="">
             <a:extLst xmlns:a="http://schemas.openxmlformats.org/drawingml/2006/main">
               <a:ext uri="{FF2B5EF4-FFF2-40B4-BE49-F238E27FC236}">
-                <a16:creationId xmlns:a16="http://schemas.microsoft.com/office/drawing/2014/main" id="{2FF27330-3E4C-4A93-A094-DF116D6774C6}"/>
+                <a16:creationId xmlns:a16="http://schemas.microsoft.com/office/drawing/2014/main" id="{27C420CF-C9B0-456E-A3FB-703AFF3C77D3}"/>
               </a:ext>
             </a:extLst>
           </p:cNvPr>
@@ -3748,7 +3748,7 @@
           <p:cNvPr id="59" name="">
             <a:extLst xmlns:a="http://schemas.openxmlformats.org/drawingml/2006/main">
               <a:ext uri="{FF2B5EF4-FFF2-40B4-BE49-F238E27FC236}">
-                <a16:creationId xmlns:a16="http://schemas.microsoft.com/office/drawing/2014/main" id="{2FDB23E7-6DE3-418A-9A5B-B2474E2E80CF}"/>
+                <a16:creationId xmlns:a16="http://schemas.microsoft.com/office/drawing/2014/main" id="{13D0750A-D8F3-4E29-891E-BD9BC5C9824C}"/>
               </a:ext>
             </a:extLst>
           </p:cNvPr>
@@ -3779,7 +3779,7 @@
           <p:cNvPr id="60" name="">
             <a:extLst xmlns:a="http://schemas.openxmlformats.org/drawingml/2006/main">
               <a:ext uri="{FF2B5EF4-FFF2-40B4-BE49-F238E27FC236}">
-                <a16:creationId xmlns:a16="http://schemas.microsoft.com/office/drawing/2014/main" id="{242D55B0-2563-451E-AC07-C649644B3686}"/>
+                <a16:creationId xmlns:a16="http://schemas.microsoft.com/office/drawing/2014/main" id="{0A48E128-AF92-44C9-8829-333E0441562E}"/>
               </a:ext>
             </a:extLst>
           </p:cNvPr>
@@ -3810,7 +3810,7 @@
           <p:cNvPr id="61" name="">
             <a:extLst xmlns:a="http://schemas.openxmlformats.org/drawingml/2006/main">
               <a:ext uri="{FF2B5EF4-FFF2-40B4-BE49-F238E27FC236}">
-                <a16:creationId xmlns:a16="http://schemas.microsoft.com/office/drawing/2014/main" id="{7D7BCE9E-CE50-4D52-ACE5-8F8F035DE05B}"/>
+                <a16:creationId xmlns:a16="http://schemas.microsoft.com/office/drawing/2014/main" id="{D0027398-F40F-4B9D-83A1-E460978ED82E}"/>
               </a:ext>
             </a:extLst>
           </p:cNvPr>
@@ -3841,7 +3841,7 @@
           <p:cNvPr id="62" name="">
             <a:extLst xmlns:a="http://schemas.openxmlformats.org/drawingml/2006/main">
               <a:ext uri="{FF2B5EF4-FFF2-40B4-BE49-F238E27FC236}">
-                <a16:creationId xmlns:a16="http://schemas.microsoft.com/office/drawing/2014/main" id="{75EF44BA-C604-4CEB-8CFE-EC53E4B02C08}"/>
+                <a16:creationId xmlns:a16="http://schemas.microsoft.com/office/drawing/2014/main" id="{C0F683AB-F416-40B8-AF8E-2A3E2F819830}"/>
               </a:ext>
             </a:extLst>
           </p:cNvPr>
@@ -3872,7 +3872,7 @@
           <p:cNvPr id="63" name="">
             <a:extLst xmlns:a="http://schemas.openxmlformats.org/drawingml/2006/main">
               <a:ext uri="{FF2B5EF4-FFF2-40B4-BE49-F238E27FC236}">
-                <a16:creationId xmlns:a16="http://schemas.microsoft.com/office/drawing/2014/main" id="{A5369F9E-6040-4B4F-B729-122AFBC640F2}"/>
+                <a16:creationId xmlns:a16="http://schemas.microsoft.com/office/drawing/2014/main" id="{E259AE58-D137-41AA-B64E-7BF1A8F182C1}"/>
               </a:ext>
             </a:extLst>
           </p:cNvPr>
@@ -3903,7 +3903,7 @@
           <p:cNvPr id="64" name="">
             <a:extLst xmlns:a="http://schemas.openxmlformats.org/drawingml/2006/main">
               <a:ext uri="{FF2B5EF4-FFF2-40B4-BE49-F238E27FC236}">
-                <a16:creationId xmlns:a16="http://schemas.microsoft.com/office/drawing/2014/main" id="{0A935FA6-A964-4A92-887F-B2D0428B666B}"/>
+                <a16:creationId xmlns:a16="http://schemas.microsoft.com/office/drawing/2014/main" id="{ECC0E57B-1B1F-4255-9ADE-8083BAA7B101}"/>
               </a:ext>
             </a:extLst>
           </p:cNvPr>
@@ -3934,7 +3934,7 @@
           <p:cNvPr id="65" name="">
             <a:extLst xmlns:a="http://schemas.openxmlformats.org/drawingml/2006/main">
               <a:ext uri="{FF2B5EF4-FFF2-40B4-BE49-F238E27FC236}">
-                <a16:creationId xmlns:a16="http://schemas.microsoft.com/office/drawing/2014/main" id="{873067A8-2E1A-474F-8DCC-1279276B621C}"/>
+                <a16:creationId xmlns:a16="http://schemas.microsoft.com/office/drawing/2014/main" id="{A6CD3348-9825-4B42-95B0-0A367FA6551D}"/>
               </a:ext>
             </a:extLst>
           </p:cNvPr>
@@ -3965,7 +3965,7 @@
           <p:cNvPr id="66" name="">
             <a:extLst xmlns:a="http://schemas.openxmlformats.org/drawingml/2006/main">
               <a:ext uri="{FF2B5EF4-FFF2-40B4-BE49-F238E27FC236}">
-                <a16:creationId xmlns:a16="http://schemas.microsoft.com/office/drawing/2014/main" id="{705C575C-D1B7-4359-AB3C-0AD0B8B785B9}"/>
+                <a16:creationId xmlns:a16="http://schemas.microsoft.com/office/drawing/2014/main" id="{A090F251-4E16-45E1-A16A-FF88B72BA83B}"/>
               </a:ext>
             </a:extLst>
           </p:cNvPr>
@@ -3996,7 +3996,7 @@
           <p:cNvPr id="67" name="">
             <a:extLst xmlns:a="http://schemas.openxmlformats.org/drawingml/2006/main">
               <a:ext uri="{FF2B5EF4-FFF2-40B4-BE49-F238E27FC236}">
-                <a16:creationId xmlns:a16="http://schemas.microsoft.com/office/drawing/2014/main" id="{7804417E-6B5B-4D9E-84F7-11F39E7F0861}"/>
+                <a16:creationId xmlns:a16="http://schemas.microsoft.com/office/drawing/2014/main" id="{62E2BDEE-2076-47C2-8FDF-FF4399C112E5}"/>
               </a:ext>
             </a:extLst>
           </p:cNvPr>
@@ -4027,7 +4027,7 @@
           <p:cNvPr id="68" name="">
             <a:extLst xmlns:a="http://schemas.openxmlformats.org/drawingml/2006/main">
               <a:ext uri="{FF2B5EF4-FFF2-40B4-BE49-F238E27FC236}">
-                <a16:creationId xmlns:a16="http://schemas.microsoft.com/office/drawing/2014/main" id="{0F33EB2C-1791-4FF1-B411-F2B266C8DB77}"/>
+                <a16:creationId xmlns:a16="http://schemas.microsoft.com/office/drawing/2014/main" id="{A26BB3CE-923D-46AF-BF59-7F2DE3636E55}"/>
               </a:ext>
             </a:extLst>
           </p:cNvPr>
@@ -4058,7 +4058,7 @@
           <p:cNvPr id="69" name="">
             <a:extLst xmlns:a="http://schemas.openxmlformats.org/drawingml/2006/main">
               <a:ext uri="{FF2B5EF4-FFF2-40B4-BE49-F238E27FC236}">
-                <a16:creationId xmlns:a16="http://schemas.microsoft.com/office/drawing/2014/main" id="{66152857-1FEA-4E87-90B2-E9F817510C67}"/>
+                <a16:creationId xmlns:a16="http://schemas.microsoft.com/office/drawing/2014/main" id="{92B88F16-3736-42AD-A99E-63C5EEE14579}"/>
               </a:ext>
             </a:extLst>
           </p:cNvPr>
@@ -4089,7 +4089,7 @@
           <p:cNvPr id="70" name="">
             <a:extLst xmlns:a="http://schemas.openxmlformats.org/drawingml/2006/main">
               <a:ext uri="{FF2B5EF4-FFF2-40B4-BE49-F238E27FC236}">
-                <a16:creationId xmlns:a16="http://schemas.microsoft.com/office/drawing/2014/main" id="{DBFD14CA-DE5E-4008-9F70-3A72DBEE18C0}"/>
+                <a16:creationId xmlns:a16="http://schemas.microsoft.com/office/drawing/2014/main" id="{48BB974D-BE5B-4B11-8943-F03E5A085B9B}"/>
               </a:ext>
             </a:extLst>
           </p:cNvPr>
@@ -4120,7 +4120,7 @@
           <p:cNvPr id="71" name="">
             <a:extLst xmlns:a="http://schemas.openxmlformats.org/drawingml/2006/main">
               <a:ext uri="{FF2B5EF4-FFF2-40B4-BE49-F238E27FC236}">
-                <a16:creationId xmlns:a16="http://schemas.microsoft.com/office/drawing/2014/main" id="{FF8F2687-A39C-4F25-93D2-545F39830E51}"/>
+                <a16:creationId xmlns:a16="http://schemas.microsoft.com/office/drawing/2014/main" id="{C7F03DDB-3DF8-465F-8F60-7F46C955C744}"/>
               </a:ext>
             </a:extLst>
           </p:cNvPr>
@@ -4151,7 +4151,7 @@
           <p:cNvPr id="72" name="">
             <a:extLst xmlns:a="http://schemas.openxmlformats.org/drawingml/2006/main">
               <a:ext uri="{FF2B5EF4-FFF2-40B4-BE49-F238E27FC236}">
-                <a16:creationId xmlns:a16="http://schemas.microsoft.com/office/drawing/2014/main" id="{3A4655AB-B456-461E-8DB2-DB5E40A9DF7F}"/>
+                <a16:creationId xmlns:a16="http://schemas.microsoft.com/office/drawing/2014/main" id="{70F58E5F-B7A2-4763-92D2-C73CFD4F9910}"/>
               </a:ext>
             </a:extLst>
           </p:cNvPr>
@@ -4184,7 +4184,7 @@
           <p:cNvPr id="73" name="">
             <a:extLst xmlns:a="http://schemas.openxmlformats.org/drawingml/2006/main">
               <a:ext uri="{FF2B5EF4-FFF2-40B4-BE49-F238E27FC236}">
-                <a16:creationId xmlns:a16="http://schemas.microsoft.com/office/drawing/2014/main" id="{32DF4C4B-0392-46A7-A232-C348B42A0853}"/>
+                <a16:creationId xmlns:a16="http://schemas.microsoft.com/office/drawing/2014/main" id="{9A898713-FDCB-465D-BF76-7E21F4DA8C24}"/>
               </a:ext>
             </a:extLst>
           </p:cNvPr>
@@ -4217,7 +4217,7 @@
           <p:cNvPr id="74" name="">
             <a:extLst xmlns:a="http://schemas.openxmlformats.org/drawingml/2006/main">
               <a:ext uri="{FF2B5EF4-FFF2-40B4-BE49-F238E27FC236}">
-                <a16:creationId xmlns:a16="http://schemas.microsoft.com/office/drawing/2014/main" id="{79288BCA-CA1D-4DE9-A5DE-724006284929}"/>
+                <a16:creationId xmlns:a16="http://schemas.microsoft.com/office/drawing/2014/main" id="{123E81B2-1326-4887-9CF2-9DFA70DADD68}"/>
               </a:ext>
             </a:extLst>
           </p:cNvPr>
@@ -4250,7 +4250,7 @@
           <p:cNvPr id="75" name="">
             <a:extLst xmlns:a="http://schemas.openxmlformats.org/drawingml/2006/main">
               <a:ext uri="{FF2B5EF4-FFF2-40B4-BE49-F238E27FC236}">
-                <a16:creationId xmlns:a16="http://schemas.microsoft.com/office/drawing/2014/main" id="{2976B567-C21C-4092-9193-21DC51706B4C}"/>
+                <a16:creationId xmlns:a16="http://schemas.microsoft.com/office/drawing/2014/main" id="{6943012B-6241-41D3-AFBE-49C695E6FADD}"/>
               </a:ext>
             </a:extLst>
           </p:cNvPr>
@@ -4281,7 +4281,7 @@
           <p:cNvPr id="76" name="">
             <a:extLst xmlns:a="http://schemas.openxmlformats.org/drawingml/2006/main">
               <a:ext uri="{FF2B5EF4-FFF2-40B4-BE49-F238E27FC236}">
-                <a16:creationId xmlns:a16="http://schemas.microsoft.com/office/drawing/2014/main" id="{EFF33FA4-1775-49CD-9A22-35B1EB254A7F}"/>
+                <a16:creationId xmlns:a16="http://schemas.microsoft.com/office/drawing/2014/main" id="{B6E9B858-CB30-4895-9169-5B3D77E2ADFA}"/>
               </a:ext>
             </a:extLst>
           </p:cNvPr>
@@ -4312,7 +4312,7 @@
           <p:cNvPr id="77" name="">
             <a:extLst xmlns:a="http://schemas.openxmlformats.org/drawingml/2006/main">
               <a:ext uri="{FF2B5EF4-FFF2-40B4-BE49-F238E27FC236}">
-                <a16:creationId xmlns:a16="http://schemas.microsoft.com/office/drawing/2014/main" id="{41987CF9-2FF9-4906-960E-06D97F50481B}"/>
+                <a16:creationId xmlns:a16="http://schemas.microsoft.com/office/drawing/2014/main" id="{0CAE74EE-17AB-4537-8A24-3EDF3580765D}"/>
               </a:ext>
             </a:extLst>
           </p:cNvPr>
@@ -4343,7 +4343,7 @@
           <p:cNvPr id="78" name="">
             <a:extLst xmlns:a="http://schemas.openxmlformats.org/drawingml/2006/main">
               <a:ext uri="{FF2B5EF4-FFF2-40B4-BE49-F238E27FC236}">
-                <a16:creationId xmlns:a16="http://schemas.microsoft.com/office/drawing/2014/main" id="{07598104-2463-489A-A498-2BD8BF8678C5}"/>
+                <a16:creationId xmlns:a16="http://schemas.microsoft.com/office/drawing/2014/main" id="{CFA77F7D-B1BA-45DE-A872-B57DB90A5ED8}"/>
               </a:ext>
             </a:extLst>
           </p:cNvPr>
@@ -4374,7 +4374,7 @@
           <p:cNvPr id="79" name="">
             <a:extLst xmlns:a="http://schemas.openxmlformats.org/drawingml/2006/main">
               <a:ext uri="{FF2B5EF4-FFF2-40B4-BE49-F238E27FC236}">
-                <a16:creationId xmlns:a16="http://schemas.microsoft.com/office/drawing/2014/main" id="{A384BBE6-537E-4C88-9D5E-D3BF08D543C6}"/>
+                <a16:creationId xmlns:a16="http://schemas.microsoft.com/office/drawing/2014/main" id="{7A30ACD9-A09E-4499-BFF8-FA1EAC8113BD}"/>
               </a:ext>
             </a:extLst>
           </p:cNvPr>
@@ -4405,7 +4405,7 @@
           <p:cNvPr id="80" name="">
             <a:extLst xmlns:a="http://schemas.openxmlformats.org/drawingml/2006/main">
               <a:ext uri="{FF2B5EF4-FFF2-40B4-BE49-F238E27FC236}">
-                <a16:creationId xmlns:a16="http://schemas.microsoft.com/office/drawing/2014/main" id="{1EEE0160-6198-4780-8A97-68A016791D5B}"/>
+                <a16:creationId xmlns:a16="http://schemas.microsoft.com/office/drawing/2014/main" id="{B5F56AF3-8E03-4584-87A4-2985B07AE8A6}"/>
               </a:ext>
             </a:extLst>
           </p:cNvPr>
@@ -4436,7 +4436,7 @@
           <p:cNvPr id="81" name="">
             <a:extLst xmlns:a="http://schemas.openxmlformats.org/drawingml/2006/main">
               <a:ext uri="{FF2B5EF4-FFF2-40B4-BE49-F238E27FC236}">
-                <a16:creationId xmlns:a16="http://schemas.microsoft.com/office/drawing/2014/main" id="{18D7CC8B-BC90-49D8-92CC-EC861CB00EFB}"/>
+                <a16:creationId xmlns:a16="http://schemas.microsoft.com/office/drawing/2014/main" id="{778468D2-11B2-4839-B0C5-5511ABE3C7C2}"/>
               </a:ext>
             </a:extLst>
           </p:cNvPr>
@@ -4467,7 +4467,7 @@
           <p:cNvPr id="82" name="">
             <a:extLst xmlns:a="http://schemas.openxmlformats.org/drawingml/2006/main">
               <a:ext uri="{FF2B5EF4-FFF2-40B4-BE49-F238E27FC236}">
-                <a16:creationId xmlns:a16="http://schemas.microsoft.com/office/drawing/2014/main" id="{50425797-D9CE-400E-A101-F69F9A71C635}"/>
+                <a16:creationId xmlns:a16="http://schemas.microsoft.com/office/drawing/2014/main" id="{39D95272-FA51-4268-8402-7515BECB6084}"/>
               </a:ext>
             </a:extLst>
           </p:cNvPr>
@@ -4498,7 +4498,7 @@
           <p:cNvPr id="83" name="">
             <a:extLst xmlns:a="http://schemas.openxmlformats.org/drawingml/2006/main">
               <a:ext uri="{FF2B5EF4-FFF2-40B4-BE49-F238E27FC236}">
-                <a16:creationId xmlns:a16="http://schemas.microsoft.com/office/drawing/2014/main" id="{83D91ACF-6FEC-47AF-8FB1-BA5A950E40DC}"/>
+                <a16:creationId xmlns:a16="http://schemas.microsoft.com/office/drawing/2014/main" id="{20A1A6ED-5635-4AC3-B6CD-74AD08321F9C}"/>
               </a:ext>
             </a:extLst>
           </p:cNvPr>
@@ -4529,7 +4529,7 @@
           <p:cNvPr id="84" name="">
             <a:extLst xmlns:a="http://schemas.openxmlformats.org/drawingml/2006/main">
               <a:ext uri="{FF2B5EF4-FFF2-40B4-BE49-F238E27FC236}">
-                <a16:creationId xmlns:a16="http://schemas.microsoft.com/office/drawing/2014/main" id="{CB69981D-CF6C-4D79-9E2F-1DCB52A51204}"/>
+                <a16:creationId xmlns:a16="http://schemas.microsoft.com/office/drawing/2014/main" id="{0B9D7939-7043-4377-98FF-7950C9F1C582}"/>
               </a:ext>
             </a:extLst>
           </p:cNvPr>
@@ -4560,7 +4560,7 @@
           <p:cNvPr id="85" name="">
             <a:extLst xmlns:a="http://schemas.openxmlformats.org/drawingml/2006/main">
               <a:ext uri="{FF2B5EF4-FFF2-40B4-BE49-F238E27FC236}">
-                <a16:creationId xmlns:a16="http://schemas.microsoft.com/office/drawing/2014/main" id="{6277CA90-7DB6-4392-A5BC-07F749C3E42B}"/>
+                <a16:creationId xmlns:a16="http://schemas.microsoft.com/office/drawing/2014/main" id="{62F3AEBA-1CCC-4097-85F1-80E74563DE6D}"/>
               </a:ext>
             </a:extLst>
           </p:cNvPr>
@@ -4591,7 +4591,7 @@
           <p:cNvPr id="86" name="">
             <a:extLst xmlns:a="http://schemas.openxmlformats.org/drawingml/2006/main">
               <a:ext uri="{FF2B5EF4-FFF2-40B4-BE49-F238E27FC236}">
-                <a16:creationId xmlns:a16="http://schemas.microsoft.com/office/drawing/2014/main" id="{6FDBA015-CE85-43B3-AF74-D9AE8974FAC3}"/>
+                <a16:creationId xmlns:a16="http://schemas.microsoft.com/office/drawing/2014/main" id="{6BF2850C-5CF3-4883-8EB0-737DD47F932C}"/>
               </a:ext>
             </a:extLst>
           </p:cNvPr>
@@ -4622,7 +4622,7 @@
           <p:cNvPr id="87" name="">
             <a:extLst xmlns:a="http://schemas.openxmlformats.org/drawingml/2006/main">
               <a:ext uri="{FF2B5EF4-FFF2-40B4-BE49-F238E27FC236}">
-                <a16:creationId xmlns:a16="http://schemas.microsoft.com/office/drawing/2014/main" id="{D44B6D8C-5987-4F10-820E-87001A1E09D4}"/>
+                <a16:creationId xmlns:a16="http://schemas.microsoft.com/office/drawing/2014/main" id="{7B1BEBD4-8893-417E-BF71-7C3EFEF70AD7}"/>
               </a:ext>
             </a:extLst>
           </p:cNvPr>
@@ -4653,7 +4653,7 @@
           <p:cNvPr id="88" name="">
             <a:extLst xmlns:a="http://schemas.openxmlformats.org/drawingml/2006/main">
               <a:ext uri="{FF2B5EF4-FFF2-40B4-BE49-F238E27FC236}">
-                <a16:creationId xmlns:a16="http://schemas.microsoft.com/office/drawing/2014/main" id="{5095BDFC-CE11-4A40-8363-0D374F6C7E41}"/>
+                <a16:creationId xmlns:a16="http://schemas.microsoft.com/office/drawing/2014/main" id="{04D0CF99-2F73-4835-B243-C44671DBE110}"/>
               </a:ext>
             </a:extLst>
           </p:cNvPr>
@@ -4698,7 +4698,7 @@
           <p:cNvPr id="89" name="">
             <a:extLst xmlns:a="http://schemas.openxmlformats.org/drawingml/2006/main">
               <a:ext uri="{FF2B5EF4-FFF2-40B4-BE49-F238E27FC236}">
-                <a16:creationId xmlns:a16="http://schemas.microsoft.com/office/drawing/2014/main" id="{A64F17BB-E439-4138-A8D3-FC515D95E6D2}"/>
+                <a16:creationId xmlns:a16="http://schemas.microsoft.com/office/drawing/2014/main" id="{07FCCBF3-2D19-41D5-A6A2-F8A894633DAC}"/>
               </a:ext>
             </a:extLst>
           </p:cNvPr>
@@ -4729,7 +4729,7 @@
           <p:cNvPr id="90" name="">
             <a:extLst xmlns:a="http://schemas.openxmlformats.org/drawingml/2006/main">
               <a:ext uri="{FF2B5EF4-FFF2-40B4-BE49-F238E27FC236}">
-                <a16:creationId xmlns:a16="http://schemas.microsoft.com/office/drawing/2014/main" id="{DAEDDCF5-626F-47C3-A0CD-3951210A48B0}"/>
+                <a16:creationId xmlns:a16="http://schemas.microsoft.com/office/drawing/2014/main" id="{11C4675A-2CE7-4DCA-8B01-7AE09F8AD487}"/>
               </a:ext>
             </a:extLst>
           </p:cNvPr>
@@ -4774,7 +4774,7 @@
           <p:cNvPr id="91" name="">
             <a:extLst xmlns:a="http://schemas.openxmlformats.org/drawingml/2006/main">
               <a:ext uri="{FF2B5EF4-FFF2-40B4-BE49-F238E27FC236}">
-                <a16:creationId xmlns:a16="http://schemas.microsoft.com/office/drawing/2014/main" id="{051DFF6E-FA70-4384-8FC3-93ED0E1D0F29}"/>
+                <a16:creationId xmlns:a16="http://schemas.microsoft.com/office/drawing/2014/main" id="{8C7110C6-005A-403E-BF48-531ED0E1E7DA}"/>
               </a:ext>
             </a:extLst>
           </p:cNvPr>
@@ -4819,7 +4819,7 @@
           <p:cNvPr id="92" name="">
             <a:extLst xmlns:a="http://schemas.openxmlformats.org/drawingml/2006/main">
               <a:ext uri="{FF2B5EF4-FFF2-40B4-BE49-F238E27FC236}">
-                <a16:creationId xmlns:a16="http://schemas.microsoft.com/office/drawing/2014/main" id="{DD9A19E6-62B9-4484-9BA3-CB5B4869E971}"/>
+                <a16:creationId xmlns:a16="http://schemas.microsoft.com/office/drawing/2014/main" id="{B90074D2-DD77-4562-85E9-481FD87651AF}"/>
               </a:ext>
             </a:extLst>
           </p:cNvPr>
@@ -4850,7 +4850,7 @@
           <p:cNvPr id="93" name="">
             <a:extLst xmlns:a="http://schemas.openxmlformats.org/drawingml/2006/main">
               <a:ext uri="{FF2B5EF4-FFF2-40B4-BE49-F238E27FC236}">
-                <a16:creationId xmlns:a16="http://schemas.microsoft.com/office/drawing/2014/main" id="{BD33EE6D-0545-4CAE-B992-7A8D6F3A915B}"/>
+                <a16:creationId xmlns:a16="http://schemas.microsoft.com/office/drawing/2014/main" id="{FF38F891-96BF-4035-AE05-7F03E41495E0}"/>
               </a:ext>
             </a:extLst>
           </p:cNvPr>
@@ -4895,7 +4895,7 @@
           <p:cNvPr id="94" name="">
             <a:extLst xmlns:a="http://schemas.openxmlformats.org/drawingml/2006/main">
               <a:ext uri="{FF2B5EF4-FFF2-40B4-BE49-F238E27FC236}">
-                <a16:creationId xmlns:a16="http://schemas.microsoft.com/office/drawing/2014/main" id="{CBDC86A8-3A92-4591-9413-62CF6ED9C966}"/>
+                <a16:creationId xmlns:a16="http://schemas.microsoft.com/office/drawing/2014/main" id="{47C1F486-0C3C-4734-9C18-3A6DDD8FE82A}"/>
               </a:ext>
             </a:extLst>
           </p:cNvPr>
@@ -4940,7 +4940,7 @@
           <p:cNvPr id="95" name="">
             <a:extLst xmlns:a="http://schemas.openxmlformats.org/drawingml/2006/main">
               <a:ext uri="{FF2B5EF4-FFF2-40B4-BE49-F238E27FC236}">
-                <a16:creationId xmlns:a16="http://schemas.microsoft.com/office/drawing/2014/main" id="{0906EE57-141C-4E07-A7AF-1605AD105B0F}"/>
+                <a16:creationId xmlns:a16="http://schemas.microsoft.com/office/drawing/2014/main" id="{18C84F5E-65AA-4659-A2F6-5C281A4B3610}"/>
               </a:ext>
             </a:extLst>
           </p:cNvPr>
@@ -4971,7 +4971,7 @@
           <p:cNvPr id="96" name="">
             <a:extLst xmlns:a="http://schemas.openxmlformats.org/drawingml/2006/main">
               <a:ext uri="{FF2B5EF4-FFF2-40B4-BE49-F238E27FC236}">
-                <a16:creationId xmlns:a16="http://schemas.microsoft.com/office/drawing/2014/main" id="{C8275E80-B5BA-47BA-B3FE-84A5B328CBD7}"/>
+                <a16:creationId xmlns:a16="http://schemas.microsoft.com/office/drawing/2014/main" id="{6E5E4D4B-7942-4493-8CD5-2904962BDD42}"/>
               </a:ext>
             </a:extLst>
           </p:cNvPr>
@@ -5016,7 +5016,7 @@
           <p:cNvPr id="97" name="">
             <a:extLst xmlns:a="http://schemas.openxmlformats.org/drawingml/2006/main">
               <a:ext uri="{FF2B5EF4-FFF2-40B4-BE49-F238E27FC236}">
-                <a16:creationId xmlns:a16="http://schemas.microsoft.com/office/drawing/2014/main" id="{FA5BCBDB-5E75-4897-83D0-319AE22AF2CB}"/>
+                <a16:creationId xmlns:a16="http://schemas.microsoft.com/office/drawing/2014/main" id="{2FBFD5A0-F56A-48AE-8B93-879FB916BBD2}"/>
               </a:ext>
             </a:extLst>
           </p:cNvPr>
@@ -5061,7 +5061,7 @@
           <p:cNvPr id="98" name="">
             <a:extLst xmlns:a="http://schemas.openxmlformats.org/drawingml/2006/main">
               <a:ext uri="{FF2B5EF4-FFF2-40B4-BE49-F238E27FC236}">
-                <a16:creationId xmlns:a16="http://schemas.microsoft.com/office/drawing/2014/main" id="{2895A76F-A4B9-48F9-84D8-8F449E5F45BC}"/>
+                <a16:creationId xmlns:a16="http://schemas.microsoft.com/office/drawing/2014/main" id="{6DE73196-0D69-487A-9D2C-9FB29A22EDE3}"/>
               </a:ext>
             </a:extLst>
           </p:cNvPr>
@@ -5092,7 +5092,7 @@
           <p:cNvPr id="99" name="">
             <a:extLst xmlns:a="http://schemas.openxmlformats.org/drawingml/2006/main">
               <a:ext uri="{FF2B5EF4-FFF2-40B4-BE49-F238E27FC236}">
-                <a16:creationId xmlns:a16="http://schemas.microsoft.com/office/drawing/2014/main" id="{FBB4C9D5-E7F7-4261-A534-9FEE304315EB}"/>
+                <a16:creationId xmlns:a16="http://schemas.microsoft.com/office/drawing/2014/main" id="{C66D65D6-17C0-4585-BEFF-38095D3F38A0}"/>
               </a:ext>
             </a:extLst>
           </p:cNvPr>
@@ -5137,7 +5137,7 @@
           <p:cNvPr id="100" name="">
             <a:extLst xmlns:a="http://schemas.openxmlformats.org/drawingml/2006/main">
               <a:ext uri="{FF2B5EF4-FFF2-40B4-BE49-F238E27FC236}">
-                <a16:creationId xmlns:a16="http://schemas.microsoft.com/office/drawing/2014/main" id="{D4C95FF3-CC99-4716-A72A-CC41110B6289}"/>
+                <a16:creationId xmlns:a16="http://schemas.microsoft.com/office/drawing/2014/main" id="{78C91131-5EDD-43A7-9AEC-8AC530601F40}"/>
               </a:ext>
             </a:extLst>
           </p:cNvPr>
@@ -5182,7 +5182,7 @@
           <p:cNvPr id="101" name="">
             <a:extLst xmlns:a="http://schemas.openxmlformats.org/drawingml/2006/main">
               <a:ext uri="{FF2B5EF4-FFF2-40B4-BE49-F238E27FC236}">
-                <a16:creationId xmlns:a16="http://schemas.microsoft.com/office/drawing/2014/main" id="{B76B743B-8716-42FF-8D92-F40A799B0F23}"/>
+                <a16:creationId xmlns:a16="http://schemas.microsoft.com/office/drawing/2014/main" id="{58A68CA6-6031-4979-90F1-8A6D59EA14D9}"/>
               </a:ext>
             </a:extLst>
           </p:cNvPr>
@@ -5227,7 +5227,7 @@
           <p:cNvPr id="102" name="">
             <a:extLst xmlns:a="http://schemas.openxmlformats.org/drawingml/2006/main">
               <a:ext uri="{FF2B5EF4-FFF2-40B4-BE49-F238E27FC236}">
-                <a16:creationId xmlns:a16="http://schemas.microsoft.com/office/drawing/2014/main" id="{C1797D0A-821B-4E30-A966-B0F2A2282629}"/>
+                <a16:creationId xmlns:a16="http://schemas.microsoft.com/office/drawing/2014/main" id="{44106120-15E6-4AC6-BB0D-C672D215F52A}"/>
               </a:ext>
             </a:extLst>
           </p:cNvPr>
@@ -5258,7 +5258,7 @@
           <p:cNvPr id="103" name="">
             <a:extLst xmlns:a="http://schemas.openxmlformats.org/drawingml/2006/main">
               <a:ext uri="{FF2B5EF4-FFF2-40B4-BE49-F238E27FC236}">
-                <a16:creationId xmlns:a16="http://schemas.microsoft.com/office/drawing/2014/main" id="{CC8F932F-7599-4B5E-8ED9-662B50A9C95E}"/>
+                <a16:creationId xmlns:a16="http://schemas.microsoft.com/office/drawing/2014/main" id="{252958A2-3A63-467A-A671-EE22B40CEB9A}"/>
               </a:ext>
             </a:extLst>
           </p:cNvPr>
@@ -5303,7 +5303,7 @@
           <p:cNvPr id="104" name="">
             <a:extLst xmlns:a="http://schemas.openxmlformats.org/drawingml/2006/main">
               <a:ext uri="{FF2B5EF4-FFF2-40B4-BE49-F238E27FC236}">
-                <a16:creationId xmlns:a16="http://schemas.microsoft.com/office/drawing/2014/main" id="{8A13EBC7-B333-4D39-992F-7D6E9B92D964}"/>
+                <a16:creationId xmlns:a16="http://schemas.microsoft.com/office/drawing/2014/main" id="{9110525A-D16D-47A7-A08D-09A3E99AEF7C}"/>
               </a:ext>
             </a:extLst>
           </p:cNvPr>
@@ -5346,7 +5346,7 @@
     </p:spTree>
     <p:extLst>
       <p:ext uri="{BB962C8B-B14F-4D97-AF65-F5344CB8AC3E}">
-        <p14:creationId xmlns:p14="http://schemas.microsoft.com/office/powerpoint/2010/main" val="2067732673"/>
+        <p14:creationId xmlns:p14="http://schemas.microsoft.com/office/powerpoint/2010/main" val="1584118352"/>
       </p:ext>
     </p:extLst>
   </p:cSld>
@@ -5370,7 +5370,7 @@
           <p:cNvPr id="50" name="">
             <a:extLst xmlns:a="http://schemas.openxmlformats.org/drawingml/2006/main">
               <a:ext uri="{FF2B5EF4-FFF2-40B4-BE49-F238E27FC236}">
-                <a16:creationId xmlns:a16="http://schemas.microsoft.com/office/drawing/2014/main" id="{53CF88C2-D3B7-4AD3-AC35-C687C8E0B865}"/>
+                <a16:creationId xmlns:a16="http://schemas.microsoft.com/office/drawing/2014/main" id="{0C782DBB-28A2-49A2-A912-59A23C4A2F65}"/>
               </a:ext>
             </a:extLst>
           </p:cNvPr>
@@ -5401,7 +5401,7 @@
           <p:cNvPr id="2" name="">
             <a:extLst xmlns:a="http://schemas.openxmlformats.org/drawingml/2006/main">
               <a:ext uri="{FF2B5EF4-FFF2-40B4-BE49-F238E27FC236}">
-                <a16:creationId xmlns:a16="http://schemas.microsoft.com/office/drawing/2014/main" id="{9606B5CD-5AF6-46A2-8360-4B98E001A201}"/>
+                <a16:creationId xmlns:a16="http://schemas.microsoft.com/office/drawing/2014/main" id="{A8C0AA26-3A2B-44B6-9643-D5998804D8E2}"/>
               </a:ext>
             </a:extLst>
           </p:cNvPr>
@@ -5446,7 +5446,7 @@
           <p:cNvPr id="3" name="">
             <a:extLst xmlns:a="http://schemas.openxmlformats.org/drawingml/2006/main">
               <a:ext uri="{FF2B5EF4-FFF2-40B4-BE49-F238E27FC236}">
-                <a16:creationId xmlns:a16="http://schemas.microsoft.com/office/drawing/2014/main" id="{CE82DE01-2B15-4A9D-AC31-7F16AF80DFCC}"/>
+                <a16:creationId xmlns:a16="http://schemas.microsoft.com/office/drawing/2014/main" id="{70453A0E-9E8F-44F3-998B-0FF6B47BDF86}"/>
               </a:ext>
             </a:extLst>
           </p:cNvPr>
@@ -5491,7 +5491,7 @@
           <p:cNvPr id="4" name="">
             <a:extLst xmlns:a="http://schemas.openxmlformats.org/drawingml/2006/main">
               <a:ext uri="{FF2B5EF4-FFF2-40B4-BE49-F238E27FC236}">
-                <a16:creationId xmlns:a16="http://schemas.microsoft.com/office/drawing/2014/main" id="{6ACE7E8E-6AC0-45CE-807C-E6B727C9F9DA}"/>
+                <a16:creationId xmlns:a16="http://schemas.microsoft.com/office/drawing/2014/main" id="{4A83B5EA-8A25-445B-959C-DEBC0561779C}"/>
               </a:ext>
             </a:extLst>
           </p:cNvPr>
@@ -5536,7 +5536,7 @@
           <p:cNvPr id="5" name="">
             <a:extLst xmlns:a="http://schemas.openxmlformats.org/drawingml/2006/main">
               <a:ext uri="{FF2B5EF4-FFF2-40B4-BE49-F238E27FC236}">
-                <a16:creationId xmlns:a16="http://schemas.microsoft.com/office/drawing/2014/main" id="{BA0005B5-AA79-4D83-829D-3B92FD945478}"/>
+                <a16:creationId xmlns:a16="http://schemas.microsoft.com/office/drawing/2014/main" id="{000C571E-AC8F-4152-87F9-9FAC647E2269}"/>
               </a:ext>
             </a:extLst>
           </p:cNvPr>
@@ -5567,7 +5567,7 @@
           <p:cNvPr id="6" name="">
             <a:extLst xmlns:a="http://schemas.openxmlformats.org/drawingml/2006/main">
               <a:ext uri="{FF2B5EF4-FFF2-40B4-BE49-F238E27FC236}">
-                <a16:creationId xmlns:a16="http://schemas.microsoft.com/office/drawing/2014/main" id="{9F718B24-0DD1-452F-A55D-2DFB41B097A8}"/>
+                <a16:creationId xmlns:a16="http://schemas.microsoft.com/office/drawing/2014/main" id="{29D313AE-6F5B-4F12-B489-B29F8F4A970B}"/>
               </a:ext>
             </a:extLst>
           </p:cNvPr>
@@ -5598,7 +5598,7 @@
           <p:cNvPr id="7" name="">
             <a:extLst xmlns:a="http://schemas.openxmlformats.org/drawingml/2006/main">
               <a:ext uri="{FF2B5EF4-FFF2-40B4-BE49-F238E27FC236}">
-                <a16:creationId xmlns:a16="http://schemas.microsoft.com/office/drawing/2014/main" id="{897C68A1-9DAC-4F28-937F-5BBDA11B8722}"/>
+                <a16:creationId xmlns:a16="http://schemas.microsoft.com/office/drawing/2014/main" id="{789B0E4F-8868-41DA-91CB-3D2621E5E1CE}"/>
               </a:ext>
             </a:extLst>
           </p:cNvPr>
@@ -5643,7 +5643,7 @@
           <p:cNvPr id="8" name="">
             <a:extLst xmlns:a="http://schemas.openxmlformats.org/drawingml/2006/main">
               <a:ext uri="{FF2B5EF4-FFF2-40B4-BE49-F238E27FC236}">
-                <a16:creationId xmlns:a16="http://schemas.microsoft.com/office/drawing/2014/main" id="{5B32F584-7682-4813-A5DC-BA28F664FA20}"/>
+                <a16:creationId xmlns:a16="http://schemas.microsoft.com/office/drawing/2014/main" id="{DFF9249D-8472-4245-8632-0B6B015B0F46}"/>
               </a:ext>
             </a:extLst>
           </p:cNvPr>
@@ -5688,7 +5688,7 @@
           <p:cNvPr id="9" name="">
             <a:extLst xmlns:a="http://schemas.openxmlformats.org/drawingml/2006/main">
               <a:ext uri="{FF2B5EF4-FFF2-40B4-BE49-F238E27FC236}">
-                <a16:creationId xmlns:a16="http://schemas.microsoft.com/office/drawing/2014/main" id="{9B14A9FC-77DB-4EB6-8DF9-FFDD4EC27792}"/>
+                <a16:creationId xmlns:a16="http://schemas.microsoft.com/office/drawing/2014/main" id="{8905FADE-ECBD-4427-9B25-441451D5A45A}"/>
               </a:ext>
             </a:extLst>
           </p:cNvPr>
@@ -5719,7 +5719,7 @@
           <p:cNvPr id="10" name="">
             <a:extLst xmlns:a="http://schemas.openxmlformats.org/drawingml/2006/main">
               <a:ext uri="{FF2B5EF4-FFF2-40B4-BE49-F238E27FC236}">
-                <a16:creationId xmlns:a16="http://schemas.microsoft.com/office/drawing/2014/main" id="{DECCDB6D-7513-4BE0-909A-9E921062F78B}"/>
+                <a16:creationId xmlns:a16="http://schemas.microsoft.com/office/drawing/2014/main" id="{6594BBE7-A624-4121-A7D0-C553EE97DCAF}"/>
               </a:ext>
             </a:extLst>
           </p:cNvPr>
@@ -5764,7 +5764,7 @@
           <p:cNvPr id="11" name="">
             <a:extLst xmlns:a="http://schemas.openxmlformats.org/drawingml/2006/main">
               <a:ext uri="{FF2B5EF4-FFF2-40B4-BE49-F238E27FC236}">
-                <a16:creationId xmlns:a16="http://schemas.microsoft.com/office/drawing/2014/main" id="{1F52D7A4-1708-4D5E-9E55-A3A865D8C589}"/>
+                <a16:creationId xmlns:a16="http://schemas.microsoft.com/office/drawing/2014/main" id="{20F55888-6C18-445B-86E0-30B654B5929D}"/>
               </a:ext>
             </a:extLst>
           </p:cNvPr>
@@ -5809,7 +5809,7 @@
           <p:cNvPr id="12" name="">
             <a:extLst xmlns:a="http://schemas.openxmlformats.org/drawingml/2006/main">
               <a:ext uri="{FF2B5EF4-FFF2-40B4-BE49-F238E27FC236}">
-                <a16:creationId xmlns:a16="http://schemas.microsoft.com/office/drawing/2014/main" id="{132CFDAC-0CAE-4DA5-9776-11C1F6E05638}"/>
+                <a16:creationId xmlns:a16="http://schemas.microsoft.com/office/drawing/2014/main" id="{5E9EEBCE-5855-450C-A97F-442A2C711EC3}"/>
               </a:ext>
             </a:extLst>
           </p:cNvPr>
@@ -5854,7 +5854,7 @@
           <p:cNvPr id="13" name="">
             <a:extLst xmlns:a="http://schemas.openxmlformats.org/drawingml/2006/main">
               <a:ext uri="{FF2B5EF4-FFF2-40B4-BE49-F238E27FC236}">
-                <a16:creationId xmlns:a16="http://schemas.microsoft.com/office/drawing/2014/main" id="{3BEC96DC-F1F2-430B-BBE7-C922DCBEE004}"/>
+                <a16:creationId xmlns:a16="http://schemas.microsoft.com/office/drawing/2014/main" id="{16E15A16-61C7-4A92-B690-8CE7800609E2}"/>
               </a:ext>
             </a:extLst>
           </p:cNvPr>
@@ -5887,7 +5887,7 @@
           <p:cNvPr id="14" name="">
             <a:extLst xmlns:a="http://schemas.openxmlformats.org/drawingml/2006/main">
               <a:ext uri="{FF2B5EF4-FFF2-40B4-BE49-F238E27FC236}">
-                <a16:creationId xmlns:a16="http://schemas.microsoft.com/office/drawing/2014/main" id="{DC4A47C6-38B2-49CB-B9F4-C5026C46955A}"/>
+                <a16:creationId xmlns:a16="http://schemas.microsoft.com/office/drawing/2014/main" id="{FB4F7E2C-1F3E-4BAE-8BBD-EFB47F1D79B5}"/>
               </a:ext>
             </a:extLst>
           </p:cNvPr>
@@ -5932,7 +5932,7 @@
           <p:cNvPr id="15" name="">
             <a:extLst xmlns:a="http://schemas.openxmlformats.org/drawingml/2006/main">
               <a:ext uri="{FF2B5EF4-FFF2-40B4-BE49-F238E27FC236}">
-                <a16:creationId xmlns:a16="http://schemas.microsoft.com/office/drawing/2014/main" id="{128DF462-FA78-4D48-BAA4-2E5E429FFE3C}"/>
+                <a16:creationId xmlns:a16="http://schemas.microsoft.com/office/drawing/2014/main" id="{30122F5E-6B70-4394-97B3-2F8F67EA2B6A}"/>
               </a:ext>
             </a:extLst>
           </p:cNvPr>
@@ -5977,7 +5977,7 @@
           <p:cNvPr id="16" name="">
             <a:extLst xmlns:a="http://schemas.openxmlformats.org/drawingml/2006/main">
               <a:ext uri="{FF2B5EF4-FFF2-40B4-BE49-F238E27FC236}">
-                <a16:creationId xmlns:a16="http://schemas.microsoft.com/office/drawing/2014/main" id="{296F16EA-51C8-4957-AAE0-91980E32752D}"/>
+                <a16:creationId xmlns:a16="http://schemas.microsoft.com/office/drawing/2014/main" id="{38FE0870-CEFE-4790-998E-EB6F80F34FDB}"/>
               </a:ext>
             </a:extLst>
           </p:cNvPr>
@@ -6022,7 +6022,7 @@
           <p:cNvPr id="17" name="">
             <a:extLst xmlns:a="http://schemas.openxmlformats.org/drawingml/2006/main">
               <a:ext uri="{FF2B5EF4-FFF2-40B4-BE49-F238E27FC236}">
-                <a16:creationId xmlns:a16="http://schemas.microsoft.com/office/drawing/2014/main" id="{9F59D4B4-3D69-4F05-BE90-E5D3B1CB05B7}"/>
+                <a16:creationId xmlns:a16="http://schemas.microsoft.com/office/drawing/2014/main" id="{022FB337-7F6B-417D-A0FD-BC9BC88060C1}"/>
               </a:ext>
             </a:extLst>
           </p:cNvPr>
@@ -6055,7 +6055,7 @@
           <p:cNvPr id="18" name="">
             <a:extLst xmlns:a="http://schemas.openxmlformats.org/drawingml/2006/main">
               <a:ext uri="{FF2B5EF4-FFF2-40B4-BE49-F238E27FC236}">
-                <a16:creationId xmlns:a16="http://schemas.microsoft.com/office/drawing/2014/main" id="{22D74E02-0EB7-42DE-ABD2-DF0CB1A44B74}"/>
+                <a16:creationId xmlns:a16="http://schemas.microsoft.com/office/drawing/2014/main" id="{473489B2-6982-45DD-AE12-724927BBB464}"/>
               </a:ext>
             </a:extLst>
           </p:cNvPr>
@@ -6100,7 +6100,7 @@
           <p:cNvPr id="19" name="">
             <a:extLst xmlns:a="http://schemas.openxmlformats.org/drawingml/2006/main">
               <a:ext uri="{FF2B5EF4-FFF2-40B4-BE49-F238E27FC236}">
-                <a16:creationId xmlns:a16="http://schemas.microsoft.com/office/drawing/2014/main" id="{4FD61261-CCC2-414F-83E5-747F67229554}"/>
+                <a16:creationId xmlns:a16="http://schemas.microsoft.com/office/drawing/2014/main" id="{4F4E5845-7252-4F52-A549-EC8E5DADAAE8}"/>
               </a:ext>
             </a:extLst>
           </p:cNvPr>
@@ -6145,7 +6145,7 @@
           <p:cNvPr id="20" name="">
             <a:extLst xmlns:a="http://schemas.openxmlformats.org/drawingml/2006/main">
               <a:ext uri="{FF2B5EF4-FFF2-40B4-BE49-F238E27FC236}">
-                <a16:creationId xmlns:a16="http://schemas.microsoft.com/office/drawing/2014/main" id="{D904A082-8BC5-4C7C-9323-B4A1013E0431}"/>
+                <a16:creationId xmlns:a16="http://schemas.microsoft.com/office/drawing/2014/main" id="{90334F0B-6017-470D-9086-3738C939E8F5}"/>
               </a:ext>
             </a:extLst>
           </p:cNvPr>
@@ -6190,7 +6190,7 @@
           <p:cNvPr id="21" name="">
             <a:extLst xmlns:a="http://schemas.openxmlformats.org/drawingml/2006/main">
               <a:ext uri="{FF2B5EF4-FFF2-40B4-BE49-F238E27FC236}">
-                <a16:creationId xmlns:a16="http://schemas.microsoft.com/office/drawing/2014/main" id="{24003F1D-642B-4AB5-A20C-495E941F3F9E}"/>
+                <a16:creationId xmlns:a16="http://schemas.microsoft.com/office/drawing/2014/main" id="{E106AFC2-7A4E-42AB-B753-9AD5B84266D9}"/>
               </a:ext>
             </a:extLst>
           </p:cNvPr>
@@ -6223,7 +6223,7 @@
           <p:cNvPr id="22" name="">
             <a:extLst xmlns:a="http://schemas.openxmlformats.org/drawingml/2006/main">
               <a:ext uri="{FF2B5EF4-FFF2-40B4-BE49-F238E27FC236}">
-                <a16:creationId xmlns:a16="http://schemas.microsoft.com/office/drawing/2014/main" id="{23A6C79C-445C-47DD-8584-C2BF1ACDD37C}"/>
+                <a16:creationId xmlns:a16="http://schemas.microsoft.com/office/drawing/2014/main" id="{DA057494-3EB6-433F-B9AB-3279E2194DD3}"/>
               </a:ext>
             </a:extLst>
           </p:cNvPr>
@@ -6268,7 +6268,7 @@
           <p:cNvPr id="23" name="">
             <a:extLst xmlns:a="http://schemas.openxmlformats.org/drawingml/2006/main">
               <a:ext uri="{FF2B5EF4-FFF2-40B4-BE49-F238E27FC236}">
-                <a16:creationId xmlns:a16="http://schemas.microsoft.com/office/drawing/2014/main" id="{E847FDDA-1A1A-4213-8D90-C809A7CDC299}"/>
+                <a16:creationId xmlns:a16="http://schemas.microsoft.com/office/drawing/2014/main" id="{9D570BCC-46FB-4694-8EDD-5C5E927E946F}"/>
               </a:ext>
             </a:extLst>
           </p:cNvPr>
@@ -6313,7 +6313,7 @@
           <p:cNvPr id="24" name="">
             <a:extLst xmlns:a="http://schemas.openxmlformats.org/drawingml/2006/main">
               <a:ext uri="{FF2B5EF4-FFF2-40B4-BE49-F238E27FC236}">
-                <a16:creationId xmlns:a16="http://schemas.microsoft.com/office/drawing/2014/main" id="{059AD715-051C-4C13-9334-6338363016F6}"/>
+                <a16:creationId xmlns:a16="http://schemas.microsoft.com/office/drawing/2014/main" id="{39D8FEE3-D2A7-43B7-B1B2-53D7046F9EB0}"/>
               </a:ext>
             </a:extLst>
           </p:cNvPr>
@@ -6358,7 +6358,7 @@
           <p:cNvPr id="25" name="">
             <a:extLst xmlns:a="http://schemas.openxmlformats.org/drawingml/2006/main">
               <a:ext uri="{FF2B5EF4-FFF2-40B4-BE49-F238E27FC236}">
-                <a16:creationId xmlns:a16="http://schemas.microsoft.com/office/drawing/2014/main" id="{ECEF2CB8-F39E-46FB-840B-4E410884DCD4}"/>
+                <a16:creationId xmlns:a16="http://schemas.microsoft.com/office/drawing/2014/main" id="{69EC5792-771D-42E4-A4EF-A5E7259DF934}"/>
               </a:ext>
             </a:extLst>
           </p:cNvPr>
@@ -6391,7 +6391,7 @@
           <p:cNvPr id="26" name="">
             <a:extLst xmlns:a="http://schemas.openxmlformats.org/drawingml/2006/main">
               <a:ext uri="{FF2B5EF4-FFF2-40B4-BE49-F238E27FC236}">
-                <a16:creationId xmlns:a16="http://schemas.microsoft.com/office/drawing/2014/main" id="{7BA4339B-525C-49E4-AA61-4BB049727E84}"/>
+                <a16:creationId xmlns:a16="http://schemas.microsoft.com/office/drawing/2014/main" id="{302677AE-591F-450D-8814-E87110B74158}"/>
               </a:ext>
             </a:extLst>
           </p:cNvPr>
@@ -6436,7 +6436,7 @@
           <p:cNvPr id="27" name="">
             <a:extLst xmlns:a="http://schemas.openxmlformats.org/drawingml/2006/main">
               <a:ext uri="{FF2B5EF4-FFF2-40B4-BE49-F238E27FC236}">
-                <a16:creationId xmlns:a16="http://schemas.microsoft.com/office/drawing/2014/main" id="{8D83298E-54A6-4BBE-8536-F52958CFB4A8}"/>
+                <a16:creationId xmlns:a16="http://schemas.microsoft.com/office/drawing/2014/main" id="{1CF6AFF5-0B10-4CD5-941F-671E1837C360}"/>
               </a:ext>
             </a:extLst>
           </p:cNvPr>
@@ -6481,7 +6481,7 @@
           <p:cNvPr id="28" name="">
             <a:extLst xmlns:a="http://schemas.openxmlformats.org/drawingml/2006/main">
               <a:ext uri="{FF2B5EF4-FFF2-40B4-BE49-F238E27FC236}">
-                <a16:creationId xmlns:a16="http://schemas.microsoft.com/office/drawing/2014/main" id="{19559906-360C-4867-85A0-4A7EF3F853BD}"/>
+                <a16:creationId xmlns:a16="http://schemas.microsoft.com/office/drawing/2014/main" id="{DB3648A1-AB5B-4035-A5C4-15D214D8FC7C}"/>
               </a:ext>
             </a:extLst>
           </p:cNvPr>
@@ -6526,7 +6526,7 @@
           <p:cNvPr id="29" name="">
             <a:extLst xmlns:a="http://schemas.openxmlformats.org/drawingml/2006/main">
               <a:ext uri="{FF2B5EF4-FFF2-40B4-BE49-F238E27FC236}">
-                <a16:creationId xmlns:a16="http://schemas.microsoft.com/office/drawing/2014/main" id="{6C5F90EA-130E-4E46-B869-936B559F3F34}"/>
+                <a16:creationId xmlns:a16="http://schemas.microsoft.com/office/drawing/2014/main" id="{DC8F3398-C4CB-4CDA-8811-5F20153C5B0A}"/>
               </a:ext>
             </a:extLst>
           </p:cNvPr>
@@ -6559,7 +6559,7 @@
           <p:cNvPr id="30" name="">
             <a:extLst xmlns:a="http://schemas.openxmlformats.org/drawingml/2006/main">
               <a:ext uri="{FF2B5EF4-FFF2-40B4-BE49-F238E27FC236}">
-                <a16:creationId xmlns:a16="http://schemas.microsoft.com/office/drawing/2014/main" id="{2161A324-2E26-4889-B778-C9B31792CDFA}"/>
+                <a16:creationId xmlns:a16="http://schemas.microsoft.com/office/drawing/2014/main" id="{5FB4C70C-9562-487B-B5C3-A96EECF14361}"/>
               </a:ext>
             </a:extLst>
           </p:cNvPr>
@@ -6604,7 +6604,7 @@
           <p:cNvPr id="31" name="">
             <a:extLst xmlns:a="http://schemas.openxmlformats.org/drawingml/2006/main">
               <a:ext uri="{FF2B5EF4-FFF2-40B4-BE49-F238E27FC236}">
-                <a16:creationId xmlns:a16="http://schemas.microsoft.com/office/drawing/2014/main" id="{C6889253-B3DD-4A4B-A43C-709FED59DC57}"/>
+                <a16:creationId xmlns:a16="http://schemas.microsoft.com/office/drawing/2014/main" id="{7A024A3F-9389-486C-A976-A31CD60E13B8}"/>
               </a:ext>
             </a:extLst>
           </p:cNvPr>
@@ -6649,7 +6649,7 @@
           <p:cNvPr id="32" name="">
             <a:extLst xmlns:a="http://schemas.openxmlformats.org/drawingml/2006/main">
               <a:ext uri="{FF2B5EF4-FFF2-40B4-BE49-F238E27FC236}">
-                <a16:creationId xmlns:a16="http://schemas.microsoft.com/office/drawing/2014/main" id="{B06A8B92-ADEC-4A3F-B40B-C0D988913A42}"/>
+                <a16:creationId xmlns:a16="http://schemas.microsoft.com/office/drawing/2014/main" id="{FB10995F-4A4E-49C8-A532-F55D45BF42D4}"/>
               </a:ext>
             </a:extLst>
           </p:cNvPr>
@@ -6694,7 +6694,7 @@
           <p:cNvPr id="33" name="">
             <a:extLst xmlns:a="http://schemas.openxmlformats.org/drawingml/2006/main">
               <a:ext uri="{FF2B5EF4-FFF2-40B4-BE49-F238E27FC236}">
-                <a16:creationId xmlns:a16="http://schemas.microsoft.com/office/drawing/2014/main" id="{3676682F-AAB0-41D7-9CCF-266A2B9D7209}"/>
+                <a16:creationId xmlns:a16="http://schemas.microsoft.com/office/drawing/2014/main" id="{76799550-15BC-4353-9AC2-BCC4CCC57407}"/>
               </a:ext>
             </a:extLst>
           </p:cNvPr>
@@ -6729,7 +6729,7 @@
           <p:cNvPr id="34" name="">
             <a:extLst xmlns:a="http://schemas.openxmlformats.org/drawingml/2006/main">
               <a:ext uri="{FF2B5EF4-FFF2-40B4-BE49-F238E27FC236}">
-                <a16:creationId xmlns:a16="http://schemas.microsoft.com/office/drawing/2014/main" id="{329F929C-F935-4380-9600-71E6A57A8A34}"/>
+                <a16:creationId xmlns:a16="http://schemas.microsoft.com/office/drawing/2014/main" id="{5406967A-69D7-4A78-8D13-D20D65E1203A}"/>
               </a:ext>
             </a:extLst>
           </p:cNvPr>
@@ -6774,7 +6774,7 @@
           <p:cNvPr id="35" name="">
             <a:extLst xmlns:a="http://schemas.openxmlformats.org/drawingml/2006/main">
               <a:ext uri="{FF2B5EF4-FFF2-40B4-BE49-F238E27FC236}">
-                <a16:creationId xmlns:a16="http://schemas.microsoft.com/office/drawing/2014/main" id="{DCBC17BE-B55F-4C8C-AA71-94E25046BE55}"/>
+                <a16:creationId xmlns:a16="http://schemas.microsoft.com/office/drawing/2014/main" id="{7C647CD0-DCC0-4AB6-B661-71A5D2F538C7}"/>
               </a:ext>
             </a:extLst>
           </p:cNvPr>
@@ -6819,7 +6819,7 @@
           <p:cNvPr id="36" name="">
             <a:extLst xmlns:a="http://schemas.openxmlformats.org/drawingml/2006/main">
               <a:ext uri="{FF2B5EF4-FFF2-40B4-BE49-F238E27FC236}">
-                <a16:creationId xmlns:a16="http://schemas.microsoft.com/office/drawing/2014/main" id="{34A10675-E835-4B6C-9885-ED79D0D513C9}"/>
+                <a16:creationId xmlns:a16="http://schemas.microsoft.com/office/drawing/2014/main" id="{8D1DE66A-911F-4579-B458-8EB3F93BBAC0}"/>
               </a:ext>
             </a:extLst>
           </p:cNvPr>
@@ -6864,7 +6864,7 @@
           <p:cNvPr id="37" name="">
             <a:extLst xmlns:a="http://schemas.openxmlformats.org/drawingml/2006/main">
               <a:ext uri="{FF2B5EF4-FFF2-40B4-BE49-F238E27FC236}">
-                <a16:creationId xmlns:a16="http://schemas.microsoft.com/office/drawing/2014/main" id="{0EBA8533-1D5B-4F21-AD6D-2122C7CBE575}"/>
+                <a16:creationId xmlns:a16="http://schemas.microsoft.com/office/drawing/2014/main" id="{199D80B4-2186-4B6E-A944-9D1EAA2F042C}"/>
               </a:ext>
             </a:extLst>
           </p:cNvPr>
@@ -6899,7 +6899,7 @@
           <p:cNvPr id="38" name="">
             <a:extLst xmlns:a="http://schemas.openxmlformats.org/drawingml/2006/main">
               <a:ext uri="{FF2B5EF4-FFF2-40B4-BE49-F238E27FC236}">
-                <a16:creationId xmlns:a16="http://schemas.microsoft.com/office/drawing/2014/main" id="{AC376D83-D9D1-4A73-8708-389A7714B2B4}"/>
+                <a16:creationId xmlns:a16="http://schemas.microsoft.com/office/drawing/2014/main" id="{C8E3B98A-75F1-4AD6-BE67-D4079D9C2A9E}"/>
               </a:ext>
             </a:extLst>
           </p:cNvPr>
@@ -6930,7 +6930,7 @@
           <p:cNvPr id="39" name="">
             <a:extLst xmlns:a="http://schemas.openxmlformats.org/drawingml/2006/main">
               <a:ext uri="{FF2B5EF4-FFF2-40B4-BE49-F238E27FC236}">
-                <a16:creationId xmlns:a16="http://schemas.microsoft.com/office/drawing/2014/main" id="{87593DC7-AA3B-43CC-877B-1F8692C6DD3B}"/>
+                <a16:creationId xmlns:a16="http://schemas.microsoft.com/office/drawing/2014/main" id="{2A415797-28A8-4366-A4C3-0BF8FF7D806F}"/>
               </a:ext>
             </a:extLst>
           </p:cNvPr>
@@ -6975,7 +6975,7 @@
           <p:cNvPr id="40" name="">
             <a:extLst xmlns:a="http://schemas.openxmlformats.org/drawingml/2006/main">
               <a:ext uri="{FF2B5EF4-FFF2-40B4-BE49-F238E27FC236}">
-                <a16:creationId xmlns:a16="http://schemas.microsoft.com/office/drawing/2014/main" id="{88EDFB62-BAC7-49BC-9B4A-994397AD0161}"/>
+                <a16:creationId xmlns:a16="http://schemas.microsoft.com/office/drawing/2014/main" id="{88274376-7723-4156-81A4-CAED3BFA0B41}"/>
               </a:ext>
             </a:extLst>
           </p:cNvPr>
@@ -7020,7 +7020,7 @@
           <p:cNvPr id="41" name="">
             <a:extLst xmlns:a="http://schemas.openxmlformats.org/drawingml/2006/main">
               <a:ext uri="{FF2B5EF4-FFF2-40B4-BE49-F238E27FC236}">
-                <a16:creationId xmlns:a16="http://schemas.microsoft.com/office/drawing/2014/main" id="{10B32452-48B3-4FFF-A1C6-E734E24A76A2}"/>
+                <a16:creationId xmlns:a16="http://schemas.microsoft.com/office/drawing/2014/main" id="{673374A6-8DA8-425B-A5AD-A1F86CB8EC60}"/>
               </a:ext>
             </a:extLst>
           </p:cNvPr>
@@ -7065,7 +7065,7 @@
           <p:cNvPr id="42" name="">
             <a:extLst xmlns:a="http://schemas.openxmlformats.org/drawingml/2006/main">
               <a:ext uri="{FF2B5EF4-FFF2-40B4-BE49-F238E27FC236}">
-                <a16:creationId xmlns:a16="http://schemas.microsoft.com/office/drawing/2014/main" id="{DA2F151F-F280-4CC6-9602-53E80E976FC6}"/>
+                <a16:creationId xmlns:a16="http://schemas.microsoft.com/office/drawing/2014/main" id="{6B5094C9-89C7-4FE8-8101-619BA1CE528B}"/>
               </a:ext>
             </a:extLst>
           </p:cNvPr>
@@ -7096,7 +7096,7 @@
           <p:cNvPr id="43" name="">
             <a:extLst xmlns:a="http://schemas.openxmlformats.org/drawingml/2006/main">
               <a:ext uri="{FF2B5EF4-FFF2-40B4-BE49-F238E27FC236}">
-                <a16:creationId xmlns:a16="http://schemas.microsoft.com/office/drawing/2014/main" id="{13D654C4-C70C-4AC3-A274-C8C63FF1C5C4}"/>
+                <a16:creationId xmlns:a16="http://schemas.microsoft.com/office/drawing/2014/main" id="{9E55958D-4B55-4EEB-B9DA-EA96E6A47657}"/>
               </a:ext>
             </a:extLst>
           </p:cNvPr>
@@ -7141,7 +7141,7 @@
           <p:cNvPr id="44" name="">
             <a:extLst xmlns:a="http://schemas.openxmlformats.org/drawingml/2006/main">
               <a:ext uri="{FF2B5EF4-FFF2-40B4-BE49-F238E27FC236}">
-                <a16:creationId xmlns:a16="http://schemas.microsoft.com/office/drawing/2014/main" id="{EE4AE010-7534-4C24-B451-00771B09FEFF}"/>
+                <a16:creationId xmlns:a16="http://schemas.microsoft.com/office/drawing/2014/main" id="{AF24C5FD-A7D0-4233-90D0-5EA36810DEFA}"/>
               </a:ext>
             </a:extLst>
           </p:cNvPr>
@@ -7172,7 +7172,7 @@
           <p:cNvPr id="45" name="">
             <a:extLst xmlns:a="http://schemas.openxmlformats.org/drawingml/2006/main">
               <a:ext uri="{FF2B5EF4-FFF2-40B4-BE49-F238E27FC236}">
-                <a16:creationId xmlns:a16="http://schemas.microsoft.com/office/drawing/2014/main" id="{CFD18813-9FBB-4271-A14A-B7996F156367}"/>
+                <a16:creationId xmlns:a16="http://schemas.microsoft.com/office/drawing/2014/main" id="{13BFC649-0997-43B9-98F0-2AEC2EFEFD09}"/>
               </a:ext>
             </a:extLst>
           </p:cNvPr>
@@ -7217,7 +7217,7 @@
           <p:cNvPr id="46" name="">
             <a:extLst xmlns:a="http://schemas.openxmlformats.org/drawingml/2006/main">
               <a:ext uri="{FF2B5EF4-FFF2-40B4-BE49-F238E27FC236}">
-                <a16:creationId xmlns:a16="http://schemas.microsoft.com/office/drawing/2014/main" id="{C224A543-376D-4E32-A23C-8F18A5F9AF47}"/>
+                <a16:creationId xmlns:a16="http://schemas.microsoft.com/office/drawing/2014/main" id="{841D892D-E6B8-46E9-8A52-2B8E7F861BC8}"/>
               </a:ext>
             </a:extLst>
           </p:cNvPr>
@@ -7248,7 +7248,7 @@
           <p:cNvPr id="47" name="">
             <a:extLst xmlns:a="http://schemas.openxmlformats.org/drawingml/2006/main">
               <a:ext uri="{FF2B5EF4-FFF2-40B4-BE49-F238E27FC236}">
-                <a16:creationId xmlns:a16="http://schemas.microsoft.com/office/drawing/2014/main" id="{6D9A20D9-C11F-45A8-B84E-F26448749919}"/>
+                <a16:creationId xmlns:a16="http://schemas.microsoft.com/office/drawing/2014/main" id="{B4C8B704-C378-4E97-9727-CC81BCEB922F}"/>
               </a:ext>
             </a:extLst>
           </p:cNvPr>
@@ -7293,7 +7293,7 @@
           <p:cNvPr id="48" name="">
             <a:extLst xmlns:a="http://schemas.openxmlformats.org/drawingml/2006/main">
               <a:ext uri="{FF2B5EF4-FFF2-40B4-BE49-F238E27FC236}">
-                <a16:creationId xmlns:a16="http://schemas.microsoft.com/office/drawing/2014/main" id="{DE3C8016-F5C3-4ACA-9F22-770F2874B0D1}"/>
+                <a16:creationId xmlns:a16="http://schemas.microsoft.com/office/drawing/2014/main" id="{08720B43-FDCA-4BE3-B739-7E7355A81C8E}"/>
               </a:ext>
             </a:extLst>
           </p:cNvPr>
@@ -7324,7 +7324,7 @@
           <p:cNvPr id="49" name="">
             <a:extLst xmlns:a="http://schemas.openxmlformats.org/drawingml/2006/main">
               <a:ext uri="{FF2B5EF4-FFF2-40B4-BE49-F238E27FC236}">
-                <a16:creationId xmlns:a16="http://schemas.microsoft.com/office/drawing/2014/main" id="{A6851AC6-9A43-4C4D-BFA4-4E87A18DDCBC}"/>
+                <a16:creationId xmlns:a16="http://schemas.microsoft.com/office/drawing/2014/main" id="{DF512C4C-33DE-4673-8FEA-B4CE671921B2}"/>
               </a:ext>
             </a:extLst>
           </p:cNvPr>
@@ -7367,7 +7367,7 @@
     </p:spTree>
     <p:extLst>
       <p:ext uri="{BB962C8B-B14F-4D97-AF65-F5344CB8AC3E}">
-        <p14:creationId xmlns:p14="http://schemas.microsoft.com/office/powerpoint/2010/main" val="353411741"/>
+        <p14:creationId xmlns:p14="http://schemas.microsoft.com/office/powerpoint/2010/main" val="1386078136"/>
       </p:ext>
     </p:extLst>
   </p:cSld>
@@ -7391,7 +7391,7 @@
           <p:cNvPr id="34" name="">
             <a:extLst xmlns:a="http://schemas.openxmlformats.org/drawingml/2006/main">
               <a:ext uri="{FF2B5EF4-FFF2-40B4-BE49-F238E27FC236}">
-                <a16:creationId xmlns:a16="http://schemas.microsoft.com/office/drawing/2014/main" id="{963E3D6E-C2CE-4621-B25B-4185BA353C4F}"/>
+                <a16:creationId xmlns:a16="http://schemas.microsoft.com/office/drawing/2014/main" id="{BFDDA644-C735-4DDA-9947-72DB6EE56560}"/>
               </a:ext>
             </a:extLst>
           </p:cNvPr>
@@ -7422,7 +7422,7 @@
           <p:cNvPr id="2" name="">
             <a:extLst xmlns:a="http://schemas.openxmlformats.org/drawingml/2006/main">
               <a:ext uri="{FF2B5EF4-FFF2-40B4-BE49-F238E27FC236}">
-                <a16:creationId xmlns:a16="http://schemas.microsoft.com/office/drawing/2014/main" id="{D1972983-6D44-4835-89B0-84B0F67D998B}"/>
+                <a16:creationId xmlns:a16="http://schemas.microsoft.com/office/drawing/2014/main" id="{7153A7B8-1A79-4FBF-8F45-A620E141D0AB}"/>
               </a:ext>
             </a:extLst>
           </p:cNvPr>
@@ -7467,7 +7467,7 @@
           <p:cNvPr id="3" name="">
             <a:extLst xmlns:a="http://schemas.openxmlformats.org/drawingml/2006/main">
               <a:ext uri="{FF2B5EF4-FFF2-40B4-BE49-F238E27FC236}">
-                <a16:creationId xmlns:a16="http://schemas.microsoft.com/office/drawing/2014/main" id="{57691EC3-1FD2-43CD-9615-44100763499E}"/>
+                <a16:creationId xmlns:a16="http://schemas.microsoft.com/office/drawing/2014/main" id="{60931979-2A27-4FB8-952E-81B7FED0B687}"/>
               </a:ext>
             </a:extLst>
           </p:cNvPr>
@@ -7512,7 +7512,7 @@
           <p:cNvPr id="4" name="">
             <a:extLst xmlns:a="http://schemas.openxmlformats.org/drawingml/2006/main">
               <a:ext uri="{FF2B5EF4-FFF2-40B4-BE49-F238E27FC236}">
-                <a16:creationId xmlns:a16="http://schemas.microsoft.com/office/drawing/2014/main" id="{89300475-C049-470E-AA6F-35D8FD8F80EA}"/>
+                <a16:creationId xmlns:a16="http://schemas.microsoft.com/office/drawing/2014/main" id="{6D418BFE-5521-4CC9-95A6-BE75583FCB7B}"/>
               </a:ext>
             </a:extLst>
           </p:cNvPr>
@@ -7557,7 +7557,7 @@
           <p:cNvPr id="5" name="">
             <a:extLst xmlns:a="http://schemas.openxmlformats.org/drawingml/2006/main">
               <a:ext uri="{FF2B5EF4-FFF2-40B4-BE49-F238E27FC236}">
-                <a16:creationId xmlns:a16="http://schemas.microsoft.com/office/drawing/2014/main" id="{96F3B005-F998-4098-B540-26438984AF50}"/>
+                <a16:creationId xmlns:a16="http://schemas.microsoft.com/office/drawing/2014/main" id="{D9B2872E-DF97-4D84-BB87-2B1EDAC3A474}"/>
               </a:ext>
             </a:extLst>
           </p:cNvPr>
@@ -7588,7 +7588,7 @@
           <p:cNvPr id="6" name="">
             <a:extLst xmlns:a="http://schemas.openxmlformats.org/drawingml/2006/main">
               <a:ext uri="{FF2B5EF4-FFF2-40B4-BE49-F238E27FC236}">
-                <a16:creationId xmlns:a16="http://schemas.microsoft.com/office/drawing/2014/main" id="{305C5F91-A513-4D5F-87B1-BB2EAE118DD5}"/>
+                <a16:creationId xmlns:a16="http://schemas.microsoft.com/office/drawing/2014/main" id="{8ED68D34-E224-4291-BD3D-8F9B92A5AB44}"/>
               </a:ext>
             </a:extLst>
           </p:cNvPr>
@@ -7619,7 +7619,7 @@
           <p:cNvPr id="7" name="">
             <a:extLst xmlns:a="http://schemas.openxmlformats.org/drawingml/2006/main">
               <a:ext uri="{FF2B5EF4-FFF2-40B4-BE49-F238E27FC236}">
-                <a16:creationId xmlns:a16="http://schemas.microsoft.com/office/drawing/2014/main" id="{84EDB210-CD67-4517-A7CE-2B4A4645267F}"/>
+                <a16:creationId xmlns:a16="http://schemas.microsoft.com/office/drawing/2014/main" id="{5D6D9B9A-31EE-484D-8B2A-6195B46A3F4B}"/>
               </a:ext>
             </a:extLst>
           </p:cNvPr>
@@ -7664,7 +7664,7 @@
           <p:cNvPr id="8" name="">
             <a:extLst xmlns:a="http://schemas.openxmlformats.org/drawingml/2006/main">
               <a:ext uri="{FF2B5EF4-FFF2-40B4-BE49-F238E27FC236}">
-                <a16:creationId xmlns:a16="http://schemas.microsoft.com/office/drawing/2014/main" id="{11294129-A6DF-4CE9-BA5D-9076561B66A9}"/>
+                <a16:creationId xmlns:a16="http://schemas.microsoft.com/office/drawing/2014/main" id="{7171B16B-7BCB-445F-9FD9-453E4DFAF27F}"/>
               </a:ext>
             </a:extLst>
           </p:cNvPr>
@@ -7709,7 +7709,7 @@
           <p:cNvPr id="9" name="">
             <a:extLst xmlns:a="http://schemas.openxmlformats.org/drawingml/2006/main">
               <a:ext uri="{FF2B5EF4-FFF2-40B4-BE49-F238E27FC236}">
-                <a16:creationId xmlns:a16="http://schemas.microsoft.com/office/drawing/2014/main" id="{4E6BC3BD-9163-4849-A06F-FD63FEBF42B4}"/>
+                <a16:creationId xmlns:a16="http://schemas.microsoft.com/office/drawing/2014/main" id="{097B2D8A-29E9-4DFB-94E4-1C14564C27B9}"/>
               </a:ext>
             </a:extLst>
           </p:cNvPr>
@@ -7744,7 +7744,7 @@
           <p:cNvPr id="10" name="">
             <a:extLst xmlns:a="http://schemas.openxmlformats.org/drawingml/2006/main">
               <a:ext uri="{FF2B5EF4-FFF2-40B4-BE49-F238E27FC236}">
-                <a16:creationId xmlns:a16="http://schemas.microsoft.com/office/drawing/2014/main" id="{D90F7425-34CC-4DEB-9AA7-409C35059E2D}"/>
+                <a16:creationId xmlns:a16="http://schemas.microsoft.com/office/drawing/2014/main" id="{F7365591-F571-48A4-937E-FD3C2D67CD77}"/>
               </a:ext>
             </a:extLst>
           </p:cNvPr>
@@ -7789,7 +7789,7 @@
           <p:cNvPr id="11" name="">
             <a:extLst xmlns:a="http://schemas.openxmlformats.org/drawingml/2006/main">
               <a:ext uri="{FF2B5EF4-FFF2-40B4-BE49-F238E27FC236}">
-                <a16:creationId xmlns:a16="http://schemas.microsoft.com/office/drawing/2014/main" id="{2377EA20-43FD-4930-9E9F-9F8023E56666}"/>
+                <a16:creationId xmlns:a16="http://schemas.microsoft.com/office/drawing/2014/main" id="{966A8342-33F9-45D9-A35D-739B565E57ED}"/>
               </a:ext>
             </a:extLst>
           </p:cNvPr>
@@ -7834,7 +7834,7 @@
           <p:cNvPr id="12" name="">
             <a:extLst xmlns:a="http://schemas.openxmlformats.org/drawingml/2006/main">
               <a:ext uri="{FF2B5EF4-FFF2-40B4-BE49-F238E27FC236}">
-                <a16:creationId xmlns:a16="http://schemas.microsoft.com/office/drawing/2014/main" id="{34B1DA34-7A26-4BDF-8434-9CA25A1D0B98}"/>
+                <a16:creationId xmlns:a16="http://schemas.microsoft.com/office/drawing/2014/main" id="{C2F0EF19-30F9-42AA-BF27-3FC7E8F78093}"/>
               </a:ext>
             </a:extLst>
           </p:cNvPr>
@@ -7879,7 +7879,7 @@
           <p:cNvPr id="13" name="">
             <a:extLst xmlns:a="http://schemas.openxmlformats.org/drawingml/2006/main">
               <a:ext uri="{FF2B5EF4-FFF2-40B4-BE49-F238E27FC236}">
-                <a16:creationId xmlns:a16="http://schemas.microsoft.com/office/drawing/2014/main" id="{6F65085F-BE91-4245-9689-6DF0FDC0ECEB}"/>
+                <a16:creationId xmlns:a16="http://schemas.microsoft.com/office/drawing/2014/main" id="{FC62A57B-5B2C-4E20-9B9E-BB5A52DC507F}"/>
               </a:ext>
             </a:extLst>
           </p:cNvPr>
@@ -7914,7 +7914,7 @@
           <p:cNvPr id="14" name="">
             <a:extLst xmlns:a="http://schemas.openxmlformats.org/drawingml/2006/main">
               <a:ext uri="{FF2B5EF4-FFF2-40B4-BE49-F238E27FC236}">
-                <a16:creationId xmlns:a16="http://schemas.microsoft.com/office/drawing/2014/main" id="{A45EEB03-5E11-4152-9AF7-C7B191D12214}"/>
+                <a16:creationId xmlns:a16="http://schemas.microsoft.com/office/drawing/2014/main" id="{AC65583D-7C5B-46E1-8069-D461F9471809}"/>
               </a:ext>
             </a:extLst>
           </p:cNvPr>
@@ -7959,7 +7959,7 @@
           <p:cNvPr id="15" name="">
             <a:extLst xmlns:a="http://schemas.openxmlformats.org/drawingml/2006/main">
               <a:ext uri="{FF2B5EF4-FFF2-40B4-BE49-F238E27FC236}">
-                <a16:creationId xmlns:a16="http://schemas.microsoft.com/office/drawing/2014/main" id="{5910E49E-B027-4E77-8115-422F60578493}"/>
+                <a16:creationId xmlns:a16="http://schemas.microsoft.com/office/drawing/2014/main" id="{742F9666-F93C-42CF-B258-DD3866FA3F32}"/>
               </a:ext>
             </a:extLst>
           </p:cNvPr>
@@ -8004,7 +8004,7 @@
           <p:cNvPr id="16" name="">
             <a:extLst xmlns:a="http://schemas.openxmlformats.org/drawingml/2006/main">
               <a:ext uri="{FF2B5EF4-FFF2-40B4-BE49-F238E27FC236}">
-                <a16:creationId xmlns:a16="http://schemas.microsoft.com/office/drawing/2014/main" id="{4F7F4919-F72D-48D5-B920-76BC67166B89}"/>
+                <a16:creationId xmlns:a16="http://schemas.microsoft.com/office/drawing/2014/main" id="{482D6701-9016-42C7-8448-531CD3751B12}"/>
               </a:ext>
             </a:extLst>
           </p:cNvPr>
@@ -8049,7 +8049,7 @@
           <p:cNvPr id="17" name="">
             <a:extLst xmlns:a="http://schemas.openxmlformats.org/drawingml/2006/main">
               <a:ext uri="{FF2B5EF4-FFF2-40B4-BE49-F238E27FC236}">
-                <a16:creationId xmlns:a16="http://schemas.microsoft.com/office/drawing/2014/main" id="{4FF301E0-DDB5-4904-A351-D30679DE1C33}"/>
+                <a16:creationId xmlns:a16="http://schemas.microsoft.com/office/drawing/2014/main" id="{C3040C35-2ACE-4264-9299-A43683B81315}"/>
               </a:ext>
             </a:extLst>
           </p:cNvPr>
@@ -8084,7 +8084,7 @@
           <p:cNvPr id="18" name="">
             <a:extLst xmlns:a="http://schemas.openxmlformats.org/drawingml/2006/main">
               <a:ext uri="{FF2B5EF4-FFF2-40B4-BE49-F238E27FC236}">
-                <a16:creationId xmlns:a16="http://schemas.microsoft.com/office/drawing/2014/main" id="{9C7B9247-ABB3-4D7E-81CC-0588F6B8191F}"/>
+                <a16:creationId xmlns:a16="http://schemas.microsoft.com/office/drawing/2014/main" id="{82AEFC05-C047-4684-8E1F-2D33D6F9690D}"/>
               </a:ext>
             </a:extLst>
           </p:cNvPr>
@@ -8129,7 +8129,7 @@
           <p:cNvPr id="19" name="">
             <a:extLst xmlns:a="http://schemas.openxmlformats.org/drawingml/2006/main">
               <a:ext uri="{FF2B5EF4-FFF2-40B4-BE49-F238E27FC236}">
-                <a16:creationId xmlns:a16="http://schemas.microsoft.com/office/drawing/2014/main" id="{4BFB5265-265E-422B-808F-AE37429172EA}"/>
+                <a16:creationId xmlns:a16="http://schemas.microsoft.com/office/drawing/2014/main" id="{303878FA-B3B9-45F7-8070-75980E836D0F}"/>
               </a:ext>
             </a:extLst>
           </p:cNvPr>
@@ -8174,7 +8174,7 @@
           <p:cNvPr id="20" name="">
             <a:extLst xmlns:a="http://schemas.openxmlformats.org/drawingml/2006/main">
               <a:ext uri="{FF2B5EF4-FFF2-40B4-BE49-F238E27FC236}">
-                <a16:creationId xmlns:a16="http://schemas.microsoft.com/office/drawing/2014/main" id="{6DCD6EA2-002C-4877-BDE4-EF072610AC77}"/>
+                <a16:creationId xmlns:a16="http://schemas.microsoft.com/office/drawing/2014/main" id="{B2153AD0-2236-40F0-AA49-D94FB5ECD4D0}"/>
               </a:ext>
             </a:extLst>
           </p:cNvPr>
@@ -8219,7 +8219,7 @@
           <p:cNvPr id="21" name="">
             <a:extLst xmlns:a="http://schemas.openxmlformats.org/drawingml/2006/main">
               <a:ext uri="{FF2B5EF4-FFF2-40B4-BE49-F238E27FC236}">
-                <a16:creationId xmlns:a16="http://schemas.microsoft.com/office/drawing/2014/main" id="{21307849-6340-4277-A58E-80477414E166}"/>
+                <a16:creationId xmlns:a16="http://schemas.microsoft.com/office/drawing/2014/main" id="{A934F65D-EF03-4E16-AC59-67D881F5139E}"/>
               </a:ext>
             </a:extLst>
           </p:cNvPr>
@@ -8254,7 +8254,7 @@
           <p:cNvPr id="22" name="">
             <a:extLst xmlns:a="http://schemas.openxmlformats.org/drawingml/2006/main">
               <a:ext uri="{FF2B5EF4-FFF2-40B4-BE49-F238E27FC236}">
-                <a16:creationId xmlns:a16="http://schemas.microsoft.com/office/drawing/2014/main" id="{690ED1C5-F74B-4680-B25F-FE55A6433707}"/>
+                <a16:creationId xmlns:a16="http://schemas.microsoft.com/office/drawing/2014/main" id="{55AFF66D-6045-4F4E-81E4-3780F90D0A03}"/>
               </a:ext>
             </a:extLst>
           </p:cNvPr>
@@ -8299,7 +8299,7 @@
           <p:cNvPr id="23" name="">
             <a:extLst xmlns:a="http://schemas.openxmlformats.org/drawingml/2006/main">
               <a:ext uri="{FF2B5EF4-FFF2-40B4-BE49-F238E27FC236}">
-                <a16:creationId xmlns:a16="http://schemas.microsoft.com/office/drawing/2014/main" id="{5BE34F5C-59D3-4295-895B-CE8F68CC081B}"/>
+                <a16:creationId xmlns:a16="http://schemas.microsoft.com/office/drawing/2014/main" id="{517F81FA-BBF2-44C0-96D3-8F06B4ADB89A}"/>
               </a:ext>
             </a:extLst>
           </p:cNvPr>
@@ -8344,7 +8344,7 @@
           <p:cNvPr id="24" name="">
             <a:extLst xmlns:a="http://schemas.openxmlformats.org/drawingml/2006/main">
               <a:ext uri="{FF2B5EF4-FFF2-40B4-BE49-F238E27FC236}">
-                <a16:creationId xmlns:a16="http://schemas.microsoft.com/office/drawing/2014/main" id="{62539892-4186-49D6-B6D2-E7AC4D27B98C}"/>
+                <a16:creationId xmlns:a16="http://schemas.microsoft.com/office/drawing/2014/main" id="{0826B0C4-6B72-47BE-857D-402DC8F0F304}"/>
               </a:ext>
             </a:extLst>
           </p:cNvPr>
@@ -8389,7 +8389,7 @@
           <p:cNvPr id="25" name="">
             <a:extLst xmlns:a="http://schemas.openxmlformats.org/drawingml/2006/main">
               <a:ext uri="{FF2B5EF4-FFF2-40B4-BE49-F238E27FC236}">
-                <a16:creationId xmlns:a16="http://schemas.microsoft.com/office/drawing/2014/main" id="{727E5E8F-FA01-46E9-8FD5-ACBDFEFD61E5}"/>
+                <a16:creationId xmlns:a16="http://schemas.microsoft.com/office/drawing/2014/main" id="{40682649-64CF-4FA1-ACB3-38D9888AFA53}"/>
               </a:ext>
             </a:extLst>
           </p:cNvPr>
@@ -8424,7 +8424,7 @@
           <p:cNvPr id="26" name="">
             <a:extLst xmlns:a="http://schemas.openxmlformats.org/drawingml/2006/main">
               <a:ext uri="{FF2B5EF4-FFF2-40B4-BE49-F238E27FC236}">
-                <a16:creationId xmlns:a16="http://schemas.microsoft.com/office/drawing/2014/main" id="{6BC369A0-8436-475E-BDBC-83AA9B2BC75D}"/>
+                <a16:creationId xmlns:a16="http://schemas.microsoft.com/office/drawing/2014/main" id="{C82EC3B1-4F2B-475C-8D0C-285EACFA440A}"/>
               </a:ext>
             </a:extLst>
           </p:cNvPr>
@@ -8455,7 +8455,7 @@
           <p:cNvPr id="27" name="">
             <a:extLst xmlns:a="http://schemas.openxmlformats.org/drawingml/2006/main">
               <a:ext uri="{FF2B5EF4-FFF2-40B4-BE49-F238E27FC236}">
-                <a16:creationId xmlns:a16="http://schemas.microsoft.com/office/drawing/2014/main" id="{A0EF974B-CE3F-4DA1-BC2D-108781E66BE6}"/>
+                <a16:creationId xmlns:a16="http://schemas.microsoft.com/office/drawing/2014/main" id="{AE351C2D-60E8-473C-BC83-EF5A289B671E}"/>
               </a:ext>
             </a:extLst>
           </p:cNvPr>
@@ -8500,7 +8500,7 @@
           <p:cNvPr id="28" name="">
             <a:extLst xmlns:a="http://schemas.openxmlformats.org/drawingml/2006/main">
               <a:ext uri="{FF2B5EF4-FFF2-40B4-BE49-F238E27FC236}">
-                <a16:creationId xmlns:a16="http://schemas.microsoft.com/office/drawing/2014/main" id="{F6A7028B-8D60-45E7-AD88-74E8A0E462BB}"/>
+                <a16:creationId xmlns:a16="http://schemas.microsoft.com/office/drawing/2014/main" id="{094D936D-6295-458E-8528-CD22E00CC4BD}"/>
               </a:ext>
             </a:extLst>
           </p:cNvPr>
@@ -8545,7 +8545,7 @@
           <p:cNvPr id="29" name="">
             <a:extLst xmlns:a="http://schemas.openxmlformats.org/drawingml/2006/main">
               <a:ext uri="{FF2B5EF4-FFF2-40B4-BE49-F238E27FC236}">
-                <a16:creationId xmlns:a16="http://schemas.microsoft.com/office/drawing/2014/main" id="{7D6A4804-71B1-40BC-85BD-BD016EEFCF4E}"/>
+                <a16:creationId xmlns:a16="http://schemas.microsoft.com/office/drawing/2014/main" id="{1AD3672D-0AFB-44F4-83CE-C6632AF57CE8}"/>
               </a:ext>
             </a:extLst>
           </p:cNvPr>
@@ -8580,7 +8580,7 @@
           <p:cNvPr id="30" name="">
             <a:extLst xmlns:a="http://schemas.openxmlformats.org/drawingml/2006/main">
               <a:ext uri="{FF2B5EF4-FFF2-40B4-BE49-F238E27FC236}">
-                <a16:creationId xmlns:a16="http://schemas.microsoft.com/office/drawing/2014/main" id="{67D1D975-703B-43F0-A53B-D852C854A32B}"/>
+                <a16:creationId xmlns:a16="http://schemas.microsoft.com/office/drawing/2014/main" id="{C8A86D14-5012-4E0D-B4AD-3CCBFC18A370}"/>
               </a:ext>
             </a:extLst>
           </p:cNvPr>
@@ -8611,7 +8611,7 @@
           <p:cNvPr id="31" name="">
             <a:extLst xmlns:a="http://schemas.openxmlformats.org/drawingml/2006/main">
               <a:ext uri="{FF2B5EF4-FFF2-40B4-BE49-F238E27FC236}">
-                <a16:creationId xmlns:a16="http://schemas.microsoft.com/office/drawing/2014/main" id="{1E9AE270-1403-46EF-8273-47FA22553E0F}"/>
+                <a16:creationId xmlns:a16="http://schemas.microsoft.com/office/drawing/2014/main" id="{D5923A8C-F524-4222-BCAC-BB8C117D657E}"/>
               </a:ext>
             </a:extLst>
           </p:cNvPr>
@@ -8656,7 +8656,7 @@
           <p:cNvPr id="32" name="">
             <a:extLst xmlns:a="http://schemas.openxmlformats.org/drawingml/2006/main">
               <a:ext uri="{FF2B5EF4-FFF2-40B4-BE49-F238E27FC236}">
-                <a16:creationId xmlns:a16="http://schemas.microsoft.com/office/drawing/2014/main" id="{D43E6219-1521-4518-BC72-24AB5384ED8C}"/>
+                <a16:creationId xmlns:a16="http://schemas.microsoft.com/office/drawing/2014/main" id="{FAF1369F-773D-4B30-82DA-58AF7FA5A482}"/>
               </a:ext>
             </a:extLst>
           </p:cNvPr>
@@ -8701,7 +8701,7 @@
           <p:cNvPr id="33" name="">
             <a:extLst xmlns:a="http://schemas.openxmlformats.org/drawingml/2006/main">
               <a:ext uri="{FF2B5EF4-FFF2-40B4-BE49-F238E27FC236}">
-                <a16:creationId xmlns:a16="http://schemas.microsoft.com/office/drawing/2014/main" id="{2F4578CD-C119-41C2-AC98-D2B3FFEEE24B}"/>
+                <a16:creationId xmlns:a16="http://schemas.microsoft.com/office/drawing/2014/main" id="{B710E8EB-26F7-4023-A449-EF8645C6E013}"/>
               </a:ext>
             </a:extLst>
           </p:cNvPr>
@@ -8744,7 +8744,7 @@
     </p:spTree>
     <p:extLst>
       <p:ext uri="{BB962C8B-B14F-4D97-AF65-F5344CB8AC3E}">
-        <p14:creationId xmlns:p14="http://schemas.microsoft.com/office/powerpoint/2010/main" val="1988588398"/>
+        <p14:creationId xmlns:p14="http://schemas.microsoft.com/office/powerpoint/2010/main" val="247216123"/>
       </p:ext>
     </p:extLst>
   </p:cSld>
@@ -8768,7 +8768,7 @@
           <p:cNvPr id="54" name="">
             <a:extLst xmlns:a="http://schemas.openxmlformats.org/drawingml/2006/main">
               <a:ext uri="{FF2B5EF4-FFF2-40B4-BE49-F238E27FC236}">
-                <a16:creationId xmlns:a16="http://schemas.microsoft.com/office/drawing/2014/main" id="{7CED06A3-2AF9-4DA2-8C98-A17601F563D0}"/>
+                <a16:creationId xmlns:a16="http://schemas.microsoft.com/office/drawing/2014/main" id="{BE43A95D-F1E5-4A96-8245-3BEDD7093495}"/>
               </a:ext>
             </a:extLst>
           </p:cNvPr>
@@ -8799,7 +8799,7 @@
           <p:cNvPr id="2" name="">
             <a:extLst xmlns:a="http://schemas.openxmlformats.org/drawingml/2006/main">
               <a:ext uri="{FF2B5EF4-FFF2-40B4-BE49-F238E27FC236}">
-                <a16:creationId xmlns:a16="http://schemas.microsoft.com/office/drawing/2014/main" id="{2D51A1BE-D2AF-44A8-B07D-5FA6B5EF9598}"/>
+                <a16:creationId xmlns:a16="http://schemas.microsoft.com/office/drawing/2014/main" id="{33EFEE41-15D6-47CB-A438-B8A19B30D486}"/>
               </a:ext>
             </a:extLst>
           </p:cNvPr>
@@ -8844,7 +8844,7 @@
           <p:cNvPr id="3" name="">
             <a:extLst xmlns:a="http://schemas.openxmlformats.org/drawingml/2006/main">
               <a:ext uri="{FF2B5EF4-FFF2-40B4-BE49-F238E27FC236}">
-                <a16:creationId xmlns:a16="http://schemas.microsoft.com/office/drawing/2014/main" id="{459A877F-E07C-4035-AE4E-8FC38DEE703D}"/>
+                <a16:creationId xmlns:a16="http://schemas.microsoft.com/office/drawing/2014/main" id="{8854B231-06F0-440A-B041-AF241D972D37}"/>
               </a:ext>
             </a:extLst>
           </p:cNvPr>
@@ -8889,7 +8889,7 @@
           <p:cNvPr id="4" name="">
             <a:extLst xmlns:a="http://schemas.openxmlformats.org/drawingml/2006/main">
               <a:ext uri="{FF2B5EF4-FFF2-40B4-BE49-F238E27FC236}">
-                <a16:creationId xmlns:a16="http://schemas.microsoft.com/office/drawing/2014/main" id="{C9205D00-C122-4BE5-BF2C-9F6B9C9DF20B}"/>
+                <a16:creationId xmlns:a16="http://schemas.microsoft.com/office/drawing/2014/main" id="{D2DA2B35-9C65-434C-B4DD-D65AF1E558B5}"/>
               </a:ext>
             </a:extLst>
           </p:cNvPr>
@@ -8934,7 +8934,7 @@
           <p:cNvPr id="5" name="">
             <a:extLst xmlns:a="http://schemas.openxmlformats.org/drawingml/2006/main">
               <a:ext uri="{FF2B5EF4-FFF2-40B4-BE49-F238E27FC236}">
-                <a16:creationId xmlns:a16="http://schemas.microsoft.com/office/drawing/2014/main" id="{3C50E855-0407-4B21-AC10-1247E2A31A42}"/>
+                <a16:creationId xmlns:a16="http://schemas.microsoft.com/office/drawing/2014/main" id="{53CF6966-97E3-4D3A-8946-3CAD322AE0B8}"/>
               </a:ext>
             </a:extLst>
           </p:cNvPr>
@@ -8965,7 +8965,7 @@
           <p:cNvPr id="6" name="">
             <a:extLst xmlns:a="http://schemas.openxmlformats.org/drawingml/2006/main">
               <a:ext uri="{FF2B5EF4-FFF2-40B4-BE49-F238E27FC236}">
-                <a16:creationId xmlns:a16="http://schemas.microsoft.com/office/drawing/2014/main" id="{6C513731-C7C7-4CBB-AFD9-89EC093A0D09}"/>
+                <a16:creationId xmlns:a16="http://schemas.microsoft.com/office/drawing/2014/main" id="{9124A68A-3C42-4980-8AD5-C29340DD50E1}"/>
               </a:ext>
             </a:extLst>
           </p:cNvPr>
@@ -8996,7 +8996,7 @@
           <p:cNvPr id="7" name="">
             <a:extLst xmlns:a="http://schemas.openxmlformats.org/drawingml/2006/main">
               <a:ext uri="{FF2B5EF4-FFF2-40B4-BE49-F238E27FC236}">
-                <a16:creationId xmlns:a16="http://schemas.microsoft.com/office/drawing/2014/main" id="{F64EE48F-F810-4158-BD1D-5B346F9536CD}"/>
+                <a16:creationId xmlns:a16="http://schemas.microsoft.com/office/drawing/2014/main" id="{985F62FC-7542-4C42-816F-5B4D58F21907}"/>
               </a:ext>
             </a:extLst>
           </p:cNvPr>
@@ -9041,7 +9041,7 @@
           <p:cNvPr id="8" name="">
             <a:extLst xmlns:a="http://schemas.openxmlformats.org/drawingml/2006/main">
               <a:ext uri="{FF2B5EF4-FFF2-40B4-BE49-F238E27FC236}">
-                <a16:creationId xmlns:a16="http://schemas.microsoft.com/office/drawing/2014/main" id="{441F29DD-EA88-44F1-BDF7-0EA4DF092DF4}"/>
+                <a16:creationId xmlns:a16="http://schemas.microsoft.com/office/drawing/2014/main" id="{692164B3-33AC-4A1D-A25E-768D867ABD80}"/>
               </a:ext>
             </a:extLst>
           </p:cNvPr>
@@ -9086,7 +9086,7 @@
           <p:cNvPr id="9" name="">
             <a:extLst xmlns:a="http://schemas.openxmlformats.org/drawingml/2006/main">
               <a:ext uri="{FF2B5EF4-FFF2-40B4-BE49-F238E27FC236}">
-                <a16:creationId xmlns:a16="http://schemas.microsoft.com/office/drawing/2014/main" id="{86CC3C8E-4E36-46B4-9598-472D6F28B816}"/>
+                <a16:creationId xmlns:a16="http://schemas.microsoft.com/office/drawing/2014/main" id="{3FC31ADB-AFB8-431D-A03E-71895C79D019}"/>
               </a:ext>
             </a:extLst>
           </p:cNvPr>
@@ -9121,7 +9121,7 @@
           <p:cNvPr id="10" name="">
             <a:extLst xmlns:a="http://schemas.openxmlformats.org/drawingml/2006/main">
               <a:ext uri="{FF2B5EF4-FFF2-40B4-BE49-F238E27FC236}">
-                <a16:creationId xmlns:a16="http://schemas.microsoft.com/office/drawing/2014/main" id="{221270EB-A8CA-4CB0-85AB-EECF502C846D}"/>
+                <a16:creationId xmlns:a16="http://schemas.microsoft.com/office/drawing/2014/main" id="{E8C3E005-2018-494F-A219-E49E4A2DE690}"/>
               </a:ext>
             </a:extLst>
           </p:cNvPr>
@@ -9152,7 +9152,7 @@
           <p:cNvPr id="11" name="">
             <a:extLst xmlns:a="http://schemas.openxmlformats.org/drawingml/2006/main">
               <a:ext uri="{FF2B5EF4-FFF2-40B4-BE49-F238E27FC236}">
-                <a16:creationId xmlns:a16="http://schemas.microsoft.com/office/drawing/2014/main" id="{68CE5F5D-3F28-4A0A-860D-05AF15415B3A}"/>
+                <a16:creationId xmlns:a16="http://schemas.microsoft.com/office/drawing/2014/main" id="{4EF887CC-31B6-4E9D-9364-CE44033AFB74}"/>
               </a:ext>
             </a:extLst>
           </p:cNvPr>
@@ -9197,7 +9197,7 @@
           <p:cNvPr id="12" name="">
             <a:extLst xmlns:a="http://schemas.openxmlformats.org/drawingml/2006/main">
               <a:ext uri="{FF2B5EF4-FFF2-40B4-BE49-F238E27FC236}">
-                <a16:creationId xmlns:a16="http://schemas.microsoft.com/office/drawing/2014/main" id="{496F6982-4177-45DE-B931-AB8C0D2B88C1}"/>
+                <a16:creationId xmlns:a16="http://schemas.microsoft.com/office/drawing/2014/main" id="{6AD6DD0A-16B6-45D5-A856-45F4EFB53B39}"/>
               </a:ext>
             </a:extLst>
           </p:cNvPr>
@@ -9242,7 +9242,7 @@
           <p:cNvPr id="13" name="">
             <a:extLst xmlns:a="http://schemas.openxmlformats.org/drawingml/2006/main">
               <a:ext uri="{FF2B5EF4-FFF2-40B4-BE49-F238E27FC236}">
-                <a16:creationId xmlns:a16="http://schemas.microsoft.com/office/drawing/2014/main" id="{81D98CEC-5DB1-43B1-8E3E-7D9E1B4E91AF}"/>
+                <a16:creationId xmlns:a16="http://schemas.microsoft.com/office/drawing/2014/main" id="{A7442A88-B7F1-4D11-B2FE-F285C016BD91}"/>
               </a:ext>
             </a:extLst>
           </p:cNvPr>
@@ -9277,7 +9277,7 @@
           <p:cNvPr id="14" name="">
             <a:extLst xmlns:a="http://schemas.openxmlformats.org/drawingml/2006/main">
               <a:ext uri="{FF2B5EF4-FFF2-40B4-BE49-F238E27FC236}">
-                <a16:creationId xmlns:a16="http://schemas.microsoft.com/office/drawing/2014/main" id="{FEEAB267-C3D2-42BD-B53C-DEE2A9DE8868}"/>
+                <a16:creationId xmlns:a16="http://schemas.microsoft.com/office/drawing/2014/main" id="{FEB54046-6ACB-4DA7-8EC8-4AD77BC8C35A}"/>
               </a:ext>
             </a:extLst>
           </p:cNvPr>
@@ -9308,7 +9308,7 @@
           <p:cNvPr id="15" name="">
             <a:extLst xmlns:a="http://schemas.openxmlformats.org/drawingml/2006/main">
               <a:ext uri="{FF2B5EF4-FFF2-40B4-BE49-F238E27FC236}">
-                <a16:creationId xmlns:a16="http://schemas.microsoft.com/office/drawing/2014/main" id="{8752CCEE-999D-41BB-ABC4-9CB67F14AD15}"/>
+                <a16:creationId xmlns:a16="http://schemas.microsoft.com/office/drawing/2014/main" id="{B1458ED5-88F5-47C0-9441-677606F05F94}"/>
               </a:ext>
             </a:extLst>
           </p:cNvPr>
@@ -9353,7 +9353,7 @@
           <p:cNvPr id="16" name="">
             <a:extLst xmlns:a="http://schemas.openxmlformats.org/drawingml/2006/main">
               <a:ext uri="{FF2B5EF4-FFF2-40B4-BE49-F238E27FC236}">
-                <a16:creationId xmlns:a16="http://schemas.microsoft.com/office/drawing/2014/main" id="{166EA6E4-1879-4B25-8FF1-09F111232CF3}"/>
+                <a16:creationId xmlns:a16="http://schemas.microsoft.com/office/drawing/2014/main" id="{CF778F3A-1470-47DB-AB0A-7C665E29A424}"/>
               </a:ext>
             </a:extLst>
           </p:cNvPr>
@@ -9398,7 +9398,7 @@
           <p:cNvPr id="17" name="">
             <a:extLst xmlns:a="http://schemas.openxmlformats.org/drawingml/2006/main">
               <a:ext uri="{FF2B5EF4-FFF2-40B4-BE49-F238E27FC236}">
-                <a16:creationId xmlns:a16="http://schemas.microsoft.com/office/drawing/2014/main" id="{EE0CF1BF-9F8F-4046-A54D-A3EEEF8B2FAE}"/>
+                <a16:creationId xmlns:a16="http://schemas.microsoft.com/office/drawing/2014/main" id="{5A1FB84C-E434-4E86-BB75-004BE33CA81E}"/>
               </a:ext>
             </a:extLst>
           </p:cNvPr>
@@ -9429,7 +9429,7 @@
           <p:cNvPr id="18" name="">
             <a:extLst xmlns:a="http://schemas.openxmlformats.org/drawingml/2006/main">
               <a:ext uri="{FF2B5EF4-FFF2-40B4-BE49-F238E27FC236}">
-                <a16:creationId xmlns:a16="http://schemas.microsoft.com/office/drawing/2014/main" id="{2F53C9C1-3396-4036-B831-4307F28E2FC9}"/>
+                <a16:creationId xmlns:a16="http://schemas.microsoft.com/office/drawing/2014/main" id="{9708D7E9-C158-4048-B2C4-866C1CE1DA61}"/>
               </a:ext>
             </a:extLst>
           </p:cNvPr>
@@ -9474,7 +9474,7 @@
           <p:cNvPr id="19" name="">
             <a:extLst xmlns:a="http://schemas.openxmlformats.org/drawingml/2006/main">
               <a:ext uri="{FF2B5EF4-FFF2-40B4-BE49-F238E27FC236}">
-                <a16:creationId xmlns:a16="http://schemas.microsoft.com/office/drawing/2014/main" id="{197A6727-0D25-4930-B518-D97C7C20A736}"/>
+                <a16:creationId xmlns:a16="http://schemas.microsoft.com/office/drawing/2014/main" id="{119A5BC6-B4B1-4F73-9A0A-E95BC756D4C4}"/>
               </a:ext>
             </a:extLst>
           </p:cNvPr>
@@ -9505,7 +9505,7 @@
           <p:cNvPr id="20" name="">
             <a:extLst xmlns:a="http://schemas.openxmlformats.org/drawingml/2006/main">
               <a:ext uri="{FF2B5EF4-FFF2-40B4-BE49-F238E27FC236}">
-                <a16:creationId xmlns:a16="http://schemas.microsoft.com/office/drawing/2014/main" id="{6D62D6E3-3291-439D-BE77-B0F2435811DB}"/>
+                <a16:creationId xmlns:a16="http://schemas.microsoft.com/office/drawing/2014/main" id="{AE23A51D-D105-4874-956B-15A62E7E7F17}"/>
               </a:ext>
             </a:extLst>
           </p:cNvPr>
@@ -9550,7 +9550,7 @@
           <p:cNvPr id="21" name="">
             <a:extLst xmlns:a="http://schemas.openxmlformats.org/drawingml/2006/main">
               <a:ext uri="{FF2B5EF4-FFF2-40B4-BE49-F238E27FC236}">
-                <a16:creationId xmlns:a16="http://schemas.microsoft.com/office/drawing/2014/main" id="{72903D08-2819-46D0-892E-1F46B7C5C208}"/>
+                <a16:creationId xmlns:a16="http://schemas.microsoft.com/office/drawing/2014/main" id="{0D0AA107-4E07-4FC1-9D2C-9DD7DC841DCC}"/>
               </a:ext>
             </a:extLst>
           </p:cNvPr>
@@ -9595,7 +9595,7 @@
           <p:cNvPr id="22" name="">
             <a:extLst xmlns:a="http://schemas.openxmlformats.org/drawingml/2006/main">
               <a:ext uri="{FF2B5EF4-FFF2-40B4-BE49-F238E27FC236}">
-                <a16:creationId xmlns:a16="http://schemas.microsoft.com/office/drawing/2014/main" id="{DEB025F4-50F0-48E7-902E-4188723C8C3B}"/>
+                <a16:creationId xmlns:a16="http://schemas.microsoft.com/office/drawing/2014/main" id="{ED9A357F-CA79-4DEA-9B5F-7D6D80F849DA}"/>
               </a:ext>
             </a:extLst>
           </p:cNvPr>
@@ -9628,7 +9628,7 @@
           <p:cNvPr id="23" name="">
             <a:extLst xmlns:a="http://schemas.openxmlformats.org/drawingml/2006/main">
               <a:ext uri="{FF2B5EF4-FFF2-40B4-BE49-F238E27FC236}">
-                <a16:creationId xmlns:a16="http://schemas.microsoft.com/office/drawing/2014/main" id="{1A31965C-9A33-4C51-9547-2F85024F8DAC}"/>
+                <a16:creationId xmlns:a16="http://schemas.microsoft.com/office/drawing/2014/main" id="{B70BBF21-7B86-4F4C-8197-BB905C88C195}"/>
               </a:ext>
             </a:extLst>
           </p:cNvPr>
@@ -9673,7 +9673,7 @@
           <p:cNvPr id="24" name="">
             <a:extLst xmlns:a="http://schemas.openxmlformats.org/drawingml/2006/main">
               <a:ext uri="{FF2B5EF4-FFF2-40B4-BE49-F238E27FC236}">
-                <a16:creationId xmlns:a16="http://schemas.microsoft.com/office/drawing/2014/main" id="{3017642F-BE0B-4F1F-B296-C9819BDFE499}"/>
+                <a16:creationId xmlns:a16="http://schemas.microsoft.com/office/drawing/2014/main" id="{F315B7E3-5F23-4BB2-B2C7-E25617BCABB8}"/>
               </a:ext>
             </a:extLst>
           </p:cNvPr>
@@ -9706,7 +9706,7 @@
           <p:cNvPr id="25" name="">
             <a:extLst xmlns:a="http://schemas.openxmlformats.org/drawingml/2006/main">
               <a:ext uri="{FF2B5EF4-FFF2-40B4-BE49-F238E27FC236}">
-                <a16:creationId xmlns:a16="http://schemas.microsoft.com/office/drawing/2014/main" id="{8779F149-9B63-428A-892B-78294E04DCDF}"/>
+                <a16:creationId xmlns:a16="http://schemas.microsoft.com/office/drawing/2014/main" id="{F5191B7D-8E7D-47D0-AA60-02BD1C7A2396}"/>
               </a:ext>
             </a:extLst>
           </p:cNvPr>
@@ -9751,7 +9751,7 @@
           <p:cNvPr id="26" name="">
             <a:extLst xmlns:a="http://schemas.openxmlformats.org/drawingml/2006/main">
               <a:ext uri="{FF2B5EF4-FFF2-40B4-BE49-F238E27FC236}">
-                <a16:creationId xmlns:a16="http://schemas.microsoft.com/office/drawing/2014/main" id="{654C2C2F-98E3-45AA-9771-8C3BD4C6FD74}"/>
+                <a16:creationId xmlns:a16="http://schemas.microsoft.com/office/drawing/2014/main" id="{4B9CE1AA-2988-45CB-A47D-4BC793F46A26}"/>
               </a:ext>
             </a:extLst>
           </p:cNvPr>
@@ -9796,7 +9796,7 @@
           <p:cNvPr id="27" name="">
             <a:extLst xmlns:a="http://schemas.openxmlformats.org/drawingml/2006/main">
               <a:ext uri="{FF2B5EF4-FFF2-40B4-BE49-F238E27FC236}">
-                <a16:creationId xmlns:a16="http://schemas.microsoft.com/office/drawing/2014/main" id="{75143876-F070-4C4A-9F20-0C14B886AE27}"/>
+                <a16:creationId xmlns:a16="http://schemas.microsoft.com/office/drawing/2014/main" id="{398644C4-9A80-40C0-8261-A65FD1CCE03C}"/>
               </a:ext>
             </a:extLst>
           </p:cNvPr>
@@ -9829,7 +9829,7 @@
           <p:cNvPr id="28" name="">
             <a:extLst xmlns:a="http://schemas.openxmlformats.org/drawingml/2006/main">
               <a:ext uri="{FF2B5EF4-FFF2-40B4-BE49-F238E27FC236}">
-                <a16:creationId xmlns:a16="http://schemas.microsoft.com/office/drawing/2014/main" id="{97C5CAEB-7864-43F2-89C1-094DD55DA247}"/>
+                <a16:creationId xmlns:a16="http://schemas.microsoft.com/office/drawing/2014/main" id="{4E93A68B-C0EB-4637-8014-73047C736C2C}"/>
               </a:ext>
             </a:extLst>
           </p:cNvPr>
@@ -9874,7 +9874,7 @@
           <p:cNvPr id="29" name="">
             <a:extLst xmlns:a="http://schemas.openxmlformats.org/drawingml/2006/main">
               <a:ext uri="{FF2B5EF4-FFF2-40B4-BE49-F238E27FC236}">
-                <a16:creationId xmlns:a16="http://schemas.microsoft.com/office/drawing/2014/main" id="{0A5009BA-CE55-4499-94D8-50EBC950C132}"/>
+                <a16:creationId xmlns:a16="http://schemas.microsoft.com/office/drawing/2014/main" id="{F28148EC-BBE6-4464-A6F6-6EE3061452EE}"/>
               </a:ext>
             </a:extLst>
           </p:cNvPr>
@@ -9907,7 +9907,7 @@
           <p:cNvPr id="30" name="">
             <a:extLst xmlns:a="http://schemas.openxmlformats.org/drawingml/2006/main">
               <a:ext uri="{FF2B5EF4-FFF2-40B4-BE49-F238E27FC236}">
-                <a16:creationId xmlns:a16="http://schemas.microsoft.com/office/drawing/2014/main" id="{2B7C77E7-A771-4084-AB9B-89184AE510B6}"/>
+                <a16:creationId xmlns:a16="http://schemas.microsoft.com/office/drawing/2014/main" id="{8C062945-6926-49DE-8E89-12A07CB43102}"/>
               </a:ext>
             </a:extLst>
           </p:cNvPr>
@@ -9952,7 +9952,7 @@
           <p:cNvPr id="31" name="">
             <a:extLst xmlns:a="http://schemas.openxmlformats.org/drawingml/2006/main">
               <a:ext uri="{FF2B5EF4-FFF2-40B4-BE49-F238E27FC236}">
-                <a16:creationId xmlns:a16="http://schemas.microsoft.com/office/drawing/2014/main" id="{1238C8CB-9F3C-427D-BEE8-2375298BD887}"/>
+                <a16:creationId xmlns:a16="http://schemas.microsoft.com/office/drawing/2014/main" id="{7C846929-B37C-42BE-A568-E88A0A351071}"/>
               </a:ext>
             </a:extLst>
           </p:cNvPr>
@@ -9997,7 +9997,7 @@
           <p:cNvPr id="32" name="">
             <a:extLst xmlns:a="http://schemas.openxmlformats.org/drawingml/2006/main">
               <a:ext uri="{FF2B5EF4-FFF2-40B4-BE49-F238E27FC236}">
-                <a16:creationId xmlns:a16="http://schemas.microsoft.com/office/drawing/2014/main" id="{011798C9-5996-4ACF-80CC-964871F29CE2}"/>
+                <a16:creationId xmlns:a16="http://schemas.microsoft.com/office/drawing/2014/main" id="{FA6833F3-1D5C-43F5-9097-283C7E43F07C}"/>
               </a:ext>
             </a:extLst>
           </p:cNvPr>
@@ -10028,7 +10028,7 @@
           <p:cNvPr id="33" name="">
             <a:extLst xmlns:a="http://schemas.openxmlformats.org/drawingml/2006/main">
               <a:ext uri="{FF2B5EF4-FFF2-40B4-BE49-F238E27FC236}">
-                <a16:creationId xmlns:a16="http://schemas.microsoft.com/office/drawing/2014/main" id="{2821F9AF-B818-4D7E-95DC-0118C7584646}"/>
+                <a16:creationId xmlns:a16="http://schemas.microsoft.com/office/drawing/2014/main" id="{21704980-9909-437B-9064-A331FCF76C04}"/>
               </a:ext>
             </a:extLst>
           </p:cNvPr>
@@ -10061,7 +10061,7 @@
           <p:cNvPr id="34" name="">
             <a:extLst xmlns:a="http://schemas.openxmlformats.org/drawingml/2006/main">
               <a:ext uri="{FF2B5EF4-FFF2-40B4-BE49-F238E27FC236}">
-                <a16:creationId xmlns:a16="http://schemas.microsoft.com/office/drawing/2014/main" id="{B4D0C5F2-5CB0-45E5-9E98-C22D4EA7E09A}"/>
+                <a16:creationId xmlns:a16="http://schemas.microsoft.com/office/drawing/2014/main" id="{F0EBB745-691C-4227-8C13-05008E95B4E6}"/>
               </a:ext>
             </a:extLst>
           </p:cNvPr>
@@ -10106,7 +10106,7 @@
           <p:cNvPr id="35" name="">
             <a:extLst xmlns:a="http://schemas.openxmlformats.org/drawingml/2006/main">
               <a:ext uri="{FF2B5EF4-FFF2-40B4-BE49-F238E27FC236}">
-                <a16:creationId xmlns:a16="http://schemas.microsoft.com/office/drawing/2014/main" id="{0D8E34F8-5AE1-4450-B769-7D0930AB245B}"/>
+                <a16:creationId xmlns:a16="http://schemas.microsoft.com/office/drawing/2014/main" id="{E7FBC511-3816-4698-8FC0-839BB9579A0D}"/>
               </a:ext>
             </a:extLst>
           </p:cNvPr>
@@ -10139,7 +10139,7 @@
           <p:cNvPr id="36" name="">
             <a:extLst xmlns:a="http://schemas.openxmlformats.org/drawingml/2006/main">
               <a:ext uri="{FF2B5EF4-FFF2-40B4-BE49-F238E27FC236}">
-                <a16:creationId xmlns:a16="http://schemas.microsoft.com/office/drawing/2014/main" id="{72230554-AC98-4D7E-ABBC-FD5E6920FE5C}"/>
+                <a16:creationId xmlns:a16="http://schemas.microsoft.com/office/drawing/2014/main" id="{248499E6-E2FB-4C81-BB90-D289DCA3DF82}"/>
               </a:ext>
             </a:extLst>
           </p:cNvPr>
@@ -10184,7 +10184,7 @@
           <p:cNvPr id="37" name="">
             <a:extLst xmlns:a="http://schemas.openxmlformats.org/drawingml/2006/main">
               <a:ext uri="{FF2B5EF4-FFF2-40B4-BE49-F238E27FC236}">
-                <a16:creationId xmlns:a16="http://schemas.microsoft.com/office/drawing/2014/main" id="{03E2ED5B-706E-48C2-9DEA-4DF8E9AA80A7}"/>
+                <a16:creationId xmlns:a16="http://schemas.microsoft.com/office/drawing/2014/main" id="{E65827B0-346C-4532-BAD6-B6046AE19FDA}"/>
               </a:ext>
             </a:extLst>
           </p:cNvPr>
@@ -10229,7 +10229,7 @@
           <p:cNvPr id="38" name="">
             <a:extLst xmlns:a="http://schemas.openxmlformats.org/drawingml/2006/main">
               <a:ext uri="{FF2B5EF4-FFF2-40B4-BE49-F238E27FC236}">
-                <a16:creationId xmlns:a16="http://schemas.microsoft.com/office/drawing/2014/main" id="{B7FA7C22-DF1D-486D-BDB2-91A7810BDB3F}"/>
+                <a16:creationId xmlns:a16="http://schemas.microsoft.com/office/drawing/2014/main" id="{2B876371-2E03-4106-BA2B-BD112EB1AF3D}"/>
               </a:ext>
             </a:extLst>
           </p:cNvPr>
@@ -10262,7 +10262,7 @@
           <p:cNvPr id="39" name="">
             <a:extLst xmlns:a="http://schemas.openxmlformats.org/drawingml/2006/main">
               <a:ext uri="{FF2B5EF4-FFF2-40B4-BE49-F238E27FC236}">
-                <a16:creationId xmlns:a16="http://schemas.microsoft.com/office/drawing/2014/main" id="{351BE2A4-A9AC-4168-8125-DFBEDFF5D161}"/>
+                <a16:creationId xmlns:a16="http://schemas.microsoft.com/office/drawing/2014/main" id="{DFB2F439-B7E7-44C9-BEB7-8D32099E0768}"/>
               </a:ext>
             </a:extLst>
           </p:cNvPr>
@@ -10307,7 +10307,7 @@
           <p:cNvPr id="40" name="">
             <a:extLst xmlns:a="http://schemas.openxmlformats.org/drawingml/2006/main">
               <a:ext uri="{FF2B5EF4-FFF2-40B4-BE49-F238E27FC236}">
-                <a16:creationId xmlns:a16="http://schemas.microsoft.com/office/drawing/2014/main" id="{2A4737A1-3CB5-49AF-B96F-7C99C9BB1792}"/>
+                <a16:creationId xmlns:a16="http://schemas.microsoft.com/office/drawing/2014/main" id="{99472E4A-74C2-43CA-B073-1BE36E401FD0}"/>
               </a:ext>
             </a:extLst>
           </p:cNvPr>
@@ -10340,7 +10340,7 @@
           <p:cNvPr id="41" name="">
             <a:extLst xmlns:a="http://schemas.openxmlformats.org/drawingml/2006/main">
               <a:ext uri="{FF2B5EF4-FFF2-40B4-BE49-F238E27FC236}">
-                <a16:creationId xmlns:a16="http://schemas.microsoft.com/office/drawing/2014/main" id="{7F0B2598-ACD5-473A-A528-17C020AF72A4}"/>
+                <a16:creationId xmlns:a16="http://schemas.microsoft.com/office/drawing/2014/main" id="{D7C1E38F-8AF9-4373-9C05-2D89F60E5C1D}"/>
               </a:ext>
             </a:extLst>
           </p:cNvPr>
@@ -10385,7 +10385,7 @@
           <p:cNvPr id="42" name="">
             <a:extLst xmlns:a="http://schemas.openxmlformats.org/drawingml/2006/main">
               <a:ext uri="{FF2B5EF4-FFF2-40B4-BE49-F238E27FC236}">
-                <a16:creationId xmlns:a16="http://schemas.microsoft.com/office/drawing/2014/main" id="{46B38D4D-38AA-48A6-88A5-97713C854E11}"/>
+                <a16:creationId xmlns:a16="http://schemas.microsoft.com/office/drawing/2014/main" id="{E418D422-E324-43B7-8DF3-25CD228A02EB}"/>
               </a:ext>
             </a:extLst>
           </p:cNvPr>
@@ -10430,7 +10430,7 @@
           <p:cNvPr id="43" name="">
             <a:extLst xmlns:a="http://schemas.openxmlformats.org/drawingml/2006/main">
               <a:ext uri="{FF2B5EF4-FFF2-40B4-BE49-F238E27FC236}">
-                <a16:creationId xmlns:a16="http://schemas.microsoft.com/office/drawing/2014/main" id="{9FCBB77D-A368-4529-A5AA-27B4ABBE3DC7}"/>
+                <a16:creationId xmlns:a16="http://schemas.microsoft.com/office/drawing/2014/main" id="{2A2B1E9B-4297-44FE-B1AE-488E35EE05CA}"/>
               </a:ext>
             </a:extLst>
           </p:cNvPr>
@@ -10463,7 +10463,7 @@
           <p:cNvPr id="44" name="">
             <a:extLst xmlns:a="http://schemas.openxmlformats.org/drawingml/2006/main">
               <a:ext uri="{FF2B5EF4-FFF2-40B4-BE49-F238E27FC236}">
-                <a16:creationId xmlns:a16="http://schemas.microsoft.com/office/drawing/2014/main" id="{C0B0124C-5711-490F-ADFC-41754D7A4743}"/>
+                <a16:creationId xmlns:a16="http://schemas.microsoft.com/office/drawing/2014/main" id="{97401B67-BBC1-4560-BEF6-73F4297876D6}"/>
               </a:ext>
             </a:extLst>
           </p:cNvPr>
@@ -10508,7 +10508,7 @@
           <p:cNvPr id="45" name="">
             <a:extLst xmlns:a="http://schemas.openxmlformats.org/drawingml/2006/main">
               <a:ext uri="{FF2B5EF4-FFF2-40B4-BE49-F238E27FC236}">
-                <a16:creationId xmlns:a16="http://schemas.microsoft.com/office/drawing/2014/main" id="{EA1F2773-1D76-4D03-BEDE-0686FB5DFFEC}"/>
+                <a16:creationId xmlns:a16="http://schemas.microsoft.com/office/drawing/2014/main" id="{A6AE6499-4D5E-4620-98DB-9C12CA8B183A}"/>
               </a:ext>
             </a:extLst>
           </p:cNvPr>
@@ -10541,7 +10541,7 @@
           <p:cNvPr id="46" name="">
             <a:extLst xmlns:a="http://schemas.openxmlformats.org/drawingml/2006/main">
               <a:ext uri="{FF2B5EF4-FFF2-40B4-BE49-F238E27FC236}">
-                <a16:creationId xmlns:a16="http://schemas.microsoft.com/office/drawing/2014/main" id="{D4BE4895-A3C4-4BED-82BA-F3FBE42BBC66}"/>
+                <a16:creationId xmlns:a16="http://schemas.microsoft.com/office/drawing/2014/main" id="{8395CED4-70C2-414C-9D05-44D8A66AE58F}"/>
               </a:ext>
             </a:extLst>
           </p:cNvPr>
@@ -10586,7 +10586,7 @@
           <p:cNvPr id="47" name="">
             <a:extLst xmlns:a="http://schemas.openxmlformats.org/drawingml/2006/main">
               <a:ext uri="{FF2B5EF4-FFF2-40B4-BE49-F238E27FC236}">
-                <a16:creationId xmlns:a16="http://schemas.microsoft.com/office/drawing/2014/main" id="{20EE8EE5-E1CC-494D-9A95-961C3D91B89A}"/>
+                <a16:creationId xmlns:a16="http://schemas.microsoft.com/office/drawing/2014/main" id="{D775DEAC-B178-4B13-921D-8EEC5D43C039}"/>
               </a:ext>
             </a:extLst>
           </p:cNvPr>
@@ -10631,7 +10631,7 @@
           <p:cNvPr id="48" name="">
             <a:extLst xmlns:a="http://schemas.openxmlformats.org/drawingml/2006/main">
               <a:ext uri="{FF2B5EF4-FFF2-40B4-BE49-F238E27FC236}">
-                <a16:creationId xmlns:a16="http://schemas.microsoft.com/office/drawing/2014/main" id="{BC01A0F2-8377-43EB-B5B7-0753C239A845}"/>
+                <a16:creationId xmlns:a16="http://schemas.microsoft.com/office/drawing/2014/main" id="{6220203B-C302-4FCA-AA68-DFB5B45CFA53}"/>
               </a:ext>
             </a:extLst>
           </p:cNvPr>
@@ -10664,7 +10664,7 @@
           <p:cNvPr id="49" name="">
             <a:extLst xmlns:a="http://schemas.openxmlformats.org/drawingml/2006/main">
               <a:ext uri="{FF2B5EF4-FFF2-40B4-BE49-F238E27FC236}">
-                <a16:creationId xmlns:a16="http://schemas.microsoft.com/office/drawing/2014/main" id="{932B10F7-329C-4E8C-9757-CC2372B0345B}"/>
+                <a16:creationId xmlns:a16="http://schemas.microsoft.com/office/drawing/2014/main" id="{E874313E-7EFF-443D-A9EA-C034C3EF5088}"/>
               </a:ext>
             </a:extLst>
           </p:cNvPr>
@@ -10709,7 +10709,7 @@
           <p:cNvPr id="50" name="">
             <a:extLst xmlns:a="http://schemas.openxmlformats.org/drawingml/2006/main">
               <a:ext uri="{FF2B5EF4-FFF2-40B4-BE49-F238E27FC236}">
-                <a16:creationId xmlns:a16="http://schemas.microsoft.com/office/drawing/2014/main" id="{B3AF1D1F-74A9-49B4-A32D-F01F7BEC2DF7}"/>
+                <a16:creationId xmlns:a16="http://schemas.microsoft.com/office/drawing/2014/main" id="{1F32F9B1-4ACB-4A76-8399-F0500247EF3D}"/>
               </a:ext>
             </a:extLst>
           </p:cNvPr>
@@ -10742,7 +10742,7 @@
           <p:cNvPr id="51" name="">
             <a:extLst xmlns:a="http://schemas.openxmlformats.org/drawingml/2006/main">
               <a:ext uri="{FF2B5EF4-FFF2-40B4-BE49-F238E27FC236}">
-                <a16:creationId xmlns:a16="http://schemas.microsoft.com/office/drawing/2014/main" id="{712B5184-01FD-425E-8315-EE1B9A943069}"/>
+                <a16:creationId xmlns:a16="http://schemas.microsoft.com/office/drawing/2014/main" id="{7D060E33-C3DC-4C67-89D0-7494996065A4}"/>
               </a:ext>
             </a:extLst>
           </p:cNvPr>
@@ -10787,7 +10787,7 @@
           <p:cNvPr id="52" name="">
             <a:extLst xmlns:a="http://schemas.openxmlformats.org/drawingml/2006/main">
               <a:ext uri="{FF2B5EF4-FFF2-40B4-BE49-F238E27FC236}">
-                <a16:creationId xmlns:a16="http://schemas.microsoft.com/office/drawing/2014/main" id="{0231703E-EED8-4C96-89D5-81F8CE9B633B}"/>
+                <a16:creationId xmlns:a16="http://schemas.microsoft.com/office/drawing/2014/main" id="{E58B861B-42BF-4086-8E5E-0EC3F7A0B755}"/>
               </a:ext>
             </a:extLst>
           </p:cNvPr>
@@ -10832,7 +10832,7 @@
           <p:cNvPr id="53" name="">
             <a:extLst xmlns:a="http://schemas.openxmlformats.org/drawingml/2006/main">
               <a:ext uri="{FF2B5EF4-FFF2-40B4-BE49-F238E27FC236}">
-                <a16:creationId xmlns:a16="http://schemas.microsoft.com/office/drawing/2014/main" id="{A294F90F-8B8C-4993-9A03-308EFD1F50FC}"/>
+                <a16:creationId xmlns:a16="http://schemas.microsoft.com/office/drawing/2014/main" id="{FBBD42DA-1629-4610-A6E1-4ABF914EAE1B}"/>
               </a:ext>
             </a:extLst>
           </p:cNvPr>
@@ -10875,7 +10875,7 @@
     </p:spTree>
     <p:extLst>
       <p:ext uri="{BB962C8B-B14F-4D97-AF65-F5344CB8AC3E}">
-        <p14:creationId xmlns:p14="http://schemas.microsoft.com/office/powerpoint/2010/main" val="872848814"/>
+        <p14:creationId xmlns:p14="http://schemas.microsoft.com/office/powerpoint/2010/main" val="579610109"/>
       </p:ext>
     </p:extLst>
   </p:cSld>
@@ -10899,7 +10899,7 @@
           <p:cNvPr id="24" name="">
             <a:extLst xmlns:a="http://schemas.openxmlformats.org/drawingml/2006/main">
               <a:ext uri="{FF2B5EF4-FFF2-40B4-BE49-F238E27FC236}">
-                <a16:creationId xmlns:a16="http://schemas.microsoft.com/office/drawing/2014/main" id="{83A26D82-E0E3-4E10-A363-DE3276284BC9}"/>
+                <a16:creationId xmlns:a16="http://schemas.microsoft.com/office/drawing/2014/main" id="{A84ED048-D29B-4CAA-BD18-DC81B10A5138}"/>
               </a:ext>
             </a:extLst>
           </p:cNvPr>
@@ -10930,7 +10930,7 @@
           <p:cNvPr id="2" name="">
             <a:extLst xmlns:a="http://schemas.openxmlformats.org/drawingml/2006/main">
               <a:ext uri="{FF2B5EF4-FFF2-40B4-BE49-F238E27FC236}">
-                <a16:creationId xmlns:a16="http://schemas.microsoft.com/office/drawing/2014/main" id="{B6A5FE41-7581-4E67-85E9-AEE317C057E7}"/>
+                <a16:creationId xmlns:a16="http://schemas.microsoft.com/office/drawing/2014/main" id="{3CE64EC2-00DA-4BCD-BFB7-14D4CEFB0FA3}"/>
               </a:ext>
             </a:extLst>
           </p:cNvPr>
@@ -10961,7 +10961,7 @@
           <p:cNvPr id="3" name="">
             <a:extLst xmlns:a="http://schemas.openxmlformats.org/drawingml/2006/main">
               <a:ext uri="{FF2B5EF4-FFF2-40B4-BE49-F238E27FC236}">
-                <a16:creationId xmlns:a16="http://schemas.microsoft.com/office/drawing/2014/main" id="{AD9485AD-BB13-4F53-938D-5428B264E33B}"/>
+                <a16:creationId xmlns:a16="http://schemas.microsoft.com/office/drawing/2014/main" id="{EEB18406-BB18-41A5-8912-5E56436A10B0}"/>
               </a:ext>
             </a:extLst>
           </p:cNvPr>
@@ -11006,7 +11006,7 @@
           <p:cNvPr id="4" name="">
             <a:extLst xmlns:a="http://schemas.openxmlformats.org/drawingml/2006/main">
               <a:ext uri="{FF2B5EF4-FFF2-40B4-BE49-F238E27FC236}">
-                <a16:creationId xmlns:a16="http://schemas.microsoft.com/office/drawing/2014/main" id="{AA318C4A-1ED6-4868-A47E-E7E831EA5D5D}"/>
+                <a16:creationId xmlns:a16="http://schemas.microsoft.com/office/drawing/2014/main" id="{4D642EEC-E30A-4474-83AD-77A9CE9AEA64}"/>
               </a:ext>
             </a:extLst>
           </p:cNvPr>
@@ -11051,7 +11051,7 @@
           <p:cNvPr id="5" name="">
             <a:extLst xmlns:a="http://schemas.openxmlformats.org/drawingml/2006/main">
               <a:ext uri="{FF2B5EF4-FFF2-40B4-BE49-F238E27FC236}">
-                <a16:creationId xmlns:a16="http://schemas.microsoft.com/office/drawing/2014/main" id="{AD3411BF-1871-48DB-A043-17A486314739}"/>
+                <a16:creationId xmlns:a16="http://schemas.microsoft.com/office/drawing/2014/main" id="{F9106C77-85A0-41B3-816C-A808F05E7861}"/>
               </a:ext>
             </a:extLst>
           </p:cNvPr>
@@ -11082,7 +11082,7 @@
           <p:cNvPr id="6" name="">
             <a:extLst xmlns:a="http://schemas.openxmlformats.org/drawingml/2006/main">
               <a:ext uri="{FF2B5EF4-FFF2-40B4-BE49-F238E27FC236}">
-                <a16:creationId xmlns:a16="http://schemas.microsoft.com/office/drawing/2014/main" id="{33FF1ACC-8D11-4164-AD1C-A272EE36C46C}"/>
+                <a16:creationId xmlns:a16="http://schemas.microsoft.com/office/drawing/2014/main" id="{F7A90890-08A8-4E82-9F33-055876B4EF67}"/>
               </a:ext>
             </a:extLst>
           </p:cNvPr>
@@ -11127,7 +11127,7 @@
           <p:cNvPr id="7" name="">
             <a:extLst xmlns:a="http://schemas.openxmlformats.org/drawingml/2006/main">
               <a:ext uri="{FF2B5EF4-FFF2-40B4-BE49-F238E27FC236}">
-                <a16:creationId xmlns:a16="http://schemas.microsoft.com/office/drawing/2014/main" id="{F984C9A9-714A-42AF-A6A6-F15D30CE2901}"/>
+                <a16:creationId xmlns:a16="http://schemas.microsoft.com/office/drawing/2014/main" id="{E02EBA9B-C26E-40D5-ACE1-48D72C75FED0}"/>
               </a:ext>
             </a:extLst>
           </p:cNvPr>
@@ -11172,7 +11172,7 @@
           <p:cNvPr id="8" name="">
             <a:extLst xmlns:a="http://schemas.openxmlformats.org/drawingml/2006/main">
               <a:ext uri="{FF2B5EF4-FFF2-40B4-BE49-F238E27FC236}">
-                <a16:creationId xmlns:a16="http://schemas.microsoft.com/office/drawing/2014/main" id="{1FF69BEB-9879-439A-999D-381496595ED5}"/>
+                <a16:creationId xmlns:a16="http://schemas.microsoft.com/office/drawing/2014/main" id="{BA076F86-75DF-482A-9F2C-673F661925EC}"/>
               </a:ext>
             </a:extLst>
           </p:cNvPr>
@@ -11207,7 +11207,7 @@
           <p:cNvPr id="9" name="">
             <a:extLst xmlns:a="http://schemas.openxmlformats.org/drawingml/2006/main">
               <a:ext uri="{FF2B5EF4-FFF2-40B4-BE49-F238E27FC236}">
-                <a16:creationId xmlns:a16="http://schemas.microsoft.com/office/drawing/2014/main" id="{E26239B1-4F0C-4F4F-B3AA-F6B3C0EC41A6}"/>
+                <a16:creationId xmlns:a16="http://schemas.microsoft.com/office/drawing/2014/main" id="{927CF38F-73EB-4197-9B89-929B6CC9EE14}"/>
               </a:ext>
             </a:extLst>
           </p:cNvPr>
@@ -11238,7 +11238,7 @@
           <p:cNvPr id="10" name="">
             <a:extLst xmlns:a="http://schemas.openxmlformats.org/drawingml/2006/main">
               <a:ext uri="{FF2B5EF4-FFF2-40B4-BE49-F238E27FC236}">
-                <a16:creationId xmlns:a16="http://schemas.microsoft.com/office/drawing/2014/main" id="{F0C98F43-D585-4CA3-88E8-84D214DAEC91}"/>
+                <a16:creationId xmlns:a16="http://schemas.microsoft.com/office/drawing/2014/main" id="{6D7868E4-4E00-4FB3-BD0B-0705EE063456}"/>
               </a:ext>
             </a:extLst>
           </p:cNvPr>
@@ -11283,7 +11283,7 @@
           <p:cNvPr id="11" name="">
             <a:extLst xmlns:a="http://schemas.openxmlformats.org/drawingml/2006/main">
               <a:ext uri="{FF2B5EF4-FFF2-40B4-BE49-F238E27FC236}">
-                <a16:creationId xmlns:a16="http://schemas.microsoft.com/office/drawing/2014/main" id="{361599B1-D97A-4CA5-A343-1A1D2A849545}"/>
+                <a16:creationId xmlns:a16="http://schemas.microsoft.com/office/drawing/2014/main" id="{F372E55B-ACFC-4255-A2F9-EA846237DBAB}"/>
               </a:ext>
             </a:extLst>
           </p:cNvPr>
@@ -11328,7 +11328,7 @@
           <p:cNvPr id="12" name="">
             <a:extLst xmlns:a="http://schemas.openxmlformats.org/drawingml/2006/main">
               <a:ext uri="{FF2B5EF4-FFF2-40B4-BE49-F238E27FC236}">
-                <a16:creationId xmlns:a16="http://schemas.microsoft.com/office/drawing/2014/main" id="{8C245039-7257-4BED-A68D-8D482F290C52}"/>
+                <a16:creationId xmlns:a16="http://schemas.microsoft.com/office/drawing/2014/main" id="{5327311B-9D44-43D1-9292-9EA7001D8C98}"/>
               </a:ext>
             </a:extLst>
           </p:cNvPr>
@@ -11363,7 +11363,7 @@
           <p:cNvPr id="13" name="">
             <a:extLst xmlns:a="http://schemas.openxmlformats.org/drawingml/2006/main">
               <a:ext uri="{FF2B5EF4-FFF2-40B4-BE49-F238E27FC236}">
-                <a16:creationId xmlns:a16="http://schemas.microsoft.com/office/drawing/2014/main" id="{9704ABF2-762D-4E07-8B12-C3BFFFD901A5}"/>
+                <a16:creationId xmlns:a16="http://schemas.microsoft.com/office/drawing/2014/main" id="{7F774A05-752E-4815-98A4-6F6CAE884849}"/>
               </a:ext>
             </a:extLst>
           </p:cNvPr>
@@ -11394,7 +11394,7 @@
           <p:cNvPr id="14" name="">
             <a:extLst xmlns:a="http://schemas.openxmlformats.org/drawingml/2006/main">
               <a:ext uri="{FF2B5EF4-FFF2-40B4-BE49-F238E27FC236}">
-                <a16:creationId xmlns:a16="http://schemas.microsoft.com/office/drawing/2014/main" id="{FB283784-1105-47D7-9FD0-BBE7044144B5}"/>
+                <a16:creationId xmlns:a16="http://schemas.microsoft.com/office/drawing/2014/main" id="{853B74D7-8E62-4E8F-B9A6-31D3FE787A1B}"/>
               </a:ext>
             </a:extLst>
           </p:cNvPr>
@@ -11439,7 +11439,7 @@
           <p:cNvPr id="15" name="">
             <a:extLst xmlns:a="http://schemas.openxmlformats.org/drawingml/2006/main">
               <a:ext uri="{FF2B5EF4-FFF2-40B4-BE49-F238E27FC236}">
-                <a16:creationId xmlns:a16="http://schemas.microsoft.com/office/drawing/2014/main" id="{0145F77E-B79E-409D-8E54-35ED44A0B8B7}"/>
+                <a16:creationId xmlns:a16="http://schemas.microsoft.com/office/drawing/2014/main" id="{9DB99DF8-F140-46C6-BC4F-957F72AD6CF9}"/>
               </a:ext>
             </a:extLst>
           </p:cNvPr>
@@ -11484,7 +11484,7 @@
           <p:cNvPr id="16" name="">
             <a:extLst xmlns:a="http://schemas.openxmlformats.org/drawingml/2006/main">
               <a:ext uri="{FF2B5EF4-FFF2-40B4-BE49-F238E27FC236}">
-                <a16:creationId xmlns:a16="http://schemas.microsoft.com/office/drawing/2014/main" id="{8361C351-260B-47FE-BFCC-6D1488750819}"/>
+                <a16:creationId xmlns:a16="http://schemas.microsoft.com/office/drawing/2014/main" id="{2F68D204-5D10-41B0-A199-C886FACD54AC}"/>
               </a:ext>
             </a:extLst>
           </p:cNvPr>
@@ -11519,7 +11519,7 @@
           <p:cNvPr id="17" name="">
             <a:extLst xmlns:a="http://schemas.openxmlformats.org/drawingml/2006/main">
               <a:ext uri="{FF2B5EF4-FFF2-40B4-BE49-F238E27FC236}">
-                <a16:creationId xmlns:a16="http://schemas.microsoft.com/office/drawing/2014/main" id="{D5147567-E283-439E-BA81-F50686922612}"/>
+                <a16:creationId xmlns:a16="http://schemas.microsoft.com/office/drawing/2014/main" id="{7725FBDA-1658-41AB-829F-A7B3AD5D5E97}"/>
               </a:ext>
             </a:extLst>
           </p:cNvPr>
@@ -11550,7 +11550,7 @@
           <p:cNvPr id="18" name="">
             <a:extLst xmlns:a="http://schemas.openxmlformats.org/drawingml/2006/main">
               <a:ext uri="{FF2B5EF4-FFF2-40B4-BE49-F238E27FC236}">
-                <a16:creationId xmlns:a16="http://schemas.microsoft.com/office/drawing/2014/main" id="{361CDF8D-1874-4379-BA5B-FE083C262DDA}"/>
+                <a16:creationId xmlns:a16="http://schemas.microsoft.com/office/drawing/2014/main" id="{642B302A-B4C3-4172-A030-36C561E63880}"/>
               </a:ext>
             </a:extLst>
           </p:cNvPr>
@@ -11595,7 +11595,7 @@
           <p:cNvPr id="19" name="">
             <a:extLst xmlns:a="http://schemas.openxmlformats.org/drawingml/2006/main">
               <a:ext uri="{FF2B5EF4-FFF2-40B4-BE49-F238E27FC236}">
-                <a16:creationId xmlns:a16="http://schemas.microsoft.com/office/drawing/2014/main" id="{BCC5E58B-83C9-4EA3-9F5F-F50999434F2D}"/>
+                <a16:creationId xmlns:a16="http://schemas.microsoft.com/office/drawing/2014/main" id="{4F8BCF3B-2626-451E-AAF3-0FA192D08840}"/>
               </a:ext>
             </a:extLst>
           </p:cNvPr>
@@ -11640,7 +11640,7 @@
           <p:cNvPr id="20" name="">
             <a:extLst xmlns:a="http://schemas.openxmlformats.org/drawingml/2006/main">
               <a:ext uri="{FF2B5EF4-FFF2-40B4-BE49-F238E27FC236}">
-                <a16:creationId xmlns:a16="http://schemas.microsoft.com/office/drawing/2014/main" id="{FE3F7815-8F4B-4705-AEF9-E0BE826F3E02}"/>
+                <a16:creationId xmlns:a16="http://schemas.microsoft.com/office/drawing/2014/main" id="{B5ABD562-7369-4EBF-8021-B9402FA8E445}"/>
               </a:ext>
             </a:extLst>
           </p:cNvPr>
@@ -11671,7 +11671,7 @@
           <p:cNvPr id="21" name="">
             <a:extLst xmlns:a="http://schemas.openxmlformats.org/drawingml/2006/main">
               <a:ext uri="{FF2B5EF4-FFF2-40B4-BE49-F238E27FC236}">
-                <a16:creationId xmlns:a16="http://schemas.microsoft.com/office/drawing/2014/main" id="{EFCD4C29-667D-42A4-A68C-87912486D603}"/>
+                <a16:creationId xmlns:a16="http://schemas.microsoft.com/office/drawing/2014/main" id="{27BDE736-BC8F-463B-942F-8358E793F7A3}"/>
               </a:ext>
             </a:extLst>
           </p:cNvPr>
@@ -11702,7 +11702,7 @@
           <p:cNvPr id="22" name="">
             <a:extLst xmlns:a="http://schemas.openxmlformats.org/drawingml/2006/main">
               <a:ext uri="{FF2B5EF4-FFF2-40B4-BE49-F238E27FC236}">
-                <a16:creationId xmlns:a16="http://schemas.microsoft.com/office/drawing/2014/main" id="{4D8BC0C3-718C-477D-81E0-746AEB27B085}"/>
+                <a16:creationId xmlns:a16="http://schemas.microsoft.com/office/drawing/2014/main" id="{5D4D6F15-C706-44CB-9ECF-7FE47E79FD53}"/>
               </a:ext>
             </a:extLst>
           </p:cNvPr>
@@ -11747,7 +11747,7 @@
           <p:cNvPr id="23" name="">
             <a:extLst xmlns:a="http://schemas.openxmlformats.org/drawingml/2006/main">
               <a:ext uri="{FF2B5EF4-FFF2-40B4-BE49-F238E27FC236}">
-                <a16:creationId xmlns:a16="http://schemas.microsoft.com/office/drawing/2014/main" id="{F6783925-C82B-49E5-AABC-B6364B60D843}"/>
+                <a16:creationId xmlns:a16="http://schemas.microsoft.com/office/drawing/2014/main" id="{EA4DE4D3-0440-4CBD-97EA-2C5228451A2D}"/>
               </a:ext>
             </a:extLst>
           </p:cNvPr>
@@ -11790,7 +11790,7 @@
     </p:spTree>
     <p:extLst>
       <p:ext uri="{BB962C8B-B14F-4D97-AF65-F5344CB8AC3E}">
-        <p14:creationId xmlns:p14="http://schemas.microsoft.com/office/powerpoint/2010/main" val="2067149170"/>
+        <p14:creationId xmlns:p14="http://schemas.microsoft.com/office/powerpoint/2010/main" val="2084683679"/>
       </p:ext>
     </p:extLst>
   </p:cSld>
@@ -11814,7 +11814,7 @@
           <p:cNvPr id="31" name="">
             <a:extLst xmlns:a="http://schemas.openxmlformats.org/drawingml/2006/main">
               <a:ext uri="{FF2B5EF4-FFF2-40B4-BE49-F238E27FC236}">
-                <a16:creationId xmlns:a16="http://schemas.microsoft.com/office/drawing/2014/main" id="{73EEE9AC-5056-4106-A1C4-A082C305E9B2}"/>
+                <a16:creationId xmlns:a16="http://schemas.microsoft.com/office/drawing/2014/main" id="{D366FD8F-B1D2-4C74-8DC6-97017C459B51}"/>
               </a:ext>
             </a:extLst>
           </p:cNvPr>
@@ -11845,7 +11845,7 @@
           <p:cNvPr id="2" name="">
             <a:extLst xmlns:a="http://schemas.openxmlformats.org/drawingml/2006/main">
               <a:ext uri="{FF2B5EF4-FFF2-40B4-BE49-F238E27FC236}">
-                <a16:creationId xmlns:a16="http://schemas.microsoft.com/office/drawing/2014/main" id="{5F779AC9-2898-4E19-A059-F883476BEBC1}"/>
+                <a16:creationId xmlns:a16="http://schemas.microsoft.com/office/drawing/2014/main" id="{2E3251E8-0072-40FD-9E1E-9F1CC36486A1}"/>
               </a:ext>
             </a:extLst>
           </p:cNvPr>
@@ -11890,7 +11890,7 @@
           <p:cNvPr id="3" name="">
             <a:extLst xmlns:a="http://schemas.openxmlformats.org/drawingml/2006/main">
               <a:ext uri="{FF2B5EF4-FFF2-40B4-BE49-F238E27FC236}">
-                <a16:creationId xmlns:a16="http://schemas.microsoft.com/office/drawing/2014/main" id="{B528D410-FEA9-45E7-B29B-6D784F3826C4}"/>
+                <a16:creationId xmlns:a16="http://schemas.microsoft.com/office/drawing/2014/main" id="{A4E57411-4187-4EB7-A516-5345ED2879DE}"/>
               </a:ext>
             </a:extLst>
           </p:cNvPr>
@@ -11935,7 +11935,7 @@
           <p:cNvPr id="4" name="">
             <a:extLst xmlns:a="http://schemas.openxmlformats.org/drawingml/2006/main">
               <a:ext uri="{FF2B5EF4-FFF2-40B4-BE49-F238E27FC236}">
-                <a16:creationId xmlns:a16="http://schemas.microsoft.com/office/drawing/2014/main" id="{6DD02B98-FF45-49A4-AD33-5A81CB53C680}"/>
+                <a16:creationId xmlns:a16="http://schemas.microsoft.com/office/drawing/2014/main" id="{F24F266B-7DD5-4D09-9551-ED30FD17F31E}"/>
               </a:ext>
             </a:extLst>
           </p:cNvPr>
@@ -11980,7 +11980,7 @@
           <p:cNvPr id="5" name="">
             <a:extLst xmlns:a="http://schemas.openxmlformats.org/drawingml/2006/main">
               <a:ext uri="{FF2B5EF4-FFF2-40B4-BE49-F238E27FC236}">
-                <a16:creationId xmlns:a16="http://schemas.microsoft.com/office/drawing/2014/main" id="{4625EF02-228D-4EFE-BEAE-17435ECF0763}"/>
+                <a16:creationId xmlns:a16="http://schemas.microsoft.com/office/drawing/2014/main" id="{44475E02-3A11-4632-A7F6-6020F9632B29}"/>
               </a:ext>
             </a:extLst>
           </p:cNvPr>
@@ -12011,7 +12011,7 @@
           <p:cNvPr id="6" name="">
             <a:extLst xmlns:a="http://schemas.openxmlformats.org/drawingml/2006/main">
               <a:ext uri="{FF2B5EF4-FFF2-40B4-BE49-F238E27FC236}">
-                <a16:creationId xmlns:a16="http://schemas.microsoft.com/office/drawing/2014/main" id="{4B547B24-162E-4A23-9450-A19B2FEBBA9E}"/>
+                <a16:creationId xmlns:a16="http://schemas.microsoft.com/office/drawing/2014/main" id="{90FE27B2-3BDC-48A1-B335-09411E5B5D31}"/>
               </a:ext>
             </a:extLst>
           </p:cNvPr>
@@ -12042,7 +12042,7 @@
           <p:cNvPr id="7" name="">
             <a:extLst xmlns:a="http://schemas.openxmlformats.org/drawingml/2006/main">
               <a:ext uri="{FF2B5EF4-FFF2-40B4-BE49-F238E27FC236}">
-                <a16:creationId xmlns:a16="http://schemas.microsoft.com/office/drawing/2014/main" id="{6244B735-7638-49FA-A66D-8E548AD5F852}"/>
+                <a16:creationId xmlns:a16="http://schemas.microsoft.com/office/drawing/2014/main" id="{D2C666C0-8971-49BB-ABA6-7E54E96B7DE9}"/>
               </a:ext>
             </a:extLst>
           </p:cNvPr>
@@ -12087,7 +12087,7 @@
           <p:cNvPr id="8" name="">
             <a:extLst xmlns:a="http://schemas.openxmlformats.org/drawingml/2006/main">
               <a:ext uri="{FF2B5EF4-FFF2-40B4-BE49-F238E27FC236}">
-                <a16:creationId xmlns:a16="http://schemas.microsoft.com/office/drawing/2014/main" id="{E44AC7FB-DBBF-4DCB-AB66-682F7161D61B}"/>
+                <a16:creationId xmlns:a16="http://schemas.microsoft.com/office/drawing/2014/main" id="{B8EFEB0A-E451-4F2A-B829-754C95E413A2}"/>
               </a:ext>
             </a:extLst>
           </p:cNvPr>
@@ -12132,7 +12132,7 @@
           <p:cNvPr id="9" name="">
             <a:extLst xmlns:a="http://schemas.openxmlformats.org/drawingml/2006/main">
               <a:ext uri="{FF2B5EF4-FFF2-40B4-BE49-F238E27FC236}">
-                <a16:creationId xmlns:a16="http://schemas.microsoft.com/office/drawing/2014/main" id="{592053D7-031C-4C87-A10E-DE67D53EF474}"/>
+                <a16:creationId xmlns:a16="http://schemas.microsoft.com/office/drawing/2014/main" id="{769A32C2-76D4-488F-86A4-6039E4A413CE}"/>
               </a:ext>
             </a:extLst>
           </p:cNvPr>
@@ -12163,7 +12163,7 @@
           <p:cNvPr id="10" name="">
             <a:extLst xmlns:a="http://schemas.openxmlformats.org/drawingml/2006/main">
               <a:ext uri="{FF2B5EF4-FFF2-40B4-BE49-F238E27FC236}">
-                <a16:creationId xmlns:a16="http://schemas.microsoft.com/office/drawing/2014/main" id="{5F9768AE-36A0-4DF0-BBFB-2C6737B1D896}"/>
+                <a16:creationId xmlns:a16="http://schemas.microsoft.com/office/drawing/2014/main" id="{00F02C70-626B-470A-B6CE-FFABCC50353C}"/>
               </a:ext>
             </a:extLst>
           </p:cNvPr>
@@ -12208,7 +12208,7 @@
           <p:cNvPr id="11" name="">
             <a:extLst xmlns:a="http://schemas.openxmlformats.org/drawingml/2006/main">
               <a:ext uri="{FF2B5EF4-FFF2-40B4-BE49-F238E27FC236}">
-                <a16:creationId xmlns:a16="http://schemas.microsoft.com/office/drawing/2014/main" id="{27345972-15F5-43D8-82BE-B0F55245BAB3}"/>
+                <a16:creationId xmlns:a16="http://schemas.microsoft.com/office/drawing/2014/main" id="{7FE3F3AF-9ABA-4A9C-9107-63F891BEB2FE}"/>
               </a:ext>
             </a:extLst>
           </p:cNvPr>
@@ -12253,7 +12253,7 @@
           <p:cNvPr id="12" name="">
             <a:extLst xmlns:a="http://schemas.openxmlformats.org/drawingml/2006/main">
               <a:ext uri="{FF2B5EF4-FFF2-40B4-BE49-F238E27FC236}">
-                <a16:creationId xmlns:a16="http://schemas.microsoft.com/office/drawing/2014/main" id="{95C063E5-A9ED-4B9B-840D-0870F9716875}"/>
+                <a16:creationId xmlns:a16="http://schemas.microsoft.com/office/drawing/2014/main" id="{2C148E7A-A521-4B0D-9E00-AB194ADB2B68}"/>
               </a:ext>
             </a:extLst>
           </p:cNvPr>
@@ -12298,7 +12298,7 @@
           <p:cNvPr id="13" name="">
             <a:extLst xmlns:a="http://schemas.openxmlformats.org/drawingml/2006/main">
               <a:ext uri="{FF2B5EF4-FFF2-40B4-BE49-F238E27FC236}">
-                <a16:creationId xmlns:a16="http://schemas.microsoft.com/office/drawing/2014/main" id="{72CD2311-B8AA-4593-9592-6DB3747411CC}"/>
+                <a16:creationId xmlns:a16="http://schemas.microsoft.com/office/drawing/2014/main" id="{156B28F6-789C-4DBF-8B3D-8EEC0863209E}"/>
               </a:ext>
             </a:extLst>
           </p:cNvPr>
@@ -12343,7 +12343,7 @@
           <p:cNvPr id="14" name="">
             <a:extLst xmlns:a="http://schemas.openxmlformats.org/drawingml/2006/main">
               <a:ext uri="{FF2B5EF4-FFF2-40B4-BE49-F238E27FC236}">
-                <a16:creationId xmlns:a16="http://schemas.microsoft.com/office/drawing/2014/main" id="{57F08EBB-D3CB-444C-B24A-6CBBA4242F82}"/>
+                <a16:creationId xmlns:a16="http://schemas.microsoft.com/office/drawing/2014/main" id="{6186612C-FF83-4635-8E1C-F6B8B1673D9C}"/>
               </a:ext>
             </a:extLst>
           </p:cNvPr>
@@ -12378,7 +12378,7 @@
           <p:cNvPr id="15" name="">
             <a:extLst xmlns:a="http://schemas.openxmlformats.org/drawingml/2006/main">
               <a:ext uri="{FF2B5EF4-FFF2-40B4-BE49-F238E27FC236}">
-                <a16:creationId xmlns:a16="http://schemas.microsoft.com/office/drawing/2014/main" id="{E1CDF212-E0F4-44EB-982A-B69EAEC15C08}"/>
+                <a16:creationId xmlns:a16="http://schemas.microsoft.com/office/drawing/2014/main" id="{93DBFD58-8F1B-48B1-AB9A-6A099BAE834D}"/>
               </a:ext>
             </a:extLst>
           </p:cNvPr>
@@ -12423,7 +12423,7 @@
           <p:cNvPr id="16" name="">
             <a:extLst xmlns:a="http://schemas.openxmlformats.org/drawingml/2006/main">
               <a:ext uri="{FF2B5EF4-FFF2-40B4-BE49-F238E27FC236}">
-                <a16:creationId xmlns:a16="http://schemas.microsoft.com/office/drawing/2014/main" id="{22BC2BC5-154D-4E0E-8CB5-7AAEE022D034}"/>
+                <a16:creationId xmlns:a16="http://schemas.microsoft.com/office/drawing/2014/main" id="{F30A0962-8227-405F-BF81-6AF1EF18C3E5}"/>
               </a:ext>
             </a:extLst>
           </p:cNvPr>
@@ -12468,7 +12468,7 @@
           <p:cNvPr id="17" name="">
             <a:extLst xmlns:a="http://schemas.openxmlformats.org/drawingml/2006/main">
               <a:ext uri="{FF2B5EF4-FFF2-40B4-BE49-F238E27FC236}">
-                <a16:creationId xmlns:a16="http://schemas.microsoft.com/office/drawing/2014/main" id="{2B1605EA-7543-4FE2-8129-6CA603F453CC}"/>
+                <a16:creationId xmlns:a16="http://schemas.microsoft.com/office/drawing/2014/main" id="{3390B943-B34E-496B-AB9D-63A543F860E1}"/>
               </a:ext>
             </a:extLst>
           </p:cNvPr>
@@ -12513,7 +12513,7 @@
           <p:cNvPr id="18" name="">
             <a:extLst xmlns:a="http://schemas.openxmlformats.org/drawingml/2006/main">
               <a:ext uri="{FF2B5EF4-FFF2-40B4-BE49-F238E27FC236}">
-                <a16:creationId xmlns:a16="http://schemas.microsoft.com/office/drawing/2014/main" id="{91900606-E566-4F89-BE1E-F509DD8CEA5E}"/>
+                <a16:creationId xmlns:a16="http://schemas.microsoft.com/office/drawing/2014/main" id="{56987DD9-D912-45F1-BDB8-A81CF94638FD}"/>
               </a:ext>
             </a:extLst>
           </p:cNvPr>
@@ -12548,7 +12548,7 @@
           <p:cNvPr id="19" name="">
             <a:extLst xmlns:a="http://schemas.openxmlformats.org/drawingml/2006/main">
               <a:ext uri="{FF2B5EF4-FFF2-40B4-BE49-F238E27FC236}">
-                <a16:creationId xmlns:a16="http://schemas.microsoft.com/office/drawing/2014/main" id="{DFDA20C4-712C-4A1D-BA73-A0393E205FF3}"/>
+                <a16:creationId xmlns:a16="http://schemas.microsoft.com/office/drawing/2014/main" id="{F0991184-77DF-41F7-A0C3-176DC687D8FD}"/>
               </a:ext>
             </a:extLst>
           </p:cNvPr>
@@ -12593,7 +12593,7 @@
           <p:cNvPr id="20" name="">
             <a:extLst xmlns:a="http://schemas.openxmlformats.org/drawingml/2006/main">
               <a:ext uri="{FF2B5EF4-FFF2-40B4-BE49-F238E27FC236}">
-                <a16:creationId xmlns:a16="http://schemas.microsoft.com/office/drawing/2014/main" id="{3E5B13BE-5143-45A4-8B60-F12C85C8E95F}"/>
+                <a16:creationId xmlns:a16="http://schemas.microsoft.com/office/drawing/2014/main" id="{22EE4F06-0F26-4E3F-81AE-FA3447E37D64}"/>
               </a:ext>
             </a:extLst>
           </p:cNvPr>
@@ -12638,7 +12638,7 @@
           <p:cNvPr id="21" name="">
             <a:extLst xmlns:a="http://schemas.openxmlformats.org/drawingml/2006/main">
               <a:ext uri="{FF2B5EF4-FFF2-40B4-BE49-F238E27FC236}">
-                <a16:creationId xmlns:a16="http://schemas.microsoft.com/office/drawing/2014/main" id="{5FACC5F9-4619-456A-B9BD-45854ACE0828}"/>
+                <a16:creationId xmlns:a16="http://schemas.microsoft.com/office/drawing/2014/main" id="{3F5030CC-36C6-43D5-A631-BE82DEFDB101}"/>
               </a:ext>
             </a:extLst>
           </p:cNvPr>
@@ -12683,7 +12683,7 @@
           <p:cNvPr id="22" name="">
             <a:extLst xmlns:a="http://schemas.openxmlformats.org/drawingml/2006/main">
               <a:ext uri="{FF2B5EF4-FFF2-40B4-BE49-F238E27FC236}">
-                <a16:creationId xmlns:a16="http://schemas.microsoft.com/office/drawing/2014/main" id="{70FC97BF-31C2-455B-BE88-07538F68711B}"/>
+                <a16:creationId xmlns:a16="http://schemas.microsoft.com/office/drawing/2014/main" id="{8B59509A-51B3-4C63-90FF-9B62D25AB0D2}"/>
               </a:ext>
             </a:extLst>
           </p:cNvPr>
@@ -12718,7 +12718,7 @@
           <p:cNvPr id="23" name="">
             <a:extLst xmlns:a="http://schemas.openxmlformats.org/drawingml/2006/main">
               <a:ext uri="{FF2B5EF4-FFF2-40B4-BE49-F238E27FC236}">
-                <a16:creationId xmlns:a16="http://schemas.microsoft.com/office/drawing/2014/main" id="{EC3C8AE0-CAE6-48E4-92A2-22EE51C7B300}"/>
+                <a16:creationId xmlns:a16="http://schemas.microsoft.com/office/drawing/2014/main" id="{EBAADCDB-D9F0-4ACF-B438-7C939AE7B52E}"/>
               </a:ext>
             </a:extLst>
           </p:cNvPr>
@@ -12763,7 +12763,7 @@
           <p:cNvPr id="24" name="">
             <a:extLst xmlns:a="http://schemas.openxmlformats.org/drawingml/2006/main">
               <a:ext uri="{FF2B5EF4-FFF2-40B4-BE49-F238E27FC236}">
-                <a16:creationId xmlns:a16="http://schemas.microsoft.com/office/drawing/2014/main" id="{72715CAC-3AE1-4EE7-8646-F4CDE3DCE5ED}"/>
+                <a16:creationId xmlns:a16="http://schemas.microsoft.com/office/drawing/2014/main" id="{FC78DA03-9FFA-4F94-AF5E-86E7970C59A7}"/>
               </a:ext>
             </a:extLst>
           </p:cNvPr>
@@ -12808,7 +12808,7 @@
           <p:cNvPr id="25" name="">
             <a:extLst xmlns:a="http://schemas.openxmlformats.org/drawingml/2006/main">
               <a:ext uri="{FF2B5EF4-FFF2-40B4-BE49-F238E27FC236}">
-                <a16:creationId xmlns:a16="http://schemas.microsoft.com/office/drawing/2014/main" id="{28181E12-8570-40F0-A292-95387C244E91}"/>
+                <a16:creationId xmlns:a16="http://schemas.microsoft.com/office/drawing/2014/main" id="{B30AC46C-5B06-494A-B127-EAE847A45D91}"/>
               </a:ext>
             </a:extLst>
           </p:cNvPr>
@@ -12853,7 +12853,7 @@
           <p:cNvPr id="26" name="">
             <a:extLst xmlns:a="http://schemas.openxmlformats.org/drawingml/2006/main">
               <a:ext uri="{FF2B5EF4-FFF2-40B4-BE49-F238E27FC236}">
-                <a16:creationId xmlns:a16="http://schemas.microsoft.com/office/drawing/2014/main" id="{3E28536B-302B-41A3-8F63-3B404CBBC971}"/>
+                <a16:creationId xmlns:a16="http://schemas.microsoft.com/office/drawing/2014/main" id="{868EB437-0195-4764-BD0D-C97DD2B13D57}"/>
               </a:ext>
             </a:extLst>
           </p:cNvPr>
@@ -12888,7 +12888,7 @@
           <p:cNvPr id="27" name="">
             <a:extLst xmlns:a="http://schemas.openxmlformats.org/drawingml/2006/main">
               <a:ext uri="{FF2B5EF4-FFF2-40B4-BE49-F238E27FC236}">
-                <a16:creationId xmlns:a16="http://schemas.microsoft.com/office/drawing/2014/main" id="{C7AAB6BE-21DE-4938-BBAC-10485D82B865}"/>
+                <a16:creationId xmlns:a16="http://schemas.microsoft.com/office/drawing/2014/main" id="{5545D0AD-660A-464B-A5DB-1422657A18BA}"/>
               </a:ext>
             </a:extLst>
           </p:cNvPr>
@@ -12933,7 +12933,7 @@
           <p:cNvPr id="28" name="">
             <a:extLst xmlns:a="http://schemas.openxmlformats.org/drawingml/2006/main">
               <a:ext uri="{FF2B5EF4-FFF2-40B4-BE49-F238E27FC236}">
-                <a16:creationId xmlns:a16="http://schemas.microsoft.com/office/drawing/2014/main" id="{48939771-C947-43F5-9F1C-DAE63EEF71FD}"/>
+                <a16:creationId xmlns:a16="http://schemas.microsoft.com/office/drawing/2014/main" id="{A6A09D7B-97BC-457C-A2F8-385E90417E55}"/>
               </a:ext>
             </a:extLst>
           </p:cNvPr>
@@ -12978,7 +12978,7 @@
           <p:cNvPr id="29" name="">
             <a:extLst xmlns:a="http://schemas.openxmlformats.org/drawingml/2006/main">
               <a:ext uri="{FF2B5EF4-FFF2-40B4-BE49-F238E27FC236}">
-                <a16:creationId xmlns:a16="http://schemas.microsoft.com/office/drawing/2014/main" id="{0220ECAA-D3A5-460E-A1E9-C24F9A7BC485}"/>
+                <a16:creationId xmlns:a16="http://schemas.microsoft.com/office/drawing/2014/main" id="{E5FAD1CB-F399-46DD-8F15-46EE027B5B42}"/>
               </a:ext>
             </a:extLst>
           </p:cNvPr>
@@ -13023,7 +13023,7 @@
           <p:cNvPr id="30" name="">
             <a:extLst xmlns:a="http://schemas.openxmlformats.org/drawingml/2006/main">
               <a:ext uri="{FF2B5EF4-FFF2-40B4-BE49-F238E27FC236}">
-                <a16:creationId xmlns:a16="http://schemas.microsoft.com/office/drawing/2014/main" id="{EB855420-0EE2-480A-B2EA-F3BC3258990F}"/>
+                <a16:creationId xmlns:a16="http://schemas.microsoft.com/office/drawing/2014/main" id="{81A563AB-AAEF-4962-951A-271D3F2CE930}"/>
               </a:ext>
             </a:extLst>
           </p:cNvPr>
@@ -13066,7 +13066,7 @@
     </p:spTree>
     <p:extLst>
       <p:ext uri="{BB962C8B-B14F-4D97-AF65-F5344CB8AC3E}">
-        <p14:creationId xmlns:p14="http://schemas.microsoft.com/office/powerpoint/2010/main" val="1730842108"/>
+        <p14:creationId xmlns:p14="http://schemas.microsoft.com/office/powerpoint/2010/main" val="1493616454"/>
       </p:ext>
     </p:extLst>
   </p:cSld>
@@ -13090,7 +13090,7 @@
           <p:cNvPr id="35" name="">
             <a:extLst xmlns:a="http://schemas.openxmlformats.org/drawingml/2006/main">
               <a:ext uri="{FF2B5EF4-FFF2-40B4-BE49-F238E27FC236}">
-                <a16:creationId xmlns:a16="http://schemas.microsoft.com/office/drawing/2014/main" id="{20791925-2C69-487D-9A3B-C701BCF28611}"/>
+                <a16:creationId xmlns:a16="http://schemas.microsoft.com/office/drawing/2014/main" id="{215A4454-CCD2-49E2-973B-1325231CD844}"/>
               </a:ext>
             </a:extLst>
           </p:cNvPr>
@@ -13121,7 +13121,7 @@
           <p:cNvPr id="2" name="">
             <a:extLst xmlns:a="http://schemas.openxmlformats.org/drawingml/2006/main">
               <a:ext uri="{FF2B5EF4-FFF2-40B4-BE49-F238E27FC236}">
-                <a16:creationId xmlns:a16="http://schemas.microsoft.com/office/drawing/2014/main" id="{F70DA46F-38E4-4D35-8CA9-7A89CBAB3B08}"/>
+                <a16:creationId xmlns:a16="http://schemas.microsoft.com/office/drawing/2014/main" id="{7B1617C5-257A-424D-87BD-9BC43932E2FE}"/>
               </a:ext>
             </a:extLst>
           </p:cNvPr>
@@ -13166,7 +13166,7 @@
           <p:cNvPr id="3" name="">
             <a:extLst xmlns:a="http://schemas.openxmlformats.org/drawingml/2006/main">
               <a:ext uri="{FF2B5EF4-FFF2-40B4-BE49-F238E27FC236}">
-                <a16:creationId xmlns:a16="http://schemas.microsoft.com/office/drawing/2014/main" id="{4E175825-526B-41BA-A8DE-034447CA79B8}"/>
+                <a16:creationId xmlns:a16="http://schemas.microsoft.com/office/drawing/2014/main" id="{D3F1B37A-2C79-43A3-A100-A6D4082CC3F5}"/>
               </a:ext>
             </a:extLst>
           </p:cNvPr>
@@ -13211,7 +13211,7 @@
           <p:cNvPr id="4" name="">
             <a:extLst xmlns:a="http://schemas.openxmlformats.org/drawingml/2006/main">
               <a:ext uri="{FF2B5EF4-FFF2-40B4-BE49-F238E27FC236}">
-                <a16:creationId xmlns:a16="http://schemas.microsoft.com/office/drawing/2014/main" id="{B3D277E8-A1A8-465E-903E-43767D2557D0}"/>
+                <a16:creationId xmlns:a16="http://schemas.microsoft.com/office/drawing/2014/main" id="{F8609126-4A15-464A-BC26-B145C5566EC2}"/>
               </a:ext>
             </a:extLst>
           </p:cNvPr>
@@ -13256,7 +13256,7 @@
           <p:cNvPr id="5" name="">
             <a:extLst xmlns:a="http://schemas.openxmlformats.org/drawingml/2006/main">
               <a:ext uri="{FF2B5EF4-FFF2-40B4-BE49-F238E27FC236}">
-                <a16:creationId xmlns:a16="http://schemas.microsoft.com/office/drawing/2014/main" id="{47FD1B42-C070-4E02-9895-BC32FE0EF52B}"/>
+                <a16:creationId xmlns:a16="http://schemas.microsoft.com/office/drawing/2014/main" id="{54BD2516-06E1-4FAF-9A8A-049EEAC188AB}"/>
               </a:ext>
             </a:extLst>
           </p:cNvPr>
@@ -13287,7 +13287,7 @@
           <p:cNvPr id="6" name="">
             <a:extLst xmlns:a="http://schemas.openxmlformats.org/drawingml/2006/main">
               <a:ext uri="{FF2B5EF4-FFF2-40B4-BE49-F238E27FC236}">
-                <a16:creationId xmlns:a16="http://schemas.microsoft.com/office/drawing/2014/main" id="{96FF7A4B-EF4E-4F71-902E-750EA925B9DA}"/>
+                <a16:creationId xmlns:a16="http://schemas.microsoft.com/office/drawing/2014/main" id="{D841A0BA-B648-4303-9759-019FE9218947}"/>
               </a:ext>
             </a:extLst>
           </p:cNvPr>
@@ -13318,7 +13318,7 @@
           <p:cNvPr id="7" name="">
             <a:extLst xmlns:a="http://schemas.openxmlformats.org/drawingml/2006/main">
               <a:ext uri="{FF2B5EF4-FFF2-40B4-BE49-F238E27FC236}">
-                <a16:creationId xmlns:a16="http://schemas.microsoft.com/office/drawing/2014/main" id="{D8D4E8F9-1BC8-4D6F-99E4-255F3741EB13}"/>
+                <a16:creationId xmlns:a16="http://schemas.microsoft.com/office/drawing/2014/main" id="{EF43B7AE-AF37-4C80-8716-469CDB26AFEE}"/>
               </a:ext>
             </a:extLst>
           </p:cNvPr>
@@ -13363,7 +13363,7 @@
           <p:cNvPr id="8" name="">
             <a:extLst xmlns:a="http://schemas.openxmlformats.org/drawingml/2006/main">
               <a:ext uri="{FF2B5EF4-FFF2-40B4-BE49-F238E27FC236}">
-                <a16:creationId xmlns:a16="http://schemas.microsoft.com/office/drawing/2014/main" id="{4F863C14-DBF9-4BB3-A419-DF1A9C45DEB3}"/>
+                <a16:creationId xmlns:a16="http://schemas.microsoft.com/office/drawing/2014/main" id="{55B60DA2-507F-4F8A-8167-A3797611C648}"/>
               </a:ext>
             </a:extLst>
           </p:cNvPr>
@@ -13408,7 +13408,7 @@
           <p:cNvPr id="9" name="">
             <a:extLst xmlns:a="http://schemas.openxmlformats.org/drawingml/2006/main">
               <a:ext uri="{FF2B5EF4-FFF2-40B4-BE49-F238E27FC236}">
-                <a16:creationId xmlns:a16="http://schemas.microsoft.com/office/drawing/2014/main" id="{1218106B-595C-4A1B-A4B5-3E0DF8BFDF31}"/>
+                <a16:creationId xmlns:a16="http://schemas.microsoft.com/office/drawing/2014/main" id="{49C25A5F-9002-4737-8554-81DC9A0EDBB0}"/>
               </a:ext>
             </a:extLst>
           </p:cNvPr>
@@ -13439,7 +13439,7 @@
           <p:cNvPr id="10" name="">
             <a:extLst xmlns:a="http://schemas.openxmlformats.org/drawingml/2006/main">
               <a:ext uri="{FF2B5EF4-FFF2-40B4-BE49-F238E27FC236}">
-                <a16:creationId xmlns:a16="http://schemas.microsoft.com/office/drawing/2014/main" id="{3508D90D-2900-484A-948E-46F2D0180481}"/>
+                <a16:creationId xmlns:a16="http://schemas.microsoft.com/office/drawing/2014/main" id="{319C4E10-997B-44D6-A4DE-C4111A0F3DD5}"/>
               </a:ext>
             </a:extLst>
           </p:cNvPr>
@@ -13484,7 +13484,7 @@
           <p:cNvPr id="11" name="">
             <a:extLst xmlns:a="http://schemas.openxmlformats.org/drawingml/2006/main">
               <a:ext uri="{FF2B5EF4-FFF2-40B4-BE49-F238E27FC236}">
-                <a16:creationId xmlns:a16="http://schemas.microsoft.com/office/drawing/2014/main" id="{3E04274A-90C8-48EB-88F9-C38FB8D06166}"/>
+                <a16:creationId xmlns:a16="http://schemas.microsoft.com/office/drawing/2014/main" id="{C2643F00-BAEF-4AD9-A39E-7939A9F7B0BB}"/>
               </a:ext>
             </a:extLst>
           </p:cNvPr>
@@ -13529,7 +13529,7 @@
           <p:cNvPr id="12" name="">
             <a:extLst xmlns:a="http://schemas.openxmlformats.org/drawingml/2006/main">
               <a:ext uri="{FF2B5EF4-FFF2-40B4-BE49-F238E27FC236}">
-                <a16:creationId xmlns:a16="http://schemas.microsoft.com/office/drawing/2014/main" id="{A90A7B54-DA4F-444C-94A1-912593965631}"/>
+                <a16:creationId xmlns:a16="http://schemas.microsoft.com/office/drawing/2014/main" id="{E7998D81-2111-4450-85E4-B91D13FA8B21}"/>
               </a:ext>
             </a:extLst>
           </p:cNvPr>
@@ -13574,7 +13574,7 @@
           <p:cNvPr id="13" name="">
             <a:extLst xmlns:a="http://schemas.openxmlformats.org/drawingml/2006/main">
               <a:ext uri="{FF2B5EF4-FFF2-40B4-BE49-F238E27FC236}">
-                <a16:creationId xmlns:a16="http://schemas.microsoft.com/office/drawing/2014/main" id="{546F3737-1E96-4201-8D1F-4919328B95B3}"/>
+                <a16:creationId xmlns:a16="http://schemas.microsoft.com/office/drawing/2014/main" id="{82B76542-55E1-4551-8C6C-D0530562FB33}"/>
               </a:ext>
             </a:extLst>
           </p:cNvPr>
@@ -13607,7 +13607,7 @@
           <p:cNvPr id="14" name="">
             <a:extLst xmlns:a="http://schemas.openxmlformats.org/drawingml/2006/main">
               <a:ext uri="{FF2B5EF4-FFF2-40B4-BE49-F238E27FC236}">
-                <a16:creationId xmlns:a16="http://schemas.microsoft.com/office/drawing/2014/main" id="{A019C8F5-3F1B-4604-9F12-426CB1D2C8D1}"/>
+                <a16:creationId xmlns:a16="http://schemas.microsoft.com/office/drawing/2014/main" id="{5776F08B-3DAC-4846-936E-7E59EEC617A2}"/>
               </a:ext>
             </a:extLst>
           </p:cNvPr>
@@ -13652,7 +13652,7 @@
           <p:cNvPr id="15" name="">
             <a:extLst xmlns:a="http://schemas.openxmlformats.org/drawingml/2006/main">
               <a:ext uri="{FF2B5EF4-FFF2-40B4-BE49-F238E27FC236}">
-                <a16:creationId xmlns:a16="http://schemas.microsoft.com/office/drawing/2014/main" id="{3DAE7957-32F8-4B3A-B321-A91A569F4FBB}"/>
+                <a16:creationId xmlns:a16="http://schemas.microsoft.com/office/drawing/2014/main" id="{3C319C2E-2C6A-470E-91B6-4E542505C223}"/>
               </a:ext>
             </a:extLst>
           </p:cNvPr>
@@ -13697,7 +13697,7 @@
           <p:cNvPr id="16" name="">
             <a:extLst xmlns:a="http://schemas.openxmlformats.org/drawingml/2006/main">
               <a:ext uri="{FF2B5EF4-FFF2-40B4-BE49-F238E27FC236}">
-                <a16:creationId xmlns:a16="http://schemas.microsoft.com/office/drawing/2014/main" id="{D99C788B-A31A-455F-A2DB-3D57513E87D1}"/>
+                <a16:creationId xmlns:a16="http://schemas.microsoft.com/office/drawing/2014/main" id="{A514FE28-1FC1-470F-9888-A1DEC6A722A0}"/>
               </a:ext>
             </a:extLst>
           </p:cNvPr>
@@ -13742,7 +13742,7 @@
           <p:cNvPr id="17" name="">
             <a:extLst xmlns:a="http://schemas.openxmlformats.org/drawingml/2006/main">
               <a:ext uri="{FF2B5EF4-FFF2-40B4-BE49-F238E27FC236}">
-                <a16:creationId xmlns:a16="http://schemas.microsoft.com/office/drawing/2014/main" id="{098A6D7F-7009-4619-88BE-8531EEAC9182}"/>
+                <a16:creationId xmlns:a16="http://schemas.microsoft.com/office/drawing/2014/main" id="{C76BD9BD-E5C0-46D8-AFE0-7CD6E6699CCA}"/>
               </a:ext>
             </a:extLst>
           </p:cNvPr>
@@ -13775,7 +13775,7 @@
           <p:cNvPr id="18" name="">
             <a:extLst xmlns:a="http://schemas.openxmlformats.org/drawingml/2006/main">
               <a:ext uri="{FF2B5EF4-FFF2-40B4-BE49-F238E27FC236}">
-                <a16:creationId xmlns:a16="http://schemas.microsoft.com/office/drawing/2014/main" id="{C6E69ED1-0EC1-4D12-A56D-C7EC15FB44FA}"/>
+                <a16:creationId xmlns:a16="http://schemas.microsoft.com/office/drawing/2014/main" id="{D5FA994C-C663-4FBB-ABC7-0580BE47B1AA}"/>
               </a:ext>
             </a:extLst>
           </p:cNvPr>
@@ -13806,7 +13806,7 @@
           <p:cNvPr id="19" name="">
             <a:extLst xmlns:a="http://schemas.openxmlformats.org/drawingml/2006/main">
               <a:ext uri="{FF2B5EF4-FFF2-40B4-BE49-F238E27FC236}">
-                <a16:creationId xmlns:a16="http://schemas.microsoft.com/office/drawing/2014/main" id="{040F5920-2448-4F48-8AF8-93A5E93BE078}"/>
+                <a16:creationId xmlns:a16="http://schemas.microsoft.com/office/drawing/2014/main" id="{8B03B78D-BBE0-496A-8DAA-6D5C4F6872A9}"/>
               </a:ext>
             </a:extLst>
           </p:cNvPr>
@@ -13851,7 +13851,7 @@
           <p:cNvPr id="20" name="">
             <a:extLst xmlns:a="http://schemas.openxmlformats.org/drawingml/2006/main">
               <a:ext uri="{FF2B5EF4-FFF2-40B4-BE49-F238E27FC236}">
-                <a16:creationId xmlns:a16="http://schemas.microsoft.com/office/drawing/2014/main" id="{632CE7CD-8B0B-4376-AF46-B485201601CD}"/>
+                <a16:creationId xmlns:a16="http://schemas.microsoft.com/office/drawing/2014/main" id="{8B3E4567-31EF-41F1-9558-205C0EC2D230}"/>
               </a:ext>
             </a:extLst>
           </p:cNvPr>
@@ -13896,7 +13896,7 @@
           <p:cNvPr id="21" name="">
             <a:extLst xmlns:a="http://schemas.openxmlformats.org/drawingml/2006/main">
               <a:ext uri="{FF2B5EF4-FFF2-40B4-BE49-F238E27FC236}">
-                <a16:creationId xmlns:a16="http://schemas.microsoft.com/office/drawing/2014/main" id="{9AADF4CB-C768-4101-A637-AA894C052800}"/>
+                <a16:creationId xmlns:a16="http://schemas.microsoft.com/office/drawing/2014/main" id="{7607CC77-E02E-4F23-8F18-AF20B7D3B784}"/>
               </a:ext>
             </a:extLst>
           </p:cNvPr>
@@ -13941,7 +13941,7 @@
           <p:cNvPr id="22" name="">
             <a:extLst xmlns:a="http://schemas.openxmlformats.org/drawingml/2006/main">
               <a:ext uri="{FF2B5EF4-FFF2-40B4-BE49-F238E27FC236}">
-                <a16:creationId xmlns:a16="http://schemas.microsoft.com/office/drawing/2014/main" id="{9D917F78-24CF-4057-8F86-5AEB4F97AEBC}"/>
+                <a16:creationId xmlns:a16="http://schemas.microsoft.com/office/drawing/2014/main" id="{94CEEC58-E24D-482C-A206-AFB17A0D1D16}"/>
               </a:ext>
             </a:extLst>
           </p:cNvPr>
@@ -13974,7 +13974,7 @@
           <p:cNvPr id="23" name="">
             <a:extLst xmlns:a="http://schemas.openxmlformats.org/drawingml/2006/main">
               <a:ext uri="{FF2B5EF4-FFF2-40B4-BE49-F238E27FC236}">
-                <a16:creationId xmlns:a16="http://schemas.microsoft.com/office/drawing/2014/main" id="{6AF3C7DF-3764-4D52-94EA-6B29ABE3D232}"/>
+                <a16:creationId xmlns:a16="http://schemas.microsoft.com/office/drawing/2014/main" id="{6490F063-1CE4-4B3C-ADE6-0B7027BA07BE}"/>
               </a:ext>
             </a:extLst>
           </p:cNvPr>
@@ -14019,7 +14019,7 @@
           <p:cNvPr id="24" name="">
             <a:extLst xmlns:a="http://schemas.openxmlformats.org/drawingml/2006/main">
               <a:ext uri="{FF2B5EF4-FFF2-40B4-BE49-F238E27FC236}">
-                <a16:creationId xmlns:a16="http://schemas.microsoft.com/office/drawing/2014/main" id="{DB2A6F85-9B7C-4F49-A779-FFDEAE143A01}"/>
+                <a16:creationId xmlns:a16="http://schemas.microsoft.com/office/drawing/2014/main" id="{7B481FBA-2BEB-415F-BA7C-BB4ECB485069}"/>
               </a:ext>
             </a:extLst>
           </p:cNvPr>
@@ -14064,7 +14064,7 @@
           <p:cNvPr id="25" name="">
             <a:extLst xmlns:a="http://schemas.openxmlformats.org/drawingml/2006/main">
               <a:ext uri="{FF2B5EF4-FFF2-40B4-BE49-F238E27FC236}">
-                <a16:creationId xmlns:a16="http://schemas.microsoft.com/office/drawing/2014/main" id="{C51BDE9F-3EF1-48C9-A60A-8CDD49A7767C}"/>
+                <a16:creationId xmlns:a16="http://schemas.microsoft.com/office/drawing/2014/main" id="{914CBAC7-F128-48BE-92CE-54C2CE179F17}"/>
               </a:ext>
             </a:extLst>
           </p:cNvPr>
@@ -14109,7 +14109,7 @@
           <p:cNvPr id="26" name="">
             <a:extLst xmlns:a="http://schemas.openxmlformats.org/drawingml/2006/main">
               <a:ext uri="{FF2B5EF4-FFF2-40B4-BE49-F238E27FC236}">
-                <a16:creationId xmlns:a16="http://schemas.microsoft.com/office/drawing/2014/main" id="{23186C36-1B6E-4480-AD99-3EB319721EF4}"/>
+                <a16:creationId xmlns:a16="http://schemas.microsoft.com/office/drawing/2014/main" id="{7994FE34-A9BB-4F5D-A2E9-F21628887519}"/>
               </a:ext>
             </a:extLst>
           </p:cNvPr>
@@ -14142,7 +14142,7 @@
           <p:cNvPr id="27" name="">
             <a:extLst xmlns:a="http://schemas.openxmlformats.org/drawingml/2006/main">
               <a:ext uri="{FF2B5EF4-FFF2-40B4-BE49-F238E27FC236}">
-                <a16:creationId xmlns:a16="http://schemas.microsoft.com/office/drawing/2014/main" id="{1F4C22E9-53D0-4D1C-A2BD-2D1907B0C10D}"/>
+                <a16:creationId xmlns:a16="http://schemas.microsoft.com/office/drawing/2014/main" id="{6CE5A139-B640-4F5B-96CD-FED1CEB1D3E6}"/>
               </a:ext>
             </a:extLst>
           </p:cNvPr>
@@ -14187,7 +14187,7 @@
           <p:cNvPr id="28" name="">
             <a:extLst xmlns:a="http://schemas.openxmlformats.org/drawingml/2006/main">
               <a:ext uri="{FF2B5EF4-FFF2-40B4-BE49-F238E27FC236}">
-                <a16:creationId xmlns:a16="http://schemas.microsoft.com/office/drawing/2014/main" id="{4344C0A2-E363-42CE-89FA-E1B905F42404}"/>
+                <a16:creationId xmlns:a16="http://schemas.microsoft.com/office/drawing/2014/main" id="{0F0241DE-29A0-455C-99FE-6CBF52400BFA}"/>
               </a:ext>
             </a:extLst>
           </p:cNvPr>
@@ -14232,7 +14232,7 @@
           <p:cNvPr id="29" name="">
             <a:extLst xmlns:a="http://schemas.openxmlformats.org/drawingml/2006/main">
               <a:ext uri="{FF2B5EF4-FFF2-40B4-BE49-F238E27FC236}">
-                <a16:creationId xmlns:a16="http://schemas.microsoft.com/office/drawing/2014/main" id="{EAEE86D3-607D-4A33-8479-6EF035CB2946}"/>
+                <a16:creationId xmlns:a16="http://schemas.microsoft.com/office/drawing/2014/main" id="{70455B5B-42DA-4CCF-8994-BB32DE04A474}"/>
               </a:ext>
             </a:extLst>
           </p:cNvPr>
@@ -14277,7 +14277,7 @@
           <p:cNvPr id="30" name="">
             <a:extLst xmlns:a="http://schemas.openxmlformats.org/drawingml/2006/main">
               <a:ext uri="{FF2B5EF4-FFF2-40B4-BE49-F238E27FC236}">
-                <a16:creationId xmlns:a16="http://schemas.microsoft.com/office/drawing/2014/main" id="{F2976FB2-0051-463E-9E3E-879D26232A38}"/>
+                <a16:creationId xmlns:a16="http://schemas.microsoft.com/office/drawing/2014/main" id="{BBDC3FDA-61FB-4074-BD85-675CCA8A09C0}"/>
               </a:ext>
             </a:extLst>
           </p:cNvPr>
@@ -14312,7 +14312,7 @@
           <p:cNvPr id="31" name="">
             <a:extLst xmlns:a="http://schemas.openxmlformats.org/drawingml/2006/main">
               <a:ext uri="{FF2B5EF4-FFF2-40B4-BE49-F238E27FC236}">
-                <a16:creationId xmlns:a16="http://schemas.microsoft.com/office/drawing/2014/main" id="{E52E98C1-08FC-4DD8-A64A-B5E925BEA809}"/>
+                <a16:creationId xmlns:a16="http://schemas.microsoft.com/office/drawing/2014/main" id="{3A0B9697-B3F2-46FB-81DD-E594C01A2C50}"/>
               </a:ext>
             </a:extLst>
           </p:cNvPr>
@@ -14343,7 +14343,7 @@
           <p:cNvPr id="32" name="">
             <a:extLst xmlns:a="http://schemas.openxmlformats.org/drawingml/2006/main">
               <a:ext uri="{FF2B5EF4-FFF2-40B4-BE49-F238E27FC236}">
-                <a16:creationId xmlns:a16="http://schemas.microsoft.com/office/drawing/2014/main" id="{B0136112-403D-4D5E-94C0-678FFE93923D}"/>
+                <a16:creationId xmlns:a16="http://schemas.microsoft.com/office/drawing/2014/main" id="{5B6C0DD8-420A-46B7-9D7F-83EBC6A0A5D4}"/>
               </a:ext>
             </a:extLst>
           </p:cNvPr>
@@ -14388,7 +14388,7 @@
           <p:cNvPr id="33" name="">
             <a:extLst xmlns:a="http://schemas.openxmlformats.org/drawingml/2006/main">
               <a:ext uri="{FF2B5EF4-FFF2-40B4-BE49-F238E27FC236}">
-                <a16:creationId xmlns:a16="http://schemas.microsoft.com/office/drawing/2014/main" id="{705FC6C5-1620-4917-8A52-D0EC35D80CB2}"/>
+                <a16:creationId xmlns:a16="http://schemas.microsoft.com/office/drawing/2014/main" id="{F7BE4845-0A20-4E27-8081-22722948F901}"/>
               </a:ext>
             </a:extLst>
           </p:cNvPr>
@@ -14433,7 +14433,7 @@
           <p:cNvPr id="34" name="">
             <a:extLst xmlns:a="http://schemas.openxmlformats.org/drawingml/2006/main">
               <a:ext uri="{FF2B5EF4-FFF2-40B4-BE49-F238E27FC236}">
-                <a16:creationId xmlns:a16="http://schemas.microsoft.com/office/drawing/2014/main" id="{9267C2E7-9C65-41BB-80DB-F1ACD623B654}"/>
+                <a16:creationId xmlns:a16="http://schemas.microsoft.com/office/drawing/2014/main" id="{AB177461-218A-4776-B7A6-0037C44BB0D4}"/>
               </a:ext>
             </a:extLst>
           </p:cNvPr>
@@ -14476,7 +14476,7 @@
     </p:spTree>
     <p:extLst>
       <p:ext uri="{BB962C8B-B14F-4D97-AF65-F5344CB8AC3E}">
-        <p14:creationId xmlns:p14="http://schemas.microsoft.com/office/powerpoint/2010/main" val="356799506"/>
+        <p14:creationId xmlns:p14="http://schemas.microsoft.com/office/powerpoint/2010/main" val="1722458050"/>
       </p:ext>
     </p:extLst>
   </p:cSld>
@@ -14500,7 +14500,7 @@
           <p:cNvPr id="66" name="">
             <a:extLst xmlns:a="http://schemas.openxmlformats.org/drawingml/2006/main">
               <a:ext uri="{FF2B5EF4-FFF2-40B4-BE49-F238E27FC236}">
-                <a16:creationId xmlns:a16="http://schemas.microsoft.com/office/drawing/2014/main" id="{FE599167-81AE-4355-A281-2EB0C2E42F46}"/>
+                <a16:creationId xmlns:a16="http://schemas.microsoft.com/office/drawing/2014/main" id="{87EFE992-67A9-4E66-91AD-96F30F42FF70}"/>
               </a:ext>
             </a:extLst>
           </p:cNvPr>
@@ -14531,7 +14531,7 @@
           <p:cNvPr id="2" name="">
             <a:extLst xmlns:a="http://schemas.openxmlformats.org/drawingml/2006/main">
               <a:ext uri="{FF2B5EF4-FFF2-40B4-BE49-F238E27FC236}">
-                <a16:creationId xmlns:a16="http://schemas.microsoft.com/office/drawing/2014/main" id="{DF79CEC4-A81C-46C6-BF84-5838FA204A23}"/>
+                <a16:creationId xmlns:a16="http://schemas.microsoft.com/office/drawing/2014/main" id="{EEC7FFB8-B37E-4C02-8435-3DAAFF7DA7D5}"/>
               </a:ext>
             </a:extLst>
           </p:cNvPr>
@@ -14576,7 +14576,7 @@
           <p:cNvPr id="3" name="">
             <a:extLst xmlns:a="http://schemas.openxmlformats.org/drawingml/2006/main">
               <a:ext uri="{FF2B5EF4-FFF2-40B4-BE49-F238E27FC236}">
-                <a16:creationId xmlns:a16="http://schemas.microsoft.com/office/drawing/2014/main" id="{19318ED8-06E4-47E0-8EF8-86A0B26A9F88}"/>
+                <a16:creationId xmlns:a16="http://schemas.microsoft.com/office/drawing/2014/main" id="{C4153E5A-B925-42A4-AF87-3200DFBB598F}"/>
               </a:ext>
             </a:extLst>
           </p:cNvPr>
@@ -14621,7 +14621,7 @@
           <p:cNvPr id="4" name="">
             <a:extLst xmlns:a="http://schemas.openxmlformats.org/drawingml/2006/main">
               <a:ext uri="{FF2B5EF4-FFF2-40B4-BE49-F238E27FC236}">
-                <a16:creationId xmlns:a16="http://schemas.microsoft.com/office/drawing/2014/main" id="{6617BB29-5BEC-412C-B400-87BBE454D8B2}"/>
+                <a16:creationId xmlns:a16="http://schemas.microsoft.com/office/drawing/2014/main" id="{44FFE2E7-C240-4470-908A-42C2CDE2F46C}"/>
               </a:ext>
             </a:extLst>
           </p:cNvPr>
@@ -14666,7 +14666,7 @@
           <p:cNvPr id="5" name="">
             <a:extLst xmlns:a="http://schemas.openxmlformats.org/drawingml/2006/main">
               <a:ext uri="{FF2B5EF4-FFF2-40B4-BE49-F238E27FC236}">
-                <a16:creationId xmlns:a16="http://schemas.microsoft.com/office/drawing/2014/main" id="{4D3E9911-75FB-4657-9F43-9DD0D5F78838}"/>
+                <a16:creationId xmlns:a16="http://schemas.microsoft.com/office/drawing/2014/main" id="{D4965291-7D7A-4251-8CA8-0DD0948A1571}"/>
               </a:ext>
             </a:extLst>
           </p:cNvPr>
@@ -14697,7 +14697,7 @@
           <p:cNvPr id="6" name="">
             <a:extLst xmlns:a="http://schemas.openxmlformats.org/drawingml/2006/main">
               <a:ext uri="{FF2B5EF4-FFF2-40B4-BE49-F238E27FC236}">
-                <a16:creationId xmlns:a16="http://schemas.microsoft.com/office/drawing/2014/main" id="{78130545-E33B-4008-9DC3-F09F01532386}"/>
+                <a16:creationId xmlns:a16="http://schemas.microsoft.com/office/drawing/2014/main" id="{B08088DD-2996-4F28-A4F0-25182985BF01}"/>
               </a:ext>
             </a:extLst>
           </p:cNvPr>
@@ -14728,7 +14728,7 @@
           <p:cNvPr id="7" name="">
             <a:extLst xmlns:a="http://schemas.openxmlformats.org/drawingml/2006/main">
               <a:ext uri="{FF2B5EF4-FFF2-40B4-BE49-F238E27FC236}">
-                <a16:creationId xmlns:a16="http://schemas.microsoft.com/office/drawing/2014/main" id="{B5205C9A-0291-4AFB-8450-0BED052C4607}"/>
+                <a16:creationId xmlns:a16="http://schemas.microsoft.com/office/drawing/2014/main" id="{E2B1DF51-E49C-49A2-B8EA-40FEB21A69C2}"/>
               </a:ext>
             </a:extLst>
           </p:cNvPr>
@@ -14773,7 +14773,7 @@
           <p:cNvPr id="8" name="">
             <a:extLst xmlns:a="http://schemas.openxmlformats.org/drawingml/2006/main">
               <a:ext uri="{FF2B5EF4-FFF2-40B4-BE49-F238E27FC236}">
-                <a16:creationId xmlns:a16="http://schemas.microsoft.com/office/drawing/2014/main" id="{70C97EE1-0E75-41DA-A2E4-FA02D5A67929}"/>
+                <a16:creationId xmlns:a16="http://schemas.microsoft.com/office/drawing/2014/main" id="{77F36446-AFD2-4DF8-ADD6-61DFE9A0A6DF}"/>
               </a:ext>
             </a:extLst>
           </p:cNvPr>
@@ -14818,7 +14818,7 @@
           <p:cNvPr id="9" name="">
             <a:extLst xmlns:a="http://schemas.openxmlformats.org/drawingml/2006/main">
               <a:ext uri="{FF2B5EF4-FFF2-40B4-BE49-F238E27FC236}">
-                <a16:creationId xmlns:a16="http://schemas.microsoft.com/office/drawing/2014/main" id="{F3992B90-9898-41E4-B4F4-7674217A24DF}"/>
+                <a16:creationId xmlns:a16="http://schemas.microsoft.com/office/drawing/2014/main" id="{97964C68-3047-40BF-8346-7BFCB9BE0C27}"/>
               </a:ext>
             </a:extLst>
           </p:cNvPr>
@@ -14851,7 +14851,7 @@
           <p:cNvPr id="10" name="">
             <a:extLst xmlns:a="http://schemas.openxmlformats.org/drawingml/2006/main">
               <a:ext uri="{FF2B5EF4-FFF2-40B4-BE49-F238E27FC236}">
-                <a16:creationId xmlns:a16="http://schemas.microsoft.com/office/drawing/2014/main" id="{BB546E55-0EDE-4517-8B4A-A7FE39B832C7}"/>
+                <a16:creationId xmlns:a16="http://schemas.microsoft.com/office/drawing/2014/main" id="{C703C727-BF44-4B8C-9371-0182F38CF9BD}"/>
               </a:ext>
             </a:extLst>
           </p:cNvPr>
@@ -14882,7 +14882,7 @@
           <p:cNvPr id="11" name="">
             <a:extLst xmlns:a="http://schemas.openxmlformats.org/drawingml/2006/main">
               <a:ext uri="{FF2B5EF4-FFF2-40B4-BE49-F238E27FC236}">
-                <a16:creationId xmlns:a16="http://schemas.microsoft.com/office/drawing/2014/main" id="{DCF07ADA-7CFD-4494-83DB-F36DD2C051B4}"/>
+                <a16:creationId xmlns:a16="http://schemas.microsoft.com/office/drawing/2014/main" id="{FC005439-7E83-466D-8679-461F02181C96}"/>
               </a:ext>
             </a:extLst>
           </p:cNvPr>
@@ -14927,7 +14927,7 @@
           <p:cNvPr id="12" name="">
             <a:extLst xmlns:a="http://schemas.openxmlformats.org/drawingml/2006/main">
               <a:ext uri="{FF2B5EF4-FFF2-40B4-BE49-F238E27FC236}">
-                <a16:creationId xmlns:a16="http://schemas.microsoft.com/office/drawing/2014/main" id="{EE77BADE-EFF3-4975-B20D-FC5443C03753}"/>
+                <a16:creationId xmlns:a16="http://schemas.microsoft.com/office/drawing/2014/main" id="{4937435D-94B5-4447-94E2-216A64B5AA32}"/>
               </a:ext>
             </a:extLst>
           </p:cNvPr>
@@ -14962,7 +14962,7 @@
           <p:cNvPr id="13" name="">
             <a:extLst xmlns:a="http://schemas.openxmlformats.org/drawingml/2006/main">
               <a:ext uri="{FF2B5EF4-FFF2-40B4-BE49-F238E27FC236}">
-                <a16:creationId xmlns:a16="http://schemas.microsoft.com/office/drawing/2014/main" id="{FBDCB1E5-54F0-47EB-B157-FF293D55387F}"/>
+                <a16:creationId xmlns:a16="http://schemas.microsoft.com/office/drawing/2014/main" id="{9B13D3AA-EAA7-41A9-81A5-461CB0BB46EC}"/>
               </a:ext>
             </a:extLst>
           </p:cNvPr>
@@ -15007,7 +15007,7 @@
           <p:cNvPr id="14" name="">
             <a:extLst xmlns:a="http://schemas.openxmlformats.org/drawingml/2006/main">
               <a:ext uri="{FF2B5EF4-FFF2-40B4-BE49-F238E27FC236}">
-                <a16:creationId xmlns:a16="http://schemas.microsoft.com/office/drawing/2014/main" id="{D1188BC9-4665-435E-838F-3A14D26446AD}"/>
+                <a16:creationId xmlns:a16="http://schemas.microsoft.com/office/drawing/2014/main" id="{FFE8E7D4-BD49-4317-A393-27BDBA36BEA9}"/>
               </a:ext>
             </a:extLst>
           </p:cNvPr>
@@ -15042,7 +15042,7 @@
           <p:cNvPr id="15" name="">
             <a:extLst xmlns:a="http://schemas.openxmlformats.org/drawingml/2006/main">
               <a:ext uri="{FF2B5EF4-FFF2-40B4-BE49-F238E27FC236}">
-                <a16:creationId xmlns:a16="http://schemas.microsoft.com/office/drawing/2014/main" id="{9C4FC378-DC17-439A-B037-ECF735C919F8}"/>
+                <a16:creationId xmlns:a16="http://schemas.microsoft.com/office/drawing/2014/main" id="{AC18A968-3A38-43D7-A565-96623347F619}"/>
               </a:ext>
             </a:extLst>
           </p:cNvPr>
@@ -15087,7 +15087,7 @@
           <p:cNvPr id="16" name="">
             <a:extLst xmlns:a="http://schemas.openxmlformats.org/drawingml/2006/main">
               <a:ext uri="{FF2B5EF4-FFF2-40B4-BE49-F238E27FC236}">
-                <a16:creationId xmlns:a16="http://schemas.microsoft.com/office/drawing/2014/main" id="{109EE8F8-A742-4600-B907-E7C5BCCC19A4}"/>
+                <a16:creationId xmlns:a16="http://schemas.microsoft.com/office/drawing/2014/main" id="{95332884-53A8-438E-A8B8-61A0921B8CD2}"/>
               </a:ext>
             </a:extLst>
           </p:cNvPr>
@@ -15122,7 +15122,7 @@
           <p:cNvPr id="17" name="">
             <a:extLst xmlns:a="http://schemas.openxmlformats.org/drawingml/2006/main">
               <a:ext uri="{FF2B5EF4-FFF2-40B4-BE49-F238E27FC236}">
-                <a16:creationId xmlns:a16="http://schemas.microsoft.com/office/drawing/2014/main" id="{EFD1442E-7348-4812-AB52-71B1EF92A025}"/>
+                <a16:creationId xmlns:a16="http://schemas.microsoft.com/office/drawing/2014/main" id="{6FE62D10-5469-45F5-B61D-FFCFA877488B}"/>
               </a:ext>
             </a:extLst>
           </p:cNvPr>
@@ -15167,7 +15167,7 @@
           <p:cNvPr id="18" name="">
             <a:extLst xmlns:a="http://schemas.openxmlformats.org/drawingml/2006/main">
               <a:ext uri="{FF2B5EF4-FFF2-40B4-BE49-F238E27FC236}">
-                <a16:creationId xmlns:a16="http://schemas.microsoft.com/office/drawing/2014/main" id="{A7DD7E6E-17B8-4AF8-B3AC-D287734D3ADE}"/>
+                <a16:creationId xmlns:a16="http://schemas.microsoft.com/office/drawing/2014/main" id="{05939F4B-1D11-412A-92E1-BB8F077B3AF7}"/>
               </a:ext>
             </a:extLst>
           </p:cNvPr>
@@ -15202,7 +15202,7 @@
           <p:cNvPr id="19" name="">
             <a:extLst xmlns:a="http://schemas.openxmlformats.org/drawingml/2006/main">
               <a:ext uri="{FF2B5EF4-FFF2-40B4-BE49-F238E27FC236}">
-                <a16:creationId xmlns:a16="http://schemas.microsoft.com/office/drawing/2014/main" id="{D7809FB9-1896-49C8-8A5F-6506E325E59E}"/>
+                <a16:creationId xmlns:a16="http://schemas.microsoft.com/office/drawing/2014/main" id="{5FD9EC92-1080-46DC-BF2B-4D08CA050FF0}"/>
               </a:ext>
             </a:extLst>
           </p:cNvPr>
@@ -15247,7 +15247,7 @@
           <p:cNvPr id="20" name="">
             <a:extLst xmlns:a="http://schemas.openxmlformats.org/drawingml/2006/main">
               <a:ext uri="{FF2B5EF4-FFF2-40B4-BE49-F238E27FC236}">
-                <a16:creationId xmlns:a16="http://schemas.microsoft.com/office/drawing/2014/main" id="{A428B9F0-A1A3-4B21-B172-4BCD96B1BED1}"/>
+                <a16:creationId xmlns:a16="http://schemas.microsoft.com/office/drawing/2014/main" id="{81D4A0D2-6D97-4179-92FA-507A9B3DA317}"/>
               </a:ext>
             </a:extLst>
           </p:cNvPr>
@@ -15282,7 +15282,7 @@
           <p:cNvPr id="21" name="">
             <a:extLst xmlns:a="http://schemas.openxmlformats.org/drawingml/2006/main">
               <a:ext uri="{FF2B5EF4-FFF2-40B4-BE49-F238E27FC236}">
-                <a16:creationId xmlns:a16="http://schemas.microsoft.com/office/drawing/2014/main" id="{E21D1CC1-A083-4648-8EFC-24CD4DE153C5}"/>
+                <a16:creationId xmlns:a16="http://schemas.microsoft.com/office/drawing/2014/main" id="{EB0D7C55-5EBC-455E-A197-6B56799AAD2E}"/>
               </a:ext>
             </a:extLst>
           </p:cNvPr>
@@ -15327,7 +15327,7 @@
           <p:cNvPr id="22" name="">
             <a:extLst xmlns:a="http://schemas.openxmlformats.org/drawingml/2006/main">
               <a:ext uri="{FF2B5EF4-FFF2-40B4-BE49-F238E27FC236}">
-                <a16:creationId xmlns:a16="http://schemas.microsoft.com/office/drawing/2014/main" id="{7C49F79C-2CAE-4B02-9882-8939E2034280}"/>
+                <a16:creationId xmlns:a16="http://schemas.microsoft.com/office/drawing/2014/main" id="{CDE8CE0A-904F-4934-8A02-B135980C9466}"/>
               </a:ext>
             </a:extLst>
           </p:cNvPr>
@@ -15362,7 +15362,7 @@
           <p:cNvPr id="23" name="">
             <a:extLst xmlns:a="http://schemas.openxmlformats.org/drawingml/2006/main">
               <a:ext uri="{FF2B5EF4-FFF2-40B4-BE49-F238E27FC236}">
-                <a16:creationId xmlns:a16="http://schemas.microsoft.com/office/drawing/2014/main" id="{E8D90964-4ECC-4B47-BA3D-98397093C72E}"/>
+                <a16:creationId xmlns:a16="http://schemas.microsoft.com/office/drawing/2014/main" id="{EA4F9C9D-F918-4560-9A8E-8A6650BB5D02}"/>
               </a:ext>
             </a:extLst>
           </p:cNvPr>
@@ -15407,7 +15407,7 @@
           <p:cNvPr id="24" name="">
             <a:extLst xmlns:a="http://schemas.openxmlformats.org/drawingml/2006/main">
               <a:ext uri="{FF2B5EF4-FFF2-40B4-BE49-F238E27FC236}">
-                <a16:creationId xmlns:a16="http://schemas.microsoft.com/office/drawing/2014/main" id="{380A5A1B-001A-4AC6-961F-8AEEEAAF2AEC}"/>
+                <a16:creationId xmlns:a16="http://schemas.microsoft.com/office/drawing/2014/main" id="{3CAB9D8B-6E34-4562-913E-76EDE4294585}"/>
               </a:ext>
             </a:extLst>
           </p:cNvPr>
@@ -15440,7 +15440,7 @@
           <p:cNvPr id="25" name="">
             <a:extLst xmlns:a="http://schemas.openxmlformats.org/drawingml/2006/main">
               <a:ext uri="{FF2B5EF4-FFF2-40B4-BE49-F238E27FC236}">
-                <a16:creationId xmlns:a16="http://schemas.microsoft.com/office/drawing/2014/main" id="{DA91F50D-B842-4AF9-A315-0DD3D50C0AF7}"/>
+                <a16:creationId xmlns:a16="http://schemas.microsoft.com/office/drawing/2014/main" id="{DFBD9220-BF88-4AA8-8830-BA097F89E271}"/>
               </a:ext>
             </a:extLst>
           </p:cNvPr>
@@ -15471,7 +15471,7 @@
           <p:cNvPr id="26" name="">
             <a:extLst xmlns:a="http://schemas.openxmlformats.org/drawingml/2006/main">
               <a:ext uri="{FF2B5EF4-FFF2-40B4-BE49-F238E27FC236}">
-                <a16:creationId xmlns:a16="http://schemas.microsoft.com/office/drawing/2014/main" id="{829BDCED-5544-4ADD-A7FB-8741F3C4AEEE}"/>
+                <a16:creationId xmlns:a16="http://schemas.microsoft.com/office/drawing/2014/main" id="{A3730D01-B138-444D-B935-B4115DA32DFF}"/>
               </a:ext>
             </a:extLst>
           </p:cNvPr>
@@ -15516,7 +15516,7 @@
           <p:cNvPr id="27" name="">
             <a:extLst xmlns:a="http://schemas.openxmlformats.org/drawingml/2006/main">
               <a:ext uri="{FF2B5EF4-FFF2-40B4-BE49-F238E27FC236}">
-                <a16:creationId xmlns:a16="http://schemas.microsoft.com/office/drawing/2014/main" id="{318FD7CE-4577-41B1-96F9-9C8DD49E4EDC}"/>
+                <a16:creationId xmlns:a16="http://schemas.microsoft.com/office/drawing/2014/main" id="{56B68F63-E8B6-4F2B-93D6-353D24C73E12}"/>
               </a:ext>
             </a:extLst>
           </p:cNvPr>
@@ -15551,7 +15551,7 @@
           <p:cNvPr id="28" name="">
             <a:extLst xmlns:a="http://schemas.openxmlformats.org/drawingml/2006/main">
               <a:ext uri="{FF2B5EF4-FFF2-40B4-BE49-F238E27FC236}">
-                <a16:creationId xmlns:a16="http://schemas.microsoft.com/office/drawing/2014/main" id="{29C0BD93-18C4-405C-A516-641E88220646}"/>
+                <a16:creationId xmlns:a16="http://schemas.microsoft.com/office/drawing/2014/main" id="{306202C0-4E1E-4C95-963F-D647DE0C5698}"/>
               </a:ext>
             </a:extLst>
           </p:cNvPr>
@@ -15596,7 +15596,7 @@
           <p:cNvPr id="29" name="">
             <a:extLst xmlns:a="http://schemas.openxmlformats.org/drawingml/2006/main">
               <a:ext uri="{FF2B5EF4-FFF2-40B4-BE49-F238E27FC236}">
-                <a16:creationId xmlns:a16="http://schemas.microsoft.com/office/drawing/2014/main" id="{5690E39F-EAB7-4085-9E29-D3BBBF2AE9FF}"/>
+                <a16:creationId xmlns:a16="http://schemas.microsoft.com/office/drawing/2014/main" id="{66F9B279-EAD8-47C0-A7D5-00D120A69F9F}"/>
               </a:ext>
             </a:extLst>
           </p:cNvPr>
@@ -15641,7 +15641,7 @@
           <p:cNvPr id="30" name="">
             <a:extLst xmlns:a="http://schemas.openxmlformats.org/drawingml/2006/main">
               <a:ext uri="{FF2B5EF4-FFF2-40B4-BE49-F238E27FC236}">
-                <a16:creationId xmlns:a16="http://schemas.microsoft.com/office/drawing/2014/main" id="{9ADC0054-9539-4A9A-9891-73378254EA6A}"/>
+                <a16:creationId xmlns:a16="http://schemas.microsoft.com/office/drawing/2014/main" id="{C65962E1-215C-453C-8F69-91B1A6EF800E}"/>
               </a:ext>
             </a:extLst>
           </p:cNvPr>
@@ -15676,7 +15676,7 @@
           <p:cNvPr id="31" name="">
             <a:extLst xmlns:a="http://schemas.openxmlformats.org/drawingml/2006/main">
               <a:ext uri="{FF2B5EF4-FFF2-40B4-BE49-F238E27FC236}">
-                <a16:creationId xmlns:a16="http://schemas.microsoft.com/office/drawing/2014/main" id="{3CA1B21B-E61D-49DB-B7A9-BCD9A75F8243}"/>
+                <a16:creationId xmlns:a16="http://schemas.microsoft.com/office/drawing/2014/main" id="{86524486-7C95-4C97-ADBC-D0E24617C2FF}"/>
               </a:ext>
             </a:extLst>
           </p:cNvPr>
@@ -15721,7 +15721,7 @@
           <p:cNvPr id="32" name="">
             <a:extLst xmlns:a="http://schemas.openxmlformats.org/drawingml/2006/main">
               <a:ext uri="{FF2B5EF4-FFF2-40B4-BE49-F238E27FC236}">
-                <a16:creationId xmlns:a16="http://schemas.microsoft.com/office/drawing/2014/main" id="{8D7C65A5-7309-4068-8456-CAB3A793E7A5}"/>
+                <a16:creationId xmlns:a16="http://schemas.microsoft.com/office/drawing/2014/main" id="{632C8047-707D-4B1D-93DC-3192EC6F8787}"/>
               </a:ext>
             </a:extLst>
           </p:cNvPr>
@@ -15766,7 +15766,7 @@
           <p:cNvPr id="33" name="">
             <a:extLst xmlns:a="http://schemas.openxmlformats.org/drawingml/2006/main">
               <a:ext uri="{FF2B5EF4-FFF2-40B4-BE49-F238E27FC236}">
-                <a16:creationId xmlns:a16="http://schemas.microsoft.com/office/drawing/2014/main" id="{FCE785C3-86C7-4C29-A5A0-6814B332EB45}"/>
+                <a16:creationId xmlns:a16="http://schemas.microsoft.com/office/drawing/2014/main" id="{53BC17E8-3F8F-43F5-BB05-5A6A9878DDB8}"/>
               </a:ext>
             </a:extLst>
           </p:cNvPr>
@@ -15801,7 +15801,7 @@
           <p:cNvPr id="34" name="">
             <a:extLst xmlns:a="http://schemas.openxmlformats.org/drawingml/2006/main">
               <a:ext uri="{FF2B5EF4-FFF2-40B4-BE49-F238E27FC236}">
-                <a16:creationId xmlns:a16="http://schemas.microsoft.com/office/drawing/2014/main" id="{0A628E16-E542-4C8F-96B5-65FD18B4C3CA}"/>
+                <a16:creationId xmlns:a16="http://schemas.microsoft.com/office/drawing/2014/main" id="{CAB460FD-745B-4460-B049-6A25B14E193A}"/>
               </a:ext>
             </a:extLst>
           </p:cNvPr>
@@ -15846,7 +15846,7 @@
           <p:cNvPr id="35" name="">
             <a:extLst xmlns:a="http://schemas.openxmlformats.org/drawingml/2006/main">
               <a:ext uri="{FF2B5EF4-FFF2-40B4-BE49-F238E27FC236}">
-                <a16:creationId xmlns:a16="http://schemas.microsoft.com/office/drawing/2014/main" id="{B426C027-D23E-4964-A1DE-9BBECA9F7E38}"/>
+                <a16:creationId xmlns:a16="http://schemas.microsoft.com/office/drawing/2014/main" id="{E2DBD891-73DF-4BCF-AF27-CBD0EECC3F01}"/>
               </a:ext>
             </a:extLst>
           </p:cNvPr>
@@ -15891,7 +15891,7 @@
           <p:cNvPr id="36" name="">
             <a:extLst xmlns:a="http://schemas.openxmlformats.org/drawingml/2006/main">
               <a:ext uri="{FF2B5EF4-FFF2-40B4-BE49-F238E27FC236}">
-                <a16:creationId xmlns:a16="http://schemas.microsoft.com/office/drawing/2014/main" id="{971B9875-7129-4B8F-827F-D374DACDE72C}"/>
+                <a16:creationId xmlns:a16="http://schemas.microsoft.com/office/drawing/2014/main" id="{D83671B9-EC43-404F-A0CF-4CD804B5EB28}"/>
               </a:ext>
             </a:extLst>
           </p:cNvPr>
@@ -15924,7 +15924,7 @@
           <p:cNvPr id="37" name="">
             <a:extLst xmlns:a="http://schemas.openxmlformats.org/drawingml/2006/main">
               <a:ext uri="{FF2B5EF4-FFF2-40B4-BE49-F238E27FC236}">
-                <a16:creationId xmlns:a16="http://schemas.microsoft.com/office/drawing/2014/main" id="{A56C09B1-9165-44B4-BBFD-D33E9983F4BE}"/>
+                <a16:creationId xmlns:a16="http://schemas.microsoft.com/office/drawing/2014/main" id="{C5C6B2B1-193E-4B65-B8E7-00C7E76FC708}"/>
               </a:ext>
             </a:extLst>
           </p:cNvPr>
@@ -15955,7 +15955,7 @@
           <p:cNvPr id="38" name="">
             <a:extLst xmlns:a="http://schemas.openxmlformats.org/drawingml/2006/main">
               <a:ext uri="{FF2B5EF4-FFF2-40B4-BE49-F238E27FC236}">
-                <a16:creationId xmlns:a16="http://schemas.microsoft.com/office/drawing/2014/main" id="{66723421-788A-4805-A850-F1FAAE38A646}"/>
+                <a16:creationId xmlns:a16="http://schemas.microsoft.com/office/drawing/2014/main" id="{70F197FE-01E2-4D60-93BD-141BB39DEC21}"/>
               </a:ext>
             </a:extLst>
           </p:cNvPr>
@@ -16000,7 +16000,7 @@
           <p:cNvPr id="39" name="">
             <a:extLst xmlns:a="http://schemas.openxmlformats.org/drawingml/2006/main">
               <a:ext uri="{FF2B5EF4-FFF2-40B4-BE49-F238E27FC236}">
-                <a16:creationId xmlns:a16="http://schemas.microsoft.com/office/drawing/2014/main" id="{6E5A4404-D62B-4981-977E-F8D879B2399D}"/>
+                <a16:creationId xmlns:a16="http://schemas.microsoft.com/office/drawing/2014/main" id="{CA6C8A1B-ED1A-48A8-956A-772CBA14C5E1}"/>
               </a:ext>
             </a:extLst>
           </p:cNvPr>
@@ -16035,7 +16035,7 @@
           <p:cNvPr id="40" name="">
             <a:extLst xmlns:a="http://schemas.openxmlformats.org/drawingml/2006/main">
               <a:ext uri="{FF2B5EF4-FFF2-40B4-BE49-F238E27FC236}">
-                <a16:creationId xmlns:a16="http://schemas.microsoft.com/office/drawing/2014/main" id="{11FBAA05-3312-438E-BC20-49CB360B6935}"/>
+                <a16:creationId xmlns:a16="http://schemas.microsoft.com/office/drawing/2014/main" id="{61BC4CB3-407A-48E7-AA4D-98FD2DED760E}"/>
               </a:ext>
             </a:extLst>
           </p:cNvPr>
@@ -16080,7 +16080,7 @@
           <p:cNvPr id="41" name="">
             <a:extLst xmlns:a="http://schemas.openxmlformats.org/drawingml/2006/main">
               <a:ext uri="{FF2B5EF4-FFF2-40B4-BE49-F238E27FC236}">
-                <a16:creationId xmlns:a16="http://schemas.microsoft.com/office/drawing/2014/main" id="{6B198818-C614-4113-A17F-0C051DED65B8}"/>
+                <a16:creationId xmlns:a16="http://schemas.microsoft.com/office/drawing/2014/main" id="{6E7482E2-CC16-4C31-B484-40F29E779C84}"/>
               </a:ext>
             </a:extLst>
           </p:cNvPr>
@@ -16125,7 +16125,7 @@
           <p:cNvPr id="42" name="">
             <a:extLst xmlns:a="http://schemas.openxmlformats.org/drawingml/2006/main">
               <a:ext uri="{FF2B5EF4-FFF2-40B4-BE49-F238E27FC236}">
-                <a16:creationId xmlns:a16="http://schemas.microsoft.com/office/drawing/2014/main" id="{F3D26F9D-354F-406D-ABDE-69457ADD95CC}"/>
+                <a16:creationId xmlns:a16="http://schemas.microsoft.com/office/drawing/2014/main" id="{A7EDCE99-9744-42E4-9AC5-5D4E6EF978DD}"/>
               </a:ext>
             </a:extLst>
           </p:cNvPr>
@@ -16160,7 +16160,7 @@
           <p:cNvPr id="43" name="">
             <a:extLst xmlns:a="http://schemas.openxmlformats.org/drawingml/2006/main">
               <a:ext uri="{FF2B5EF4-FFF2-40B4-BE49-F238E27FC236}">
-                <a16:creationId xmlns:a16="http://schemas.microsoft.com/office/drawing/2014/main" id="{7CDE6CE5-1F37-4E48-BE91-178B3DB8BF08}"/>
+                <a16:creationId xmlns:a16="http://schemas.microsoft.com/office/drawing/2014/main" id="{5520050D-6D5B-46FA-9211-F44D168D8E59}"/>
               </a:ext>
             </a:extLst>
           </p:cNvPr>
@@ -16205,7 +16205,7 @@
           <p:cNvPr id="44" name="">
             <a:extLst xmlns:a="http://schemas.openxmlformats.org/drawingml/2006/main">
               <a:ext uri="{FF2B5EF4-FFF2-40B4-BE49-F238E27FC236}">
-                <a16:creationId xmlns:a16="http://schemas.microsoft.com/office/drawing/2014/main" id="{ACA42403-4F2C-49D3-9E4E-A5C1D6EC7F34}"/>
+                <a16:creationId xmlns:a16="http://schemas.microsoft.com/office/drawing/2014/main" id="{C0D291F0-6468-4BC6-9543-64EE6FDDD48A}"/>
               </a:ext>
             </a:extLst>
           </p:cNvPr>
@@ -16240,7 +16240,7 @@
           <p:cNvPr id="45" name="">
             <a:extLst xmlns:a="http://schemas.openxmlformats.org/drawingml/2006/main">
               <a:ext uri="{FF2B5EF4-FFF2-40B4-BE49-F238E27FC236}">
-                <a16:creationId xmlns:a16="http://schemas.microsoft.com/office/drawing/2014/main" id="{AC9F0ACB-12FE-4CFC-BE65-DBF09F6FA4BC}"/>
+                <a16:creationId xmlns:a16="http://schemas.microsoft.com/office/drawing/2014/main" id="{6A38C4B8-E1BD-48A1-9656-F6E28902774F}"/>
               </a:ext>
             </a:extLst>
           </p:cNvPr>
@@ -16285,7 +16285,7 @@
           <p:cNvPr id="46" name="">
             <a:extLst xmlns:a="http://schemas.openxmlformats.org/drawingml/2006/main">
               <a:ext uri="{FF2B5EF4-FFF2-40B4-BE49-F238E27FC236}">
-                <a16:creationId xmlns:a16="http://schemas.microsoft.com/office/drawing/2014/main" id="{7A947886-C53C-496A-913E-BBECBD79B383}"/>
+                <a16:creationId xmlns:a16="http://schemas.microsoft.com/office/drawing/2014/main" id="{C915BD46-89F7-48BF-A286-7FBD06A33391}"/>
               </a:ext>
             </a:extLst>
           </p:cNvPr>
@@ -16320,7 +16320,7 @@
           <p:cNvPr id="47" name="">
             <a:extLst xmlns:a="http://schemas.openxmlformats.org/drawingml/2006/main">
               <a:ext uri="{FF2B5EF4-FFF2-40B4-BE49-F238E27FC236}">
-                <a16:creationId xmlns:a16="http://schemas.microsoft.com/office/drawing/2014/main" id="{87513E44-273D-46AE-A140-673CBBC3093C}"/>
+                <a16:creationId xmlns:a16="http://schemas.microsoft.com/office/drawing/2014/main" id="{A2E0E678-5F26-4985-9507-C8DF33CC6728}"/>
               </a:ext>
             </a:extLst>
           </p:cNvPr>
@@ -16365,7 +16365,7 @@
           <p:cNvPr id="48" name="">
             <a:extLst xmlns:a="http://schemas.openxmlformats.org/drawingml/2006/main">
               <a:ext uri="{FF2B5EF4-FFF2-40B4-BE49-F238E27FC236}">
-                <a16:creationId xmlns:a16="http://schemas.microsoft.com/office/drawing/2014/main" id="{85D696A5-4207-4AF7-8E9D-4F699F6A8933}"/>
+                <a16:creationId xmlns:a16="http://schemas.microsoft.com/office/drawing/2014/main" id="{642A582E-8152-42A4-9D8E-564A8FE79728}"/>
               </a:ext>
             </a:extLst>
           </p:cNvPr>
@@ -16410,7 +16410,7 @@
           <p:cNvPr id="49" name="">
             <a:extLst xmlns:a="http://schemas.openxmlformats.org/drawingml/2006/main">
               <a:ext uri="{FF2B5EF4-FFF2-40B4-BE49-F238E27FC236}">
-                <a16:creationId xmlns:a16="http://schemas.microsoft.com/office/drawing/2014/main" id="{1D878382-4632-4464-B678-032F325AAF98}"/>
+                <a16:creationId xmlns:a16="http://schemas.microsoft.com/office/drawing/2014/main" id="{66E927B1-C331-48FD-9154-05C43D04A498}"/>
               </a:ext>
             </a:extLst>
           </p:cNvPr>
@@ -16441,7 +16441,7 @@
           <p:cNvPr id="50" name="">
             <a:extLst xmlns:a="http://schemas.openxmlformats.org/drawingml/2006/main">
               <a:ext uri="{FF2B5EF4-FFF2-40B4-BE49-F238E27FC236}">
-                <a16:creationId xmlns:a16="http://schemas.microsoft.com/office/drawing/2014/main" id="{60CECDF0-F475-487E-9543-AB8384985B71}"/>
+                <a16:creationId xmlns:a16="http://schemas.microsoft.com/office/drawing/2014/main" id="{FDCB6E21-6FA4-47BB-B545-929E35745DA0}"/>
               </a:ext>
             </a:extLst>
           </p:cNvPr>
@@ -16486,7 +16486,7 @@
           <p:cNvPr id="51" name="">
             <a:extLst xmlns:a="http://schemas.openxmlformats.org/drawingml/2006/main">
               <a:ext uri="{FF2B5EF4-FFF2-40B4-BE49-F238E27FC236}">
-                <a16:creationId xmlns:a16="http://schemas.microsoft.com/office/drawing/2014/main" id="{EDA35EED-C6D2-40FA-B53E-C8AECFAAB69C}"/>
+                <a16:creationId xmlns:a16="http://schemas.microsoft.com/office/drawing/2014/main" id="{CF5C8C5C-D0F4-4DD2-AF31-5559963889CC}"/>
               </a:ext>
             </a:extLst>
           </p:cNvPr>
@@ -16531,7 +16531,7 @@
           <p:cNvPr id="52" name="">
             <a:extLst xmlns:a="http://schemas.openxmlformats.org/drawingml/2006/main">
               <a:ext uri="{FF2B5EF4-FFF2-40B4-BE49-F238E27FC236}">
-                <a16:creationId xmlns:a16="http://schemas.microsoft.com/office/drawing/2014/main" id="{9817EE41-C6D8-4C2F-872F-3A8A5CDA3EE8}"/>
+                <a16:creationId xmlns:a16="http://schemas.microsoft.com/office/drawing/2014/main" id="{F2DFA35C-942E-40E6-83C8-25C36A5870E5}"/>
               </a:ext>
             </a:extLst>
           </p:cNvPr>
@@ -16576,7 +16576,7 @@
           <p:cNvPr id="53" name="">
             <a:extLst xmlns:a="http://schemas.openxmlformats.org/drawingml/2006/main">
               <a:ext uri="{FF2B5EF4-FFF2-40B4-BE49-F238E27FC236}">
-                <a16:creationId xmlns:a16="http://schemas.microsoft.com/office/drawing/2014/main" id="{4FBC95AA-AC86-4060-8865-E9F454EA5F1A}"/>
+                <a16:creationId xmlns:a16="http://schemas.microsoft.com/office/drawing/2014/main" id="{C1EC205F-5717-4090-BD8C-04C5BC96A7D3}"/>
               </a:ext>
             </a:extLst>
           </p:cNvPr>
@@ -16607,7 +16607,7 @@
           <p:cNvPr id="54" name="">
             <a:extLst xmlns:a="http://schemas.openxmlformats.org/drawingml/2006/main">
               <a:ext uri="{FF2B5EF4-FFF2-40B4-BE49-F238E27FC236}">
-                <a16:creationId xmlns:a16="http://schemas.microsoft.com/office/drawing/2014/main" id="{12047EA1-EA9F-4B9B-9F15-1F4325A3D47B}"/>
+                <a16:creationId xmlns:a16="http://schemas.microsoft.com/office/drawing/2014/main" id="{CCC9C06D-542E-4A2E-888D-4247542D731E}"/>
               </a:ext>
             </a:extLst>
           </p:cNvPr>
@@ -16652,7 +16652,7 @@
           <p:cNvPr id="55" name="">
             <a:extLst xmlns:a="http://schemas.openxmlformats.org/drawingml/2006/main">
               <a:ext uri="{FF2B5EF4-FFF2-40B4-BE49-F238E27FC236}">
-                <a16:creationId xmlns:a16="http://schemas.microsoft.com/office/drawing/2014/main" id="{4AFBBA5C-EE38-4A97-9606-4ED0FDEDAC6A}"/>
+                <a16:creationId xmlns:a16="http://schemas.microsoft.com/office/drawing/2014/main" id="{CFA33D52-A20E-4E65-B20F-80CC19A9D23E}"/>
               </a:ext>
             </a:extLst>
           </p:cNvPr>
@@ -16697,7 +16697,7 @@
           <p:cNvPr id="56" name="">
             <a:extLst xmlns:a="http://schemas.openxmlformats.org/drawingml/2006/main">
               <a:ext uri="{FF2B5EF4-FFF2-40B4-BE49-F238E27FC236}">
-                <a16:creationId xmlns:a16="http://schemas.microsoft.com/office/drawing/2014/main" id="{0FFD7AD2-2D4B-496B-84EA-934701FFACB2}"/>
+                <a16:creationId xmlns:a16="http://schemas.microsoft.com/office/drawing/2014/main" id="{AFDE9F8D-9A39-45D9-A7B4-BF3BA37419ED}"/>
               </a:ext>
             </a:extLst>
           </p:cNvPr>
@@ -16742,7 +16742,7 @@
           <p:cNvPr id="57" name="">
             <a:extLst xmlns:a="http://schemas.openxmlformats.org/drawingml/2006/main">
               <a:ext uri="{FF2B5EF4-FFF2-40B4-BE49-F238E27FC236}">
-                <a16:creationId xmlns:a16="http://schemas.microsoft.com/office/drawing/2014/main" id="{1B43EBF3-3010-4D24-B112-58026E6946B2}"/>
+                <a16:creationId xmlns:a16="http://schemas.microsoft.com/office/drawing/2014/main" id="{616C331E-35CD-48A2-9D1F-A008FE7B4F09}"/>
               </a:ext>
             </a:extLst>
           </p:cNvPr>
@@ -16773,7 +16773,7 @@
           <p:cNvPr id="58" name="">
             <a:extLst xmlns:a="http://schemas.openxmlformats.org/drawingml/2006/main">
               <a:ext uri="{FF2B5EF4-FFF2-40B4-BE49-F238E27FC236}">
-                <a16:creationId xmlns:a16="http://schemas.microsoft.com/office/drawing/2014/main" id="{072C4653-F36E-4297-BE1A-75E5B66FB038}"/>
+                <a16:creationId xmlns:a16="http://schemas.microsoft.com/office/drawing/2014/main" id="{ED30AF5D-6425-4401-B92A-697FEBF714CA}"/>
               </a:ext>
             </a:extLst>
           </p:cNvPr>
@@ -16818,7 +16818,7 @@
           <p:cNvPr id="59" name="">
             <a:extLst xmlns:a="http://schemas.openxmlformats.org/drawingml/2006/main">
               <a:ext uri="{FF2B5EF4-FFF2-40B4-BE49-F238E27FC236}">
-                <a16:creationId xmlns:a16="http://schemas.microsoft.com/office/drawing/2014/main" id="{B9976315-0693-460D-BBC3-1064DF67D02E}"/>
+                <a16:creationId xmlns:a16="http://schemas.microsoft.com/office/drawing/2014/main" id="{7C9BCB2F-15EB-4B4D-A587-0C8C48FEA0B2}"/>
               </a:ext>
             </a:extLst>
           </p:cNvPr>
@@ -16863,7 +16863,7 @@
           <p:cNvPr id="60" name="">
             <a:extLst xmlns:a="http://schemas.openxmlformats.org/drawingml/2006/main">
               <a:ext uri="{FF2B5EF4-FFF2-40B4-BE49-F238E27FC236}">
-                <a16:creationId xmlns:a16="http://schemas.microsoft.com/office/drawing/2014/main" id="{FBC778E7-2E38-441B-9974-E541CEF33835}"/>
+                <a16:creationId xmlns:a16="http://schemas.microsoft.com/office/drawing/2014/main" id="{306AEE38-65E0-4D79-84BB-ED875197EA39}"/>
               </a:ext>
             </a:extLst>
           </p:cNvPr>
@@ -16908,7 +16908,7 @@
           <p:cNvPr id="61" name="">
             <a:extLst xmlns:a="http://schemas.openxmlformats.org/drawingml/2006/main">
               <a:ext uri="{FF2B5EF4-FFF2-40B4-BE49-F238E27FC236}">
-                <a16:creationId xmlns:a16="http://schemas.microsoft.com/office/drawing/2014/main" id="{C1F81B71-0131-4301-AB03-62DCCEEE3D5A}"/>
+                <a16:creationId xmlns:a16="http://schemas.microsoft.com/office/drawing/2014/main" id="{9A10D4DB-92E9-4E09-9B56-7B2DEB170EA6}"/>
               </a:ext>
             </a:extLst>
           </p:cNvPr>
@@ -16939,7 +16939,7 @@
           <p:cNvPr id="62" name="">
             <a:extLst xmlns:a="http://schemas.openxmlformats.org/drawingml/2006/main">
               <a:ext uri="{FF2B5EF4-FFF2-40B4-BE49-F238E27FC236}">
-                <a16:creationId xmlns:a16="http://schemas.microsoft.com/office/drawing/2014/main" id="{844362BF-83DD-4730-B9E4-6248AFC0B6F5}"/>
+                <a16:creationId xmlns:a16="http://schemas.microsoft.com/office/drawing/2014/main" id="{D6E226B7-F625-4A0F-BDBE-FB71ECFD4F9A}"/>
               </a:ext>
             </a:extLst>
           </p:cNvPr>
@@ -16984,7 +16984,7 @@
           <p:cNvPr id="63" name="">
             <a:extLst xmlns:a="http://schemas.openxmlformats.org/drawingml/2006/main">
               <a:ext uri="{FF2B5EF4-FFF2-40B4-BE49-F238E27FC236}">
-                <a16:creationId xmlns:a16="http://schemas.microsoft.com/office/drawing/2014/main" id="{50FA3921-BAFD-4CC3-AFC9-35C23F6A457B}"/>
+                <a16:creationId xmlns:a16="http://schemas.microsoft.com/office/drawing/2014/main" id="{20ADDC43-6D30-4D91-9676-31D3A31AB322}"/>
               </a:ext>
             </a:extLst>
           </p:cNvPr>
@@ -17029,7 +17029,7 @@
           <p:cNvPr id="64" name="">
             <a:extLst xmlns:a="http://schemas.openxmlformats.org/drawingml/2006/main">
               <a:ext uri="{FF2B5EF4-FFF2-40B4-BE49-F238E27FC236}">
-                <a16:creationId xmlns:a16="http://schemas.microsoft.com/office/drawing/2014/main" id="{725C7DA1-144F-4ABC-8E04-09F4F8E285FD}"/>
+                <a16:creationId xmlns:a16="http://schemas.microsoft.com/office/drawing/2014/main" id="{78BFBAD2-BE66-44A8-959F-FE1DB1E253C8}"/>
               </a:ext>
             </a:extLst>
           </p:cNvPr>
@@ -17074,7 +17074,7 @@
           <p:cNvPr id="65" name="">
             <a:extLst xmlns:a="http://schemas.openxmlformats.org/drawingml/2006/main">
               <a:ext uri="{FF2B5EF4-FFF2-40B4-BE49-F238E27FC236}">
-                <a16:creationId xmlns:a16="http://schemas.microsoft.com/office/drawing/2014/main" id="{97FC9A61-B08E-433B-92DD-28AC71E25703}"/>
+                <a16:creationId xmlns:a16="http://schemas.microsoft.com/office/drawing/2014/main" id="{F8CAD48A-CC97-4552-A37D-07F6E638E68B}"/>
               </a:ext>
             </a:extLst>
           </p:cNvPr>
@@ -17117,7 +17117,7 @@
     </p:spTree>
     <p:extLst>
       <p:ext uri="{BB962C8B-B14F-4D97-AF65-F5344CB8AC3E}">
-        <p14:creationId xmlns:p14="http://schemas.microsoft.com/office/powerpoint/2010/main" val="1669878307"/>
+        <p14:creationId xmlns:p14="http://schemas.microsoft.com/office/powerpoint/2010/main" val="1059596288"/>
       </p:ext>
     </p:extLst>
   </p:cSld>
@@ -17141,7 +17141,7 @@
           <p:cNvPr id="40" name="">
             <a:extLst xmlns:a="http://schemas.openxmlformats.org/drawingml/2006/main">
               <a:ext uri="{FF2B5EF4-FFF2-40B4-BE49-F238E27FC236}">
-                <a16:creationId xmlns:a16="http://schemas.microsoft.com/office/drawing/2014/main" id="{6FF5CF40-8F22-4607-9396-0F5740C81413}"/>
+                <a16:creationId xmlns:a16="http://schemas.microsoft.com/office/drawing/2014/main" id="{C39D55F9-6155-40B5-80C9-EFFAF4D0F894}"/>
               </a:ext>
             </a:extLst>
           </p:cNvPr>
@@ -17172,7 +17172,7 @@
           <p:cNvPr id="2" name="">
             <a:extLst xmlns:a="http://schemas.openxmlformats.org/drawingml/2006/main">
               <a:ext uri="{FF2B5EF4-FFF2-40B4-BE49-F238E27FC236}">
-                <a16:creationId xmlns:a16="http://schemas.microsoft.com/office/drawing/2014/main" id="{B14F9791-8690-4B74-B26A-38748A16F403}"/>
+                <a16:creationId xmlns:a16="http://schemas.microsoft.com/office/drawing/2014/main" id="{793E53D6-2B6C-4095-8F3D-A3AA9DA1A349}"/>
               </a:ext>
             </a:extLst>
           </p:cNvPr>
@@ -17217,7 +17217,7 @@
           <p:cNvPr id="3" name="">
             <a:extLst xmlns:a="http://schemas.openxmlformats.org/drawingml/2006/main">
               <a:ext uri="{FF2B5EF4-FFF2-40B4-BE49-F238E27FC236}">
-                <a16:creationId xmlns:a16="http://schemas.microsoft.com/office/drawing/2014/main" id="{6DB7EF42-E13E-461B-AC8F-A799BAB896D6}"/>
+                <a16:creationId xmlns:a16="http://schemas.microsoft.com/office/drawing/2014/main" id="{F7EB0F8A-EE0A-43CF-B973-675C85C5D713}"/>
               </a:ext>
             </a:extLst>
           </p:cNvPr>
@@ -17262,7 +17262,7 @@
           <p:cNvPr id="4" name="">
             <a:extLst xmlns:a="http://schemas.openxmlformats.org/drawingml/2006/main">
               <a:ext uri="{FF2B5EF4-FFF2-40B4-BE49-F238E27FC236}">
-                <a16:creationId xmlns:a16="http://schemas.microsoft.com/office/drawing/2014/main" id="{B8FB4CF6-FE24-4D2C-851A-164BBB0F086C}"/>
+                <a16:creationId xmlns:a16="http://schemas.microsoft.com/office/drawing/2014/main" id="{45ED01F1-A2C8-433B-BE1F-E32414A93CFC}"/>
               </a:ext>
             </a:extLst>
           </p:cNvPr>
@@ -17307,7 +17307,7 @@
           <p:cNvPr id="5" name="">
             <a:extLst xmlns:a="http://schemas.openxmlformats.org/drawingml/2006/main">
               <a:ext uri="{FF2B5EF4-FFF2-40B4-BE49-F238E27FC236}">
-                <a16:creationId xmlns:a16="http://schemas.microsoft.com/office/drawing/2014/main" id="{856926B8-CFE7-4473-9AA3-18DBB674B884}"/>
+                <a16:creationId xmlns:a16="http://schemas.microsoft.com/office/drawing/2014/main" id="{760728C8-830F-49C0-AC40-D6BA4CE2363B}"/>
               </a:ext>
             </a:extLst>
           </p:cNvPr>
@@ -17338,7 +17338,7 @@
           <p:cNvPr id="6" name="">
             <a:extLst xmlns:a="http://schemas.openxmlformats.org/drawingml/2006/main">
               <a:ext uri="{FF2B5EF4-FFF2-40B4-BE49-F238E27FC236}">
-                <a16:creationId xmlns:a16="http://schemas.microsoft.com/office/drawing/2014/main" id="{8A9EEBB4-C59F-49A1-9B89-BE7C2A0594B3}"/>
+                <a16:creationId xmlns:a16="http://schemas.microsoft.com/office/drawing/2014/main" id="{3B2A0F85-107E-497F-A599-2569E8FA3B9E}"/>
               </a:ext>
             </a:extLst>
           </p:cNvPr>
@@ -17369,7 +17369,7 @@
           <p:cNvPr id="7" name="">
             <a:extLst xmlns:a="http://schemas.openxmlformats.org/drawingml/2006/main">
               <a:ext uri="{FF2B5EF4-FFF2-40B4-BE49-F238E27FC236}">
-                <a16:creationId xmlns:a16="http://schemas.microsoft.com/office/drawing/2014/main" id="{D34B6D96-96BC-4F7E-AB62-BC680B996A50}"/>
+                <a16:creationId xmlns:a16="http://schemas.microsoft.com/office/drawing/2014/main" id="{1984638B-00E9-4A4E-89BB-E4B008238C10}"/>
               </a:ext>
             </a:extLst>
           </p:cNvPr>
@@ -17414,7 +17414,7 @@
           <p:cNvPr id="8" name="">
             <a:extLst xmlns:a="http://schemas.openxmlformats.org/drawingml/2006/main">
               <a:ext uri="{FF2B5EF4-FFF2-40B4-BE49-F238E27FC236}">
-                <a16:creationId xmlns:a16="http://schemas.microsoft.com/office/drawing/2014/main" id="{91AC9086-C169-4372-B3A2-367BE55F13A9}"/>
+                <a16:creationId xmlns:a16="http://schemas.microsoft.com/office/drawing/2014/main" id="{B42B17BF-DBB2-4D42-94E9-E5F89AD8221D}"/>
               </a:ext>
             </a:extLst>
           </p:cNvPr>
@@ -17459,7 +17459,7 @@
           <p:cNvPr id="9" name="">
             <a:extLst xmlns:a="http://schemas.openxmlformats.org/drawingml/2006/main">
               <a:ext uri="{FF2B5EF4-FFF2-40B4-BE49-F238E27FC236}">
-                <a16:creationId xmlns:a16="http://schemas.microsoft.com/office/drawing/2014/main" id="{194BAD6F-3F73-4F66-BF3A-F59FD68BEB41}"/>
+                <a16:creationId xmlns:a16="http://schemas.microsoft.com/office/drawing/2014/main" id="{FFBF3595-470F-4048-9631-49802F0AE1BC}"/>
               </a:ext>
             </a:extLst>
           </p:cNvPr>
@@ -17490,7 +17490,7 @@
           <p:cNvPr id="10" name="">
             <a:extLst xmlns:a="http://schemas.openxmlformats.org/drawingml/2006/main">
               <a:ext uri="{FF2B5EF4-FFF2-40B4-BE49-F238E27FC236}">
-                <a16:creationId xmlns:a16="http://schemas.microsoft.com/office/drawing/2014/main" id="{519E8C26-AC3F-418E-82D8-A98799863635}"/>
+                <a16:creationId xmlns:a16="http://schemas.microsoft.com/office/drawing/2014/main" id="{FF58B2B8-4E4A-4486-91D6-EC506DF06E7D}"/>
               </a:ext>
             </a:extLst>
           </p:cNvPr>
@@ -17535,7 +17535,7 @@
           <p:cNvPr id="11" name="">
             <a:extLst xmlns:a="http://schemas.openxmlformats.org/drawingml/2006/main">
               <a:ext uri="{FF2B5EF4-FFF2-40B4-BE49-F238E27FC236}">
-                <a16:creationId xmlns:a16="http://schemas.microsoft.com/office/drawing/2014/main" id="{B6D8F954-073D-4D0B-9340-8633426FE6DE}"/>
+                <a16:creationId xmlns:a16="http://schemas.microsoft.com/office/drawing/2014/main" id="{F35211DE-59AE-4F9F-8779-D37EE0DC88FE}"/>
               </a:ext>
             </a:extLst>
           </p:cNvPr>
@@ -17580,7 +17580,7 @@
           <p:cNvPr id="12" name="">
             <a:extLst xmlns:a="http://schemas.openxmlformats.org/drawingml/2006/main">
               <a:ext uri="{FF2B5EF4-FFF2-40B4-BE49-F238E27FC236}">
-                <a16:creationId xmlns:a16="http://schemas.microsoft.com/office/drawing/2014/main" id="{2ECF71E1-C950-48D9-826C-1ABF3EECCA0E}"/>
+                <a16:creationId xmlns:a16="http://schemas.microsoft.com/office/drawing/2014/main" id="{553B852F-A676-49F5-BEAE-BB9FEE971E8A}"/>
               </a:ext>
             </a:extLst>
           </p:cNvPr>
@@ -17625,7 +17625,7 @@
           <p:cNvPr id="13" name="">
             <a:extLst xmlns:a="http://schemas.openxmlformats.org/drawingml/2006/main">
               <a:ext uri="{FF2B5EF4-FFF2-40B4-BE49-F238E27FC236}">
-                <a16:creationId xmlns:a16="http://schemas.microsoft.com/office/drawing/2014/main" id="{92DCA2AE-F750-4A82-8337-837CF5F39AE4}"/>
+                <a16:creationId xmlns:a16="http://schemas.microsoft.com/office/drawing/2014/main" id="{E689A19F-28AF-4537-862B-048CD16C0565}"/>
               </a:ext>
             </a:extLst>
           </p:cNvPr>
@@ -17658,7 +17658,7 @@
           <p:cNvPr id="14" name="">
             <a:extLst xmlns:a="http://schemas.openxmlformats.org/drawingml/2006/main">
               <a:ext uri="{FF2B5EF4-FFF2-40B4-BE49-F238E27FC236}">
-                <a16:creationId xmlns:a16="http://schemas.microsoft.com/office/drawing/2014/main" id="{5FFFEC06-5585-403A-BDF7-EB0A90A0B3E1}"/>
+                <a16:creationId xmlns:a16="http://schemas.microsoft.com/office/drawing/2014/main" id="{3155D09D-0AA4-43BF-82C5-670706BB1FFA}"/>
               </a:ext>
             </a:extLst>
           </p:cNvPr>
@@ -17703,7 +17703,7 @@
           <p:cNvPr id="15" name="">
             <a:extLst xmlns:a="http://schemas.openxmlformats.org/drawingml/2006/main">
               <a:ext uri="{FF2B5EF4-FFF2-40B4-BE49-F238E27FC236}">
-                <a16:creationId xmlns:a16="http://schemas.microsoft.com/office/drawing/2014/main" id="{7402CF71-BDB8-4B6E-BAAA-E7831AAA8669}"/>
+                <a16:creationId xmlns:a16="http://schemas.microsoft.com/office/drawing/2014/main" id="{087BE552-348D-49B4-A52F-918850A92DB3}"/>
               </a:ext>
             </a:extLst>
           </p:cNvPr>
@@ -17748,7 +17748,7 @@
           <p:cNvPr id="16" name="">
             <a:extLst xmlns:a="http://schemas.openxmlformats.org/drawingml/2006/main">
               <a:ext uri="{FF2B5EF4-FFF2-40B4-BE49-F238E27FC236}">
-                <a16:creationId xmlns:a16="http://schemas.microsoft.com/office/drawing/2014/main" id="{A66F3E18-56F5-4E16-8EEA-EEFCEDAEBD65}"/>
+                <a16:creationId xmlns:a16="http://schemas.microsoft.com/office/drawing/2014/main" id="{84A30CAE-DD3B-4A26-B383-FA13E71562DB}"/>
               </a:ext>
             </a:extLst>
           </p:cNvPr>
@@ -17793,7 +17793,7 @@
           <p:cNvPr id="17" name="">
             <a:extLst xmlns:a="http://schemas.openxmlformats.org/drawingml/2006/main">
               <a:ext uri="{FF2B5EF4-FFF2-40B4-BE49-F238E27FC236}">
-                <a16:creationId xmlns:a16="http://schemas.microsoft.com/office/drawing/2014/main" id="{8042FFE2-2075-4553-B0EC-01676D418BFB}"/>
+                <a16:creationId xmlns:a16="http://schemas.microsoft.com/office/drawing/2014/main" id="{638165BE-C954-4168-A6B7-88DC1C4FB4A0}"/>
               </a:ext>
             </a:extLst>
           </p:cNvPr>
@@ -17826,7 +17826,7 @@
           <p:cNvPr id="18" name="">
             <a:extLst xmlns:a="http://schemas.openxmlformats.org/drawingml/2006/main">
               <a:ext uri="{FF2B5EF4-FFF2-40B4-BE49-F238E27FC236}">
-                <a16:creationId xmlns:a16="http://schemas.microsoft.com/office/drawing/2014/main" id="{3B2C0F0C-B779-449F-9BE5-108A6CAE3B14}"/>
+                <a16:creationId xmlns:a16="http://schemas.microsoft.com/office/drawing/2014/main" id="{6D1D91CD-EC0F-407C-B54E-CE1B0C7BDCB1}"/>
               </a:ext>
             </a:extLst>
           </p:cNvPr>
@@ -17871,7 +17871,7 @@
           <p:cNvPr id="19" name="">
             <a:extLst xmlns:a="http://schemas.openxmlformats.org/drawingml/2006/main">
               <a:ext uri="{FF2B5EF4-FFF2-40B4-BE49-F238E27FC236}">
-                <a16:creationId xmlns:a16="http://schemas.microsoft.com/office/drawing/2014/main" id="{34C32BC2-A925-400E-BC84-A9A2802B63B2}"/>
+                <a16:creationId xmlns:a16="http://schemas.microsoft.com/office/drawing/2014/main" id="{5D28AD5F-C626-4541-82D1-A4BAACF2DF54}"/>
               </a:ext>
             </a:extLst>
           </p:cNvPr>
@@ -17916,7 +17916,7 @@
           <p:cNvPr id="20" name="">
             <a:extLst xmlns:a="http://schemas.openxmlformats.org/drawingml/2006/main">
               <a:ext uri="{FF2B5EF4-FFF2-40B4-BE49-F238E27FC236}">
-                <a16:creationId xmlns:a16="http://schemas.microsoft.com/office/drawing/2014/main" id="{D5D28532-7712-4B7B-8A3B-32AE38475CD8}"/>
+                <a16:creationId xmlns:a16="http://schemas.microsoft.com/office/drawing/2014/main" id="{04C6EC29-873A-4045-81E6-0970C5D78AD7}"/>
               </a:ext>
             </a:extLst>
           </p:cNvPr>
@@ -17961,7 +17961,7 @@
           <p:cNvPr id="21" name="">
             <a:extLst xmlns:a="http://schemas.openxmlformats.org/drawingml/2006/main">
               <a:ext uri="{FF2B5EF4-FFF2-40B4-BE49-F238E27FC236}">
-                <a16:creationId xmlns:a16="http://schemas.microsoft.com/office/drawing/2014/main" id="{58BEC34F-BE00-4B61-AC38-934DE1FB1D44}"/>
+                <a16:creationId xmlns:a16="http://schemas.microsoft.com/office/drawing/2014/main" id="{DB9A5239-F0A8-46B7-B5E2-6C0C80110BE4}"/>
               </a:ext>
             </a:extLst>
           </p:cNvPr>
@@ -17994,7 +17994,7 @@
           <p:cNvPr id="22" name="">
             <a:extLst xmlns:a="http://schemas.openxmlformats.org/drawingml/2006/main">
               <a:ext uri="{FF2B5EF4-FFF2-40B4-BE49-F238E27FC236}">
-                <a16:creationId xmlns:a16="http://schemas.microsoft.com/office/drawing/2014/main" id="{48CE2662-FEC9-410C-B7A7-1BE2E5E33990}"/>
+                <a16:creationId xmlns:a16="http://schemas.microsoft.com/office/drawing/2014/main" id="{D8D49E70-C991-4D39-8E64-084DE51509DD}"/>
               </a:ext>
             </a:extLst>
           </p:cNvPr>
@@ -18039,7 +18039,7 @@
           <p:cNvPr id="23" name="">
             <a:extLst xmlns:a="http://schemas.openxmlformats.org/drawingml/2006/main">
               <a:ext uri="{FF2B5EF4-FFF2-40B4-BE49-F238E27FC236}">
-                <a16:creationId xmlns:a16="http://schemas.microsoft.com/office/drawing/2014/main" id="{160E7CAD-4255-4DAA-A2AA-D0876D0A82ED}"/>
+                <a16:creationId xmlns:a16="http://schemas.microsoft.com/office/drawing/2014/main" id="{C300DF8D-53DC-4C48-A6F2-DE7694861982}"/>
               </a:ext>
             </a:extLst>
           </p:cNvPr>
@@ -18084,7 +18084,7 @@
           <p:cNvPr id="24" name="">
             <a:extLst xmlns:a="http://schemas.openxmlformats.org/drawingml/2006/main">
               <a:ext uri="{FF2B5EF4-FFF2-40B4-BE49-F238E27FC236}">
-                <a16:creationId xmlns:a16="http://schemas.microsoft.com/office/drawing/2014/main" id="{3242A79B-2A4F-4A3F-AC63-CB4A91544757}"/>
+                <a16:creationId xmlns:a16="http://schemas.microsoft.com/office/drawing/2014/main" id="{2BD447B0-398F-4A5A-A754-097DC9023BDD}"/>
               </a:ext>
             </a:extLst>
           </p:cNvPr>
@@ -18129,7 +18129,7 @@
           <p:cNvPr id="25" name="">
             <a:extLst xmlns:a="http://schemas.openxmlformats.org/drawingml/2006/main">
               <a:ext uri="{FF2B5EF4-FFF2-40B4-BE49-F238E27FC236}">
-                <a16:creationId xmlns:a16="http://schemas.microsoft.com/office/drawing/2014/main" id="{2DF0C5C0-9982-49B3-A32C-A2815ADDD6D0}"/>
+                <a16:creationId xmlns:a16="http://schemas.microsoft.com/office/drawing/2014/main" id="{C7FF5C47-85BC-4F4F-A53D-BF8A895FBAD9}"/>
               </a:ext>
             </a:extLst>
           </p:cNvPr>
@@ -18162,7 +18162,7 @@
           <p:cNvPr id="26" name="">
             <a:extLst xmlns:a="http://schemas.openxmlformats.org/drawingml/2006/main">
               <a:ext uri="{FF2B5EF4-FFF2-40B4-BE49-F238E27FC236}">
-                <a16:creationId xmlns:a16="http://schemas.microsoft.com/office/drawing/2014/main" id="{75736B93-A4DC-43BC-A398-F37BC81D1505}"/>
+                <a16:creationId xmlns:a16="http://schemas.microsoft.com/office/drawing/2014/main" id="{6AEA725B-3C00-46F4-8568-207A5201DA59}"/>
               </a:ext>
             </a:extLst>
           </p:cNvPr>
@@ -18207,7 +18207,7 @@
           <p:cNvPr id="27" name="">
             <a:extLst xmlns:a="http://schemas.openxmlformats.org/drawingml/2006/main">
               <a:ext uri="{FF2B5EF4-FFF2-40B4-BE49-F238E27FC236}">
-                <a16:creationId xmlns:a16="http://schemas.microsoft.com/office/drawing/2014/main" id="{940B4ADD-3425-4FC7-99C9-D2449BF39657}"/>
+                <a16:creationId xmlns:a16="http://schemas.microsoft.com/office/drawing/2014/main" id="{4053CCEC-840B-4D80-9642-B4FFB5BFAED0}"/>
               </a:ext>
             </a:extLst>
           </p:cNvPr>
@@ -18252,7 +18252,7 @@
           <p:cNvPr id="28" name="">
             <a:extLst xmlns:a="http://schemas.openxmlformats.org/drawingml/2006/main">
               <a:ext uri="{FF2B5EF4-FFF2-40B4-BE49-F238E27FC236}">
-                <a16:creationId xmlns:a16="http://schemas.microsoft.com/office/drawing/2014/main" id="{63D872B1-E9FC-44A4-9192-A45BAE400793}"/>
+                <a16:creationId xmlns:a16="http://schemas.microsoft.com/office/drawing/2014/main" id="{FB22ECD5-0E64-47EC-87F7-87C4E1F82A23}"/>
               </a:ext>
             </a:extLst>
           </p:cNvPr>
@@ -18297,7 +18297,7 @@
           <p:cNvPr id="29" name="">
             <a:extLst xmlns:a="http://schemas.openxmlformats.org/drawingml/2006/main">
               <a:ext uri="{FF2B5EF4-FFF2-40B4-BE49-F238E27FC236}">
-                <a16:creationId xmlns:a16="http://schemas.microsoft.com/office/drawing/2014/main" id="{C42138A5-CACF-44FA-AA8E-0310C1CA3AD2}"/>
+                <a16:creationId xmlns:a16="http://schemas.microsoft.com/office/drawing/2014/main" id="{2457B427-27FD-440C-A8C6-E331903CDCA9}"/>
               </a:ext>
             </a:extLst>
           </p:cNvPr>
@@ -18330,7 +18330,7 @@
           <p:cNvPr id="30" name="">
             <a:extLst xmlns:a="http://schemas.openxmlformats.org/drawingml/2006/main">
               <a:ext uri="{FF2B5EF4-FFF2-40B4-BE49-F238E27FC236}">
-                <a16:creationId xmlns:a16="http://schemas.microsoft.com/office/drawing/2014/main" id="{86800951-F84F-467F-9A53-94D382681A15}"/>
+                <a16:creationId xmlns:a16="http://schemas.microsoft.com/office/drawing/2014/main" id="{2C83F09E-9FBF-4432-9D13-3542C6B34776}"/>
               </a:ext>
             </a:extLst>
           </p:cNvPr>
@@ -18375,7 +18375,7 @@
           <p:cNvPr id="31" name="">
             <a:extLst xmlns:a="http://schemas.openxmlformats.org/drawingml/2006/main">
               <a:ext uri="{FF2B5EF4-FFF2-40B4-BE49-F238E27FC236}">
-                <a16:creationId xmlns:a16="http://schemas.microsoft.com/office/drawing/2014/main" id="{E48119A5-3E8B-4290-9435-9A8FEA854752}"/>
+                <a16:creationId xmlns:a16="http://schemas.microsoft.com/office/drawing/2014/main" id="{C9D1AE0F-6EAB-4405-A3C1-7496C1C38665}"/>
               </a:ext>
             </a:extLst>
           </p:cNvPr>
@@ -18420,7 +18420,7 @@
           <p:cNvPr id="32" name="">
             <a:extLst xmlns:a="http://schemas.openxmlformats.org/drawingml/2006/main">
               <a:ext uri="{FF2B5EF4-FFF2-40B4-BE49-F238E27FC236}">
-                <a16:creationId xmlns:a16="http://schemas.microsoft.com/office/drawing/2014/main" id="{704C2C1B-8A62-456D-B3BA-E3F208FAC4DE}"/>
+                <a16:creationId xmlns:a16="http://schemas.microsoft.com/office/drawing/2014/main" id="{03B8A117-C09C-4B0C-9875-900FCCFAB9ED}"/>
               </a:ext>
             </a:extLst>
           </p:cNvPr>
@@ -18465,7 +18465,7 @@
           <p:cNvPr id="33" name="">
             <a:extLst xmlns:a="http://schemas.openxmlformats.org/drawingml/2006/main">
               <a:ext uri="{FF2B5EF4-FFF2-40B4-BE49-F238E27FC236}">
-                <a16:creationId xmlns:a16="http://schemas.microsoft.com/office/drawing/2014/main" id="{00BEF8F4-16E0-4D6C-A9C1-70B0BFD6BFE9}"/>
+                <a16:creationId xmlns:a16="http://schemas.microsoft.com/office/drawing/2014/main" id="{956E9DC9-2EDC-4985-8FAA-89FE9B215AA7}"/>
               </a:ext>
             </a:extLst>
           </p:cNvPr>
@@ -18498,7 +18498,7 @@
           <p:cNvPr id="34" name="">
             <a:extLst xmlns:a="http://schemas.openxmlformats.org/drawingml/2006/main">
               <a:ext uri="{FF2B5EF4-FFF2-40B4-BE49-F238E27FC236}">
-                <a16:creationId xmlns:a16="http://schemas.microsoft.com/office/drawing/2014/main" id="{706C8471-9D94-4230-8C53-626D144ACF5B}"/>
+                <a16:creationId xmlns:a16="http://schemas.microsoft.com/office/drawing/2014/main" id="{A7B097CA-74F2-4412-8BDF-895ACA9A74E5}"/>
               </a:ext>
             </a:extLst>
           </p:cNvPr>
@@ -18529,7 +18529,7 @@
           <p:cNvPr id="35" name="">
             <a:extLst xmlns:a="http://schemas.openxmlformats.org/drawingml/2006/main">
               <a:ext uri="{FF2B5EF4-FFF2-40B4-BE49-F238E27FC236}">
-                <a16:creationId xmlns:a16="http://schemas.microsoft.com/office/drawing/2014/main" id="{141C5236-A77D-49FB-A053-C1B91914D62E}"/>
+                <a16:creationId xmlns:a16="http://schemas.microsoft.com/office/drawing/2014/main" id="{0551BB96-FDFC-4C70-99EC-1356A4674342}"/>
               </a:ext>
             </a:extLst>
           </p:cNvPr>
@@ -18574,7 +18574,7 @@
           <p:cNvPr id="36" name="">
             <a:extLst xmlns:a="http://schemas.openxmlformats.org/drawingml/2006/main">
               <a:ext uri="{FF2B5EF4-FFF2-40B4-BE49-F238E27FC236}">
-                <a16:creationId xmlns:a16="http://schemas.microsoft.com/office/drawing/2014/main" id="{26FA7677-CB44-41BF-B4DB-ECB8FB903FB2}"/>
+                <a16:creationId xmlns:a16="http://schemas.microsoft.com/office/drawing/2014/main" id="{61B22DD1-F0F1-4025-92F4-45A7B5CADC12}"/>
               </a:ext>
             </a:extLst>
           </p:cNvPr>
@@ -18619,7 +18619,7 @@
           <p:cNvPr id="37" name="">
             <a:extLst xmlns:a="http://schemas.openxmlformats.org/drawingml/2006/main">
               <a:ext uri="{FF2B5EF4-FFF2-40B4-BE49-F238E27FC236}">
-                <a16:creationId xmlns:a16="http://schemas.microsoft.com/office/drawing/2014/main" id="{FEE3370A-5EAC-48BB-8FCA-1F38C324A631}"/>
+                <a16:creationId xmlns:a16="http://schemas.microsoft.com/office/drawing/2014/main" id="{453B7FE4-F672-4B58-AD11-6200FA9DA4A1}"/>
               </a:ext>
             </a:extLst>
           </p:cNvPr>
@@ -18664,7 +18664,7 @@
           <p:cNvPr id="38" name="">
             <a:extLst xmlns:a="http://schemas.openxmlformats.org/drawingml/2006/main">
               <a:ext uri="{FF2B5EF4-FFF2-40B4-BE49-F238E27FC236}">
-                <a16:creationId xmlns:a16="http://schemas.microsoft.com/office/drawing/2014/main" id="{4D1B7269-E640-461C-8E93-AE30B2889C4A}"/>
+                <a16:creationId xmlns:a16="http://schemas.microsoft.com/office/drawing/2014/main" id="{91CAF787-90B0-485E-8366-84847CB5C97E}"/>
               </a:ext>
             </a:extLst>
           </p:cNvPr>
@@ -18709,7 +18709,7 @@
           <p:cNvPr id="39" name="">
             <a:extLst xmlns:a="http://schemas.openxmlformats.org/drawingml/2006/main">
               <a:ext uri="{FF2B5EF4-FFF2-40B4-BE49-F238E27FC236}">
-                <a16:creationId xmlns:a16="http://schemas.microsoft.com/office/drawing/2014/main" id="{03A7E1E4-2EC5-4A32-AD4E-55A5BF4B8303}"/>
+                <a16:creationId xmlns:a16="http://schemas.microsoft.com/office/drawing/2014/main" id="{CABF5AE4-D164-464A-98DB-D78C8B6F9FF9}"/>
               </a:ext>
             </a:extLst>
           </p:cNvPr>
@@ -18752,7 +18752,7 @@
     </p:spTree>
     <p:extLst>
       <p:ext uri="{BB962C8B-B14F-4D97-AF65-F5344CB8AC3E}">
-        <p14:creationId xmlns:p14="http://schemas.microsoft.com/office/powerpoint/2010/main" val="1632270638"/>
+        <p14:creationId xmlns:p14="http://schemas.microsoft.com/office/powerpoint/2010/main" val="1077015346"/>
       </p:ext>
     </p:extLst>
   </p:cSld>
@@ -18776,7 +18776,7 @@
           <p:cNvPr id="52" name="">
             <a:extLst xmlns:a="http://schemas.openxmlformats.org/drawingml/2006/main">
               <a:ext uri="{FF2B5EF4-FFF2-40B4-BE49-F238E27FC236}">
-                <a16:creationId xmlns:a16="http://schemas.microsoft.com/office/drawing/2014/main" id="{0B4EBD37-7F2B-41E7-908F-CC4B66CE832D}"/>
+                <a16:creationId xmlns:a16="http://schemas.microsoft.com/office/drawing/2014/main" id="{03B45771-7ED4-49B7-8B37-D6A98CB2EA07}"/>
               </a:ext>
             </a:extLst>
           </p:cNvPr>
@@ -18807,7 +18807,7 @@
           <p:cNvPr id="2" name="">
             <a:extLst xmlns:a="http://schemas.openxmlformats.org/drawingml/2006/main">
               <a:ext uri="{FF2B5EF4-FFF2-40B4-BE49-F238E27FC236}">
-                <a16:creationId xmlns:a16="http://schemas.microsoft.com/office/drawing/2014/main" id="{AA9BC16A-2307-4196-BDCB-8D1871BBB15F}"/>
+                <a16:creationId xmlns:a16="http://schemas.microsoft.com/office/drawing/2014/main" id="{29A4D490-5155-41E4-B5CB-19224663D131}"/>
               </a:ext>
             </a:extLst>
           </p:cNvPr>
@@ -18852,7 +18852,7 @@
           <p:cNvPr id="3" name="">
             <a:extLst xmlns:a="http://schemas.openxmlformats.org/drawingml/2006/main">
               <a:ext uri="{FF2B5EF4-FFF2-40B4-BE49-F238E27FC236}">
-                <a16:creationId xmlns:a16="http://schemas.microsoft.com/office/drawing/2014/main" id="{A184E993-8D20-4603-81DD-4FF682739BDF}"/>
+                <a16:creationId xmlns:a16="http://schemas.microsoft.com/office/drawing/2014/main" id="{FD713048-3566-41EE-B597-EBAA96FFBED3}"/>
               </a:ext>
             </a:extLst>
           </p:cNvPr>
@@ -18897,7 +18897,7 @@
           <p:cNvPr id="4" name="">
             <a:extLst xmlns:a="http://schemas.openxmlformats.org/drawingml/2006/main">
               <a:ext uri="{FF2B5EF4-FFF2-40B4-BE49-F238E27FC236}">
-                <a16:creationId xmlns:a16="http://schemas.microsoft.com/office/drawing/2014/main" id="{4724F679-BEF8-482C-84C0-882F146367F7}"/>
+                <a16:creationId xmlns:a16="http://schemas.microsoft.com/office/drawing/2014/main" id="{6F7C8D17-AC84-47C2-9B83-4E45B013378B}"/>
               </a:ext>
             </a:extLst>
           </p:cNvPr>
@@ -18942,7 +18942,7 @@
           <p:cNvPr id="5" name="">
             <a:extLst xmlns:a="http://schemas.openxmlformats.org/drawingml/2006/main">
               <a:ext uri="{FF2B5EF4-FFF2-40B4-BE49-F238E27FC236}">
-                <a16:creationId xmlns:a16="http://schemas.microsoft.com/office/drawing/2014/main" id="{37C036E0-16B2-4F45-BB3F-3BA5A7957041}"/>
+                <a16:creationId xmlns:a16="http://schemas.microsoft.com/office/drawing/2014/main" id="{8035C42B-0763-46C3-91F6-C4B24041B8FF}"/>
               </a:ext>
             </a:extLst>
           </p:cNvPr>
@@ -18973,7 +18973,7 @@
           <p:cNvPr id="6" name="">
             <a:extLst xmlns:a="http://schemas.openxmlformats.org/drawingml/2006/main">
               <a:ext uri="{FF2B5EF4-FFF2-40B4-BE49-F238E27FC236}">
-                <a16:creationId xmlns:a16="http://schemas.microsoft.com/office/drawing/2014/main" id="{99429EDD-9B56-4794-81A2-72EE4EAC8575}"/>
+                <a16:creationId xmlns:a16="http://schemas.microsoft.com/office/drawing/2014/main" id="{E07894ED-6004-4D9D-8091-2459D123AD75}"/>
               </a:ext>
             </a:extLst>
           </p:cNvPr>
@@ -19004,7 +19004,7 @@
           <p:cNvPr id="7" name="">
             <a:extLst xmlns:a="http://schemas.openxmlformats.org/drawingml/2006/main">
               <a:ext uri="{FF2B5EF4-FFF2-40B4-BE49-F238E27FC236}">
-                <a16:creationId xmlns:a16="http://schemas.microsoft.com/office/drawing/2014/main" id="{D768C242-2873-47B6-93E9-CEF1FD7E7030}"/>
+                <a16:creationId xmlns:a16="http://schemas.microsoft.com/office/drawing/2014/main" id="{C2A19F1C-AD00-423A-BB40-511291CC2C8C}"/>
               </a:ext>
             </a:extLst>
           </p:cNvPr>
@@ -19049,7 +19049,7 @@
           <p:cNvPr id="8" name="">
             <a:extLst xmlns:a="http://schemas.openxmlformats.org/drawingml/2006/main">
               <a:ext uri="{FF2B5EF4-FFF2-40B4-BE49-F238E27FC236}">
-                <a16:creationId xmlns:a16="http://schemas.microsoft.com/office/drawing/2014/main" id="{1FBEA4F5-640A-4864-AD32-0BE5ACD529F3}"/>
+                <a16:creationId xmlns:a16="http://schemas.microsoft.com/office/drawing/2014/main" id="{4EC3C720-19B6-4A80-A891-DC8F8CC39D11}"/>
               </a:ext>
             </a:extLst>
           </p:cNvPr>
@@ -19094,7 +19094,7 @@
           <p:cNvPr id="9" name="">
             <a:extLst xmlns:a="http://schemas.openxmlformats.org/drawingml/2006/main">
               <a:ext uri="{FF2B5EF4-FFF2-40B4-BE49-F238E27FC236}">
-                <a16:creationId xmlns:a16="http://schemas.microsoft.com/office/drawing/2014/main" id="{1EEC6F03-1C66-4E12-8A22-D98B58B2319C}"/>
+                <a16:creationId xmlns:a16="http://schemas.microsoft.com/office/drawing/2014/main" id="{57A5DF5E-86D0-4D95-B4A3-940C4EDDF687}"/>
               </a:ext>
             </a:extLst>
           </p:cNvPr>
@@ -19127,7 +19127,7 @@
           <p:cNvPr id="10" name="">
             <a:extLst xmlns:a="http://schemas.openxmlformats.org/drawingml/2006/main">
               <a:ext uri="{FF2B5EF4-FFF2-40B4-BE49-F238E27FC236}">
-                <a16:creationId xmlns:a16="http://schemas.microsoft.com/office/drawing/2014/main" id="{38C174FE-491C-413C-B0D1-AA1E4463F92B}"/>
+                <a16:creationId xmlns:a16="http://schemas.microsoft.com/office/drawing/2014/main" id="{019C9C0E-E965-4CEA-BE97-74E741DCAB6E}"/>
               </a:ext>
             </a:extLst>
           </p:cNvPr>
@@ -19158,7 +19158,7 @@
           <p:cNvPr id="11" name="">
             <a:extLst xmlns:a="http://schemas.openxmlformats.org/drawingml/2006/main">
               <a:ext uri="{FF2B5EF4-FFF2-40B4-BE49-F238E27FC236}">
-                <a16:creationId xmlns:a16="http://schemas.microsoft.com/office/drawing/2014/main" id="{5AB1C7C1-0D34-4BEF-B57B-C8CFA538067E}"/>
+                <a16:creationId xmlns:a16="http://schemas.microsoft.com/office/drawing/2014/main" id="{16E5610B-309D-4846-BB50-65363EE5F429}"/>
               </a:ext>
             </a:extLst>
           </p:cNvPr>
@@ -19203,7 +19203,7 @@
           <p:cNvPr id="12" name="">
             <a:extLst xmlns:a="http://schemas.openxmlformats.org/drawingml/2006/main">
               <a:ext uri="{FF2B5EF4-FFF2-40B4-BE49-F238E27FC236}">
-                <a16:creationId xmlns:a16="http://schemas.microsoft.com/office/drawing/2014/main" id="{AAFCFEF2-0BD4-4282-9DBB-1E989FF0BB9E}"/>
+                <a16:creationId xmlns:a16="http://schemas.microsoft.com/office/drawing/2014/main" id="{C975DDC3-40B9-4D0E-9D6F-3A791B149BA7}"/>
               </a:ext>
             </a:extLst>
           </p:cNvPr>
@@ -19248,7 +19248,7 @@
           <p:cNvPr id="13" name="">
             <a:extLst xmlns:a="http://schemas.openxmlformats.org/drawingml/2006/main">
               <a:ext uri="{FF2B5EF4-FFF2-40B4-BE49-F238E27FC236}">
-                <a16:creationId xmlns:a16="http://schemas.microsoft.com/office/drawing/2014/main" id="{5F1B4AFD-3E7D-48CF-9D49-70B4D52234E9}"/>
+                <a16:creationId xmlns:a16="http://schemas.microsoft.com/office/drawing/2014/main" id="{23018EC3-3C17-4B5A-9BD2-ED18278F7647}"/>
               </a:ext>
             </a:extLst>
           </p:cNvPr>
@@ -19281,7 +19281,7 @@
           <p:cNvPr id="14" name="">
             <a:extLst xmlns:a="http://schemas.openxmlformats.org/drawingml/2006/main">
               <a:ext uri="{FF2B5EF4-FFF2-40B4-BE49-F238E27FC236}">
-                <a16:creationId xmlns:a16="http://schemas.microsoft.com/office/drawing/2014/main" id="{DBA98E87-6480-4593-9B5E-D58327AC3B93}"/>
+                <a16:creationId xmlns:a16="http://schemas.microsoft.com/office/drawing/2014/main" id="{F4CEF4A3-1008-4E12-B799-F0F7C546FD65}"/>
               </a:ext>
             </a:extLst>
           </p:cNvPr>
@@ -19314,7 +19314,7 @@
           <p:cNvPr id="15" name="">
             <a:extLst xmlns:a="http://schemas.openxmlformats.org/drawingml/2006/main">
               <a:ext uri="{FF2B5EF4-FFF2-40B4-BE49-F238E27FC236}">
-                <a16:creationId xmlns:a16="http://schemas.microsoft.com/office/drawing/2014/main" id="{5028345F-EC32-496E-A394-020B592AA283}"/>
+                <a16:creationId xmlns:a16="http://schemas.microsoft.com/office/drawing/2014/main" id="{123BA294-F19B-40F3-996E-64B05ECADA53}"/>
               </a:ext>
             </a:extLst>
           </p:cNvPr>
@@ -19345,7 +19345,7 @@
           <p:cNvPr id="16" name="">
             <a:extLst xmlns:a="http://schemas.openxmlformats.org/drawingml/2006/main">
               <a:ext uri="{FF2B5EF4-FFF2-40B4-BE49-F238E27FC236}">
-                <a16:creationId xmlns:a16="http://schemas.microsoft.com/office/drawing/2014/main" id="{D1CF3E60-5E25-4122-979E-9D4BD525C125}"/>
+                <a16:creationId xmlns:a16="http://schemas.microsoft.com/office/drawing/2014/main" id="{7FCC74DA-3A03-41A8-A3BD-1964873EAA91}"/>
               </a:ext>
             </a:extLst>
           </p:cNvPr>
@@ -19390,7 +19390,7 @@
           <p:cNvPr id="17" name="">
             <a:extLst xmlns:a="http://schemas.openxmlformats.org/drawingml/2006/main">
               <a:ext uri="{FF2B5EF4-FFF2-40B4-BE49-F238E27FC236}">
-                <a16:creationId xmlns:a16="http://schemas.microsoft.com/office/drawing/2014/main" id="{EAFA3295-6FEB-419B-8E81-4AEFAC76F03F}"/>
+                <a16:creationId xmlns:a16="http://schemas.microsoft.com/office/drawing/2014/main" id="{53ED4633-464E-4ADB-BFA6-BCBCDC5887BD}"/>
               </a:ext>
             </a:extLst>
           </p:cNvPr>
@@ -19435,7 +19435,7 @@
           <p:cNvPr id="18" name="">
             <a:extLst xmlns:a="http://schemas.openxmlformats.org/drawingml/2006/main">
               <a:ext uri="{FF2B5EF4-FFF2-40B4-BE49-F238E27FC236}">
-                <a16:creationId xmlns:a16="http://schemas.microsoft.com/office/drawing/2014/main" id="{89B5828C-73CA-4E35-AF37-B62C6259CFF5}"/>
+                <a16:creationId xmlns:a16="http://schemas.microsoft.com/office/drawing/2014/main" id="{BE78FE85-FA95-4350-A9EE-B2DB3AF44C5D}"/>
               </a:ext>
             </a:extLst>
           </p:cNvPr>
@@ -19468,7 +19468,7 @@
           <p:cNvPr id="19" name="">
             <a:extLst xmlns:a="http://schemas.openxmlformats.org/drawingml/2006/main">
               <a:ext uri="{FF2B5EF4-FFF2-40B4-BE49-F238E27FC236}">
-                <a16:creationId xmlns:a16="http://schemas.microsoft.com/office/drawing/2014/main" id="{CC5FA837-C04D-41C0-94EF-DD4A80CF31F6}"/>
+                <a16:creationId xmlns:a16="http://schemas.microsoft.com/office/drawing/2014/main" id="{1DDD9DCA-DF1A-4D91-AE32-49210EEAA24F}"/>
               </a:ext>
             </a:extLst>
           </p:cNvPr>
@@ -19501,7 +19501,7 @@
           <p:cNvPr id="20" name="">
             <a:extLst xmlns:a="http://schemas.openxmlformats.org/drawingml/2006/main">
               <a:ext uri="{FF2B5EF4-FFF2-40B4-BE49-F238E27FC236}">
-                <a16:creationId xmlns:a16="http://schemas.microsoft.com/office/drawing/2014/main" id="{0EA26B4B-DB20-4DE1-BAD1-308EAD461F15}"/>
+                <a16:creationId xmlns:a16="http://schemas.microsoft.com/office/drawing/2014/main" id="{BED6C217-4475-4CCC-8B04-9EDEC0E465C4}"/>
               </a:ext>
             </a:extLst>
           </p:cNvPr>
@@ -19532,7 +19532,7 @@
           <p:cNvPr id="21" name="">
             <a:extLst xmlns:a="http://schemas.openxmlformats.org/drawingml/2006/main">
               <a:ext uri="{FF2B5EF4-FFF2-40B4-BE49-F238E27FC236}">
-                <a16:creationId xmlns:a16="http://schemas.microsoft.com/office/drawing/2014/main" id="{6F36F52D-B2E4-4087-8B0D-0B2EA747B952}"/>
+                <a16:creationId xmlns:a16="http://schemas.microsoft.com/office/drawing/2014/main" id="{67EF05DA-55A3-436F-AD38-984948EA6500}"/>
               </a:ext>
             </a:extLst>
           </p:cNvPr>
@@ -19577,7 +19577,7 @@
           <p:cNvPr id="22" name="">
             <a:extLst xmlns:a="http://schemas.openxmlformats.org/drawingml/2006/main">
               <a:ext uri="{FF2B5EF4-FFF2-40B4-BE49-F238E27FC236}">
-                <a16:creationId xmlns:a16="http://schemas.microsoft.com/office/drawing/2014/main" id="{289A1E8D-FA6C-46B3-A448-8C816ED5077B}"/>
+                <a16:creationId xmlns:a16="http://schemas.microsoft.com/office/drawing/2014/main" id="{69DDDF1E-1712-42CD-B620-516B858D03D1}"/>
               </a:ext>
             </a:extLst>
           </p:cNvPr>
@@ -19622,7 +19622,7 @@
           <p:cNvPr id="23" name="">
             <a:extLst xmlns:a="http://schemas.openxmlformats.org/drawingml/2006/main">
               <a:ext uri="{FF2B5EF4-FFF2-40B4-BE49-F238E27FC236}">
-                <a16:creationId xmlns:a16="http://schemas.microsoft.com/office/drawing/2014/main" id="{4D6479CE-1ACD-4087-9A86-12C70979074D}"/>
+                <a16:creationId xmlns:a16="http://schemas.microsoft.com/office/drawing/2014/main" id="{2A56BE3F-F2C5-4FF8-9A01-747F2FED1833}"/>
               </a:ext>
             </a:extLst>
           </p:cNvPr>
@@ -19655,7 +19655,7 @@
           <p:cNvPr id="24" name="">
             <a:extLst xmlns:a="http://schemas.openxmlformats.org/drawingml/2006/main">
               <a:ext uri="{FF2B5EF4-FFF2-40B4-BE49-F238E27FC236}">
-                <a16:creationId xmlns:a16="http://schemas.microsoft.com/office/drawing/2014/main" id="{9B1C84A0-686F-429E-9EDC-7A1A04D9E21A}"/>
+                <a16:creationId xmlns:a16="http://schemas.microsoft.com/office/drawing/2014/main" id="{6ABC14AB-0E4C-4E5B-8330-3BB418971354}"/>
               </a:ext>
             </a:extLst>
           </p:cNvPr>
@@ -19688,7 +19688,7 @@
           <p:cNvPr id="25" name="">
             <a:extLst xmlns:a="http://schemas.openxmlformats.org/drawingml/2006/main">
               <a:ext uri="{FF2B5EF4-FFF2-40B4-BE49-F238E27FC236}">
-                <a16:creationId xmlns:a16="http://schemas.microsoft.com/office/drawing/2014/main" id="{B553F707-810E-4755-BFEA-699EAAF95824}"/>
+                <a16:creationId xmlns:a16="http://schemas.microsoft.com/office/drawing/2014/main" id="{2E0495EB-6FAE-4DC8-90F7-E37F1C10C023}"/>
               </a:ext>
             </a:extLst>
           </p:cNvPr>
@@ -19719,7 +19719,7 @@
           <p:cNvPr id="26" name="">
             <a:extLst xmlns:a="http://schemas.openxmlformats.org/drawingml/2006/main">
               <a:ext uri="{FF2B5EF4-FFF2-40B4-BE49-F238E27FC236}">
-                <a16:creationId xmlns:a16="http://schemas.microsoft.com/office/drawing/2014/main" id="{5671EEA1-EB5D-42C6-970E-1BB2C501C408}"/>
+                <a16:creationId xmlns:a16="http://schemas.microsoft.com/office/drawing/2014/main" id="{FF148195-0A05-4791-8A55-1D65086E41F4}"/>
               </a:ext>
             </a:extLst>
           </p:cNvPr>
@@ -19764,7 +19764,7 @@
           <p:cNvPr id="27" name="">
             <a:extLst xmlns:a="http://schemas.openxmlformats.org/drawingml/2006/main">
               <a:ext uri="{FF2B5EF4-FFF2-40B4-BE49-F238E27FC236}">
-                <a16:creationId xmlns:a16="http://schemas.microsoft.com/office/drawing/2014/main" id="{29DD8AAF-4556-4034-8886-2A360E09EC77}"/>
+                <a16:creationId xmlns:a16="http://schemas.microsoft.com/office/drawing/2014/main" id="{B82B0397-FD9B-477C-81B9-9CCB9878ED86}"/>
               </a:ext>
             </a:extLst>
           </p:cNvPr>
@@ -19809,7 +19809,7 @@
           <p:cNvPr id="28" name="">
             <a:extLst xmlns:a="http://schemas.openxmlformats.org/drawingml/2006/main">
               <a:ext uri="{FF2B5EF4-FFF2-40B4-BE49-F238E27FC236}">
-                <a16:creationId xmlns:a16="http://schemas.microsoft.com/office/drawing/2014/main" id="{2F683A27-F81C-4F2B-ADC2-9480A553ED42}"/>
+                <a16:creationId xmlns:a16="http://schemas.microsoft.com/office/drawing/2014/main" id="{67B4B891-2EA9-4EE8-9F54-FAF2ACA53D80}"/>
               </a:ext>
             </a:extLst>
           </p:cNvPr>
@@ -19842,7 +19842,7 @@
           <p:cNvPr id="29" name="">
             <a:extLst xmlns:a="http://schemas.openxmlformats.org/drawingml/2006/main">
               <a:ext uri="{FF2B5EF4-FFF2-40B4-BE49-F238E27FC236}">
-                <a16:creationId xmlns:a16="http://schemas.microsoft.com/office/drawing/2014/main" id="{1126EC08-3425-40A3-BDF9-2626B39B758E}"/>
+                <a16:creationId xmlns:a16="http://schemas.microsoft.com/office/drawing/2014/main" id="{287F10AA-4E62-4AD8-99F8-02FDCBFB1DD3}"/>
               </a:ext>
             </a:extLst>
           </p:cNvPr>
@@ -19875,7 +19875,7 @@
           <p:cNvPr id="30" name="">
             <a:extLst xmlns:a="http://schemas.openxmlformats.org/drawingml/2006/main">
               <a:ext uri="{FF2B5EF4-FFF2-40B4-BE49-F238E27FC236}">
-                <a16:creationId xmlns:a16="http://schemas.microsoft.com/office/drawing/2014/main" id="{BE20CDF0-7EFC-4F57-A9ED-F1B2DA67EF29}"/>
+                <a16:creationId xmlns:a16="http://schemas.microsoft.com/office/drawing/2014/main" id="{14233F52-2938-4BC4-BD3F-CF63A7CB2D49}"/>
               </a:ext>
             </a:extLst>
           </p:cNvPr>
@@ -19906,7 +19906,7 @@
           <p:cNvPr id="31" name="">
             <a:extLst xmlns:a="http://schemas.openxmlformats.org/drawingml/2006/main">
               <a:ext uri="{FF2B5EF4-FFF2-40B4-BE49-F238E27FC236}">
-                <a16:creationId xmlns:a16="http://schemas.microsoft.com/office/drawing/2014/main" id="{1439CEDD-59CC-4198-8BC1-6D9923E2853C}"/>
+                <a16:creationId xmlns:a16="http://schemas.microsoft.com/office/drawing/2014/main" id="{D02608E1-FA41-42BF-867D-870D08744D84}"/>
               </a:ext>
             </a:extLst>
           </p:cNvPr>
@@ -19951,7 +19951,7 @@
           <p:cNvPr id="32" name="">
             <a:extLst xmlns:a="http://schemas.openxmlformats.org/drawingml/2006/main">
               <a:ext uri="{FF2B5EF4-FFF2-40B4-BE49-F238E27FC236}">
-                <a16:creationId xmlns:a16="http://schemas.microsoft.com/office/drawing/2014/main" id="{69D2DB39-B1C0-4209-BF73-A2DBFC2EA082}"/>
+                <a16:creationId xmlns:a16="http://schemas.microsoft.com/office/drawing/2014/main" id="{6B66094C-E741-4CCC-8C49-57DF3E64360D}"/>
               </a:ext>
             </a:extLst>
           </p:cNvPr>
@@ -19996,7 +19996,7 @@
           <p:cNvPr id="33" name="">
             <a:extLst xmlns:a="http://schemas.openxmlformats.org/drawingml/2006/main">
               <a:ext uri="{FF2B5EF4-FFF2-40B4-BE49-F238E27FC236}">
-                <a16:creationId xmlns:a16="http://schemas.microsoft.com/office/drawing/2014/main" id="{414D7CD4-26EF-4B10-9BF6-1F6D9F05BE5B}"/>
+                <a16:creationId xmlns:a16="http://schemas.microsoft.com/office/drawing/2014/main" id="{FC6862D7-7932-4B40-9095-33195ACE489B}"/>
               </a:ext>
             </a:extLst>
           </p:cNvPr>
@@ -20029,7 +20029,7 @@
           <p:cNvPr id="34" name="">
             <a:extLst xmlns:a="http://schemas.openxmlformats.org/drawingml/2006/main">
               <a:ext uri="{FF2B5EF4-FFF2-40B4-BE49-F238E27FC236}">
-                <a16:creationId xmlns:a16="http://schemas.microsoft.com/office/drawing/2014/main" id="{E1ACA6D1-5E06-4C92-A20B-1F05E5768063}"/>
+                <a16:creationId xmlns:a16="http://schemas.microsoft.com/office/drawing/2014/main" id="{BCB42B89-B1D3-42A7-8941-55B37C6ED327}"/>
               </a:ext>
             </a:extLst>
           </p:cNvPr>
@@ -20062,7 +20062,7 @@
           <p:cNvPr id="35" name="">
             <a:extLst xmlns:a="http://schemas.openxmlformats.org/drawingml/2006/main">
               <a:ext uri="{FF2B5EF4-FFF2-40B4-BE49-F238E27FC236}">
-                <a16:creationId xmlns:a16="http://schemas.microsoft.com/office/drawing/2014/main" id="{762B6644-E4BA-409F-90B9-650D9AE8F260}"/>
+                <a16:creationId xmlns:a16="http://schemas.microsoft.com/office/drawing/2014/main" id="{EF2005FA-1652-487B-B9F3-71655EA29DB8}"/>
               </a:ext>
             </a:extLst>
           </p:cNvPr>
@@ -20093,7 +20093,7 @@
           <p:cNvPr id="36" name="">
             <a:extLst xmlns:a="http://schemas.openxmlformats.org/drawingml/2006/main">
               <a:ext uri="{FF2B5EF4-FFF2-40B4-BE49-F238E27FC236}">
-                <a16:creationId xmlns:a16="http://schemas.microsoft.com/office/drawing/2014/main" id="{E4B5D6CA-4EE4-4F66-BBA1-DA134FBC3171}"/>
+                <a16:creationId xmlns:a16="http://schemas.microsoft.com/office/drawing/2014/main" id="{DC279942-D3B4-4B4B-A327-94C350EF5200}"/>
               </a:ext>
             </a:extLst>
           </p:cNvPr>
@@ -20138,7 +20138,7 @@
           <p:cNvPr id="37" name="">
             <a:extLst xmlns:a="http://schemas.openxmlformats.org/drawingml/2006/main">
               <a:ext uri="{FF2B5EF4-FFF2-40B4-BE49-F238E27FC236}">
-                <a16:creationId xmlns:a16="http://schemas.microsoft.com/office/drawing/2014/main" id="{8C8D3E8B-77DC-460E-923B-E6519CFAE0D4}"/>
+                <a16:creationId xmlns:a16="http://schemas.microsoft.com/office/drawing/2014/main" id="{3EEBF9DF-A204-44DE-AE1D-AC914AF9AC1A}"/>
               </a:ext>
             </a:extLst>
           </p:cNvPr>
@@ -20183,7 +20183,7 @@
           <p:cNvPr id="38" name="">
             <a:extLst xmlns:a="http://schemas.openxmlformats.org/drawingml/2006/main">
               <a:ext uri="{FF2B5EF4-FFF2-40B4-BE49-F238E27FC236}">
-                <a16:creationId xmlns:a16="http://schemas.microsoft.com/office/drawing/2014/main" id="{EBED6B34-94F1-4FC7-B2ED-D892472A5ED9}"/>
+                <a16:creationId xmlns:a16="http://schemas.microsoft.com/office/drawing/2014/main" id="{EB778433-1091-48AB-90FE-E97A73B5F9CC}"/>
               </a:ext>
             </a:extLst>
           </p:cNvPr>
@@ -20218,7 +20218,7 @@
           <p:cNvPr id="39" name="">
             <a:extLst xmlns:a="http://schemas.openxmlformats.org/drawingml/2006/main">
               <a:ext uri="{FF2B5EF4-FFF2-40B4-BE49-F238E27FC236}">
-                <a16:creationId xmlns:a16="http://schemas.microsoft.com/office/drawing/2014/main" id="{47828AB9-5687-4BA0-B7D7-AAA04ED35DFB}"/>
+                <a16:creationId xmlns:a16="http://schemas.microsoft.com/office/drawing/2014/main" id="{ED42F713-5384-475A-88E1-8921D46EFAE1}"/>
               </a:ext>
             </a:extLst>
           </p:cNvPr>
@@ -20249,7 +20249,7 @@
           <p:cNvPr id="40" name="">
             <a:extLst xmlns:a="http://schemas.openxmlformats.org/drawingml/2006/main">
               <a:ext uri="{FF2B5EF4-FFF2-40B4-BE49-F238E27FC236}">
-                <a16:creationId xmlns:a16="http://schemas.microsoft.com/office/drawing/2014/main" id="{8EF60921-C13A-43A4-82D5-BA64590B7C24}"/>
+                <a16:creationId xmlns:a16="http://schemas.microsoft.com/office/drawing/2014/main" id="{29CC36B5-D046-43E9-AA11-45A22AB50A6D}"/>
               </a:ext>
             </a:extLst>
           </p:cNvPr>
@@ -20294,7 +20294,7 @@
           <p:cNvPr id="41" name="">
             <a:extLst xmlns:a="http://schemas.openxmlformats.org/drawingml/2006/main">
               <a:ext uri="{FF2B5EF4-FFF2-40B4-BE49-F238E27FC236}">
-                <a16:creationId xmlns:a16="http://schemas.microsoft.com/office/drawing/2014/main" id="{CCB026C3-17A3-42C2-83EC-A5FC049161F8}"/>
+                <a16:creationId xmlns:a16="http://schemas.microsoft.com/office/drawing/2014/main" id="{C267CF13-4347-48D3-B440-74B0CDAD9E3A}"/>
               </a:ext>
             </a:extLst>
           </p:cNvPr>
@@ -20339,7 +20339,7 @@
           <p:cNvPr id="42" name="">
             <a:extLst xmlns:a="http://schemas.openxmlformats.org/drawingml/2006/main">
               <a:ext uri="{FF2B5EF4-FFF2-40B4-BE49-F238E27FC236}">
-                <a16:creationId xmlns:a16="http://schemas.microsoft.com/office/drawing/2014/main" id="{C871A2C8-CB6C-427A-B3FE-08B9DC374C04}"/>
+                <a16:creationId xmlns:a16="http://schemas.microsoft.com/office/drawing/2014/main" id="{B3106169-89B7-492C-A25A-81901ABD99C7}"/>
               </a:ext>
             </a:extLst>
           </p:cNvPr>
@@ -20374,7 +20374,7 @@
           <p:cNvPr id="43" name="">
             <a:extLst xmlns:a="http://schemas.openxmlformats.org/drawingml/2006/main">
               <a:ext uri="{FF2B5EF4-FFF2-40B4-BE49-F238E27FC236}">
-                <a16:creationId xmlns:a16="http://schemas.microsoft.com/office/drawing/2014/main" id="{EE4333C2-787C-4516-A3EC-2C5BF294A7B8}"/>
+                <a16:creationId xmlns:a16="http://schemas.microsoft.com/office/drawing/2014/main" id="{DB372F04-9E16-4B6F-8D11-4DDA083FA43C}"/>
               </a:ext>
             </a:extLst>
           </p:cNvPr>
@@ -20405,7 +20405,7 @@
           <p:cNvPr id="44" name="">
             <a:extLst xmlns:a="http://schemas.openxmlformats.org/drawingml/2006/main">
               <a:ext uri="{FF2B5EF4-FFF2-40B4-BE49-F238E27FC236}">
-                <a16:creationId xmlns:a16="http://schemas.microsoft.com/office/drawing/2014/main" id="{0D429A07-289F-443F-9D9A-B6EC5A20EB43}"/>
+                <a16:creationId xmlns:a16="http://schemas.microsoft.com/office/drawing/2014/main" id="{425E4ABF-0F01-4EA0-B7BC-EB0F8C321E73}"/>
               </a:ext>
             </a:extLst>
           </p:cNvPr>
@@ -20450,7 +20450,7 @@
           <p:cNvPr id="45" name="">
             <a:extLst xmlns:a="http://schemas.openxmlformats.org/drawingml/2006/main">
               <a:ext uri="{FF2B5EF4-FFF2-40B4-BE49-F238E27FC236}">
-                <a16:creationId xmlns:a16="http://schemas.microsoft.com/office/drawing/2014/main" id="{30362F4B-3709-4BCA-B38B-94BABE6F91F8}"/>
+                <a16:creationId xmlns:a16="http://schemas.microsoft.com/office/drawing/2014/main" id="{89988B29-4111-4942-AD69-36F7D57641F0}"/>
               </a:ext>
             </a:extLst>
           </p:cNvPr>
@@ -20495,7 +20495,7 @@
           <p:cNvPr id="46" name="">
             <a:extLst xmlns:a="http://schemas.openxmlformats.org/drawingml/2006/main">
               <a:ext uri="{FF2B5EF4-FFF2-40B4-BE49-F238E27FC236}">
-                <a16:creationId xmlns:a16="http://schemas.microsoft.com/office/drawing/2014/main" id="{370704B3-2F52-4464-BCCE-4ED67D363683}"/>
+                <a16:creationId xmlns:a16="http://schemas.microsoft.com/office/drawing/2014/main" id="{49F0A6A6-DAD0-4ACD-8357-8D1C6AFC8369}"/>
               </a:ext>
             </a:extLst>
           </p:cNvPr>
@@ -20530,7 +20530,7 @@
           <p:cNvPr id="47" name="">
             <a:extLst xmlns:a="http://schemas.openxmlformats.org/drawingml/2006/main">
               <a:ext uri="{FF2B5EF4-FFF2-40B4-BE49-F238E27FC236}">
-                <a16:creationId xmlns:a16="http://schemas.microsoft.com/office/drawing/2014/main" id="{F731596F-1D38-49C7-B5F7-661E5AD93C88}"/>
+                <a16:creationId xmlns:a16="http://schemas.microsoft.com/office/drawing/2014/main" id="{E6A82A9E-6C61-48A9-B1FD-2D97D3AB7604}"/>
               </a:ext>
             </a:extLst>
           </p:cNvPr>
@@ -20561,7 +20561,7 @@
           <p:cNvPr id="48" name="">
             <a:extLst xmlns:a="http://schemas.openxmlformats.org/drawingml/2006/main">
               <a:ext uri="{FF2B5EF4-FFF2-40B4-BE49-F238E27FC236}">
-                <a16:creationId xmlns:a16="http://schemas.microsoft.com/office/drawing/2014/main" id="{ECF93F74-AECF-49E5-9F82-014281D260F2}"/>
+                <a16:creationId xmlns:a16="http://schemas.microsoft.com/office/drawing/2014/main" id="{77C8AB11-B6BD-41C7-8E39-9982CD5EB162}"/>
               </a:ext>
             </a:extLst>
           </p:cNvPr>
@@ -20606,7 +20606,7 @@
           <p:cNvPr id="49" name="">
             <a:extLst xmlns:a="http://schemas.openxmlformats.org/drawingml/2006/main">
               <a:ext uri="{FF2B5EF4-FFF2-40B4-BE49-F238E27FC236}">
-                <a16:creationId xmlns:a16="http://schemas.microsoft.com/office/drawing/2014/main" id="{33F33BE6-0D1B-47AA-B836-D259E1BB105D}"/>
+                <a16:creationId xmlns:a16="http://schemas.microsoft.com/office/drawing/2014/main" id="{E91B27D4-3276-40B1-BE30-BE5157EB4C7C}"/>
               </a:ext>
             </a:extLst>
           </p:cNvPr>
@@ -20651,7 +20651,7 @@
           <p:cNvPr id="50" name="">
             <a:extLst xmlns:a="http://schemas.openxmlformats.org/drawingml/2006/main">
               <a:ext uri="{FF2B5EF4-FFF2-40B4-BE49-F238E27FC236}">
-                <a16:creationId xmlns:a16="http://schemas.microsoft.com/office/drawing/2014/main" id="{1708FD0C-79EF-4A71-81E8-CDB43B706D4A}"/>
+                <a16:creationId xmlns:a16="http://schemas.microsoft.com/office/drawing/2014/main" id="{DDF94B98-6592-4664-98C0-CDB9AC31ECA3}"/>
               </a:ext>
             </a:extLst>
           </p:cNvPr>
@@ -20696,7 +20696,7 @@
           <p:cNvPr id="51" name="">
             <a:extLst xmlns:a="http://schemas.openxmlformats.org/drawingml/2006/main">
               <a:ext uri="{FF2B5EF4-FFF2-40B4-BE49-F238E27FC236}">
-                <a16:creationId xmlns:a16="http://schemas.microsoft.com/office/drawing/2014/main" id="{5BBF7149-2674-4E51-9DB0-405729B49486}"/>
+                <a16:creationId xmlns:a16="http://schemas.microsoft.com/office/drawing/2014/main" id="{28C7EA2E-2530-4B27-B490-73AF665FF98B}"/>
               </a:ext>
             </a:extLst>
           </p:cNvPr>
@@ -20739,7 +20739,7 @@
     </p:spTree>
     <p:extLst>
       <p:ext uri="{BB962C8B-B14F-4D97-AF65-F5344CB8AC3E}">
-        <p14:creationId xmlns:p14="http://schemas.microsoft.com/office/powerpoint/2010/main" val="1438617262"/>
+        <p14:creationId xmlns:p14="http://schemas.microsoft.com/office/powerpoint/2010/main" val="1945949720"/>
       </p:ext>
     </p:extLst>
   </p:cSld>
@@ -20763,7 +20763,7 @@
           <p:cNvPr id="30" name="">
             <a:extLst xmlns:a="http://schemas.openxmlformats.org/drawingml/2006/main">
               <a:ext uri="{FF2B5EF4-FFF2-40B4-BE49-F238E27FC236}">
-                <a16:creationId xmlns:a16="http://schemas.microsoft.com/office/drawing/2014/main" id="{766957CE-9285-42F8-81E7-26286194CBB2}"/>
+                <a16:creationId xmlns:a16="http://schemas.microsoft.com/office/drawing/2014/main" id="{BEF868E9-3D04-4086-9277-34BF63C53298}"/>
               </a:ext>
             </a:extLst>
           </p:cNvPr>
@@ -20794,7 +20794,7 @@
           <p:cNvPr id="2" name="">
             <a:extLst xmlns:a="http://schemas.openxmlformats.org/drawingml/2006/main">
               <a:ext uri="{FF2B5EF4-FFF2-40B4-BE49-F238E27FC236}">
-                <a16:creationId xmlns:a16="http://schemas.microsoft.com/office/drawing/2014/main" id="{39115229-F173-4BC4-9DA7-89CAC65E4AD4}"/>
+                <a16:creationId xmlns:a16="http://schemas.microsoft.com/office/drawing/2014/main" id="{8D763CB7-0E7C-4432-BF8D-6437ECE6CA10}"/>
               </a:ext>
             </a:extLst>
           </p:cNvPr>
@@ -20839,7 +20839,7 @@
           <p:cNvPr id="3" name="">
             <a:extLst xmlns:a="http://schemas.openxmlformats.org/drawingml/2006/main">
               <a:ext uri="{FF2B5EF4-FFF2-40B4-BE49-F238E27FC236}">
-                <a16:creationId xmlns:a16="http://schemas.microsoft.com/office/drawing/2014/main" id="{DB5C33E5-55A4-4C81-AC2A-3C8CAD8200B7}"/>
+                <a16:creationId xmlns:a16="http://schemas.microsoft.com/office/drawing/2014/main" id="{3DE34F91-6897-4161-8B19-B1AD74428FEF}"/>
               </a:ext>
             </a:extLst>
           </p:cNvPr>
@@ -20884,7 +20884,7 @@
           <p:cNvPr id="4" name="">
             <a:extLst xmlns:a="http://schemas.openxmlformats.org/drawingml/2006/main">
               <a:ext uri="{FF2B5EF4-FFF2-40B4-BE49-F238E27FC236}">
-                <a16:creationId xmlns:a16="http://schemas.microsoft.com/office/drawing/2014/main" id="{92A74857-AEFA-4AFD-AB7D-1EF8196998D6}"/>
+                <a16:creationId xmlns:a16="http://schemas.microsoft.com/office/drawing/2014/main" id="{28F1335C-1C67-416E-B214-D999781DAE98}"/>
               </a:ext>
             </a:extLst>
           </p:cNvPr>
@@ -20929,7 +20929,7 @@
           <p:cNvPr id="5" name="">
             <a:extLst xmlns:a="http://schemas.openxmlformats.org/drawingml/2006/main">
               <a:ext uri="{FF2B5EF4-FFF2-40B4-BE49-F238E27FC236}">
-                <a16:creationId xmlns:a16="http://schemas.microsoft.com/office/drawing/2014/main" id="{38E7F421-89DA-4210-B9F3-6AF4F3CC4FC0}"/>
+                <a16:creationId xmlns:a16="http://schemas.microsoft.com/office/drawing/2014/main" id="{F17D32C3-535C-4063-83CF-9DD396877660}"/>
               </a:ext>
             </a:extLst>
           </p:cNvPr>
@@ -20960,7 +20960,7 @@
           <p:cNvPr id="6" name="">
             <a:extLst xmlns:a="http://schemas.openxmlformats.org/drawingml/2006/main">
               <a:ext uri="{FF2B5EF4-FFF2-40B4-BE49-F238E27FC236}">
-                <a16:creationId xmlns:a16="http://schemas.microsoft.com/office/drawing/2014/main" id="{7506BD6C-F87B-4780-8780-0B64950BFD0C}"/>
+                <a16:creationId xmlns:a16="http://schemas.microsoft.com/office/drawing/2014/main" id="{5D702862-A92D-4C2C-9A60-DC121B64F677}"/>
               </a:ext>
             </a:extLst>
           </p:cNvPr>
@@ -20991,7 +20991,7 @@
           <p:cNvPr id="7" name="">
             <a:extLst xmlns:a="http://schemas.openxmlformats.org/drawingml/2006/main">
               <a:ext uri="{FF2B5EF4-FFF2-40B4-BE49-F238E27FC236}">
-                <a16:creationId xmlns:a16="http://schemas.microsoft.com/office/drawing/2014/main" id="{80CEA2CE-43FD-4129-84DF-4E6F5C59B4D7}"/>
+                <a16:creationId xmlns:a16="http://schemas.microsoft.com/office/drawing/2014/main" id="{5AE6DCC3-47DD-44D9-9A38-36CA8148F696}"/>
               </a:ext>
             </a:extLst>
           </p:cNvPr>
@@ -21036,7 +21036,7 @@
           <p:cNvPr id="8" name="">
             <a:extLst xmlns:a="http://schemas.openxmlformats.org/drawingml/2006/main">
               <a:ext uri="{FF2B5EF4-FFF2-40B4-BE49-F238E27FC236}">
-                <a16:creationId xmlns:a16="http://schemas.microsoft.com/office/drawing/2014/main" id="{E46CA50B-ACE2-4811-8140-D5222B36C633}"/>
+                <a16:creationId xmlns:a16="http://schemas.microsoft.com/office/drawing/2014/main" id="{065FE53F-79EC-4D99-837D-546E475C4EBF}"/>
               </a:ext>
             </a:extLst>
           </p:cNvPr>
@@ -21081,7 +21081,7 @@
           <p:cNvPr id="9" name="">
             <a:extLst xmlns:a="http://schemas.openxmlformats.org/drawingml/2006/main">
               <a:ext uri="{FF2B5EF4-FFF2-40B4-BE49-F238E27FC236}">
-                <a16:creationId xmlns:a16="http://schemas.microsoft.com/office/drawing/2014/main" id="{53E2BE59-1AF0-4E84-888E-E82F19C14ED1}"/>
+                <a16:creationId xmlns:a16="http://schemas.microsoft.com/office/drawing/2014/main" id="{F5578F5B-2EF9-481E-96E8-9B3922AB3777}"/>
               </a:ext>
             </a:extLst>
           </p:cNvPr>
@@ -21116,7 +21116,7 @@
           <p:cNvPr id="10" name="">
             <a:extLst xmlns:a="http://schemas.openxmlformats.org/drawingml/2006/main">
               <a:ext uri="{FF2B5EF4-FFF2-40B4-BE49-F238E27FC236}">
-                <a16:creationId xmlns:a16="http://schemas.microsoft.com/office/drawing/2014/main" id="{67A09F12-4EEB-4C00-B9B4-657089F593B0}"/>
+                <a16:creationId xmlns:a16="http://schemas.microsoft.com/office/drawing/2014/main" id="{7E136C11-0A38-4A1C-843A-2D2B7E792E3B}"/>
               </a:ext>
             </a:extLst>
           </p:cNvPr>
@@ -21161,7 +21161,7 @@
           <p:cNvPr id="11" name="">
             <a:extLst xmlns:a="http://schemas.openxmlformats.org/drawingml/2006/main">
               <a:ext uri="{FF2B5EF4-FFF2-40B4-BE49-F238E27FC236}">
-                <a16:creationId xmlns:a16="http://schemas.microsoft.com/office/drawing/2014/main" id="{855F8695-CC89-4E36-A984-21EA7D289940}"/>
+                <a16:creationId xmlns:a16="http://schemas.microsoft.com/office/drawing/2014/main" id="{9563819B-ADCF-4F7A-9A5C-6FA1D04C0FF4}"/>
               </a:ext>
             </a:extLst>
           </p:cNvPr>
@@ -21206,7 +21206,7 @@
           <p:cNvPr id="12" name="">
             <a:extLst xmlns:a="http://schemas.openxmlformats.org/drawingml/2006/main">
               <a:ext uri="{FF2B5EF4-FFF2-40B4-BE49-F238E27FC236}">
-                <a16:creationId xmlns:a16="http://schemas.microsoft.com/office/drawing/2014/main" id="{234EAA09-07F0-4B33-B059-EC016045C8B1}"/>
+                <a16:creationId xmlns:a16="http://schemas.microsoft.com/office/drawing/2014/main" id="{701FA3EF-EA0E-4F95-9615-F91C1ADBD059}"/>
               </a:ext>
             </a:extLst>
           </p:cNvPr>
@@ -21251,7 +21251,7 @@
           <p:cNvPr id="13" name="">
             <a:extLst xmlns:a="http://schemas.openxmlformats.org/drawingml/2006/main">
               <a:ext uri="{FF2B5EF4-FFF2-40B4-BE49-F238E27FC236}">
-                <a16:creationId xmlns:a16="http://schemas.microsoft.com/office/drawing/2014/main" id="{3B3B2EA8-D759-4986-AEC4-0F77815D8B2D}"/>
+                <a16:creationId xmlns:a16="http://schemas.microsoft.com/office/drawing/2014/main" id="{7DBCF8AD-301A-405E-AE05-04E02FE929C6}"/>
               </a:ext>
             </a:extLst>
           </p:cNvPr>
@@ -21286,7 +21286,7 @@
           <p:cNvPr id="14" name="">
             <a:extLst xmlns:a="http://schemas.openxmlformats.org/drawingml/2006/main">
               <a:ext uri="{FF2B5EF4-FFF2-40B4-BE49-F238E27FC236}">
-                <a16:creationId xmlns:a16="http://schemas.microsoft.com/office/drawing/2014/main" id="{389CD613-D1EF-49CE-9140-894C1FAD1A7A}"/>
+                <a16:creationId xmlns:a16="http://schemas.microsoft.com/office/drawing/2014/main" id="{77A5109C-62F5-488B-B8C0-43CA1ACD9001}"/>
               </a:ext>
             </a:extLst>
           </p:cNvPr>
@@ -21331,7 +21331,7 @@
           <p:cNvPr id="15" name="">
             <a:extLst xmlns:a="http://schemas.openxmlformats.org/drawingml/2006/main">
               <a:ext uri="{FF2B5EF4-FFF2-40B4-BE49-F238E27FC236}">
-                <a16:creationId xmlns:a16="http://schemas.microsoft.com/office/drawing/2014/main" id="{FBB508BD-C192-4AE5-9FE9-657BBB641AC6}"/>
+                <a16:creationId xmlns:a16="http://schemas.microsoft.com/office/drawing/2014/main" id="{648E0C88-16DA-41AB-9EB6-D84D7FFDCEA8}"/>
               </a:ext>
             </a:extLst>
           </p:cNvPr>
@@ -21376,7 +21376,7 @@
           <p:cNvPr id="16" name="">
             <a:extLst xmlns:a="http://schemas.openxmlformats.org/drawingml/2006/main">
               <a:ext uri="{FF2B5EF4-FFF2-40B4-BE49-F238E27FC236}">
-                <a16:creationId xmlns:a16="http://schemas.microsoft.com/office/drawing/2014/main" id="{9B16BCA1-F6DF-42D4-A49B-D8D0825B9D85}"/>
+                <a16:creationId xmlns:a16="http://schemas.microsoft.com/office/drawing/2014/main" id="{AB5CB8CB-91E7-4076-A52A-CB1851D5ADD1}"/>
               </a:ext>
             </a:extLst>
           </p:cNvPr>
@@ -21421,7 +21421,7 @@
           <p:cNvPr id="17" name="">
             <a:extLst xmlns:a="http://schemas.openxmlformats.org/drawingml/2006/main">
               <a:ext uri="{FF2B5EF4-FFF2-40B4-BE49-F238E27FC236}">
-                <a16:creationId xmlns:a16="http://schemas.microsoft.com/office/drawing/2014/main" id="{3E3A2F16-C98A-43A3-9939-AB38D31A1461}"/>
+                <a16:creationId xmlns:a16="http://schemas.microsoft.com/office/drawing/2014/main" id="{0656CB39-37FA-4D73-BE59-AD441C3E5A66}"/>
               </a:ext>
             </a:extLst>
           </p:cNvPr>
@@ -21456,7 +21456,7 @@
           <p:cNvPr id="18" name="">
             <a:extLst xmlns:a="http://schemas.openxmlformats.org/drawingml/2006/main">
               <a:ext uri="{FF2B5EF4-FFF2-40B4-BE49-F238E27FC236}">
-                <a16:creationId xmlns:a16="http://schemas.microsoft.com/office/drawing/2014/main" id="{034DA961-A4C5-4983-9B0C-04D20639814F}"/>
+                <a16:creationId xmlns:a16="http://schemas.microsoft.com/office/drawing/2014/main" id="{15AF709D-B8E1-4AD3-B6F0-2DB66834E021}"/>
               </a:ext>
             </a:extLst>
           </p:cNvPr>
@@ -21501,7 +21501,7 @@
           <p:cNvPr id="19" name="">
             <a:extLst xmlns:a="http://schemas.openxmlformats.org/drawingml/2006/main">
               <a:ext uri="{FF2B5EF4-FFF2-40B4-BE49-F238E27FC236}">
-                <a16:creationId xmlns:a16="http://schemas.microsoft.com/office/drawing/2014/main" id="{AA6F0C43-9B43-47F3-8ED2-53B3DF78B80B}"/>
+                <a16:creationId xmlns:a16="http://schemas.microsoft.com/office/drawing/2014/main" id="{C63CB1BD-1C23-4F28-9E21-B3B331D40354}"/>
               </a:ext>
             </a:extLst>
           </p:cNvPr>
@@ -21546,7 +21546,7 @@
           <p:cNvPr id="20" name="">
             <a:extLst xmlns:a="http://schemas.openxmlformats.org/drawingml/2006/main">
               <a:ext uri="{FF2B5EF4-FFF2-40B4-BE49-F238E27FC236}">
-                <a16:creationId xmlns:a16="http://schemas.microsoft.com/office/drawing/2014/main" id="{5E53EDC4-8404-4D9F-828B-614D52ABF2EB}"/>
+                <a16:creationId xmlns:a16="http://schemas.microsoft.com/office/drawing/2014/main" id="{15610605-D61E-4F3B-9319-042D05C92BAB}"/>
               </a:ext>
             </a:extLst>
           </p:cNvPr>
@@ -21591,7 +21591,7 @@
           <p:cNvPr id="21" name="">
             <a:extLst xmlns:a="http://schemas.openxmlformats.org/drawingml/2006/main">
               <a:ext uri="{FF2B5EF4-FFF2-40B4-BE49-F238E27FC236}">
-                <a16:creationId xmlns:a16="http://schemas.microsoft.com/office/drawing/2014/main" id="{3C3F9B7A-A297-420B-BB00-5110E64DD8BD}"/>
+                <a16:creationId xmlns:a16="http://schemas.microsoft.com/office/drawing/2014/main" id="{53DADEE1-B2D7-4385-853B-7EA8F1530A4A}"/>
               </a:ext>
             </a:extLst>
           </p:cNvPr>
@@ -21626,7 +21626,7 @@
           <p:cNvPr id="22" name="">
             <a:extLst xmlns:a="http://schemas.openxmlformats.org/drawingml/2006/main">
               <a:ext uri="{FF2B5EF4-FFF2-40B4-BE49-F238E27FC236}">
-                <a16:creationId xmlns:a16="http://schemas.microsoft.com/office/drawing/2014/main" id="{425AF819-6194-4784-B615-A4610EF274E4}"/>
+                <a16:creationId xmlns:a16="http://schemas.microsoft.com/office/drawing/2014/main" id="{B609685B-7DEE-4AFD-8EDB-DB5D8399B0F8}"/>
               </a:ext>
             </a:extLst>
           </p:cNvPr>
@@ -21657,7 +21657,7 @@
           <p:cNvPr id="23" name="">
             <a:extLst xmlns:a="http://schemas.openxmlformats.org/drawingml/2006/main">
               <a:ext uri="{FF2B5EF4-FFF2-40B4-BE49-F238E27FC236}">
-                <a16:creationId xmlns:a16="http://schemas.microsoft.com/office/drawing/2014/main" id="{D0FD2A62-1EAC-4C9E-AE85-253463DA817B}"/>
+                <a16:creationId xmlns:a16="http://schemas.microsoft.com/office/drawing/2014/main" id="{54FB173E-1095-4CF2-B72F-E6A1FE5105E7}"/>
               </a:ext>
             </a:extLst>
           </p:cNvPr>
@@ -21702,7 +21702,7 @@
           <p:cNvPr id="24" name="">
             <a:extLst xmlns:a="http://schemas.openxmlformats.org/drawingml/2006/main">
               <a:ext uri="{FF2B5EF4-FFF2-40B4-BE49-F238E27FC236}">
-                <a16:creationId xmlns:a16="http://schemas.microsoft.com/office/drawing/2014/main" id="{5825CBE1-CD30-4B4B-9348-1B81634CE1D3}"/>
+                <a16:creationId xmlns:a16="http://schemas.microsoft.com/office/drawing/2014/main" id="{816B0A06-1A27-4655-9113-AABF982E825E}"/>
               </a:ext>
             </a:extLst>
           </p:cNvPr>
@@ -21747,7 +21747,7 @@
           <p:cNvPr id="25" name="">
             <a:extLst xmlns:a="http://schemas.openxmlformats.org/drawingml/2006/main">
               <a:ext uri="{FF2B5EF4-FFF2-40B4-BE49-F238E27FC236}">
-                <a16:creationId xmlns:a16="http://schemas.microsoft.com/office/drawing/2014/main" id="{F40323E6-217F-49F1-8907-B2E2B6AC376A}"/>
+                <a16:creationId xmlns:a16="http://schemas.microsoft.com/office/drawing/2014/main" id="{136CB6B6-7F28-43D4-92AA-8C225665F556}"/>
               </a:ext>
             </a:extLst>
           </p:cNvPr>
@@ -21782,7 +21782,7 @@
           <p:cNvPr id="26" name="">
             <a:extLst xmlns:a="http://schemas.openxmlformats.org/drawingml/2006/main">
               <a:ext uri="{FF2B5EF4-FFF2-40B4-BE49-F238E27FC236}">
-                <a16:creationId xmlns:a16="http://schemas.microsoft.com/office/drawing/2014/main" id="{C5BD70B9-0D2E-4C91-8CBE-27EBFA808375}"/>
+                <a16:creationId xmlns:a16="http://schemas.microsoft.com/office/drawing/2014/main" id="{2E03BE89-9692-4913-A15B-DB1633B0B1A9}"/>
               </a:ext>
             </a:extLst>
           </p:cNvPr>
@@ -21813,7 +21813,7 @@
           <p:cNvPr id="27" name="">
             <a:extLst xmlns:a="http://schemas.openxmlformats.org/drawingml/2006/main">
               <a:ext uri="{FF2B5EF4-FFF2-40B4-BE49-F238E27FC236}">
-                <a16:creationId xmlns:a16="http://schemas.microsoft.com/office/drawing/2014/main" id="{AFDDF209-55C7-499D-9325-2269EE59909C}"/>
+                <a16:creationId xmlns:a16="http://schemas.microsoft.com/office/drawing/2014/main" id="{EF24ECB9-F945-4149-BDF3-E0D37373EFB4}"/>
               </a:ext>
             </a:extLst>
           </p:cNvPr>
@@ -21858,7 +21858,7 @@
           <p:cNvPr id="28" name="">
             <a:extLst xmlns:a="http://schemas.openxmlformats.org/drawingml/2006/main">
               <a:ext uri="{FF2B5EF4-FFF2-40B4-BE49-F238E27FC236}">
-                <a16:creationId xmlns:a16="http://schemas.microsoft.com/office/drawing/2014/main" id="{E6EB60BA-659C-42FE-9479-742CA20C524A}"/>
+                <a16:creationId xmlns:a16="http://schemas.microsoft.com/office/drawing/2014/main" id="{F52AEEDF-D160-46C7-903D-9FD4E20D3E29}"/>
               </a:ext>
             </a:extLst>
           </p:cNvPr>
@@ -21903,7 +21903,7 @@
           <p:cNvPr id="29" name="">
             <a:extLst xmlns:a="http://schemas.openxmlformats.org/drawingml/2006/main">
               <a:ext uri="{FF2B5EF4-FFF2-40B4-BE49-F238E27FC236}">
-                <a16:creationId xmlns:a16="http://schemas.microsoft.com/office/drawing/2014/main" id="{E7E33708-3AE8-4C7A-AC6B-9FF66810D845}"/>
+                <a16:creationId xmlns:a16="http://schemas.microsoft.com/office/drawing/2014/main" id="{82CD24E1-81AC-4111-AC21-16285187412F}"/>
               </a:ext>
             </a:extLst>
           </p:cNvPr>
@@ -21946,7 +21946,7 @@
     </p:spTree>
     <p:extLst>
       <p:ext uri="{BB962C8B-B14F-4D97-AF65-F5344CB8AC3E}">
-        <p14:creationId xmlns:p14="http://schemas.microsoft.com/office/powerpoint/2010/main" val="956720923"/>
+        <p14:creationId xmlns:p14="http://schemas.microsoft.com/office/powerpoint/2010/main" val="1737779367"/>
       </p:ext>
     </p:extLst>
   </p:cSld>
@@ -21970,7 +21970,7 @@
           <p:cNvPr id="30" name="">
             <a:extLst xmlns:a="http://schemas.openxmlformats.org/drawingml/2006/main">
               <a:ext uri="{FF2B5EF4-FFF2-40B4-BE49-F238E27FC236}">
-                <a16:creationId xmlns:a16="http://schemas.microsoft.com/office/drawing/2014/main" id="{20B3EC95-6143-4155-B82C-35694ABF35AB}"/>
+                <a16:creationId xmlns:a16="http://schemas.microsoft.com/office/drawing/2014/main" id="{B6378319-96E1-4F4A-9C25-280853E6C47F}"/>
               </a:ext>
             </a:extLst>
           </p:cNvPr>
@@ -22001,7 +22001,7 @@
           <p:cNvPr id="2" name="">
             <a:extLst xmlns:a="http://schemas.openxmlformats.org/drawingml/2006/main">
               <a:ext uri="{FF2B5EF4-FFF2-40B4-BE49-F238E27FC236}">
-                <a16:creationId xmlns:a16="http://schemas.microsoft.com/office/drawing/2014/main" id="{8F88E0D8-AFAF-446A-8625-781C30CDD221}"/>
+                <a16:creationId xmlns:a16="http://schemas.microsoft.com/office/drawing/2014/main" id="{93BB0D8E-EC9C-4EC3-8262-1F6B2FEBCBDA}"/>
               </a:ext>
             </a:extLst>
           </p:cNvPr>
@@ -22046,7 +22046,7 @@
           <p:cNvPr id="3" name="">
             <a:extLst xmlns:a="http://schemas.openxmlformats.org/drawingml/2006/main">
               <a:ext uri="{FF2B5EF4-FFF2-40B4-BE49-F238E27FC236}">
-                <a16:creationId xmlns:a16="http://schemas.microsoft.com/office/drawing/2014/main" id="{FCAA7063-91FC-48D1-8911-1E23E5AB88DE}"/>
+                <a16:creationId xmlns:a16="http://schemas.microsoft.com/office/drawing/2014/main" id="{59633D3A-4EFE-4A0B-90EF-0B78C4DFD789}"/>
               </a:ext>
             </a:extLst>
           </p:cNvPr>
@@ -22091,7 +22091,7 @@
           <p:cNvPr id="4" name="">
             <a:extLst xmlns:a="http://schemas.openxmlformats.org/drawingml/2006/main">
               <a:ext uri="{FF2B5EF4-FFF2-40B4-BE49-F238E27FC236}">
-                <a16:creationId xmlns:a16="http://schemas.microsoft.com/office/drawing/2014/main" id="{71E3FA66-1A6B-4799-BCC2-179CF7D28DA4}"/>
+                <a16:creationId xmlns:a16="http://schemas.microsoft.com/office/drawing/2014/main" id="{AB81CB2C-60A0-4D9E-996E-A30F4A9994C7}"/>
               </a:ext>
             </a:extLst>
           </p:cNvPr>
@@ -22136,7 +22136,7 @@
           <p:cNvPr id="5" name="">
             <a:extLst xmlns:a="http://schemas.openxmlformats.org/drawingml/2006/main">
               <a:ext uri="{FF2B5EF4-FFF2-40B4-BE49-F238E27FC236}">
-                <a16:creationId xmlns:a16="http://schemas.microsoft.com/office/drawing/2014/main" id="{8009B0F6-4F24-4E08-800A-618EC0B6508B}"/>
+                <a16:creationId xmlns:a16="http://schemas.microsoft.com/office/drawing/2014/main" id="{22D4868D-28B2-4564-81AE-7C8B6D14CF35}"/>
               </a:ext>
             </a:extLst>
           </p:cNvPr>
@@ -22167,7 +22167,7 @@
           <p:cNvPr id="6" name="">
             <a:extLst xmlns:a="http://schemas.openxmlformats.org/drawingml/2006/main">
               <a:ext uri="{FF2B5EF4-FFF2-40B4-BE49-F238E27FC236}">
-                <a16:creationId xmlns:a16="http://schemas.microsoft.com/office/drawing/2014/main" id="{7012FDEF-372E-4D2F-B61D-63D397DCA02B}"/>
+                <a16:creationId xmlns:a16="http://schemas.microsoft.com/office/drawing/2014/main" id="{AFE7C113-FEA4-4AC2-954D-C0550237C123}"/>
               </a:ext>
             </a:extLst>
           </p:cNvPr>
@@ -22198,7 +22198,7 @@
           <p:cNvPr id="7" name="">
             <a:extLst xmlns:a="http://schemas.openxmlformats.org/drawingml/2006/main">
               <a:ext uri="{FF2B5EF4-FFF2-40B4-BE49-F238E27FC236}">
-                <a16:creationId xmlns:a16="http://schemas.microsoft.com/office/drawing/2014/main" id="{B9F0C706-E776-4AA9-A6C4-08C5017D6D0A}"/>
+                <a16:creationId xmlns:a16="http://schemas.microsoft.com/office/drawing/2014/main" id="{1E400621-441E-41AF-8092-8922D37B11A7}"/>
               </a:ext>
             </a:extLst>
           </p:cNvPr>
@@ -22243,7 +22243,7 @@
           <p:cNvPr id="8" name="">
             <a:extLst xmlns:a="http://schemas.openxmlformats.org/drawingml/2006/main">
               <a:ext uri="{FF2B5EF4-FFF2-40B4-BE49-F238E27FC236}">
-                <a16:creationId xmlns:a16="http://schemas.microsoft.com/office/drawing/2014/main" id="{93EF6C2D-CEA9-4432-A238-46CF691232DD}"/>
+                <a16:creationId xmlns:a16="http://schemas.microsoft.com/office/drawing/2014/main" id="{302E5E26-4ABF-44C2-83D4-1B6F2764E29C}"/>
               </a:ext>
             </a:extLst>
           </p:cNvPr>
@@ -22288,7 +22288,7 @@
           <p:cNvPr id="9" name="">
             <a:extLst xmlns:a="http://schemas.openxmlformats.org/drawingml/2006/main">
               <a:ext uri="{FF2B5EF4-FFF2-40B4-BE49-F238E27FC236}">
-                <a16:creationId xmlns:a16="http://schemas.microsoft.com/office/drawing/2014/main" id="{21AF4A37-1E09-4F68-BB39-362F09E210B1}"/>
+                <a16:creationId xmlns:a16="http://schemas.microsoft.com/office/drawing/2014/main" id="{3867D7F8-CDFA-4356-A10A-9CBA8E560239}"/>
               </a:ext>
             </a:extLst>
           </p:cNvPr>
@@ -22333,7 +22333,7 @@
           <p:cNvPr id="10" name="">
             <a:extLst xmlns:a="http://schemas.openxmlformats.org/drawingml/2006/main">
               <a:ext uri="{FF2B5EF4-FFF2-40B4-BE49-F238E27FC236}">
-                <a16:creationId xmlns:a16="http://schemas.microsoft.com/office/drawing/2014/main" id="{CF12CD90-86D4-467B-A225-637098B46D93}"/>
+                <a16:creationId xmlns:a16="http://schemas.microsoft.com/office/drawing/2014/main" id="{2153C064-7E25-44DB-9627-3E25643E5493}"/>
               </a:ext>
             </a:extLst>
           </p:cNvPr>
@@ -22364,7 +22364,7 @@
           <p:cNvPr id="11" name="">
             <a:extLst xmlns:a="http://schemas.openxmlformats.org/drawingml/2006/main">
               <a:ext uri="{FF2B5EF4-FFF2-40B4-BE49-F238E27FC236}">
-                <a16:creationId xmlns:a16="http://schemas.microsoft.com/office/drawing/2014/main" id="{61DD3780-5E65-46FC-BFE7-129CC15D93D9}"/>
+                <a16:creationId xmlns:a16="http://schemas.microsoft.com/office/drawing/2014/main" id="{07913229-3DF2-45E7-88AD-5FBD6AF2D38D}"/>
               </a:ext>
             </a:extLst>
           </p:cNvPr>
@@ -22395,7 +22395,7 @@
           <p:cNvPr id="12" name="">
             <a:extLst xmlns:a="http://schemas.openxmlformats.org/drawingml/2006/main">
               <a:ext uri="{FF2B5EF4-FFF2-40B4-BE49-F238E27FC236}">
-                <a16:creationId xmlns:a16="http://schemas.microsoft.com/office/drawing/2014/main" id="{7F259257-65D6-49E4-A4D2-3334D3100B4F}"/>
+                <a16:creationId xmlns:a16="http://schemas.microsoft.com/office/drawing/2014/main" id="{649DE133-02B1-4C07-A832-192E4083FD5C}"/>
               </a:ext>
             </a:extLst>
           </p:cNvPr>
@@ -22440,7 +22440,7 @@
           <p:cNvPr id="13" name="">
             <a:extLst xmlns:a="http://schemas.openxmlformats.org/drawingml/2006/main">
               <a:ext uri="{FF2B5EF4-FFF2-40B4-BE49-F238E27FC236}">
-                <a16:creationId xmlns:a16="http://schemas.microsoft.com/office/drawing/2014/main" id="{A3675BE1-2471-4CCF-B9C6-C430C46F6C18}"/>
+                <a16:creationId xmlns:a16="http://schemas.microsoft.com/office/drawing/2014/main" id="{59EDB167-03F6-45C5-8C4F-1CA24A93EA2A}"/>
               </a:ext>
             </a:extLst>
           </p:cNvPr>
@@ -22485,7 +22485,7 @@
           <p:cNvPr id="14" name="">
             <a:extLst xmlns:a="http://schemas.openxmlformats.org/drawingml/2006/main">
               <a:ext uri="{FF2B5EF4-FFF2-40B4-BE49-F238E27FC236}">
-                <a16:creationId xmlns:a16="http://schemas.microsoft.com/office/drawing/2014/main" id="{C223248F-1453-4460-A9A2-DB0C3B87324E}"/>
+                <a16:creationId xmlns:a16="http://schemas.microsoft.com/office/drawing/2014/main" id="{BF5BB641-6CE8-46DC-854C-00C1A1844F3D}"/>
               </a:ext>
             </a:extLst>
           </p:cNvPr>
@@ -22516,7 +22516,7 @@
           <p:cNvPr id="15" name="">
             <a:extLst xmlns:a="http://schemas.openxmlformats.org/drawingml/2006/main">
               <a:ext uri="{FF2B5EF4-FFF2-40B4-BE49-F238E27FC236}">
-                <a16:creationId xmlns:a16="http://schemas.microsoft.com/office/drawing/2014/main" id="{05B53D82-FF78-4495-9BE8-B1F0D7F0C237}"/>
+                <a16:creationId xmlns:a16="http://schemas.microsoft.com/office/drawing/2014/main" id="{82387C29-CBD7-47AD-A904-440D46AD18C4}"/>
               </a:ext>
             </a:extLst>
           </p:cNvPr>
@@ -22561,7 +22561,7 @@
           <p:cNvPr id="16" name="">
             <a:extLst xmlns:a="http://schemas.openxmlformats.org/drawingml/2006/main">
               <a:ext uri="{FF2B5EF4-FFF2-40B4-BE49-F238E27FC236}">
-                <a16:creationId xmlns:a16="http://schemas.microsoft.com/office/drawing/2014/main" id="{7D131768-59E4-481F-A150-B0FFDCF1F1E0}"/>
+                <a16:creationId xmlns:a16="http://schemas.microsoft.com/office/drawing/2014/main" id="{6DA6A0BD-5E11-460C-9BEC-6DD0E2799B86}"/>
               </a:ext>
             </a:extLst>
           </p:cNvPr>
@@ -22606,7 +22606,7 @@
           <p:cNvPr id="17" name="">
             <a:extLst xmlns:a="http://schemas.openxmlformats.org/drawingml/2006/main">
               <a:ext uri="{FF2B5EF4-FFF2-40B4-BE49-F238E27FC236}">
-                <a16:creationId xmlns:a16="http://schemas.microsoft.com/office/drawing/2014/main" id="{94DDD674-989D-4F04-B866-5D591CA51C79}"/>
+                <a16:creationId xmlns:a16="http://schemas.microsoft.com/office/drawing/2014/main" id="{D3389F5C-C76F-47B5-B665-B2F5BC1C2A58}"/>
               </a:ext>
             </a:extLst>
           </p:cNvPr>
@@ -22641,7 +22641,7 @@
           <p:cNvPr id="18" name="">
             <a:extLst xmlns:a="http://schemas.openxmlformats.org/drawingml/2006/main">
               <a:ext uri="{FF2B5EF4-FFF2-40B4-BE49-F238E27FC236}">
-                <a16:creationId xmlns:a16="http://schemas.microsoft.com/office/drawing/2014/main" id="{FE271B0C-75DC-4A07-A718-F8D95973CC7F}"/>
+                <a16:creationId xmlns:a16="http://schemas.microsoft.com/office/drawing/2014/main" id="{CAF4C3CA-850B-474F-9FA0-4F0726602250}"/>
               </a:ext>
             </a:extLst>
           </p:cNvPr>
@@ -22672,7 +22672,7 @@
           <p:cNvPr id="19" name="">
             <a:extLst xmlns:a="http://schemas.openxmlformats.org/drawingml/2006/main">
               <a:ext uri="{FF2B5EF4-FFF2-40B4-BE49-F238E27FC236}">
-                <a16:creationId xmlns:a16="http://schemas.microsoft.com/office/drawing/2014/main" id="{47FB78DD-AF26-4FD6-B4A4-E740295793CD}"/>
+                <a16:creationId xmlns:a16="http://schemas.microsoft.com/office/drawing/2014/main" id="{D3D04271-FA21-4044-B98E-F880950530A8}"/>
               </a:ext>
             </a:extLst>
           </p:cNvPr>
@@ -22717,7 +22717,7 @@
           <p:cNvPr id="20" name="">
             <a:extLst xmlns:a="http://schemas.openxmlformats.org/drawingml/2006/main">
               <a:ext uri="{FF2B5EF4-FFF2-40B4-BE49-F238E27FC236}">
-                <a16:creationId xmlns:a16="http://schemas.microsoft.com/office/drawing/2014/main" id="{4D0BEA43-B064-4AD7-A44B-A9C61EE604BC}"/>
+                <a16:creationId xmlns:a16="http://schemas.microsoft.com/office/drawing/2014/main" id="{07EFD942-67A3-4A62-97CD-01E9DF89AE87}"/>
               </a:ext>
             </a:extLst>
           </p:cNvPr>
@@ -22762,7 +22762,7 @@
           <p:cNvPr id="21" name="">
             <a:extLst xmlns:a="http://schemas.openxmlformats.org/drawingml/2006/main">
               <a:ext uri="{FF2B5EF4-FFF2-40B4-BE49-F238E27FC236}">
-                <a16:creationId xmlns:a16="http://schemas.microsoft.com/office/drawing/2014/main" id="{80CCBAEC-6114-4AC2-AF8B-77C7406D7526}"/>
+                <a16:creationId xmlns:a16="http://schemas.microsoft.com/office/drawing/2014/main" id="{540847FF-EDAE-4B1E-8A0C-A7463366B816}"/>
               </a:ext>
             </a:extLst>
           </p:cNvPr>
@@ -22797,7 +22797,7 @@
           <p:cNvPr id="22" name="">
             <a:extLst xmlns:a="http://schemas.openxmlformats.org/drawingml/2006/main">
               <a:ext uri="{FF2B5EF4-FFF2-40B4-BE49-F238E27FC236}">
-                <a16:creationId xmlns:a16="http://schemas.microsoft.com/office/drawing/2014/main" id="{3B526E61-B4EA-427A-B6EF-96FB223E7D6F}"/>
+                <a16:creationId xmlns:a16="http://schemas.microsoft.com/office/drawing/2014/main" id="{A523C017-EBAF-42AA-9CEB-A3A257709EBD}"/>
               </a:ext>
             </a:extLst>
           </p:cNvPr>
@@ -22828,7 +22828,7 @@
           <p:cNvPr id="23" name="">
             <a:extLst xmlns:a="http://schemas.openxmlformats.org/drawingml/2006/main">
               <a:ext uri="{FF2B5EF4-FFF2-40B4-BE49-F238E27FC236}">
-                <a16:creationId xmlns:a16="http://schemas.microsoft.com/office/drawing/2014/main" id="{F076CAB2-798A-4ACE-A1F7-202629D07461}"/>
+                <a16:creationId xmlns:a16="http://schemas.microsoft.com/office/drawing/2014/main" id="{915B6B91-0E55-4F35-9BE5-8C983331333D}"/>
               </a:ext>
             </a:extLst>
           </p:cNvPr>
@@ -22873,7 +22873,7 @@
           <p:cNvPr id="24" name="">
             <a:extLst xmlns:a="http://schemas.openxmlformats.org/drawingml/2006/main">
               <a:ext uri="{FF2B5EF4-FFF2-40B4-BE49-F238E27FC236}">
-                <a16:creationId xmlns:a16="http://schemas.microsoft.com/office/drawing/2014/main" id="{C77AA1B0-3005-402D-A690-5CFD0CE0DEA6}"/>
+                <a16:creationId xmlns:a16="http://schemas.microsoft.com/office/drawing/2014/main" id="{DE6A6BDB-D430-4DE0-965C-FC2A24199026}"/>
               </a:ext>
             </a:extLst>
           </p:cNvPr>
@@ -22918,7 +22918,7 @@
           <p:cNvPr id="25" name="">
             <a:extLst xmlns:a="http://schemas.openxmlformats.org/drawingml/2006/main">
               <a:ext uri="{FF2B5EF4-FFF2-40B4-BE49-F238E27FC236}">
-                <a16:creationId xmlns:a16="http://schemas.microsoft.com/office/drawing/2014/main" id="{364043F3-38FA-4BA1-939E-F6457E3ED70F}"/>
+                <a16:creationId xmlns:a16="http://schemas.microsoft.com/office/drawing/2014/main" id="{A7BCE442-E153-453E-937F-0DB8332AB81B}"/>
               </a:ext>
             </a:extLst>
           </p:cNvPr>
@@ -22953,7 +22953,7 @@
           <p:cNvPr id="26" name="">
             <a:extLst xmlns:a="http://schemas.openxmlformats.org/drawingml/2006/main">
               <a:ext uri="{FF2B5EF4-FFF2-40B4-BE49-F238E27FC236}">
-                <a16:creationId xmlns:a16="http://schemas.microsoft.com/office/drawing/2014/main" id="{71D73644-436A-4FC5-BE5E-604A377D54DB}"/>
+                <a16:creationId xmlns:a16="http://schemas.microsoft.com/office/drawing/2014/main" id="{C00D8EDD-8363-4063-A09A-774508449814}"/>
               </a:ext>
             </a:extLst>
           </p:cNvPr>
@@ -22984,7 +22984,7 @@
           <p:cNvPr id="27" name="">
             <a:extLst xmlns:a="http://schemas.openxmlformats.org/drawingml/2006/main">
               <a:ext uri="{FF2B5EF4-FFF2-40B4-BE49-F238E27FC236}">
-                <a16:creationId xmlns:a16="http://schemas.microsoft.com/office/drawing/2014/main" id="{55030A87-4D36-424D-9AC8-EFBC85A1C663}"/>
+                <a16:creationId xmlns:a16="http://schemas.microsoft.com/office/drawing/2014/main" id="{E6809270-7ACB-44E2-9A6A-EDFC72D748EE}"/>
               </a:ext>
             </a:extLst>
           </p:cNvPr>
@@ -23029,7 +23029,7 @@
           <p:cNvPr id="28" name="">
             <a:extLst xmlns:a="http://schemas.openxmlformats.org/drawingml/2006/main">
               <a:ext uri="{FF2B5EF4-FFF2-40B4-BE49-F238E27FC236}">
-                <a16:creationId xmlns:a16="http://schemas.microsoft.com/office/drawing/2014/main" id="{AA514B15-2DE9-4372-ABD4-39D7A991B510}"/>
+                <a16:creationId xmlns:a16="http://schemas.microsoft.com/office/drawing/2014/main" id="{36760D04-448B-4420-ADB0-4D67254DD587}"/>
               </a:ext>
             </a:extLst>
           </p:cNvPr>
@@ -23074,7 +23074,7 @@
           <p:cNvPr id="29" name="">
             <a:extLst xmlns:a="http://schemas.openxmlformats.org/drawingml/2006/main">
               <a:ext uri="{FF2B5EF4-FFF2-40B4-BE49-F238E27FC236}">
-                <a16:creationId xmlns:a16="http://schemas.microsoft.com/office/drawing/2014/main" id="{AC15F07B-4255-4C22-95C8-BCAC6E09E4C3}"/>
+                <a16:creationId xmlns:a16="http://schemas.microsoft.com/office/drawing/2014/main" id="{34D84B34-4690-4FC3-8619-908C5C320B19}"/>
               </a:ext>
             </a:extLst>
           </p:cNvPr>
@@ -23117,7 +23117,7 @@
     </p:spTree>
     <p:extLst>
       <p:ext uri="{BB962C8B-B14F-4D97-AF65-F5344CB8AC3E}">
-        <p14:creationId xmlns:p14="http://schemas.microsoft.com/office/powerpoint/2010/main" val="266470598"/>
+        <p14:creationId xmlns:p14="http://schemas.microsoft.com/office/powerpoint/2010/main" val="803338358"/>
       </p:ext>
     </p:extLst>
   </p:cSld>
@@ -23141,7 +23141,7 @@
           <p:cNvPr id="50" name="">
             <a:extLst xmlns:a="http://schemas.openxmlformats.org/drawingml/2006/main">
               <a:ext uri="{FF2B5EF4-FFF2-40B4-BE49-F238E27FC236}">
-                <a16:creationId xmlns:a16="http://schemas.microsoft.com/office/drawing/2014/main" id="{CDACFF7D-E1ED-443A-A619-CB67E4A16E41}"/>
+                <a16:creationId xmlns:a16="http://schemas.microsoft.com/office/drawing/2014/main" id="{EEF1BF34-962F-4ABD-A328-8FEEDA3FADCB}"/>
               </a:ext>
             </a:extLst>
           </p:cNvPr>
@@ -23172,7 +23172,7 @@
           <p:cNvPr id="2" name="">
             <a:extLst xmlns:a="http://schemas.openxmlformats.org/drawingml/2006/main">
               <a:ext uri="{FF2B5EF4-FFF2-40B4-BE49-F238E27FC236}">
-                <a16:creationId xmlns:a16="http://schemas.microsoft.com/office/drawing/2014/main" id="{DC813F0F-AE1F-4CC8-99F2-C79BEA9632D3}"/>
+                <a16:creationId xmlns:a16="http://schemas.microsoft.com/office/drawing/2014/main" id="{5C435C84-ADC4-4C67-8997-D39B9F231C32}"/>
               </a:ext>
             </a:extLst>
           </p:cNvPr>
@@ -23217,7 +23217,7 @@
           <p:cNvPr id="3" name="">
             <a:extLst xmlns:a="http://schemas.openxmlformats.org/drawingml/2006/main">
               <a:ext uri="{FF2B5EF4-FFF2-40B4-BE49-F238E27FC236}">
-                <a16:creationId xmlns:a16="http://schemas.microsoft.com/office/drawing/2014/main" id="{E8E1BA35-B806-4037-A29F-1763190E757D}"/>
+                <a16:creationId xmlns:a16="http://schemas.microsoft.com/office/drawing/2014/main" id="{BA40EBCF-2C00-42B1-93E1-4B8B142F6F31}"/>
               </a:ext>
             </a:extLst>
           </p:cNvPr>
@@ -23262,7 +23262,7 @@
           <p:cNvPr id="4" name="">
             <a:extLst xmlns:a="http://schemas.openxmlformats.org/drawingml/2006/main">
               <a:ext uri="{FF2B5EF4-FFF2-40B4-BE49-F238E27FC236}">
-                <a16:creationId xmlns:a16="http://schemas.microsoft.com/office/drawing/2014/main" id="{3C783C79-EEFE-460F-9BBE-BC2F912317BC}"/>
+                <a16:creationId xmlns:a16="http://schemas.microsoft.com/office/drawing/2014/main" id="{F7F73AB8-F7F3-4C01-B45B-3C51E4A25D08}"/>
               </a:ext>
             </a:extLst>
           </p:cNvPr>
@@ -23307,7 +23307,7 @@
           <p:cNvPr id="5" name="">
             <a:extLst xmlns:a="http://schemas.openxmlformats.org/drawingml/2006/main">
               <a:ext uri="{FF2B5EF4-FFF2-40B4-BE49-F238E27FC236}">
-                <a16:creationId xmlns:a16="http://schemas.microsoft.com/office/drawing/2014/main" id="{FA644CB0-77E4-40C6-9469-D32E3FF2F707}"/>
+                <a16:creationId xmlns:a16="http://schemas.microsoft.com/office/drawing/2014/main" id="{75DB5458-7A45-4EE1-9131-A34BBB6BFAD6}"/>
               </a:ext>
             </a:extLst>
           </p:cNvPr>
@@ -23338,7 +23338,7 @@
           <p:cNvPr id="6" name="">
             <a:extLst xmlns:a="http://schemas.openxmlformats.org/drawingml/2006/main">
               <a:ext uri="{FF2B5EF4-FFF2-40B4-BE49-F238E27FC236}">
-                <a16:creationId xmlns:a16="http://schemas.microsoft.com/office/drawing/2014/main" id="{0DC9C99D-2B97-468F-AA69-6B4F74A19A7C}"/>
+                <a16:creationId xmlns:a16="http://schemas.microsoft.com/office/drawing/2014/main" id="{BA91F8D2-FD37-4D19-974C-68A689998081}"/>
               </a:ext>
             </a:extLst>
           </p:cNvPr>
@@ -23369,7 +23369,7 @@
           <p:cNvPr id="7" name="">
             <a:extLst xmlns:a="http://schemas.openxmlformats.org/drawingml/2006/main">
               <a:ext uri="{FF2B5EF4-FFF2-40B4-BE49-F238E27FC236}">
-                <a16:creationId xmlns:a16="http://schemas.microsoft.com/office/drawing/2014/main" id="{AE4E7193-6773-4D7E-AD26-FC69191D854B}"/>
+                <a16:creationId xmlns:a16="http://schemas.microsoft.com/office/drawing/2014/main" id="{B868A7AF-F761-4D41-9328-A34361F6CB6F}"/>
               </a:ext>
             </a:extLst>
           </p:cNvPr>
@@ -23414,7 +23414,7 @@
           <p:cNvPr id="8" name="">
             <a:extLst xmlns:a="http://schemas.openxmlformats.org/drawingml/2006/main">
               <a:ext uri="{FF2B5EF4-FFF2-40B4-BE49-F238E27FC236}">
-                <a16:creationId xmlns:a16="http://schemas.microsoft.com/office/drawing/2014/main" id="{14825209-065D-416C-AA3B-76AFC5CBFB26}"/>
+                <a16:creationId xmlns:a16="http://schemas.microsoft.com/office/drawing/2014/main" id="{6DEFA3DD-EF8B-4265-8796-91913A078DC6}"/>
               </a:ext>
             </a:extLst>
           </p:cNvPr>
@@ -23459,7 +23459,7 @@
           <p:cNvPr id="9" name="">
             <a:extLst xmlns:a="http://schemas.openxmlformats.org/drawingml/2006/main">
               <a:ext uri="{FF2B5EF4-FFF2-40B4-BE49-F238E27FC236}">
-                <a16:creationId xmlns:a16="http://schemas.microsoft.com/office/drawing/2014/main" id="{5E72502F-9D53-4EF1-8A9A-3F1BE8A1C0A8}"/>
+                <a16:creationId xmlns:a16="http://schemas.microsoft.com/office/drawing/2014/main" id="{3C3AAEAA-9F6E-4148-B3DE-901CCD6CD4C9}"/>
               </a:ext>
             </a:extLst>
           </p:cNvPr>
@@ -23492,7 +23492,7 @@
           <p:cNvPr id="10" name="">
             <a:extLst xmlns:a="http://schemas.openxmlformats.org/drawingml/2006/main">
               <a:ext uri="{FF2B5EF4-FFF2-40B4-BE49-F238E27FC236}">
-                <a16:creationId xmlns:a16="http://schemas.microsoft.com/office/drawing/2014/main" id="{B2286789-270C-436E-B315-202186814495}"/>
+                <a16:creationId xmlns:a16="http://schemas.microsoft.com/office/drawing/2014/main" id="{0DDBF6B7-74BD-4455-8F5F-30FE50B8CA28}"/>
               </a:ext>
             </a:extLst>
           </p:cNvPr>
@@ -23523,7 +23523,7 @@
           <p:cNvPr id="11" name="">
             <a:extLst xmlns:a="http://schemas.openxmlformats.org/drawingml/2006/main">
               <a:ext uri="{FF2B5EF4-FFF2-40B4-BE49-F238E27FC236}">
-                <a16:creationId xmlns:a16="http://schemas.microsoft.com/office/drawing/2014/main" id="{1708C6D9-DA8E-4CC2-BB78-2B0F791211FD}"/>
+                <a16:creationId xmlns:a16="http://schemas.microsoft.com/office/drawing/2014/main" id="{4D384C1A-A937-4F64-8CB6-F2BFD83D0E9F}"/>
               </a:ext>
             </a:extLst>
           </p:cNvPr>
@@ -23568,7 +23568,7 @@
           <p:cNvPr id="12" name="">
             <a:extLst xmlns:a="http://schemas.openxmlformats.org/drawingml/2006/main">
               <a:ext uri="{FF2B5EF4-FFF2-40B4-BE49-F238E27FC236}">
-                <a16:creationId xmlns:a16="http://schemas.microsoft.com/office/drawing/2014/main" id="{57754403-19EA-4A07-923F-64BF137C6B99}"/>
+                <a16:creationId xmlns:a16="http://schemas.microsoft.com/office/drawing/2014/main" id="{08685625-923A-4C3D-A3BE-4423E57E9A52}"/>
               </a:ext>
             </a:extLst>
           </p:cNvPr>
@@ -23613,7 +23613,7 @@
           <p:cNvPr id="13" name="">
             <a:extLst xmlns:a="http://schemas.openxmlformats.org/drawingml/2006/main">
               <a:ext uri="{FF2B5EF4-FFF2-40B4-BE49-F238E27FC236}">
-                <a16:creationId xmlns:a16="http://schemas.microsoft.com/office/drawing/2014/main" id="{5A178285-92E4-4634-8311-E64286F6F3FE}"/>
+                <a16:creationId xmlns:a16="http://schemas.microsoft.com/office/drawing/2014/main" id="{194EC75F-7925-4580-A9CA-07EDDFA8BA6C}"/>
               </a:ext>
             </a:extLst>
           </p:cNvPr>
@@ -23646,7 +23646,7 @@
           <p:cNvPr id="14" name="">
             <a:extLst xmlns:a="http://schemas.openxmlformats.org/drawingml/2006/main">
               <a:ext uri="{FF2B5EF4-FFF2-40B4-BE49-F238E27FC236}">
-                <a16:creationId xmlns:a16="http://schemas.microsoft.com/office/drawing/2014/main" id="{34171977-E737-4DD0-B783-8F583C96A45A}"/>
+                <a16:creationId xmlns:a16="http://schemas.microsoft.com/office/drawing/2014/main" id="{E7FA5CA3-0A03-4CC5-A853-2030C06D6BD8}"/>
               </a:ext>
             </a:extLst>
           </p:cNvPr>
@@ -23679,7 +23679,7 @@
           <p:cNvPr id="15" name="">
             <a:extLst xmlns:a="http://schemas.openxmlformats.org/drawingml/2006/main">
               <a:ext uri="{FF2B5EF4-FFF2-40B4-BE49-F238E27FC236}">
-                <a16:creationId xmlns:a16="http://schemas.microsoft.com/office/drawing/2014/main" id="{0A0C518D-18D5-4BFD-959D-A1C016521A03}"/>
+                <a16:creationId xmlns:a16="http://schemas.microsoft.com/office/drawing/2014/main" id="{DA95128F-9684-4575-A33F-1616678077BB}"/>
               </a:ext>
             </a:extLst>
           </p:cNvPr>
@@ -23710,7 +23710,7 @@
           <p:cNvPr id="16" name="">
             <a:extLst xmlns:a="http://schemas.openxmlformats.org/drawingml/2006/main">
               <a:ext uri="{FF2B5EF4-FFF2-40B4-BE49-F238E27FC236}">
-                <a16:creationId xmlns:a16="http://schemas.microsoft.com/office/drawing/2014/main" id="{9D1FC655-AF4A-4BFF-82DE-E277F23C21B5}"/>
+                <a16:creationId xmlns:a16="http://schemas.microsoft.com/office/drawing/2014/main" id="{678318FC-0FA2-4BA0-9B43-5886D9D87D4D}"/>
               </a:ext>
             </a:extLst>
           </p:cNvPr>
@@ -23755,7 +23755,7 @@
           <p:cNvPr id="17" name="">
             <a:extLst xmlns:a="http://schemas.openxmlformats.org/drawingml/2006/main">
               <a:ext uri="{FF2B5EF4-FFF2-40B4-BE49-F238E27FC236}">
-                <a16:creationId xmlns:a16="http://schemas.microsoft.com/office/drawing/2014/main" id="{D4C61E80-0411-431B-A23B-8D805E1C0EF4}"/>
+                <a16:creationId xmlns:a16="http://schemas.microsoft.com/office/drawing/2014/main" id="{B931341E-B4A5-4880-8748-D99E633A63B4}"/>
               </a:ext>
             </a:extLst>
           </p:cNvPr>
@@ -23800,7 +23800,7 @@
           <p:cNvPr id="18" name="">
             <a:extLst xmlns:a="http://schemas.openxmlformats.org/drawingml/2006/main">
               <a:ext uri="{FF2B5EF4-FFF2-40B4-BE49-F238E27FC236}">
-                <a16:creationId xmlns:a16="http://schemas.microsoft.com/office/drawing/2014/main" id="{F8D47E0D-3773-43A9-BFE1-F0F93910B837}"/>
+                <a16:creationId xmlns:a16="http://schemas.microsoft.com/office/drawing/2014/main" id="{3F69D76C-4794-44EC-9FD0-920BE4738E99}"/>
               </a:ext>
             </a:extLst>
           </p:cNvPr>
@@ -23833,7 +23833,7 @@
           <p:cNvPr id="19" name="">
             <a:extLst xmlns:a="http://schemas.openxmlformats.org/drawingml/2006/main">
               <a:ext uri="{FF2B5EF4-FFF2-40B4-BE49-F238E27FC236}">
-                <a16:creationId xmlns:a16="http://schemas.microsoft.com/office/drawing/2014/main" id="{BBC481D8-BB3F-4425-981C-501385F43CF0}"/>
+                <a16:creationId xmlns:a16="http://schemas.microsoft.com/office/drawing/2014/main" id="{9946E941-0BDC-48E6-BC47-6D256937B693}"/>
               </a:ext>
             </a:extLst>
           </p:cNvPr>
@@ -23866,7 +23866,7 @@
           <p:cNvPr id="20" name="">
             <a:extLst xmlns:a="http://schemas.openxmlformats.org/drawingml/2006/main">
               <a:ext uri="{FF2B5EF4-FFF2-40B4-BE49-F238E27FC236}">
-                <a16:creationId xmlns:a16="http://schemas.microsoft.com/office/drawing/2014/main" id="{1E9192EC-AB6B-4C73-AD45-80125BFB1163}"/>
+                <a16:creationId xmlns:a16="http://schemas.microsoft.com/office/drawing/2014/main" id="{3A211122-9B6A-409A-A9C7-D4957C5021AE}"/>
               </a:ext>
             </a:extLst>
           </p:cNvPr>
@@ -23897,7 +23897,7 @@
           <p:cNvPr id="21" name="">
             <a:extLst xmlns:a="http://schemas.openxmlformats.org/drawingml/2006/main">
               <a:ext uri="{FF2B5EF4-FFF2-40B4-BE49-F238E27FC236}">
-                <a16:creationId xmlns:a16="http://schemas.microsoft.com/office/drawing/2014/main" id="{B656D5E6-C700-4583-AC16-C576EFCDFCC0}"/>
+                <a16:creationId xmlns:a16="http://schemas.microsoft.com/office/drawing/2014/main" id="{1A3A3793-9704-4B5C-A173-2677FB9B0BE0}"/>
               </a:ext>
             </a:extLst>
           </p:cNvPr>
@@ -23942,7 +23942,7 @@
           <p:cNvPr id="22" name="">
             <a:extLst xmlns:a="http://schemas.openxmlformats.org/drawingml/2006/main">
               <a:ext uri="{FF2B5EF4-FFF2-40B4-BE49-F238E27FC236}">
-                <a16:creationId xmlns:a16="http://schemas.microsoft.com/office/drawing/2014/main" id="{A5154C41-D858-4168-A0F4-8AF7A11360D3}"/>
+                <a16:creationId xmlns:a16="http://schemas.microsoft.com/office/drawing/2014/main" id="{B7665992-25AA-4AA4-AE47-74E55338D4EE}"/>
               </a:ext>
             </a:extLst>
           </p:cNvPr>
@@ -23987,7 +23987,7 @@
           <p:cNvPr id="23" name="">
             <a:extLst xmlns:a="http://schemas.openxmlformats.org/drawingml/2006/main">
               <a:ext uri="{FF2B5EF4-FFF2-40B4-BE49-F238E27FC236}">
-                <a16:creationId xmlns:a16="http://schemas.microsoft.com/office/drawing/2014/main" id="{523ACBC1-CB3A-4BEB-808B-E59B1DB5CA33}"/>
+                <a16:creationId xmlns:a16="http://schemas.microsoft.com/office/drawing/2014/main" id="{97BFA1EE-9FC3-455D-8FFD-08E2A750C263}"/>
               </a:ext>
             </a:extLst>
           </p:cNvPr>
@@ -24020,7 +24020,7 @@
           <p:cNvPr id="24" name="">
             <a:extLst xmlns:a="http://schemas.openxmlformats.org/drawingml/2006/main">
               <a:ext uri="{FF2B5EF4-FFF2-40B4-BE49-F238E27FC236}">
-                <a16:creationId xmlns:a16="http://schemas.microsoft.com/office/drawing/2014/main" id="{BD6D6D0B-7D0D-4DE1-AA39-8DCF61D82245}"/>
+                <a16:creationId xmlns:a16="http://schemas.microsoft.com/office/drawing/2014/main" id="{6BAF949A-4460-4995-8F25-50FC3CEB1244}"/>
               </a:ext>
             </a:extLst>
           </p:cNvPr>
@@ -24053,7 +24053,7 @@
           <p:cNvPr id="25" name="">
             <a:extLst xmlns:a="http://schemas.openxmlformats.org/drawingml/2006/main">
               <a:ext uri="{FF2B5EF4-FFF2-40B4-BE49-F238E27FC236}">
-                <a16:creationId xmlns:a16="http://schemas.microsoft.com/office/drawing/2014/main" id="{C8D0E930-EA21-40C9-96FE-3D15FD27915F}"/>
+                <a16:creationId xmlns:a16="http://schemas.microsoft.com/office/drawing/2014/main" id="{BDE068B1-AD5A-40E3-9B60-6EB40FBB66BB}"/>
               </a:ext>
             </a:extLst>
           </p:cNvPr>
@@ -24084,7 +24084,7 @@
           <p:cNvPr id="26" name="">
             <a:extLst xmlns:a="http://schemas.openxmlformats.org/drawingml/2006/main">
               <a:ext uri="{FF2B5EF4-FFF2-40B4-BE49-F238E27FC236}">
-                <a16:creationId xmlns:a16="http://schemas.microsoft.com/office/drawing/2014/main" id="{A3BC76BC-06ED-49BD-B1AB-9D786E730B7E}"/>
+                <a16:creationId xmlns:a16="http://schemas.microsoft.com/office/drawing/2014/main" id="{E6DD8E6D-DD43-4E88-91F4-B8E83ACB0C35}"/>
               </a:ext>
             </a:extLst>
           </p:cNvPr>
@@ -24129,7 +24129,7 @@
           <p:cNvPr id="27" name="">
             <a:extLst xmlns:a="http://schemas.openxmlformats.org/drawingml/2006/main">
               <a:ext uri="{FF2B5EF4-FFF2-40B4-BE49-F238E27FC236}">
-                <a16:creationId xmlns:a16="http://schemas.microsoft.com/office/drawing/2014/main" id="{DA139FDD-30DE-49F1-9EE9-AF2921098238}"/>
+                <a16:creationId xmlns:a16="http://schemas.microsoft.com/office/drawing/2014/main" id="{FECD6BE6-9FAF-4468-8FFA-EB543CBF8639}"/>
               </a:ext>
             </a:extLst>
           </p:cNvPr>
@@ -24174,7 +24174,7 @@
           <p:cNvPr id="28" name="">
             <a:extLst xmlns:a="http://schemas.openxmlformats.org/drawingml/2006/main">
               <a:ext uri="{FF2B5EF4-FFF2-40B4-BE49-F238E27FC236}">
-                <a16:creationId xmlns:a16="http://schemas.microsoft.com/office/drawing/2014/main" id="{1A000386-6B17-414E-A3A9-508537BF58C1}"/>
+                <a16:creationId xmlns:a16="http://schemas.microsoft.com/office/drawing/2014/main" id="{421A9290-28B4-4A6C-9655-C191B00E1CA2}"/>
               </a:ext>
             </a:extLst>
           </p:cNvPr>
@@ -24207,7 +24207,7 @@
           <p:cNvPr id="29" name="">
             <a:extLst xmlns:a="http://schemas.openxmlformats.org/drawingml/2006/main">
               <a:ext uri="{FF2B5EF4-FFF2-40B4-BE49-F238E27FC236}">
-                <a16:creationId xmlns:a16="http://schemas.microsoft.com/office/drawing/2014/main" id="{F2254991-9E48-4075-996A-C6DD4FB43EF5}"/>
+                <a16:creationId xmlns:a16="http://schemas.microsoft.com/office/drawing/2014/main" id="{A4A24A5C-95DB-4A23-9040-CF9EB188BE8E}"/>
               </a:ext>
             </a:extLst>
           </p:cNvPr>
@@ -24240,7 +24240,7 @@
           <p:cNvPr id="30" name="">
             <a:extLst xmlns:a="http://schemas.openxmlformats.org/drawingml/2006/main">
               <a:ext uri="{FF2B5EF4-FFF2-40B4-BE49-F238E27FC236}">
-                <a16:creationId xmlns:a16="http://schemas.microsoft.com/office/drawing/2014/main" id="{217B56E2-6806-4AD8-9AFE-0F5CFB3355F5}"/>
+                <a16:creationId xmlns:a16="http://schemas.microsoft.com/office/drawing/2014/main" id="{996723B9-6F54-4601-98D1-45C411AF7B36}"/>
               </a:ext>
             </a:extLst>
           </p:cNvPr>
@@ -24271,7 +24271,7 @@
           <p:cNvPr id="31" name="">
             <a:extLst xmlns:a="http://schemas.openxmlformats.org/drawingml/2006/main">
               <a:ext uri="{FF2B5EF4-FFF2-40B4-BE49-F238E27FC236}">
-                <a16:creationId xmlns:a16="http://schemas.microsoft.com/office/drawing/2014/main" id="{D2E88E97-2D09-434A-86AD-29A762897394}"/>
+                <a16:creationId xmlns:a16="http://schemas.microsoft.com/office/drawing/2014/main" id="{981E7D1F-2135-4575-A8C7-7E4F2EA23720}"/>
               </a:ext>
             </a:extLst>
           </p:cNvPr>
@@ -24316,7 +24316,7 @@
           <p:cNvPr id="32" name="">
             <a:extLst xmlns:a="http://schemas.openxmlformats.org/drawingml/2006/main">
               <a:ext uri="{FF2B5EF4-FFF2-40B4-BE49-F238E27FC236}">
-                <a16:creationId xmlns:a16="http://schemas.microsoft.com/office/drawing/2014/main" id="{0E28C586-FAB6-42C8-BAD1-B5D32405F027}"/>
+                <a16:creationId xmlns:a16="http://schemas.microsoft.com/office/drawing/2014/main" id="{AFE59783-E5B5-4ECD-B22A-EA2751C2AD1D}"/>
               </a:ext>
             </a:extLst>
           </p:cNvPr>
@@ -24361,7 +24361,7 @@
           <p:cNvPr id="33" name="">
             <a:extLst xmlns:a="http://schemas.openxmlformats.org/drawingml/2006/main">
               <a:ext uri="{FF2B5EF4-FFF2-40B4-BE49-F238E27FC236}">
-                <a16:creationId xmlns:a16="http://schemas.microsoft.com/office/drawing/2014/main" id="{94F394E3-BDE4-401D-8294-CB28A9810464}"/>
+                <a16:creationId xmlns:a16="http://schemas.microsoft.com/office/drawing/2014/main" id="{B5B17222-EA5A-4609-AE2D-05490D857E81}"/>
               </a:ext>
             </a:extLst>
           </p:cNvPr>
@@ -24396,7 +24396,7 @@
           <p:cNvPr id="34" name="">
             <a:extLst xmlns:a="http://schemas.openxmlformats.org/drawingml/2006/main">
               <a:ext uri="{FF2B5EF4-FFF2-40B4-BE49-F238E27FC236}">
-                <a16:creationId xmlns:a16="http://schemas.microsoft.com/office/drawing/2014/main" id="{D9AE3B75-CEA1-4B84-97FE-2F9F9E17A249}"/>
+                <a16:creationId xmlns:a16="http://schemas.microsoft.com/office/drawing/2014/main" id="{335DDBD3-BDFB-4D0D-9E1C-52375CE3F2B9}"/>
               </a:ext>
             </a:extLst>
           </p:cNvPr>
@@ -24427,7 +24427,7 @@
           <p:cNvPr id="35" name="">
             <a:extLst xmlns:a="http://schemas.openxmlformats.org/drawingml/2006/main">
               <a:ext uri="{FF2B5EF4-FFF2-40B4-BE49-F238E27FC236}">
-                <a16:creationId xmlns:a16="http://schemas.microsoft.com/office/drawing/2014/main" id="{C1411689-EEBE-4462-9095-98C3C69E6137}"/>
+                <a16:creationId xmlns:a16="http://schemas.microsoft.com/office/drawing/2014/main" id="{2DE96FCA-AD7F-4904-A3CC-D5586D6EB173}"/>
               </a:ext>
             </a:extLst>
           </p:cNvPr>
@@ -24472,7 +24472,7 @@
           <p:cNvPr id="36" name="">
             <a:extLst xmlns:a="http://schemas.openxmlformats.org/drawingml/2006/main">
               <a:ext uri="{FF2B5EF4-FFF2-40B4-BE49-F238E27FC236}">
-                <a16:creationId xmlns:a16="http://schemas.microsoft.com/office/drawing/2014/main" id="{29693C8F-72D9-4286-80EE-52FBE700135B}"/>
+                <a16:creationId xmlns:a16="http://schemas.microsoft.com/office/drawing/2014/main" id="{9F4E87C5-39E9-4C00-B05E-FA36BA1047D4}"/>
               </a:ext>
             </a:extLst>
           </p:cNvPr>
@@ -24517,7 +24517,7 @@
           <p:cNvPr id="37" name="">
             <a:extLst xmlns:a="http://schemas.openxmlformats.org/drawingml/2006/main">
               <a:ext uri="{FF2B5EF4-FFF2-40B4-BE49-F238E27FC236}">
-                <a16:creationId xmlns:a16="http://schemas.microsoft.com/office/drawing/2014/main" id="{EB349910-FBBE-4B92-B150-99520F438577}"/>
+                <a16:creationId xmlns:a16="http://schemas.microsoft.com/office/drawing/2014/main" id="{8DF13DD4-28C2-4B68-8FD9-AC2BBE9BC221}"/>
               </a:ext>
             </a:extLst>
           </p:cNvPr>
@@ -24552,7 +24552,7 @@
           <p:cNvPr id="38" name="">
             <a:extLst xmlns:a="http://schemas.openxmlformats.org/drawingml/2006/main">
               <a:ext uri="{FF2B5EF4-FFF2-40B4-BE49-F238E27FC236}">
-                <a16:creationId xmlns:a16="http://schemas.microsoft.com/office/drawing/2014/main" id="{2B5E7578-D231-4360-909D-9BDA329FD715}"/>
+                <a16:creationId xmlns:a16="http://schemas.microsoft.com/office/drawing/2014/main" id="{F29D6AE9-D8EA-4CD6-B748-743E2C409815}"/>
               </a:ext>
             </a:extLst>
           </p:cNvPr>
@@ -24583,7 +24583,7 @@
           <p:cNvPr id="39" name="">
             <a:extLst xmlns:a="http://schemas.openxmlformats.org/drawingml/2006/main">
               <a:ext uri="{FF2B5EF4-FFF2-40B4-BE49-F238E27FC236}">
-                <a16:creationId xmlns:a16="http://schemas.microsoft.com/office/drawing/2014/main" id="{8DE699B5-FA73-42DE-9B40-D6BD57E4EC7F}"/>
+                <a16:creationId xmlns:a16="http://schemas.microsoft.com/office/drawing/2014/main" id="{0672F4C5-E80E-41D7-BDCB-342C8E631BDC}"/>
               </a:ext>
             </a:extLst>
           </p:cNvPr>
@@ -24628,7 +24628,7 @@
           <p:cNvPr id="40" name="">
             <a:extLst xmlns:a="http://schemas.openxmlformats.org/drawingml/2006/main">
               <a:ext uri="{FF2B5EF4-FFF2-40B4-BE49-F238E27FC236}">
-                <a16:creationId xmlns:a16="http://schemas.microsoft.com/office/drawing/2014/main" id="{BA353B62-A163-4696-A06D-34BF4D92F614}"/>
+                <a16:creationId xmlns:a16="http://schemas.microsoft.com/office/drawing/2014/main" id="{AD2F312E-01D5-4364-AC9A-7B16EC637DC7}"/>
               </a:ext>
             </a:extLst>
           </p:cNvPr>
@@ -24673,7 +24673,7 @@
           <p:cNvPr id="41" name="">
             <a:extLst xmlns:a="http://schemas.openxmlformats.org/drawingml/2006/main">
               <a:ext uri="{FF2B5EF4-FFF2-40B4-BE49-F238E27FC236}">
-                <a16:creationId xmlns:a16="http://schemas.microsoft.com/office/drawing/2014/main" id="{1B9D609A-9F80-4938-8D93-239DF7438695}"/>
+                <a16:creationId xmlns:a16="http://schemas.microsoft.com/office/drawing/2014/main" id="{37548248-6B82-4BA3-86DA-AECE3C9D12C0}"/>
               </a:ext>
             </a:extLst>
           </p:cNvPr>
@@ -24708,7 +24708,7 @@
           <p:cNvPr id="42" name="">
             <a:extLst xmlns:a="http://schemas.openxmlformats.org/drawingml/2006/main">
               <a:ext uri="{FF2B5EF4-FFF2-40B4-BE49-F238E27FC236}">
-                <a16:creationId xmlns:a16="http://schemas.microsoft.com/office/drawing/2014/main" id="{1CB16D1E-6AFB-4AC6-AADB-F742F105C8B3}"/>
+                <a16:creationId xmlns:a16="http://schemas.microsoft.com/office/drawing/2014/main" id="{D7758C03-7FFF-4371-97A3-DDF1DEEC6507}"/>
               </a:ext>
             </a:extLst>
           </p:cNvPr>
@@ -24739,7 +24739,7 @@
           <p:cNvPr id="43" name="">
             <a:extLst xmlns:a="http://schemas.openxmlformats.org/drawingml/2006/main">
               <a:ext uri="{FF2B5EF4-FFF2-40B4-BE49-F238E27FC236}">
-                <a16:creationId xmlns:a16="http://schemas.microsoft.com/office/drawing/2014/main" id="{24BBD28C-29BB-4316-AB36-00D88533DFEB}"/>
+                <a16:creationId xmlns:a16="http://schemas.microsoft.com/office/drawing/2014/main" id="{2686BA52-58D1-4388-9185-E108E93B7FA5}"/>
               </a:ext>
             </a:extLst>
           </p:cNvPr>
@@ -24784,7 +24784,7 @@
           <p:cNvPr id="44" name="">
             <a:extLst xmlns:a="http://schemas.openxmlformats.org/drawingml/2006/main">
               <a:ext uri="{FF2B5EF4-FFF2-40B4-BE49-F238E27FC236}">
-                <a16:creationId xmlns:a16="http://schemas.microsoft.com/office/drawing/2014/main" id="{402616A5-8494-4B19-906D-2747BB1FDCBA}"/>
+                <a16:creationId xmlns:a16="http://schemas.microsoft.com/office/drawing/2014/main" id="{201FD57E-5911-4BB3-AAD6-2A602F5C0F3A}"/>
               </a:ext>
             </a:extLst>
           </p:cNvPr>
@@ -24829,7 +24829,7 @@
           <p:cNvPr id="45" name="">
             <a:extLst xmlns:a="http://schemas.openxmlformats.org/drawingml/2006/main">
               <a:ext uri="{FF2B5EF4-FFF2-40B4-BE49-F238E27FC236}">
-                <a16:creationId xmlns:a16="http://schemas.microsoft.com/office/drawing/2014/main" id="{6A144565-F0CC-4AD4-A48E-D736E2825464}"/>
+                <a16:creationId xmlns:a16="http://schemas.microsoft.com/office/drawing/2014/main" id="{D8A79776-E373-4310-9AD7-C830CDDFC7C2}"/>
               </a:ext>
             </a:extLst>
           </p:cNvPr>
@@ -24864,7 +24864,7 @@
           <p:cNvPr id="46" name="">
             <a:extLst xmlns:a="http://schemas.openxmlformats.org/drawingml/2006/main">
               <a:ext uri="{FF2B5EF4-FFF2-40B4-BE49-F238E27FC236}">
-                <a16:creationId xmlns:a16="http://schemas.microsoft.com/office/drawing/2014/main" id="{075A1F25-2FAF-4827-83F4-AD88874D45D4}"/>
+                <a16:creationId xmlns:a16="http://schemas.microsoft.com/office/drawing/2014/main" id="{EB5CDE1B-43D0-4870-9ACE-51E37A7A238C}"/>
               </a:ext>
             </a:extLst>
           </p:cNvPr>
@@ -24895,7 +24895,7 @@
           <p:cNvPr id="47" name="">
             <a:extLst xmlns:a="http://schemas.openxmlformats.org/drawingml/2006/main">
               <a:ext uri="{FF2B5EF4-FFF2-40B4-BE49-F238E27FC236}">
-                <a16:creationId xmlns:a16="http://schemas.microsoft.com/office/drawing/2014/main" id="{F45D20EA-9B22-428D-883F-FFCCC8C2117C}"/>
+                <a16:creationId xmlns:a16="http://schemas.microsoft.com/office/drawing/2014/main" id="{395F0C25-CE77-46B1-A1CE-6A7EB25D941D}"/>
               </a:ext>
             </a:extLst>
           </p:cNvPr>
@@ -24940,7 +24940,7 @@
           <p:cNvPr id="48" name="">
             <a:extLst xmlns:a="http://schemas.openxmlformats.org/drawingml/2006/main">
               <a:ext uri="{FF2B5EF4-FFF2-40B4-BE49-F238E27FC236}">
-                <a16:creationId xmlns:a16="http://schemas.microsoft.com/office/drawing/2014/main" id="{9494C6C9-F3AA-4539-AD89-F92C98B35E6B}"/>
+                <a16:creationId xmlns:a16="http://schemas.microsoft.com/office/drawing/2014/main" id="{72CA15B0-0459-4BBE-A222-54F8515BFC63}"/>
               </a:ext>
             </a:extLst>
           </p:cNvPr>
@@ -24985,7 +24985,7 @@
           <p:cNvPr id="49" name="">
             <a:extLst xmlns:a="http://schemas.openxmlformats.org/drawingml/2006/main">
               <a:ext uri="{FF2B5EF4-FFF2-40B4-BE49-F238E27FC236}">
-                <a16:creationId xmlns:a16="http://schemas.microsoft.com/office/drawing/2014/main" id="{9CAA8B68-3478-4209-AECD-341A7C93D345}"/>
+                <a16:creationId xmlns:a16="http://schemas.microsoft.com/office/drawing/2014/main" id="{E4BA4FCE-1347-4542-9912-6D78B5036802}"/>
               </a:ext>
             </a:extLst>
           </p:cNvPr>
@@ -25028,7 +25028,7 @@
     </p:spTree>
     <p:extLst>
       <p:ext uri="{BB962C8B-B14F-4D97-AF65-F5344CB8AC3E}">
-        <p14:creationId xmlns:p14="http://schemas.microsoft.com/office/powerpoint/2010/main" val="1410171589"/>
+        <p14:creationId xmlns:p14="http://schemas.microsoft.com/office/powerpoint/2010/main" val="567781587"/>
       </p:ext>
     </p:extLst>
   </p:cSld>
